--- a/Curso Gas B/10 - UNE 60670 - Tuberias, accesorios y uniones/10 - UNE 60670 - Tuberias, accesorios y uniones - Vídeo 1.pptx
+++ b/Curso Gas B/10 - UNE 60670 - Tuberias, accesorios y uniones/10 - UNE 60670 - Tuberias, accesorios y uniones - Vídeo 1.pptx
@@ -22,6 +22,7 @@
     <p:sldId id="270" r:id="rId22"/>
     <p:sldId id="271" r:id="rId23"/>
     <p:sldId id="272" r:id="rId24"/>
+    <p:sldId id="273" r:id="rId25"/>
   </p:sldIdLst>
   <p:sldSz cx="12191695" cy="6858000" type="screen4x3"/>
   <p:notesSz cx="6858000" cy="9144000"/>
@@ -593,12 +594,12 @@
           <a:lstStyle/>
           <a:p>
             <a:r>
-              <a:t>N1: ¿Por qué el tubo enterrado tiene que ser más grueso?</a:t>
-            </a:r>
-          </a:p>
-          <a:p>
-            <a:r>
-              <a:t>N2: Porque debajo de la tierra el tubo lo pasa peor. Aguanta el peso del terreno, la humedad, cualquier movimiento del suelo... y encima, si algo empieza a corroerlo por fuera, cuanta más pared tenga, más tarda en perforarse. Por eso la norma pide dos espesores distintos que tienes que clavarte. Uno coma cinco milímetros para todo lo que va enterrado. Y un milímetro para todo lo demás: tubo visto, empotrado en la pared, metido en vaina o para la conexión de los aparatos. La regla para no fallar: enterrado, medio milímetro más gordo. Cuidado, que este es un clásico de examen; si ves 'un milímetro para tubo enterrado', está mal: la respuesta es uno coma cinco.</a:t>
+              <a:t>N1: ¿Qué tiene de especial el cobre para gas?</a:t>
+            </a:r>
+          </a:p>
+          <a:p>
+            <a:r>
+              <a:t>N2: Que es limpio, duradero y muy manejable, por eso se usa tantísimo en interior. Pero no vale cualquier cobre: la norma pide uno concreto, el llamado cu-de-hache-pe, que es cobre redondo de precisión, estirado en frío y sin costura de soldadura, según la norma mil cincuenta y siete. Ese 'sin soldadura' importa: el tubo es de una pieza, no una chapa curvada y pegada, así que no tiene una junta débil por donde empezar a fugar. Viene en dos formatos que verás en el almacén: en barra rígida, que llamamos estado duro, y en rollo blando, el recocido. Los dos son cobre bueno; lo que cambia es cómo los trabajas. Y sus piezas, los codos y manguitos, se pegan por soldadura capilar, que veremos con calma en el último vídeo.</a:t>
             </a:r>
           </a:p>
         </p:txBody>
@@ -668,12 +669,12 @@
           <a:lstStyle/>
           <a:p>
             <a:r>
-              <a:t>N1: Duro y recocido... ¿y cómo curvo cada uno sin cargármelo?</a:t>
-            </a:r>
-          </a:p>
-          <a:p>
-            <a:r>
-              <a:t>N2: Vamos por partes. El cobre duro viene tieso, en barra, así que para doblarlo necesitas una máquina curvadora, manual o eléctrica. El recocido viene blando, en rollo, y ese lo doblas casi a mano con un muelle curvatubos, que es una espiral que metes para que el tubo no se aplaste. La clave, y vale para los dos, es que la curva quede lisa, sin arrugas ni pliegues. Y aquí el detalle que encanta preguntar: nunca se usa mandril interno. El mandril es una pieza que se mete dentro del tubo para curvar chapa gruesa, pero en el cobre de gas está prohibido. ¿Por qué? Porque arruga y estrangula el tubo por dentro, y un estrangulamiento deja al aparato sin caudal: llama pobre, mala combustión y avería. Curva limpia y sin mandril: esa es la consigna.</a:t>
+              <a:t>N1: ¿Por qué el tubo enterrado tiene que ser más grueso?</a:t>
+            </a:r>
+          </a:p>
+          <a:p>
+            <a:r>
+              <a:t>N2: Porque debajo de la tierra el tubo lo pasa peor. Aguanta el peso del terreno, la humedad, cualquier movimiento del suelo... y encima, si algo empieza a corroerlo por fuera, cuanta más pared tenga, más tarda en perforarse. Por eso la norma pide dos espesores distintos que tienes que clavarte. Uno coma cinco milímetros para todo lo que va enterrado. Y un milímetro para todo lo demás: tubo visto, empotrado en la pared, metido en vaina o para la conexión de los aparatos. La regla para no fallar: enterrado, medio milímetro más gordo. Cuidado, que este es un clásico de examen; si ves 'un milímetro para tubo enterrado', está mal: la respuesta es uno coma cinco.</a:t>
             </a:r>
           </a:p>
         </p:txBody>
@@ -743,12 +744,12 @@
           <a:lstStyle/>
           <a:p>
             <a:r>
-              <a:t>N1: ¿Y el acero? ¿hasta dónde se puede curvar?</a:t>
-            </a:r>
-          </a:p>
-          <a:p>
-            <a:r>
-              <a:t>N2: El acero es el tubo de toda la vida para el gas visto en interior, el negro roscado que has visto mil veces. Se fabrica de dos maneras válidas: sin costura, o con una soldadura a lo largo del tubo, siempre según la norma diez mil doscientos cincuenta y cinco. Lo que más se pregunta es el límite del curvado: se curva en frío con máquina, pero preferentemente solo hasta dos pulgadas de diámetro. ¿Por qué ese tope? Porque a partir de ahí el tubo es tan gordo que curvarlo en frío lo deforma; para esos diámetros grandes se usan codos ya fabricados. Sus piezas van soldadas o roscadas, cada una con su norma. Y un aviso: el acero enterrado sin proteger se lo come el terreno en nada, así que fuera siempre con su recubrimiento. Ah, y aquí también, mandril interno prohibido.</a:t>
+              <a:t>N1: Duro y recocido... ¿y cómo curvo cada uno sin cargármelo?</a:t>
+            </a:r>
+          </a:p>
+          <a:p>
+            <a:r>
+              <a:t>N2: Vamos por partes. El cobre duro viene tieso, en barra, así que para doblarlo necesitas una máquina curvadora, manual o eléctrica. El recocido viene blando, en rollo, y ese lo doblas casi a mano con un muelle curvatubos, que es una espiral que metes para que el tubo no se aplaste. La clave, y vale para los dos, es que la curva quede lisa, sin arrugas ni pliegues. Y aquí el detalle que encanta preguntar: nunca se usa mandril interno. El mandril es una pieza que se mete dentro del tubo para curvar chapa gruesa, pero en el cobre de gas está prohibido. ¿Por qué? Porque arruga y estrangula el tubo por dentro, y un estrangulamiento deja al aparato sin caudal: llama pobre, mala combustión y avería. Curva limpia y sin mandril: esa es la consigna.</a:t>
             </a:r>
           </a:p>
         </p:txBody>
@@ -818,12 +819,12 @@
           <a:lstStyle/>
           <a:p>
             <a:r>
-              <a:t>N1: ¿Cuándo compensa el inoxidable en vez del acero normal?</a:t>
-            </a:r>
-          </a:p>
-          <a:p>
-            <a:r>
-              <a:t>N2: Cuando el ambiente es agresivo y quieres que el tubo aguante sin oxidarse. Por eso la norma dice algo muy lógico: el tipo de inoxidable se elige según las condiciones del sitio. No es lo mismo un local seco de interior que una instalación a pie de costa, donde el salitre ataca, o una zona industrial con humos. A más agresividad, un inoxidable de más categoría. El dato numérico que te pueden pedir es el apellido: Serie dos. Tanto el tubo como sus accesorios de presión trabajan con la Serie dos, según la norma diez mil trescientos doce. Así que si te preguntan qué serie de inoxidable se usa, la respuesta es la dos; grábate ese número y ese apellido.</a:t>
+              <a:t>N1: ¿Y el acero? ¿hasta dónde se puede curvar?</a:t>
+            </a:r>
+          </a:p>
+          <a:p>
+            <a:r>
+              <a:t>N2: El acero es el tubo de toda la vida para el gas visto en interior, el negro roscado que has visto mil veces. Se fabrica de dos maneras válidas: sin costura, o con una soldadura a lo largo del tubo, siempre según la norma diez mil doscientos cincuenta y cinco. Lo que más se pregunta es el límite del curvado: se curva en frío con máquina, pero preferentemente solo hasta dos pulgadas de diámetro. ¿Por qué ese tope? Porque a partir de ahí el tubo es tan gordo que curvarlo en frío lo deforma; para esos diámetros grandes se usan codos ya fabricados. Sus piezas van soldadas o roscadas, cada una con su norma. Y un aviso: el acero enterrado sin proteger se lo come el terreno en nada, así que fuera siempre con su recubrimiento. Ah, y aquí también, mandril interno prohibido.</a:t>
             </a:r>
           </a:p>
         </p:txBody>
@@ -893,12 +894,12 @@
           <a:lstStyle/>
           <a:p>
             <a:r>
-              <a:t>N1: ¿Qué es eso del multicapa y por qué lleva limitadores obligatorios?</a:t>
-            </a:r>
-          </a:p>
-          <a:p>
-            <a:r>
-              <a:t>N2: Imagínate el corte del tubo y lo entiendes de golpe: es un sándwich de tres capas, plástico por dentro, una lámina de aluminio en medio y plástico por fuera. De ahí el nombre, polímero-aluminio-polímero. Es ligero y rápido de montar, pero tiene una debilidad: aguanta mal el calor. Si se le acerca una fuente caliente, se reblandece. Por eso la norma le exige siempre dos piezas de seguridad: un limitador de caudal, que corta si sale más gas del previsto, y un limitador de temperatura, que corta si el tubo se calienta de más. Y aquí viene la trampa de examen: son obligatorios con independencia de la longitud del tramo. Aunque el trozo de multicapa sea de un palmo, van sus dos limitadores. Todo esto según la norma cincuenta y tres mil ocho.</a:t>
+              <a:t>N1: ¿Cuándo compensa el inoxidable en vez del acero normal?</a:t>
+            </a:r>
+          </a:p>
+          <a:p>
+            <a:r>
+              <a:t>N2: Cuando el ambiente es agresivo y quieres que el tubo aguante sin oxidarse. Por eso la norma dice algo muy lógico: el tipo de inoxidable se elige según las condiciones del sitio. No es lo mismo un local seco de interior que una instalación a pie de costa, donde el salitre ataca, o una zona industrial con humos. A más agresividad, un inoxidable de más categoría. El dato numérico que te pueden pedir es el apellido: Serie dos. Tanto el tubo como sus accesorios de presión trabajan con la Serie dos, según la norma diez mil trescientos doce. Así que si te preguntan qué serie de inoxidable se usa, la respuesta es la dos; grábate ese número y ese apellido.</a:t>
             </a:r>
           </a:p>
         </p:txBody>
@@ -968,12 +969,12 @@
           <a:lstStyle/>
           <a:p>
             <a:r>
-              <a:t>N1: El tubo amarillo con forma de acordeón, ¿ese cuál es?</a:t>
-            </a:r>
-          </a:p>
-          <a:p>
-            <a:r>
-              <a:t>N2: Ese es el acero inoxidable corrugado, y cada vez se ve más en viviendas porque se monta rapidísimo: es flexible y lo llevas por rincones donde el tubo rígido no entra. Fíjate en que tiene dos capas, y esto es lo que se pregunta. La de dentro es el acero inoxidable ondulado, el acordeón, y es la que aguanta, la que hace de estructura y resiste la presión. La de fuera es una funda de protección, normalmente ese plástico amarillo, que lo defiende de golpes y del ambiente. Estructura por dentro, protección por fuera. Su norma es la quince mil doscientos sesenta y seis. Si te describen 'un tubo de dos capas, una estructural corrugada y otra externa de protección', están hablando de este.</a:t>
+              <a:t>N1: ¿Qué es eso del multicapa y por qué lleva limitadores obligatorios?</a:t>
+            </a:r>
+          </a:p>
+          <a:p>
+            <a:r>
+              <a:t>N2: Imagínate el corte del tubo y lo entiendes de golpe: es un sándwich de tres capas, plástico por dentro, una lámina de aluminio en medio y plástico por fuera. De ahí el nombre, polímero-aluminio-polímero. Es ligero y rápido de montar, pero tiene una debilidad: aguanta mal el calor. Si se le acerca una fuente caliente, se reblandece. Por eso la norma le exige siempre dos piezas de seguridad: un limitador de caudal, que corta si sale más gas del previsto, y un limitador de temperatura, que corta si el tubo se calienta de más. Y aquí viene la trampa de examen: son obligatorios con independencia de la longitud del tramo. Aunque el trozo de multicapa sea de un palmo, van sus dos limitadores. Todo esto según la norma cincuenta y tres mil ocho.</a:t>
             </a:r>
           </a:p>
         </p:txBody>
@@ -1043,12 +1044,12 @@
           <a:lstStyle/>
           <a:p>
             <a:r>
-              <a:t>N1: ¿Qué es exactamente una vaina y de qué tiene que ser?</a:t>
-            </a:r>
-          </a:p>
-          <a:p>
-            <a:r>
-              <a:t>N2: La vaina es la funda del tubo de gas: un tubo más ancho por dentro del cual pasa el de gas cuando cruza un muro o una zona comprometida, para protegerlo. Junto a ella van los conductos y los pasamuros, que hacen esa misma labor al atravesar una pared. Aquí la norma no te da un material único, y eso a veces despista. Lo que dice es que sea el adecuado a su función: pueden ser metálicas, de plástico, de obra... según para qué sirvan. El detalle concreto de cuándo va cada una lo remite a la parte cuatro, la del plano de obra. Y un cierre útil: además de los seis materiales de tubo que hemos visto, se admite cualquier otro que acepte la norma mil setecientos setenta y cinco. La idea con la que quedarte: la vaina protege al tubo, y su material depende del trabajo que haga.</a:t>
+              <a:t>N1: El tubo amarillo con forma de acordeón, ¿ese cuál es?</a:t>
+            </a:r>
+          </a:p>
+          <a:p>
+            <a:r>
+              <a:t>N2: Ese es el acero inoxidable corrugado, y cada vez se ve más en viviendas porque se monta rapidísimo: es flexible y lo llevas por rincones donde el tubo rígido no entra. Fíjate en que tiene dos capas, y esto es lo que se pregunta. La de dentro es el acero inoxidable ondulado, el acordeón, y es la que aguanta, la que hace de estructura y resiste la presión. La de fuera es una funda de protección, normalmente ese plástico amarillo, que lo defiende de golpes y del ambiente. Estructura por dentro, protección por fuera. Su norma es la quince mil doscientos sesenta y seis. Si te describen 'un tubo de dos capas, una estructural corrugada y otra externa de protección', están hablando de este.</a:t>
             </a:r>
           </a:p>
         </p:txBody>
@@ -1118,6 +1119,81 @@
           <a:lstStyle/>
           <a:p>
             <a:r>
+              <a:t>N1: ¿Qué es exactamente una vaina y de qué tiene que ser?</a:t>
+            </a:r>
+          </a:p>
+          <a:p>
+            <a:r>
+              <a:t>N2: La vaina es la funda del tubo de gas: un tubo más ancho por dentro del cual pasa el de gas cuando cruza un muro o una zona comprometida, para protegerlo. Junto a ella van los conductos y los pasamuros, que hacen esa misma labor al atravesar una pared. Aquí la norma no te da un material único, y eso a veces despista. Lo que dice es que sea el adecuado a su función: pueden ser metálicas, de plástico, de obra... según para qué sirvan. El detalle concreto de cuándo va cada una lo remite a la parte cuatro, la del plano de obra. Y un cierre útil: además de los seis materiales de tubo que hemos visto, se admite cualquier otro que acepte la norma mil setecientos setenta y cinco. La idea con la que quedarte: la vaina protege al tubo, y su material depende del trabajo que haga.</a:t>
+            </a:r>
+          </a:p>
+        </p:txBody>
+      </p:sp>
+      <p:sp>
+        <p:nvSpPr>
+          <p:cNvPr id="4" name="Slide Number Placeholder 3"/>
+          <p:cNvSpPr>
+            <a:spLocks noGrp="1"/>
+          </p:cNvSpPr>
+          <p:nvPr>
+            <p:ph type="sldNum" idx="5" sz="quarter"/>
+          </p:nvPr>
+        </p:nvSpPr>
+        <p:spPr/>
+      </p:sp>
+    </p:spTree>
+  </p:cSld>
+  <p:clrMapOvr>
+    <a:masterClrMapping/>
+  </p:clrMapOvr>
+</p:notes>
+</file>
+
+<file path=ppt/notesSlides/notesSlide18.xml><?xml version="1.0" encoding="utf-8"?>
+<p:notes xmlns:a="http://schemas.openxmlformats.org/drawingml/2006/main" xmlns:p="http://schemas.openxmlformats.org/presentationml/2006/main" xmlns:r="http://schemas.openxmlformats.org/officeDocument/2006/relationships">
+  <p:cSld>
+    <p:spTree>
+      <p:nvGrpSpPr>
+        <p:cNvPr id="1" name=""/>
+        <p:cNvGrpSpPr/>
+        <p:nvPr/>
+      </p:nvGrpSpPr>
+      <p:grpSpPr>
+        <a:xfrm>
+          <a:off x="0" y="0"/>
+          <a:ext cx="0" cy="0"/>
+          <a:chOff x="0" y="0"/>
+          <a:chExt cx="0" cy="0"/>
+        </a:xfrm>
+      </p:grpSpPr>
+      <p:sp>
+        <p:nvSpPr>
+          <p:cNvPr id="2" name="Slide Image Placeholder 1"/>
+          <p:cNvSpPr>
+            <a:spLocks noGrp="1"/>
+          </p:cNvSpPr>
+          <p:nvPr>
+            <p:ph type="sldImg" idx="2"/>
+          </p:nvPr>
+        </p:nvSpPr>
+        <p:spPr/>
+      </p:sp>
+      <p:sp>
+        <p:nvSpPr>
+          <p:cNvPr id="3" name="Notes Placeholder 2"/>
+          <p:cNvSpPr>
+            <a:spLocks noGrp="1"/>
+          </p:cNvSpPr>
+          <p:nvPr>
+            <p:ph type="body" idx="3" sz="quarter"/>
+          </p:nvPr>
+        </p:nvSpPr>
+        <p:spPr/>
+        <p:txBody>
+          <a:bodyPr/>
+          <a:lstStyle/>
+          <a:p>
+            <a:r>
               <a:t>N1: Cerramos el primer vídeo. Si me quedo con lo esencial, ¿qué me llevo?</a:t>
             </a:r>
           </a:p>
@@ -1276,16 +1352,7 @@
         <p:txBody>
           <a:bodyPr/>
           <a:lstStyle/>
-          <a:p>
-            <a:r>
-              <a:t>N1: ¿Trece partes tiene la norma? ¿por qué tantas?</a:t>
-            </a:r>
-          </a:p>
-          <a:p>
-            <a:r>
-              <a:t>N2: Porque montar gas no es solo pegar tubos: primero se diseña, luego se construye, después se prueba que no fuga, se pone en servicio y, con los años, se revisa. Cada una de esas fases tiene su cuadernillo, y así no se mezcla todo en un texto enorme. La parte que nos toca, la tercera, es la de los materiales: tuberías, accesorios y uniones. Un apunte de vocabulario: verás mucho eso de eme-o-pe, la MOP, que es sencillamente la presión máxima a la que puede trabajar el tramo. Toda esta norma se aplica hasta cinco bar de MOP, que es la presión de las instalaciones que vas a tocar en viviendas y comercios. Ejemplo de por qué importa: si te preguntan el espesor de un tubo enterrado, eso es la parte tres; si te preguntan por dónde se ventila un cuarto de calderas, eso ya es otra parte distinta.</a:t>
-            </a:r>
-          </a:p>
+          <a:p/>
         </p:txBody>
       </p:sp>
       <p:sp>
@@ -1353,12 +1420,12 @@
           <a:lstStyle/>
           <a:p>
             <a:r>
-              <a:t>N1: Vale, ¿y cómo sé si una pregunta es de la parte tres o de la cuatro?</a:t>
-            </a:r>
-          </a:p>
-          <a:p>
-            <a:r>
-              <a:t>N2: Con una imagen que no se te olvida. La parte tres es el almacén: entras y te dicen qué tubo puedes coger, qué válvula, qué tipo de unión. La parte cuatro es el plano de la obra: te dice dónde clavas ese tubo, a qué distancia de un cable pasa y cómo se ventila. Almacén contra plano. Así que cuando la pregunta lleve las palabras 'qué material', 'qué espesor' o 'qué soldadura se admite', es parte tres, la nuestra. Cuando lleve 'trazado', 'distancia' o 'ventilación', es la cuatro. Este truco te ahorra fallar las preguntas cruzadas, que son las que ponen para pillarte.</a:t>
+              <a:t>N1: ¿Trece partes tiene la norma? ¿por qué tantas?</a:t>
+            </a:r>
+          </a:p>
+          <a:p>
+            <a:r>
+              <a:t>N2: Porque montar gas no es solo pegar tubos: primero se diseña, luego se construye, después se prueba que no fuga, se pone en servicio y, con los años, se revisa. Cada una de esas fases tiene su cuadernillo, y así no se mezcla todo en un texto enorme. La parte que nos toca, la tercera, es la de los materiales: tuberías, accesorios y uniones. Un apunte de vocabulario: verás mucho eso de eme-o-pe, la MOP, que es sencillamente la presión máxima a la que puede trabajar el tramo. Toda esta norma se aplica hasta cinco bar de MOP, que es la presión de las instalaciones que vas a tocar en viviendas y comercios. Ejemplo de por qué importa: si te preguntan el espesor de un tubo enterrado, eso es la parte tres; si te preguntan por dónde se ventila un cuarto de calderas, eso ya es otra parte distinta.</a:t>
             </a:r>
           </a:p>
         </p:txBody>
@@ -1428,12 +1495,12 @@
           <a:lstStyle/>
           <a:p>
             <a:r>
-              <a:t>N1: ¿Y por qué me importan los cambios respecto a la edición vieja?</a:t>
-            </a:r>
-          </a:p>
-          <a:p>
-            <a:r>
-              <a:t>N2: Porque lo que cambia es justo lo que les gusta preguntar: quieren saber si estudias la norma de ahora o la de antes. No hace falta que te los sepas todos de carrerilla, pero quédate con la idea de cada uno. El multicapa ahora exige sí o sí dos piezas de seguridad, el limitador de caudal y el de temperatura. Se admite un tallo nuevo, el de plástico con multicapa. Todas las normas viejas de reguladores de butano y propano se han juntado en una sola, la dieciséis mil ciento veintinueve. Y han quitado la obligación de autobloqueo en las llavecitas de conexión del aparato. Truco práctico: si en una respuesta ves una norma que 'ya no existe', probablemente es de la edición anterior, así que descártala.</a:t>
+              <a:t>N1: Vale, ¿y cómo sé si una pregunta es de la parte tres o de la cuatro?</a:t>
+            </a:r>
+          </a:p>
+          <a:p>
+            <a:r>
+              <a:t>N2: Con una imagen que no se te olvida. La parte tres es el almacén: entras y te dicen qué tubo puedes coger, qué válvula, qué tipo de unión. La parte cuatro es el plano de la obra: te dice dónde clavas ese tubo, a qué distancia de un cable pasa y cómo se ventila. Almacén contra plano. Así que cuando la pregunta lleve las palabras 'qué material', 'qué espesor' o 'qué soldadura se admite', es parte tres, la nuestra. Cuando lleve 'trazado', 'distancia' o 'ventilación', es la cuatro. Este truco te ahorra fallar las preguntas cruzadas, que son las que ponen para pillarte.</a:t>
             </a:r>
           </a:p>
         </p:txBody>
@@ -1503,12 +1570,12 @@
           <a:lstStyle/>
           <a:p>
             <a:r>
-              <a:t>N1: ¿'Objeto y campo de aplicación' no es paja de introducción?</a:t>
-            </a:r>
-          </a:p>
-          <a:p>
-            <a:r>
-              <a:t>N2: Parece paja, pero define el terreno de juego, y por eso a veces lo preguntan tal cual. Lo que dice, en llano, es esto: esta parte fija las condiciones que deben cumplir tres cosas y su enganche. Las tres cosas son las tuberías, los elementos que se intercalan, como un contador o una válvula, y los accesorios, como un codo. Y el enganche son las uniones. ¿Todo eso para qué? Para dos trabajos: construir la instalación receptora, que es la que lleva el gas por la casa, y conectar los aparatos, la caldera o la cocina. Si te quedas con 'tuberías, elementos, accesorios y uniones', ya tienes el índice del tema entero.</a:t>
+              <a:t>N1: ¿Y por qué me importan los cambios respecto a la edición vieja?</a:t>
+            </a:r>
+          </a:p>
+          <a:p>
+            <a:r>
+              <a:t>N2: Porque lo que cambia es justo lo que les gusta preguntar: quieren saber si estudias la norma de ahora o la de antes. No hace falta que te los sepas todos de carrerilla, pero quédate con la idea de cada uno. El multicapa ahora exige sí o sí dos piezas de seguridad, el limitador de caudal y el de temperatura. Se admite un tallo nuevo, el de plástico con multicapa. Todas las normas viejas de reguladores de butano y propano se han juntado en una sola, la dieciséis mil ciento veintinueve. Y han quitado la obligación de autobloqueo en las llavecitas de conexión del aparato. Truco práctico: si en una respuesta ves una norma que 'ya no existe', probablemente es de la edición anterior, así que descártala.</a:t>
             </a:r>
           </a:p>
         </p:txBody>
@@ -1578,12 +1645,12 @@
           <a:lstStyle/>
           <a:p>
             <a:r>
-              <a:t>N1: De todo el capítulo, si me quedo con una sola frase, ¿cuál es?</a:t>
-            </a:r>
-          </a:p>
-          <a:p>
-            <a:r>
-              <a:t>N2: Esta, y cabe en una línea: el material ni se lo come el gas por dentro ni la humedad por fuera. Piénsalo como el fontanero de siempre: un tubo que se pica se acaba agujereando, y por ese agujero se escapa el gas. Entonces la norma te da dos salidas cuando el ambiente es agresivo, por ejemplo un acero metido bajo tierra: o pones un material que aguante de por sí, o lo proteges con un recubrimiento anticorrosión, como una funda. Y por encima de todo, un sello: el Marcado CE, que exige el Reglamento europeo de productos de construcción, el trescientos cinco. Sin ese marcado, el material no vale aunque parezca bueno. Ejemplo real: un tubo enterrado sin proteger acaba en corrosión perforante, ese agujerito que provoca la fuga soterrada, la más difícil y cara de encontrar.</a:t>
+              <a:t>N1: ¿'Objeto y campo de aplicación' no es paja de introducción?</a:t>
+            </a:r>
+          </a:p>
+          <a:p>
+            <a:r>
+              <a:t>N2: Parece paja, pero define el terreno de juego, y por eso a veces lo preguntan tal cual. Lo que dice, en llano, es esto: esta parte fija las condiciones que deben cumplir tres cosas y su enganche. Las tres cosas son las tuberías, los elementos que se intercalan, como un contador o una válvula, y los accesorios, como un codo. Y el enganche son las uniones. ¿Todo eso para qué? Para dos trabajos: construir la instalación receptora, que es la que lleva el gas por la casa, y conectar los aparatos, la caldera o la cocina. Si te quedas con 'tuberías, elementos, accesorios y uniones', ya tienes el índice del tema entero.</a:t>
             </a:r>
           </a:p>
         </p:txBody>
@@ -1653,12 +1720,12 @@
           <a:lstStyle/>
           <a:p>
             <a:r>
-              <a:t>N1: ¿Por qué el tubo de plástico negro solo se puede enterrar?</a:t>
-            </a:r>
-          </a:p>
-          <a:p>
-            <a:r>
-              <a:t>N2: Buena pregunta, y la respuesta es puro sentido común. El polietileno es ese tubo negro flexible que ves en las zanjas de la calle: barato, se dobla fácil y, lo mejor para el gas, no se corroe nunca. Pero tiene un talón de Aquiles: el sol. Los rayos ultravioleta lo van cuarteando hasta que se agrieta y suelta gas. Por eso la norma solo lo deja en dos sitios: enterrado, o metido dentro de una vaina que lo tape. Nunca a la vista. El truco para no olvidarlo es la propia sigla: pe, de Para Enterrar. Su calidad viene en dos grados, pe ochenta y pe cien, según la norma mil quinientos cincuenta y cinco. Si algún día ves en una fachada un trozo de tubo negro colgando al aire, ya sabes que está mal puesto: es una fuga a plazo fijo.</a:t>
+              <a:t>N1: De todo el capítulo, si me quedo con una sola frase, ¿cuál es?</a:t>
+            </a:r>
+          </a:p>
+          <a:p>
+            <a:r>
+              <a:t>N2: Esta, y cabe en una línea: el material ni se lo come el gas por dentro ni la humedad por fuera. Piénsalo como el fontanero de siempre: un tubo que se pica se acaba agujereando, y por ese agujero se escapa el gas. Entonces la norma te da dos salidas cuando el ambiente es agresivo, por ejemplo un acero metido bajo tierra: o pones un material que aguante de por sí, o lo proteges con un recubrimiento anticorrosión, como una funda. Y por encima de todo, un sello: el Marcado CE, que exige el Reglamento europeo de productos de construcción, el trescientos cinco. Sin ese marcado, el material no vale aunque parezca bueno. Ejemplo real: un tubo enterrado sin proteger acaba en corrosión perforante, ese agujerito que provoca la fuga soterrada, la más difícil y cara de encontrar.</a:t>
             </a:r>
           </a:p>
         </p:txBody>
@@ -1728,12 +1795,12 @@
           <a:lstStyle/>
           <a:p>
             <a:r>
-              <a:t>N1: ¿Qué tiene de especial el cobre para gas?</a:t>
-            </a:r>
-          </a:p>
-          <a:p>
-            <a:r>
-              <a:t>N2: Que es limpio, duradero y muy manejable, por eso se usa tantísimo en interior. Pero no vale cualquier cobre: la norma pide uno concreto, el llamado cu-de-hache-pe, que es cobre redondo de precisión, estirado en frío y sin costura de soldadura, según la norma mil cincuenta y siete. Ese 'sin soldadura' importa: el tubo es de una pieza, no una chapa curvada y pegada, así que no tiene una junta débil por donde empezar a fugar. Viene en dos formatos que verás en el almacén: en barra rígida, que llamamos estado duro, y en rollo blando, el recocido. Los dos son cobre bueno; lo que cambia es cómo los trabajas. Y sus piezas, los codos y manguitos, se pegan por soldadura capilar, que veremos con calma en el último vídeo.</a:t>
+              <a:t>N1: ¿Por qué el tubo de plástico negro solo se puede enterrar?</a:t>
+            </a:r>
+          </a:p>
+          <a:p>
+            <a:r>
+              <a:t>N2: Buena pregunta, y la respuesta es puro sentido común. El polietileno es ese tubo negro flexible que ves en las zanjas de la calle: barato, se dobla fácil y, lo mejor para el gas, no se corroe nunca. Pero tiene un talón de Aquiles: el sol. Los rayos ultravioleta lo van cuarteando hasta que se agrieta y suelta gas. Por eso la norma solo lo deja en dos sitios: enterrado, o metido dentro de una vaina que lo tape. Nunca a la vista. El truco para no olvidarlo es la propia sigla: pe, de Para Enterrar. Su calidad viene en dos grados, pe ochenta y pe cien, según la norma mil quinientos cincuenta y cinco. Si algún día ves en una fachada un trozo de tubo negro colgando al aire, ya sabes que está mal puesto: es una fuga a plazo fijo.</a:t>
             </a:r>
           </a:p>
         </p:txBody>
@@ -4808,7 +4875,7 @@
             <a:r>
               <a:rPr sz="1400" b="1" i="0">
                 <a:solidFill>
-                  <a:srgbClr val="CADCFC"/>
+                  <a:srgbClr val="F4A24C"/>
                 </a:solidFill>
                 <a:latin typeface="Montserrat"/>
               </a:rPr>
@@ -4819,13 +4886,57 @@
       </p:sp>
       <p:sp>
         <p:nvSpPr>
-          <p:cNvPr id="4" name="TextBox 3"/>
+          <p:cNvPr id="4" name="Rounded Rectangle 3"/>
+          <p:cNvSpPr/>
+          <p:nvPr/>
+        </p:nvSpPr>
+        <p:spPr>
+          <a:xfrm>
+            <a:off x="868680" y="2057400"/>
+            <a:ext cx="1463040" cy="82296"/>
+          </a:xfrm>
+          <a:prstGeom prst="roundRect">
+            <a:avLst/>
+          </a:prstGeom>
+          <a:solidFill>
+            <a:srgbClr val="E8801A"/>
+          </a:solidFill>
+          <a:ln>
+            <a:noFill/>
+          </a:ln>
+          <a:effectLst/>
+        </p:spPr>
+        <p:style>
+          <a:lnRef idx="1">
+            <a:schemeClr val="accent1"/>
+          </a:lnRef>
+          <a:fillRef idx="3">
+            <a:schemeClr val="accent1"/>
+          </a:fillRef>
+          <a:effectRef idx="2">
+            <a:schemeClr val="accent1"/>
+          </a:effectRef>
+          <a:fontRef idx="minor">
+            <a:schemeClr val="lt1"/>
+          </a:fontRef>
+        </p:style>
+        <p:txBody>
+          <a:bodyPr rtlCol="0" anchor="ctr"/>
+          <a:lstStyle/>
+          <a:p>
+            <a:pPr algn="ctr"/>
+          </a:p>
+        </p:txBody>
+      </p:sp>
+      <p:sp>
+        <p:nvSpPr>
+          <p:cNvPr id="5" name="TextBox 4"/>
           <p:cNvSpPr txBox="1"/>
           <p:nvPr/>
         </p:nvSpPr>
         <p:spPr>
           <a:xfrm>
-            <a:off x="822960" y="2194560"/>
+            <a:off x="822960" y="2286000"/>
             <a:ext cx="10515600" cy="2011680"/>
           </a:xfrm>
           <a:prstGeom prst="rect">
@@ -4864,7 +4975,7 @@
       </p:sp>
       <p:sp>
         <p:nvSpPr>
-          <p:cNvPr id="5" name="TextBox 4"/>
+          <p:cNvPr id="6" name="TextBox 5"/>
           <p:cNvSpPr txBox="1"/>
           <p:nvPr/>
         </p:nvSpPr>
@@ -4988,7 +5099,7 @@
                 </a:solidFill>
                 <a:latin typeface="Montserrat"/>
               </a:rPr>
-              <a:t>010 / 017</a:t>
+              <a:t>010 / 018</a:t>
             </a:r>
           </a:p>
         </p:txBody>
@@ -5036,7 +5147,7 @@
         <p:spPr>
           <a:xfrm>
             <a:off x="822960" y="457200"/>
-            <a:ext cx="8229600" cy="365760"/>
+            <a:ext cx="10058400" cy="365760"/>
           </a:xfrm>
           <a:prstGeom prst="rect">
             <a:avLst/>
@@ -5050,9 +5161,9 @@
           <a:lstStyle/>
           <a:p>
             <a:r>
-              <a:rPr sz="1200" b="1" i="0">
-                <a:solidFill>
-                  <a:srgbClr val="64748B"/>
+              <a:rPr sz="1300" b="1" i="0">
+                <a:solidFill>
+                  <a:srgbClr val="E8801A"/>
                 </a:solidFill>
                 <a:latin typeface="Montserrat"/>
               </a:rPr>
@@ -5084,26 +5195,70 @@
           <a:lstStyle/>
           <a:p>
             <a:r>
-              <a:rPr sz="2700" b="1" i="0">
+              <a:rPr sz="2800" b="1" i="0">
                 <a:solidFill>
                   <a:srgbClr val="1E2761"/>
                 </a:solidFill>
                 <a:latin typeface="Montserrat"/>
               </a:rPr>
-              <a:t>Los dos espesores del cobre</a:t>
-            </a:r>
-          </a:p>
-        </p:txBody>
-      </p:sp>
-      <p:sp>
-        <p:nvSpPr>
-          <p:cNvPr id="7" name="TextBox 6"/>
+              <a:t>Cobre: el tubo noble</a:t>
+            </a:r>
+          </a:p>
+        </p:txBody>
+      </p:sp>
+      <p:sp>
+        <p:nvSpPr>
+          <p:cNvPr id="7" name="Rounded Rectangle 6"/>
+          <p:cNvSpPr/>
+          <p:nvPr/>
+        </p:nvSpPr>
+        <p:spPr>
+          <a:xfrm>
+            <a:off x="868680" y="1627632"/>
+            <a:ext cx="2011680" cy="73152"/>
+          </a:xfrm>
+          <a:prstGeom prst="roundRect">
+            <a:avLst/>
+          </a:prstGeom>
+          <a:solidFill>
+            <a:srgbClr val="E8801A"/>
+          </a:solidFill>
+          <a:ln>
+            <a:noFill/>
+          </a:ln>
+          <a:effectLst/>
+        </p:spPr>
+        <p:style>
+          <a:lnRef idx="1">
+            <a:schemeClr val="accent1"/>
+          </a:lnRef>
+          <a:fillRef idx="3">
+            <a:schemeClr val="accent1"/>
+          </a:fillRef>
+          <a:effectRef idx="2">
+            <a:schemeClr val="accent1"/>
+          </a:effectRef>
+          <a:fontRef idx="minor">
+            <a:schemeClr val="lt1"/>
+          </a:fontRef>
+        </p:style>
+        <p:txBody>
+          <a:bodyPr rtlCol="0" anchor="ctr"/>
+          <a:lstStyle/>
+          <a:p>
+            <a:pPr algn="ctr"/>
+          </a:p>
+        </p:txBody>
+      </p:sp>
+      <p:sp>
+        <p:nvSpPr>
+          <p:cNvPr id="8" name="TextBox 7"/>
           <p:cNvSpPr txBox="1"/>
           <p:nvPr/>
         </p:nvSpPr>
         <p:spPr>
           <a:xfrm>
-            <a:off x="822960" y="1920240"/>
+            <a:off x="822960" y="1965960"/>
             <a:ext cx="4983480" cy="4206240"/>
           </a:xfrm>
           <a:prstGeom prst="rect">
@@ -5119,17 +5274,17 @@
           <a:p>
             <a:pPr>
               <a:spcAft>
-                <a:spcPts val="1000"/>
+                <a:spcPts val="1100"/>
               </a:spcAft>
             </a:pPr>
             <a:r>
               <a:rPr sz="1600" b="1" i="0">
                 <a:solidFill>
-                  <a:srgbClr val="2E3A80"/>
-                </a:solidFill>
-                <a:latin typeface="Montserrat"/>
-              </a:rPr>
-              <a:t>•  </a:t>
+                  <a:srgbClr val="E8801A"/>
+                </a:solidFill>
+                <a:latin typeface="Montserrat"/>
+              </a:rPr>
+              <a:t>▸  </a:t>
             </a:r>
             <a:r>
               <a:rPr sz="1600" b="0" i="0">
@@ -5138,23 +5293,23 @@
                 </a:solidFill>
                 <a:latin typeface="Montserrat"/>
               </a:rPr>
-              <a:t>1 mm: visto, empotrado, en vaina, aparatos</a:t>
+              <a:t>Redondo de precisión, sin soldadura</a:t>
             </a:r>
           </a:p>
           <a:p>
             <a:pPr>
               <a:spcAft>
-                <a:spcPts val="1000"/>
+                <a:spcPts val="1100"/>
               </a:spcAft>
             </a:pPr>
             <a:r>
               <a:rPr sz="1600" b="1" i="0">
                 <a:solidFill>
-                  <a:srgbClr val="2E3A80"/>
-                </a:solidFill>
-                <a:latin typeface="Montserrat"/>
-              </a:rPr>
-              <a:t>•  </a:t>
+                  <a:srgbClr val="E8801A"/>
+                </a:solidFill>
+                <a:latin typeface="Montserrat"/>
+              </a:rPr>
+              <a:t>▸  </a:t>
             </a:r>
             <a:r>
               <a:rPr sz="1600" b="0" i="0">
@@ -5163,23 +5318,23 @@
                 </a:solidFill>
                 <a:latin typeface="Montserrat"/>
               </a:rPr>
-              <a:t>1,5 mm: enterrado</a:t>
+              <a:t>Tipo Cu-DHP (UNE-EN 1057)</a:t>
             </a:r>
           </a:p>
           <a:p>
             <a:pPr>
               <a:spcAft>
-                <a:spcPts val="1000"/>
+                <a:spcPts val="1100"/>
               </a:spcAft>
             </a:pPr>
             <a:r>
               <a:rPr sz="1600" b="1" i="0">
                 <a:solidFill>
-                  <a:srgbClr val="2E3A80"/>
-                </a:solidFill>
-                <a:latin typeface="Montserrat"/>
-              </a:rPr>
-              <a:t>•  </a:t>
+                  <a:srgbClr val="E8801A"/>
+                </a:solidFill>
+                <a:latin typeface="Montserrat"/>
+              </a:rPr>
+              <a:t>▸  </a:t>
             </a:r>
             <a:r>
               <a:rPr sz="1600" b="0" i="0">
@@ -5188,23 +5343,23 @@
                 </a:solidFill>
                 <a:latin typeface="Montserrat"/>
               </a:rPr>
-              <a:t>Bajo tierra el tubo sufre más</a:t>
+              <a:t>Estado duro o recocido en rollo</a:t>
             </a:r>
           </a:p>
           <a:p>
             <a:pPr>
               <a:spcAft>
-                <a:spcPts val="1000"/>
+                <a:spcPts val="1100"/>
               </a:spcAft>
             </a:pPr>
             <a:r>
               <a:rPr sz="1600" b="1" i="0">
                 <a:solidFill>
-                  <a:srgbClr val="2E3A80"/>
-                </a:solidFill>
-                <a:latin typeface="Montserrat"/>
-              </a:rPr>
-              <a:t>•  </a:t>
+                  <a:srgbClr val="E8801A"/>
+                </a:solidFill>
+                <a:latin typeface="Montserrat"/>
+              </a:rPr>
+              <a:t>▸  </a:t>
             </a:r>
             <a:r>
               <a:rPr sz="1600" b="0" i="0">
@@ -5213,14 +5368,14 @@
                 </a:solidFill>
                 <a:latin typeface="Montserrat"/>
               </a:rPr>
-              <a:t>Enterrado = medio milímetro más gordo</a:t>
-            </a:r>
-          </a:p>
-        </p:txBody>
-      </p:sp>
-      <p:sp>
-        <p:nvSpPr>
-          <p:cNvPr id="8" name="imgph" descr="IMGQ:copper pipe wall thickness caliper measure"/>
+              <a:t>Sus piezas, por soldadura capilar</a:t>
+            </a:r>
+          </a:p>
+        </p:txBody>
+      </p:sp>
+      <p:sp>
+        <p:nvSpPr>
+          <p:cNvPr id="9" name="imgph" descr="IMGQ:copper pipe coil hard drawn tube"/>
           <p:cNvSpPr/>
           <p:nvPr/>
         </p:nvSpPr>
@@ -5266,7 +5421,7 @@
       </p:sp>
       <p:sp>
         <p:nvSpPr>
-          <p:cNvPr id="9" name="TextBox 8"/>
+          <p:cNvPr id="10" name="TextBox 9"/>
           <p:cNvSpPr txBox="1"/>
           <p:nvPr/>
         </p:nvSpPr>
@@ -5306,7 +5461,7 @@
                 </a:solidFill>
                 <a:latin typeface="Montserrat"/>
               </a:rPr>
-              <a:t>copper pipe wall thickness caliper measure</a:t>
+              <a:t>copper pipe coil hard drawn tube</a:t>
             </a:r>
           </a:p>
         </p:txBody>
@@ -5403,7 +5558,7 @@
                 </a:solidFill>
                 <a:latin typeface="Montserrat"/>
               </a:rPr>
-              <a:t>011 / 017</a:t>
+              <a:t>011 / 018</a:t>
             </a:r>
           </a:p>
         </p:txBody>
@@ -5451,7 +5606,7 @@
         <p:spPr>
           <a:xfrm>
             <a:off x="822960" y="457200"/>
-            <a:ext cx="8229600" cy="365760"/>
+            <a:ext cx="10058400" cy="365760"/>
           </a:xfrm>
           <a:prstGeom prst="rect">
             <a:avLst/>
@@ -5465,9 +5620,9 @@
           <a:lstStyle/>
           <a:p>
             <a:r>
-              <a:rPr sz="1200" b="1" i="0">
-                <a:solidFill>
-                  <a:srgbClr val="64748B"/>
+              <a:rPr sz="1300" b="1" i="0">
+                <a:solidFill>
+                  <a:srgbClr val="E8801A"/>
                 </a:solidFill>
                 <a:latin typeface="Montserrat"/>
               </a:rPr>
@@ -5499,26 +5654,70 @@
           <a:lstStyle/>
           <a:p>
             <a:r>
-              <a:rPr sz="2700" b="1" i="0">
+              <a:rPr sz="2800" b="1" i="0">
                 <a:solidFill>
                   <a:srgbClr val="1E2761"/>
                 </a:solidFill>
                 <a:latin typeface="Montserrat"/>
               </a:rPr>
-              <a:t>Duro, recocido y curvado</a:t>
-            </a:r>
-          </a:p>
-        </p:txBody>
-      </p:sp>
-      <p:sp>
-        <p:nvSpPr>
-          <p:cNvPr id="7" name="TextBox 6"/>
+              <a:t>Los dos espesores del cobre</a:t>
+            </a:r>
+          </a:p>
+        </p:txBody>
+      </p:sp>
+      <p:sp>
+        <p:nvSpPr>
+          <p:cNvPr id="7" name="Rounded Rectangle 6"/>
+          <p:cNvSpPr/>
+          <p:nvPr/>
+        </p:nvSpPr>
+        <p:spPr>
+          <a:xfrm>
+            <a:off x="868680" y="1627632"/>
+            <a:ext cx="2011680" cy="73152"/>
+          </a:xfrm>
+          <a:prstGeom prst="roundRect">
+            <a:avLst/>
+          </a:prstGeom>
+          <a:solidFill>
+            <a:srgbClr val="E8801A"/>
+          </a:solidFill>
+          <a:ln>
+            <a:noFill/>
+          </a:ln>
+          <a:effectLst/>
+        </p:spPr>
+        <p:style>
+          <a:lnRef idx="1">
+            <a:schemeClr val="accent1"/>
+          </a:lnRef>
+          <a:fillRef idx="3">
+            <a:schemeClr val="accent1"/>
+          </a:fillRef>
+          <a:effectRef idx="2">
+            <a:schemeClr val="accent1"/>
+          </a:effectRef>
+          <a:fontRef idx="minor">
+            <a:schemeClr val="lt1"/>
+          </a:fontRef>
+        </p:style>
+        <p:txBody>
+          <a:bodyPr rtlCol="0" anchor="ctr"/>
+          <a:lstStyle/>
+          <a:p>
+            <a:pPr algn="ctr"/>
+          </a:p>
+        </p:txBody>
+      </p:sp>
+      <p:sp>
+        <p:nvSpPr>
+          <p:cNvPr id="8" name="TextBox 7"/>
           <p:cNvSpPr txBox="1"/>
           <p:nvPr/>
         </p:nvSpPr>
         <p:spPr>
           <a:xfrm>
-            <a:off x="822960" y="1920240"/>
+            <a:off x="822960" y="1965960"/>
             <a:ext cx="4983480" cy="4206240"/>
           </a:xfrm>
           <a:prstGeom prst="rect">
@@ -5534,17 +5733,17 @@
           <a:p>
             <a:pPr>
               <a:spcAft>
-                <a:spcPts val="1000"/>
+                <a:spcPts val="1100"/>
               </a:spcAft>
             </a:pPr>
             <a:r>
               <a:rPr sz="1600" b="1" i="0">
                 <a:solidFill>
-                  <a:srgbClr val="2E3A80"/>
-                </a:solidFill>
-                <a:latin typeface="Montserrat"/>
-              </a:rPr>
-              <a:t>•  </a:t>
+                  <a:srgbClr val="E8801A"/>
+                </a:solidFill>
+                <a:latin typeface="Montserrat"/>
+              </a:rPr>
+              <a:t>▸  </a:t>
             </a:r>
             <a:r>
               <a:rPr sz="1600" b="0" i="0">
@@ -5553,23 +5752,23 @@
                 </a:solidFill>
                 <a:latin typeface="Montserrat"/>
               </a:rPr>
-              <a:t>Duro: barra rígida, curvadora de máquina</a:t>
+              <a:t>1 mm: visto, empotrado, en vaina, aparatos</a:t>
             </a:r>
           </a:p>
           <a:p>
             <a:pPr>
               <a:spcAft>
-                <a:spcPts val="1000"/>
+                <a:spcPts val="1100"/>
               </a:spcAft>
             </a:pPr>
             <a:r>
               <a:rPr sz="1600" b="1" i="0">
                 <a:solidFill>
-                  <a:srgbClr val="2E3A80"/>
-                </a:solidFill>
-                <a:latin typeface="Montserrat"/>
-              </a:rPr>
-              <a:t>•  </a:t>
+                  <a:srgbClr val="E8801A"/>
+                </a:solidFill>
+                <a:latin typeface="Montserrat"/>
+              </a:rPr>
+              <a:t>▸  </a:t>
             </a:r>
             <a:r>
               <a:rPr sz="1600" b="0" i="0">
@@ -5578,23 +5777,23 @@
                 </a:solidFill>
                 <a:latin typeface="Montserrat"/>
               </a:rPr>
-              <a:t>Recocido: rollo blando, muelle curvatubos</a:t>
+              <a:t>1,5 mm: enterrado</a:t>
             </a:r>
           </a:p>
           <a:p>
             <a:pPr>
               <a:spcAft>
-                <a:spcPts val="1000"/>
+                <a:spcPts val="1100"/>
               </a:spcAft>
             </a:pPr>
             <a:r>
               <a:rPr sz="1600" b="1" i="0">
                 <a:solidFill>
-                  <a:srgbClr val="2E3A80"/>
-                </a:solidFill>
-                <a:latin typeface="Montserrat"/>
-              </a:rPr>
-              <a:t>•  </a:t>
+                  <a:srgbClr val="E8801A"/>
+                </a:solidFill>
+                <a:latin typeface="Montserrat"/>
+              </a:rPr>
+              <a:t>▸  </a:t>
             </a:r>
             <a:r>
               <a:rPr sz="1600" b="0" i="0">
@@ -5603,23 +5802,23 @@
                 </a:solidFill>
                 <a:latin typeface="Montserrat"/>
               </a:rPr>
-              <a:t>Nunca mandril interno</a:t>
+              <a:t>Bajo tierra el tubo sufre más</a:t>
             </a:r>
           </a:p>
           <a:p>
             <a:pPr>
               <a:spcAft>
-                <a:spcPts val="1000"/>
+                <a:spcPts val="1100"/>
               </a:spcAft>
             </a:pPr>
             <a:r>
               <a:rPr sz="1600" b="1" i="0">
                 <a:solidFill>
-                  <a:srgbClr val="2E3A80"/>
-                </a:solidFill>
-                <a:latin typeface="Montserrat"/>
-              </a:rPr>
-              <a:t>•  </a:t>
+                  <a:srgbClr val="E8801A"/>
+                </a:solidFill>
+                <a:latin typeface="Montserrat"/>
+              </a:rPr>
+              <a:t>▸  </a:t>
             </a:r>
             <a:r>
               <a:rPr sz="1600" b="0" i="0">
@@ -5628,14 +5827,14 @@
                 </a:solidFill>
                 <a:latin typeface="Montserrat"/>
               </a:rPr>
-              <a:t>Curva sin arrugas ni defectos</a:t>
-            </a:r>
-          </a:p>
-        </p:txBody>
-      </p:sp>
-      <p:sp>
-        <p:nvSpPr>
-          <p:cNvPr id="8" name="imgph" descr="IMGQ:bending copper pipe with spring tool"/>
+              <a:t>Enterrado = medio milímetro más gordo</a:t>
+            </a:r>
+          </a:p>
+        </p:txBody>
+      </p:sp>
+      <p:sp>
+        <p:nvSpPr>
+          <p:cNvPr id="9" name="imgph" descr="IMGQ:copper pipe wall thickness caliper measure"/>
           <p:cNvSpPr/>
           <p:nvPr/>
         </p:nvSpPr>
@@ -5681,7 +5880,7 @@
       </p:sp>
       <p:sp>
         <p:nvSpPr>
-          <p:cNvPr id="9" name="TextBox 8"/>
+          <p:cNvPr id="10" name="TextBox 9"/>
           <p:cNvSpPr txBox="1"/>
           <p:nvPr/>
         </p:nvSpPr>
@@ -5721,7 +5920,7 @@
                 </a:solidFill>
                 <a:latin typeface="Montserrat"/>
               </a:rPr>
-              <a:t>bending copper pipe with spring tool</a:t>
+              <a:t>copper pipe wall thickness caliper measure</a:t>
             </a:r>
           </a:p>
         </p:txBody>
@@ -5818,7 +6017,7 @@
                 </a:solidFill>
                 <a:latin typeface="Montserrat"/>
               </a:rPr>
-              <a:t>012 / 017</a:t>
+              <a:t>012 / 018</a:t>
             </a:r>
           </a:p>
         </p:txBody>
@@ -5866,7 +6065,7 @@
         <p:spPr>
           <a:xfrm>
             <a:off x="822960" y="457200"/>
-            <a:ext cx="8229600" cy="365760"/>
+            <a:ext cx="10058400" cy="365760"/>
           </a:xfrm>
           <a:prstGeom prst="rect">
             <a:avLst/>
@@ -5880,13 +6079,13 @@
           <a:lstStyle/>
           <a:p>
             <a:r>
-              <a:rPr sz="1200" b="1" i="0">
-                <a:solidFill>
-                  <a:srgbClr val="64748B"/>
-                </a:solidFill>
-                <a:latin typeface="Montserrat"/>
-              </a:rPr>
-              <a:t>MATERIALES · ACERO</a:t>
+              <a:rPr sz="1300" b="1" i="0">
+                <a:solidFill>
+                  <a:srgbClr val="E8801A"/>
+                </a:solidFill>
+                <a:latin typeface="Montserrat"/>
+              </a:rPr>
+              <a:t>MATERIALES · COBRE</a:t>
             </a:r>
           </a:p>
         </p:txBody>
@@ -5914,26 +6113,70 @@
           <a:lstStyle/>
           <a:p>
             <a:r>
-              <a:rPr sz="2700" b="1" i="0">
+              <a:rPr sz="2800" b="1" i="0">
                 <a:solidFill>
                   <a:srgbClr val="1E2761"/>
                 </a:solidFill>
                 <a:latin typeface="Montserrat"/>
               </a:rPr>
-              <a:t>Acero: el clásico del gas visto</a:t>
-            </a:r>
-          </a:p>
-        </p:txBody>
-      </p:sp>
-      <p:sp>
-        <p:nvSpPr>
-          <p:cNvPr id="7" name="TextBox 6"/>
+              <a:t>Duro, recocido y curvado</a:t>
+            </a:r>
+          </a:p>
+        </p:txBody>
+      </p:sp>
+      <p:sp>
+        <p:nvSpPr>
+          <p:cNvPr id="7" name="Rounded Rectangle 6"/>
+          <p:cNvSpPr/>
+          <p:nvPr/>
+        </p:nvSpPr>
+        <p:spPr>
+          <a:xfrm>
+            <a:off x="868680" y="1627632"/>
+            <a:ext cx="2011680" cy="73152"/>
+          </a:xfrm>
+          <a:prstGeom prst="roundRect">
+            <a:avLst/>
+          </a:prstGeom>
+          <a:solidFill>
+            <a:srgbClr val="E8801A"/>
+          </a:solidFill>
+          <a:ln>
+            <a:noFill/>
+          </a:ln>
+          <a:effectLst/>
+        </p:spPr>
+        <p:style>
+          <a:lnRef idx="1">
+            <a:schemeClr val="accent1"/>
+          </a:lnRef>
+          <a:fillRef idx="3">
+            <a:schemeClr val="accent1"/>
+          </a:fillRef>
+          <a:effectRef idx="2">
+            <a:schemeClr val="accent1"/>
+          </a:effectRef>
+          <a:fontRef idx="minor">
+            <a:schemeClr val="lt1"/>
+          </a:fontRef>
+        </p:style>
+        <p:txBody>
+          <a:bodyPr rtlCol="0" anchor="ctr"/>
+          <a:lstStyle/>
+          <a:p>
+            <a:pPr algn="ctr"/>
+          </a:p>
+        </p:txBody>
+      </p:sp>
+      <p:sp>
+        <p:nvSpPr>
+          <p:cNvPr id="8" name="TextBox 7"/>
           <p:cNvSpPr txBox="1"/>
           <p:nvPr/>
         </p:nvSpPr>
         <p:spPr>
           <a:xfrm>
-            <a:off x="822960" y="1920240"/>
+            <a:off x="822960" y="1965960"/>
             <a:ext cx="4983480" cy="4206240"/>
           </a:xfrm>
           <a:prstGeom prst="rect">
@@ -5949,17 +6192,17 @@
           <a:p>
             <a:pPr>
               <a:spcAft>
-                <a:spcPts val="1000"/>
+                <a:spcPts val="1100"/>
               </a:spcAft>
             </a:pPr>
             <a:r>
               <a:rPr sz="1600" b="1" i="0">
                 <a:solidFill>
-                  <a:srgbClr val="2E3A80"/>
-                </a:solidFill>
-                <a:latin typeface="Montserrat"/>
-              </a:rPr>
-              <a:t>•  </a:t>
+                  <a:srgbClr val="E8801A"/>
+                </a:solidFill>
+                <a:latin typeface="Montserrat"/>
+              </a:rPr>
+              <a:t>▸  </a:t>
             </a:r>
             <a:r>
               <a:rPr sz="1600" b="0" i="0">
@@ -5968,23 +6211,23 @@
                 </a:solidFill>
                 <a:latin typeface="Montserrat"/>
               </a:rPr>
-              <a:t>Sin soldadura o con soldadura longitudinal</a:t>
+              <a:t>Duro: barra rígida, curvadora de máquina</a:t>
             </a:r>
           </a:p>
           <a:p>
             <a:pPr>
               <a:spcAft>
-                <a:spcPts val="1000"/>
+                <a:spcPts val="1100"/>
               </a:spcAft>
             </a:pPr>
             <a:r>
               <a:rPr sz="1600" b="1" i="0">
                 <a:solidFill>
-                  <a:srgbClr val="2E3A80"/>
-                </a:solidFill>
-                <a:latin typeface="Montserrat"/>
-              </a:rPr>
-              <a:t>•  </a:t>
+                  <a:srgbClr val="E8801A"/>
+                </a:solidFill>
+                <a:latin typeface="Montserrat"/>
+              </a:rPr>
+              <a:t>▸  </a:t>
             </a:r>
             <a:r>
               <a:rPr sz="1600" b="0" i="0">
@@ -5993,23 +6236,23 @@
                 </a:solidFill>
                 <a:latin typeface="Montserrat"/>
               </a:rPr>
-              <a:t>Dimensiones según UNE-EN 10255</a:t>
+              <a:t>Recocido: rollo blando, muelle curvatubos</a:t>
             </a:r>
           </a:p>
           <a:p>
             <a:pPr>
               <a:spcAft>
-                <a:spcPts val="1000"/>
+                <a:spcPts val="1100"/>
               </a:spcAft>
             </a:pPr>
             <a:r>
               <a:rPr sz="1600" b="1" i="0">
                 <a:solidFill>
-                  <a:srgbClr val="2E3A80"/>
-                </a:solidFill>
-                <a:latin typeface="Montserrat"/>
-              </a:rPr>
-              <a:t>•  </a:t>
+                  <a:srgbClr val="E8801A"/>
+                </a:solidFill>
+                <a:latin typeface="Montserrat"/>
+              </a:rPr>
+              <a:t>▸  </a:t>
             </a:r>
             <a:r>
               <a:rPr sz="1600" b="0" i="0">
@@ -6018,23 +6261,23 @@
                 </a:solidFill>
                 <a:latin typeface="Montserrat"/>
               </a:rPr>
-              <a:t>Curvado en frío preferente hasta 2"</a:t>
+              <a:t>Nunca mandril interno</a:t>
             </a:r>
           </a:p>
           <a:p>
             <a:pPr>
               <a:spcAft>
-                <a:spcPts val="1000"/>
+                <a:spcPts val="1100"/>
               </a:spcAft>
             </a:pPr>
             <a:r>
               <a:rPr sz="1600" b="1" i="0">
                 <a:solidFill>
-                  <a:srgbClr val="2E3A80"/>
-                </a:solidFill>
-                <a:latin typeface="Montserrat"/>
-              </a:rPr>
-              <a:t>•  </a:t>
+                  <a:srgbClr val="E8801A"/>
+                </a:solidFill>
+                <a:latin typeface="Montserrat"/>
+              </a:rPr>
+              <a:t>▸  </a:t>
             </a:r>
             <a:r>
               <a:rPr sz="1600" b="0" i="0">
@@ -6043,14 +6286,14 @@
                 </a:solidFill>
                 <a:latin typeface="Montserrat"/>
               </a:rPr>
-              <a:t>Enterrado, siempre protegido</a:t>
-            </a:r>
-          </a:p>
-        </p:txBody>
-      </p:sp>
-      <p:sp>
-        <p:nvSpPr>
-          <p:cNvPr id="8" name="imgph" descr="IMGQ:black steel gas pipe threaded fitting"/>
+              <a:t>Curva sin arrugas ni defectos</a:t>
+            </a:r>
+          </a:p>
+        </p:txBody>
+      </p:sp>
+      <p:sp>
+        <p:nvSpPr>
+          <p:cNvPr id="9" name="imgph" descr="IMGQ:bending copper pipe with spring tool"/>
           <p:cNvSpPr/>
           <p:nvPr/>
         </p:nvSpPr>
@@ -6096,7 +6339,7 @@
       </p:sp>
       <p:sp>
         <p:nvSpPr>
-          <p:cNvPr id="9" name="TextBox 8"/>
+          <p:cNvPr id="10" name="TextBox 9"/>
           <p:cNvSpPr txBox="1"/>
           <p:nvPr/>
         </p:nvSpPr>
@@ -6136,7 +6379,7 @@
                 </a:solidFill>
                 <a:latin typeface="Montserrat"/>
               </a:rPr>
-              <a:t>black steel gas pipe threaded fitting</a:t>
+              <a:t>bending copper pipe with spring tool</a:t>
             </a:r>
           </a:p>
         </p:txBody>
@@ -6233,7 +6476,7 @@
                 </a:solidFill>
                 <a:latin typeface="Montserrat"/>
               </a:rPr>
-              <a:t>013 / 017</a:t>
+              <a:t>013 / 018</a:t>
             </a:r>
           </a:p>
         </p:txBody>
@@ -6281,7 +6524,7 @@
         <p:spPr>
           <a:xfrm>
             <a:off x="822960" y="457200"/>
-            <a:ext cx="8229600" cy="365760"/>
+            <a:ext cx="10058400" cy="365760"/>
           </a:xfrm>
           <a:prstGeom prst="rect">
             <a:avLst/>
@@ -6295,13 +6538,13 @@
           <a:lstStyle/>
           <a:p>
             <a:r>
-              <a:rPr sz="1200" b="1" i="0">
-                <a:solidFill>
-                  <a:srgbClr val="64748B"/>
-                </a:solidFill>
-                <a:latin typeface="Montserrat"/>
-              </a:rPr>
-              <a:t>MATERIALES · ACERO INOXIDABLE</a:t>
+              <a:rPr sz="1300" b="1" i="0">
+                <a:solidFill>
+                  <a:srgbClr val="E8801A"/>
+                </a:solidFill>
+                <a:latin typeface="Montserrat"/>
+              </a:rPr>
+              <a:t>MATERIALES · ACERO</a:t>
             </a:r>
           </a:p>
         </p:txBody>
@@ -6329,26 +6572,70 @@
           <a:lstStyle/>
           <a:p>
             <a:r>
-              <a:rPr sz="2700" b="1" i="0">
+              <a:rPr sz="2800" b="1" i="0">
                 <a:solidFill>
                   <a:srgbClr val="1E2761"/>
                 </a:solidFill>
                 <a:latin typeface="Montserrat"/>
               </a:rPr>
-              <a:t>Inoxidable: para ambientes duros</a:t>
-            </a:r>
-          </a:p>
-        </p:txBody>
-      </p:sp>
-      <p:sp>
-        <p:nvSpPr>
-          <p:cNvPr id="7" name="TextBox 6"/>
+              <a:t>Acero: el clásico del gas visto</a:t>
+            </a:r>
+          </a:p>
+        </p:txBody>
+      </p:sp>
+      <p:sp>
+        <p:nvSpPr>
+          <p:cNvPr id="7" name="Rounded Rectangle 6"/>
+          <p:cNvSpPr/>
+          <p:nvPr/>
+        </p:nvSpPr>
+        <p:spPr>
+          <a:xfrm>
+            <a:off x="868680" y="1627632"/>
+            <a:ext cx="2011680" cy="73152"/>
+          </a:xfrm>
+          <a:prstGeom prst="roundRect">
+            <a:avLst/>
+          </a:prstGeom>
+          <a:solidFill>
+            <a:srgbClr val="E8801A"/>
+          </a:solidFill>
+          <a:ln>
+            <a:noFill/>
+          </a:ln>
+          <a:effectLst/>
+        </p:spPr>
+        <p:style>
+          <a:lnRef idx="1">
+            <a:schemeClr val="accent1"/>
+          </a:lnRef>
+          <a:fillRef idx="3">
+            <a:schemeClr val="accent1"/>
+          </a:fillRef>
+          <a:effectRef idx="2">
+            <a:schemeClr val="accent1"/>
+          </a:effectRef>
+          <a:fontRef idx="minor">
+            <a:schemeClr val="lt1"/>
+          </a:fontRef>
+        </p:style>
+        <p:txBody>
+          <a:bodyPr rtlCol="0" anchor="ctr"/>
+          <a:lstStyle/>
+          <a:p>
+            <a:pPr algn="ctr"/>
+          </a:p>
+        </p:txBody>
+      </p:sp>
+      <p:sp>
+        <p:nvSpPr>
+          <p:cNvPr id="8" name="TextBox 7"/>
           <p:cNvSpPr txBox="1"/>
           <p:nvPr/>
         </p:nvSpPr>
         <p:spPr>
           <a:xfrm>
-            <a:off x="822960" y="1920240"/>
+            <a:off x="822960" y="1965960"/>
             <a:ext cx="4983480" cy="4206240"/>
           </a:xfrm>
           <a:prstGeom prst="rect">
@@ -6364,17 +6651,17 @@
           <a:p>
             <a:pPr>
               <a:spcAft>
-                <a:spcPts val="1000"/>
+                <a:spcPts val="1100"/>
               </a:spcAft>
             </a:pPr>
             <a:r>
               <a:rPr sz="1600" b="1" i="0">
                 <a:solidFill>
-                  <a:srgbClr val="2E3A80"/>
-                </a:solidFill>
-                <a:latin typeface="Montserrat"/>
-              </a:rPr>
-              <a:t>•  </a:t>
+                  <a:srgbClr val="E8801A"/>
+                </a:solidFill>
+                <a:latin typeface="Montserrat"/>
+              </a:rPr>
+              <a:t>▸  </a:t>
             </a:r>
             <a:r>
               <a:rPr sz="1600" b="0" i="0">
@@ -6383,23 +6670,23 @@
                 </a:solidFill>
                 <a:latin typeface="Montserrat"/>
               </a:rPr>
-              <a:t>Banda soldada longitudinalmente</a:t>
+              <a:t>Sin soldadura o con soldadura longitudinal</a:t>
             </a:r>
           </a:p>
           <a:p>
             <a:pPr>
               <a:spcAft>
-                <a:spcPts val="1000"/>
+                <a:spcPts val="1100"/>
               </a:spcAft>
             </a:pPr>
             <a:r>
               <a:rPr sz="1600" b="1" i="0">
                 <a:solidFill>
-                  <a:srgbClr val="2E3A80"/>
-                </a:solidFill>
-                <a:latin typeface="Montserrat"/>
-              </a:rPr>
-              <a:t>•  </a:t>
+                  <a:srgbClr val="E8801A"/>
+                </a:solidFill>
+                <a:latin typeface="Montserrat"/>
+              </a:rPr>
+              <a:t>▸  </a:t>
             </a:r>
             <a:r>
               <a:rPr sz="1600" b="0" i="0">
@@ -6408,23 +6695,23 @@
                 </a:solidFill>
                 <a:latin typeface="Montserrat"/>
               </a:rPr>
-              <a:t>Serie 2 (UNE-EN 10312)</a:t>
+              <a:t>Dimensiones según UNE-EN 10255</a:t>
             </a:r>
           </a:p>
           <a:p>
             <a:pPr>
               <a:spcAft>
-                <a:spcPts val="1000"/>
+                <a:spcPts val="1100"/>
               </a:spcAft>
             </a:pPr>
             <a:r>
               <a:rPr sz="1600" b="1" i="0">
                 <a:solidFill>
-                  <a:srgbClr val="2E3A80"/>
-                </a:solidFill>
-                <a:latin typeface="Montserrat"/>
-              </a:rPr>
-              <a:t>•  </a:t>
+                  <a:srgbClr val="E8801A"/>
+                </a:solidFill>
+                <a:latin typeface="Montserrat"/>
+              </a:rPr>
+              <a:t>▸  </a:t>
             </a:r>
             <a:r>
               <a:rPr sz="1600" b="0" i="0">
@@ -6433,23 +6720,23 @@
                 </a:solidFill>
                 <a:latin typeface="Montserrat"/>
               </a:rPr>
-              <a:t>El tipo se elige según el ambiente</a:t>
+              <a:t>Curvado en frío preferente hasta 2"</a:t>
             </a:r>
           </a:p>
           <a:p>
             <a:pPr>
               <a:spcAft>
-                <a:spcPts val="1000"/>
+                <a:spcPts val="1100"/>
               </a:spcAft>
             </a:pPr>
             <a:r>
               <a:rPr sz="1600" b="1" i="0">
                 <a:solidFill>
-                  <a:srgbClr val="2E3A80"/>
-                </a:solidFill>
-                <a:latin typeface="Montserrat"/>
-              </a:rPr>
-              <a:t>•  </a:t>
+                  <a:srgbClr val="E8801A"/>
+                </a:solidFill>
+                <a:latin typeface="Montserrat"/>
+              </a:rPr>
+              <a:t>▸  </a:t>
             </a:r>
             <a:r>
               <a:rPr sz="1600" b="0" i="0">
@@ -6458,14 +6745,14 @@
                 </a:solidFill>
                 <a:latin typeface="Montserrat"/>
               </a:rPr>
-              <a:t>Accesorios de presión, también Serie 2</a:t>
-            </a:r>
-          </a:p>
-        </p:txBody>
-      </p:sp>
-      <p:sp>
-        <p:nvSpPr>
-          <p:cNvPr id="8" name="imgph" descr="IMGQ:stainless steel pipe coastal installation"/>
+              <a:t>Enterrado, siempre protegido</a:t>
+            </a:r>
+          </a:p>
+        </p:txBody>
+      </p:sp>
+      <p:sp>
+        <p:nvSpPr>
+          <p:cNvPr id="9" name="imgph" descr="IMGQ:black steel gas pipe threaded fitting"/>
           <p:cNvSpPr/>
           <p:nvPr/>
         </p:nvSpPr>
@@ -6511,7 +6798,7 @@
       </p:sp>
       <p:sp>
         <p:nvSpPr>
-          <p:cNvPr id="9" name="TextBox 8"/>
+          <p:cNvPr id="10" name="TextBox 9"/>
           <p:cNvSpPr txBox="1"/>
           <p:nvPr/>
         </p:nvSpPr>
@@ -6551,7 +6838,7 @@
                 </a:solidFill>
                 <a:latin typeface="Montserrat"/>
               </a:rPr>
-              <a:t>stainless steel pipe coastal installation</a:t>
+              <a:t>black steel gas pipe threaded fitting</a:t>
             </a:r>
           </a:p>
         </p:txBody>
@@ -6648,7 +6935,7 @@
                 </a:solidFill>
                 <a:latin typeface="Montserrat"/>
               </a:rPr>
-              <a:t>014 / 017</a:t>
+              <a:t>014 / 018</a:t>
             </a:r>
           </a:p>
         </p:txBody>
@@ -6696,7 +6983,7 @@
         <p:spPr>
           <a:xfrm>
             <a:off x="822960" y="457200"/>
-            <a:ext cx="8229600" cy="365760"/>
+            <a:ext cx="10058400" cy="365760"/>
           </a:xfrm>
           <a:prstGeom prst="rect">
             <a:avLst/>
@@ -6710,13 +6997,13 @@
           <a:lstStyle/>
           <a:p>
             <a:r>
-              <a:rPr sz="1200" b="1" i="0">
-                <a:solidFill>
-                  <a:srgbClr val="64748B"/>
-                </a:solidFill>
-                <a:latin typeface="Montserrat"/>
-              </a:rPr>
-              <a:t>MATERIALES · MULTICAPA</a:t>
+              <a:rPr sz="1300" b="1" i="0">
+                <a:solidFill>
+                  <a:srgbClr val="E8801A"/>
+                </a:solidFill>
+                <a:latin typeface="Montserrat"/>
+              </a:rPr>
+              <a:t>MATERIALES · ACERO INOXIDABLE</a:t>
             </a:r>
           </a:p>
         </p:txBody>
@@ -6744,26 +7031,70 @@
           <a:lstStyle/>
           <a:p>
             <a:r>
-              <a:rPr sz="2700" b="1" i="0">
+              <a:rPr sz="2800" b="1" i="0">
                 <a:solidFill>
                   <a:srgbClr val="1E2761"/>
                 </a:solidFill>
                 <a:latin typeface="Montserrat"/>
               </a:rPr>
-              <a:t>Multicapa: el sándwich</a:t>
-            </a:r>
-          </a:p>
-        </p:txBody>
-      </p:sp>
-      <p:sp>
-        <p:nvSpPr>
-          <p:cNvPr id="7" name="TextBox 6"/>
+              <a:t>Inoxidable: para ambientes duros</a:t>
+            </a:r>
+          </a:p>
+        </p:txBody>
+      </p:sp>
+      <p:sp>
+        <p:nvSpPr>
+          <p:cNvPr id="7" name="Rounded Rectangle 6"/>
+          <p:cNvSpPr/>
+          <p:nvPr/>
+        </p:nvSpPr>
+        <p:spPr>
+          <a:xfrm>
+            <a:off x="868680" y="1627632"/>
+            <a:ext cx="2011680" cy="73152"/>
+          </a:xfrm>
+          <a:prstGeom prst="roundRect">
+            <a:avLst/>
+          </a:prstGeom>
+          <a:solidFill>
+            <a:srgbClr val="E8801A"/>
+          </a:solidFill>
+          <a:ln>
+            <a:noFill/>
+          </a:ln>
+          <a:effectLst/>
+        </p:spPr>
+        <p:style>
+          <a:lnRef idx="1">
+            <a:schemeClr val="accent1"/>
+          </a:lnRef>
+          <a:fillRef idx="3">
+            <a:schemeClr val="accent1"/>
+          </a:fillRef>
+          <a:effectRef idx="2">
+            <a:schemeClr val="accent1"/>
+          </a:effectRef>
+          <a:fontRef idx="minor">
+            <a:schemeClr val="lt1"/>
+          </a:fontRef>
+        </p:style>
+        <p:txBody>
+          <a:bodyPr rtlCol="0" anchor="ctr"/>
+          <a:lstStyle/>
+          <a:p>
+            <a:pPr algn="ctr"/>
+          </a:p>
+        </p:txBody>
+      </p:sp>
+      <p:sp>
+        <p:nvSpPr>
+          <p:cNvPr id="8" name="TextBox 7"/>
           <p:cNvSpPr txBox="1"/>
           <p:nvPr/>
         </p:nvSpPr>
         <p:spPr>
           <a:xfrm>
-            <a:off x="822960" y="1920240"/>
+            <a:off x="822960" y="1965960"/>
             <a:ext cx="4983480" cy="4206240"/>
           </a:xfrm>
           <a:prstGeom prst="rect">
@@ -6779,17 +7110,17 @@
           <a:p>
             <a:pPr>
               <a:spcAft>
-                <a:spcPts val="1000"/>
+                <a:spcPts val="1100"/>
               </a:spcAft>
             </a:pPr>
             <a:r>
               <a:rPr sz="1600" b="1" i="0">
                 <a:solidFill>
-                  <a:srgbClr val="2E3A80"/>
-                </a:solidFill>
-                <a:latin typeface="Montserrat"/>
-              </a:rPr>
-              <a:t>•  </a:t>
+                  <a:srgbClr val="E8801A"/>
+                </a:solidFill>
+                <a:latin typeface="Montserrat"/>
+              </a:rPr>
+              <a:t>▸  </a:t>
             </a:r>
             <a:r>
               <a:rPr sz="1600" b="0" i="0">
@@ -6798,23 +7129,23 @@
                 </a:solidFill>
                 <a:latin typeface="Montserrat"/>
               </a:rPr>
-              <a:t>Polímero – aluminio – polímero</a:t>
+              <a:t>Banda soldada longitudinalmente</a:t>
             </a:r>
           </a:p>
           <a:p>
             <a:pPr>
               <a:spcAft>
-                <a:spcPts val="1000"/>
+                <a:spcPts val="1100"/>
               </a:spcAft>
             </a:pPr>
             <a:r>
               <a:rPr sz="1600" b="1" i="0">
                 <a:solidFill>
-                  <a:srgbClr val="2E3A80"/>
-                </a:solidFill>
-                <a:latin typeface="Montserrat"/>
-              </a:rPr>
-              <a:t>•  </a:t>
+                  <a:srgbClr val="E8801A"/>
+                </a:solidFill>
+                <a:latin typeface="Montserrat"/>
+              </a:rPr>
+              <a:t>▸  </a:t>
             </a:r>
             <a:r>
               <a:rPr sz="1600" b="0" i="0">
@@ -6823,23 +7154,23 @@
                 </a:solidFill>
                 <a:latin typeface="Montserrat"/>
               </a:rPr>
-              <a:t>Normas UNE 53008-1 y -2</a:t>
+              <a:t>Serie 2 (UNE-EN 10312)</a:t>
             </a:r>
           </a:p>
           <a:p>
             <a:pPr>
               <a:spcAft>
-                <a:spcPts val="1000"/>
+                <a:spcPts val="1100"/>
               </a:spcAft>
             </a:pPr>
             <a:r>
               <a:rPr sz="1600" b="1" i="0">
                 <a:solidFill>
-                  <a:srgbClr val="2E3A80"/>
-                </a:solidFill>
-                <a:latin typeface="Montserrat"/>
-              </a:rPr>
-              <a:t>•  </a:t>
+                  <a:srgbClr val="E8801A"/>
+                </a:solidFill>
+                <a:latin typeface="Montserrat"/>
+              </a:rPr>
+              <a:t>▸  </a:t>
             </a:r>
             <a:r>
               <a:rPr sz="1600" b="0" i="0">
@@ -6848,23 +7179,23 @@
                 </a:solidFill>
                 <a:latin typeface="Montserrat"/>
               </a:rPr>
-              <a:t>Siempre limitador de caudal y de temperatura</a:t>
+              <a:t>El tipo se elige según el ambiente</a:t>
             </a:r>
           </a:p>
           <a:p>
             <a:pPr>
               <a:spcAft>
-                <a:spcPts val="1000"/>
+                <a:spcPts val="1100"/>
               </a:spcAft>
             </a:pPr>
             <a:r>
               <a:rPr sz="1600" b="1" i="0">
                 <a:solidFill>
-                  <a:srgbClr val="2E3A80"/>
-                </a:solidFill>
-                <a:latin typeface="Montserrat"/>
-              </a:rPr>
-              <a:t>•  </a:t>
+                  <a:srgbClr val="E8801A"/>
+                </a:solidFill>
+                <a:latin typeface="Montserrat"/>
+              </a:rPr>
+              <a:t>▸  </a:t>
             </a:r>
             <a:r>
               <a:rPr sz="1600" b="0" i="0">
@@ -6873,14 +7204,14 @@
                 </a:solidFill>
                 <a:latin typeface="Montserrat"/>
               </a:rPr>
-              <a:t>Sea cual sea la longitud del tramo</a:t>
-            </a:r>
-          </a:p>
-        </p:txBody>
-      </p:sp>
-      <p:sp>
-        <p:nvSpPr>
-          <p:cNvPr id="8" name="imgph" descr="IMGQ:multilayer pipe cross section aluminium layers"/>
+              <a:t>Accesorios de presión, también Serie 2</a:t>
+            </a:r>
+          </a:p>
+        </p:txBody>
+      </p:sp>
+      <p:sp>
+        <p:nvSpPr>
+          <p:cNvPr id="9" name="imgph" descr="IMGQ:stainless steel pipe coastal installation"/>
           <p:cNvSpPr/>
           <p:nvPr/>
         </p:nvSpPr>
@@ -6926,7 +7257,7 @@
       </p:sp>
       <p:sp>
         <p:nvSpPr>
-          <p:cNvPr id="9" name="TextBox 8"/>
+          <p:cNvPr id="10" name="TextBox 9"/>
           <p:cNvSpPr txBox="1"/>
           <p:nvPr/>
         </p:nvSpPr>
@@ -6966,7 +7297,7 @@
                 </a:solidFill>
                 <a:latin typeface="Montserrat"/>
               </a:rPr>
-              <a:t>multilayer pipe cross section aluminium layers</a:t>
+              <a:t>stainless steel pipe coastal installation</a:t>
             </a:r>
           </a:p>
         </p:txBody>
@@ -7063,7 +7394,7 @@
                 </a:solidFill>
                 <a:latin typeface="Montserrat"/>
               </a:rPr>
-              <a:t>015 / 017</a:t>
+              <a:t>015 / 018</a:t>
             </a:r>
           </a:p>
         </p:txBody>
@@ -7111,7 +7442,7 @@
         <p:spPr>
           <a:xfrm>
             <a:off x="822960" y="457200"/>
-            <a:ext cx="8229600" cy="365760"/>
+            <a:ext cx="10058400" cy="365760"/>
           </a:xfrm>
           <a:prstGeom prst="rect">
             <a:avLst/>
@@ -7125,13 +7456,13 @@
           <a:lstStyle/>
           <a:p>
             <a:r>
-              <a:rPr sz="1200" b="1" i="0">
-                <a:solidFill>
-                  <a:srgbClr val="64748B"/>
-                </a:solidFill>
-                <a:latin typeface="Montserrat"/>
-              </a:rPr>
-              <a:t>MATERIALES · INOX CORRUGADO</a:t>
+              <a:rPr sz="1300" b="1" i="0">
+                <a:solidFill>
+                  <a:srgbClr val="E8801A"/>
+                </a:solidFill>
+                <a:latin typeface="Montserrat"/>
+              </a:rPr>
+              <a:t>MATERIALES · MULTICAPA</a:t>
             </a:r>
           </a:p>
         </p:txBody>
@@ -7159,26 +7490,70 @@
           <a:lstStyle/>
           <a:p>
             <a:r>
-              <a:rPr sz="2700" b="1" i="0">
+              <a:rPr sz="2800" b="1" i="0">
                 <a:solidFill>
                   <a:srgbClr val="1E2761"/>
                 </a:solidFill>
                 <a:latin typeface="Montserrat"/>
               </a:rPr>
-              <a:t>Corrugado: el flexible acordeón</a:t>
-            </a:r>
-          </a:p>
-        </p:txBody>
-      </p:sp>
-      <p:sp>
-        <p:nvSpPr>
-          <p:cNvPr id="7" name="TextBox 6"/>
+              <a:t>Multicapa: el sándwich</a:t>
+            </a:r>
+          </a:p>
+        </p:txBody>
+      </p:sp>
+      <p:sp>
+        <p:nvSpPr>
+          <p:cNvPr id="7" name="Rounded Rectangle 6"/>
+          <p:cNvSpPr/>
+          <p:nvPr/>
+        </p:nvSpPr>
+        <p:spPr>
+          <a:xfrm>
+            <a:off x="868680" y="1627632"/>
+            <a:ext cx="2011680" cy="73152"/>
+          </a:xfrm>
+          <a:prstGeom prst="roundRect">
+            <a:avLst/>
+          </a:prstGeom>
+          <a:solidFill>
+            <a:srgbClr val="E8801A"/>
+          </a:solidFill>
+          <a:ln>
+            <a:noFill/>
+          </a:ln>
+          <a:effectLst/>
+        </p:spPr>
+        <p:style>
+          <a:lnRef idx="1">
+            <a:schemeClr val="accent1"/>
+          </a:lnRef>
+          <a:fillRef idx="3">
+            <a:schemeClr val="accent1"/>
+          </a:fillRef>
+          <a:effectRef idx="2">
+            <a:schemeClr val="accent1"/>
+          </a:effectRef>
+          <a:fontRef idx="minor">
+            <a:schemeClr val="lt1"/>
+          </a:fontRef>
+        </p:style>
+        <p:txBody>
+          <a:bodyPr rtlCol="0" anchor="ctr"/>
+          <a:lstStyle/>
+          <a:p>
+            <a:pPr algn="ctr"/>
+          </a:p>
+        </p:txBody>
+      </p:sp>
+      <p:sp>
+        <p:nvSpPr>
+          <p:cNvPr id="8" name="TextBox 7"/>
           <p:cNvSpPr txBox="1"/>
           <p:nvPr/>
         </p:nvSpPr>
         <p:spPr>
           <a:xfrm>
-            <a:off x="822960" y="1920240"/>
+            <a:off x="822960" y="1965960"/>
             <a:ext cx="4983480" cy="4206240"/>
           </a:xfrm>
           <a:prstGeom prst="rect">
@@ -7194,17 +7569,17 @@
           <a:p>
             <a:pPr>
               <a:spcAft>
-                <a:spcPts val="1000"/>
+                <a:spcPts val="1100"/>
               </a:spcAft>
             </a:pPr>
             <a:r>
               <a:rPr sz="1600" b="1" i="0">
                 <a:solidFill>
-                  <a:srgbClr val="2E3A80"/>
-                </a:solidFill>
-                <a:latin typeface="Montserrat"/>
-              </a:rPr>
-              <a:t>•  </a:t>
+                  <a:srgbClr val="E8801A"/>
+                </a:solidFill>
+                <a:latin typeface="Montserrat"/>
+              </a:rPr>
+              <a:t>▸  </a:t>
             </a:r>
             <a:r>
               <a:rPr sz="1600" b="0" i="0">
@@ -7213,23 +7588,23 @@
                 </a:solidFill>
                 <a:latin typeface="Montserrat"/>
               </a:rPr>
-              <a:t>Dos capas: inox corrugado + protección</a:t>
+              <a:t>Polímero – aluminio – polímero</a:t>
             </a:r>
           </a:p>
           <a:p>
             <a:pPr>
               <a:spcAft>
-                <a:spcPts val="1000"/>
+                <a:spcPts val="1100"/>
               </a:spcAft>
             </a:pPr>
             <a:r>
               <a:rPr sz="1600" b="1" i="0">
                 <a:solidFill>
-                  <a:srgbClr val="2E3A80"/>
-                </a:solidFill>
-                <a:latin typeface="Montserrat"/>
-              </a:rPr>
-              <a:t>•  </a:t>
+                  <a:srgbClr val="E8801A"/>
+                </a:solidFill>
+                <a:latin typeface="Montserrat"/>
+              </a:rPr>
+              <a:t>▸  </a:t>
             </a:r>
             <a:r>
               <a:rPr sz="1600" b="0" i="0">
@@ -7238,23 +7613,23 @@
                 </a:solidFill>
                 <a:latin typeface="Montserrat"/>
               </a:rPr>
-              <a:t>La corrugada aguanta (estructura)</a:t>
+              <a:t>Normas UNE 53008-1 y -2</a:t>
             </a:r>
           </a:p>
           <a:p>
             <a:pPr>
               <a:spcAft>
-                <a:spcPts val="1000"/>
+                <a:spcPts val="1100"/>
               </a:spcAft>
             </a:pPr>
             <a:r>
               <a:rPr sz="1600" b="1" i="0">
                 <a:solidFill>
-                  <a:srgbClr val="2E3A80"/>
-                </a:solidFill>
-                <a:latin typeface="Montserrat"/>
-              </a:rPr>
-              <a:t>•  </a:t>
+                  <a:srgbClr val="E8801A"/>
+                </a:solidFill>
+                <a:latin typeface="Montserrat"/>
+              </a:rPr>
+              <a:t>▸  </a:t>
             </a:r>
             <a:r>
               <a:rPr sz="1600" b="0" i="0">
@@ -7263,23 +7638,23 @@
                 </a:solidFill>
                 <a:latin typeface="Montserrat"/>
               </a:rPr>
-              <a:t>La externa protege</a:t>
+              <a:t>Siempre limitador de caudal y de temperatura</a:t>
             </a:r>
           </a:p>
           <a:p>
             <a:pPr>
               <a:spcAft>
-                <a:spcPts val="1000"/>
+                <a:spcPts val="1100"/>
               </a:spcAft>
             </a:pPr>
             <a:r>
               <a:rPr sz="1600" b="1" i="0">
                 <a:solidFill>
-                  <a:srgbClr val="2E3A80"/>
-                </a:solidFill>
-                <a:latin typeface="Montserrat"/>
-              </a:rPr>
-              <a:t>•  </a:t>
+                  <a:srgbClr val="E8801A"/>
+                </a:solidFill>
+                <a:latin typeface="Montserrat"/>
+              </a:rPr>
+              <a:t>▸  </a:t>
             </a:r>
             <a:r>
               <a:rPr sz="1600" b="0" i="0">
@@ -7288,14 +7663,14 @@
                 </a:solidFill>
                 <a:latin typeface="Montserrat"/>
               </a:rPr>
-              <a:t>Norma UNE-EN 15266</a:t>
-            </a:r>
-          </a:p>
-        </p:txBody>
-      </p:sp>
-      <p:sp>
-        <p:nvSpPr>
-          <p:cNvPr id="8" name="imgph" descr="IMGQ:corrugated stainless steel gas hose yellow"/>
+              <a:t>Sea cual sea la longitud del tramo</a:t>
+            </a:r>
+          </a:p>
+        </p:txBody>
+      </p:sp>
+      <p:sp>
+        <p:nvSpPr>
+          <p:cNvPr id="9" name="imgph" descr="IMGQ:multilayer pipe cross section aluminium layers"/>
           <p:cNvSpPr/>
           <p:nvPr/>
         </p:nvSpPr>
@@ -7341,7 +7716,7 @@
       </p:sp>
       <p:sp>
         <p:nvSpPr>
-          <p:cNvPr id="9" name="TextBox 8"/>
+          <p:cNvPr id="10" name="TextBox 9"/>
           <p:cNvSpPr txBox="1"/>
           <p:nvPr/>
         </p:nvSpPr>
@@ -7381,7 +7756,7 @@
                 </a:solidFill>
                 <a:latin typeface="Montserrat"/>
               </a:rPr>
-              <a:t>corrugated stainless steel gas hose yellow</a:t>
+              <a:t>multilayer pipe cross section aluminium layers</a:t>
             </a:r>
           </a:p>
         </p:txBody>
@@ -7478,7 +7853,7 @@
                 </a:solidFill>
                 <a:latin typeface="Montserrat"/>
               </a:rPr>
-              <a:t>016 / 017</a:t>
+              <a:t>016 / 018</a:t>
             </a:r>
           </a:p>
         </p:txBody>
@@ -7526,7 +7901,7 @@
         <p:spPr>
           <a:xfrm>
             <a:off x="822960" y="457200"/>
-            <a:ext cx="8229600" cy="365760"/>
+            <a:ext cx="10058400" cy="365760"/>
           </a:xfrm>
           <a:prstGeom prst="rect">
             <a:avLst/>
@@ -7540,13 +7915,13 @@
           <a:lstStyle/>
           <a:p>
             <a:r>
-              <a:rPr sz="1200" b="1" i="0">
-                <a:solidFill>
-                  <a:srgbClr val="64748B"/>
-                </a:solidFill>
-                <a:latin typeface="Montserrat"/>
-              </a:rPr>
-              <a:t>VAINAS · OTROS MATERIALES</a:t>
+              <a:rPr sz="1300" b="1" i="0">
+                <a:solidFill>
+                  <a:srgbClr val="E8801A"/>
+                </a:solidFill>
+                <a:latin typeface="Montserrat"/>
+              </a:rPr>
+              <a:t>MATERIALES · INOX CORRUGADO</a:t>
             </a:r>
           </a:p>
         </p:txBody>
@@ -7574,26 +7949,70 @@
           <a:lstStyle/>
           <a:p>
             <a:r>
-              <a:rPr sz="2700" b="1" i="0">
+              <a:rPr sz="2800" b="1" i="0">
                 <a:solidFill>
                   <a:srgbClr val="1E2761"/>
                 </a:solidFill>
                 <a:latin typeface="Montserrat"/>
               </a:rPr>
-              <a:t>Vainas, conductos y pasamuros</a:t>
-            </a:r>
-          </a:p>
-        </p:txBody>
-      </p:sp>
-      <p:sp>
-        <p:nvSpPr>
-          <p:cNvPr id="7" name="TextBox 6"/>
+              <a:t>Corrugado: el flexible acordeón</a:t>
+            </a:r>
+          </a:p>
+        </p:txBody>
+      </p:sp>
+      <p:sp>
+        <p:nvSpPr>
+          <p:cNvPr id="7" name="Rounded Rectangle 6"/>
+          <p:cNvSpPr/>
+          <p:nvPr/>
+        </p:nvSpPr>
+        <p:spPr>
+          <a:xfrm>
+            <a:off x="868680" y="1627632"/>
+            <a:ext cx="2011680" cy="73152"/>
+          </a:xfrm>
+          <a:prstGeom prst="roundRect">
+            <a:avLst/>
+          </a:prstGeom>
+          <a:solidFill>
+            <a:srgbClr val="E8801A"/>
+          </a:solidFill>
+          <a:ln>
+            <a:noFill/>
+          </a:ln>
+          <a:effectLst/>
+        </p:spPr>
+        <p:style>
+          <a:lnRef idx="1">
+            <a:schemeClr val="accent1"/>
+          </a:lnRef>
+          <a:fillRef idx="3">
+            <a:schemeClr val="accent1"/>
+          </a:fillRef>
+          <a:effectRef idx="2">
+            <a:schemeClr val="accent1"/>
+          </a:effectRef>
+          <a:fontRef idx="minor">
+            <a:schemeClr val="lt1"/>
+          </a:fontRef>
+        </p:style>
+        <p:txBody>
+          <a:bodyPr rtlCol="0" anchor="ctr"/>
+          <a:lstStyle/>
+          <a:p>
+            <a:pPr algn="ctr"/>
+          </a:p>
+        </p:txBody>
+      </p:sp>
+      <p:sp>
+        <p:nvSpPr>
+          <p:cNvPr id="8" name="TextBox 7"/>
           <p:cNvSpPr txBox="1"/>
           <p:nvPr/>
         </p:nvSpPr>
         <p:spPr>
           <a:xfrm>
-            <a:off x="822960" y="1920240"/>
+            <a:off x="822960" y="1965960"/>
             <a:ext cx="4983480" cy="4206240"/>
           </a:xfrm>
           <a:prstGeom prst="rect">
@@ -7609,17 +8028,17 @@
           <a:p>
             <a:pPr>
               <a:spcAft>
-                <a:spcPts val="1000"/>
+                <a:spcPts val="1100"/>
               </a:spcAft>
             </a:pPr>
             <a:r>
               <a:rPr sz="1600" b="1" i="0">
                 <a:solidFill>
-                  <a:srgbClr val="2E3A80"/>
-                </a:solidFill>
-                <a:latin typeface="Montserrat"/>
-              </a:rPr>
-              <a:t>•  </a:t>
+                  <a:srgbClr val="E8801A"/>
+                </a:solidFill>
+                <a:latin typeface="Montserrat"/>
+              </a:rPr>
+              <a:t>▸  </a:t>
             </a:r>
             <a:r>
               <a:rPr sz="1600" b="0" i="0">
@@ -7628,23 +8047,23 @@
                 </a:solidFill>
                 <a:latin typeface="Montserrat"/>
               </a:rPr>
-              <a:t>La 'funda' del tubo de gas</a:t>
+              <a:t>Dos capas: inox corrugado + protección</a:t>
             </a:r>
           </a:p>
           <a:p>
             <a:pPr>
               <a:spcAft>
-                <a:spcPts val="1000"/>
+                <a:spcPts val="1100"/>
               </a:spcAft>
             </a:pPr>
             <a:r>
               <a:rPr sz="1600" b="1" i="0">
                 <a:solidFill>
-                  <a:srgbClr val="2E3A80"/>
-                </a:solidFill>
-                <a:latin typeface="Montserrat"/>
-              </a:rPr>
-              <a:t>•  </a:t>
+                  <a:srgbClr val="E8801A"/>
+                </a:solidFill>
+                <a:latin typeface="Montserrat"/>
+              </a:rPr>
+              <a:t>▸  </a:t>
             </a:r>
             <a:r>
               <a:rPr sz="1600" b="0" i="0">
@@ -7653,23 +8072,23 @@
                 </a:solidFill>
                 <a:latin typeface="Montserrat"/>
               </a:rPr>
-              <a:t>Material adecuado a su función</a:t>
+              <a:t>La corrugada aguanta (estructura)</a:t>
             </a:r>
           </a:p>
           <a:p>
             <a:pPr>
               <a:spcAft>
-                <a:spcPts val="1000"/>
+                <a:spcPts val="1100"/>
               </a:spcAft>
             </a:pPr>
             <a:r>
               <a:rPr sz="1600" b="1" i="0">
                 <a:solidFill>
-                  <a:srgbClr val="2E3A80"/>
-                </a:solidFill>
-                <a:latin typeface="Montserrat"/>
-              </a:rPr>
-              <a:t>•  </a:t>
+                  <a:srgbClr val="E8801A"/>
+                </a:solidFill>
+                <a:latin typeface="Montserrat"/>
+              </a:rPr>
+              <a:t>▸  </a:t>
             </a:r>
             <a:r>
               <a:rPr sz="1600" b="0" i="0">
@@ -7678,23 +8097,23 @@
                 </a:solidFill>
                 <a:latin typeface="Montserrat"/>
               </a:rPr>
-              <a:t>Metálicas, plásticas, de obra…</a:t>
+              <a:t>La externa protege</a:t>
             </a:r>
           </a:p>
           <a:p>
             <a:pPr>
               <a:spcAft>
-                <a:spcPts val="1000"/>
+                <a:spcPts val="1100"/>
               </a:spcAft>
             </a:pPr>
             <a:r>
               <a:rPr sz="1600" b="1" i="0">
                 <a:solidFill>
-                  <a:srgbClr val="2E3A80"/>
-                </a:solidFill>
-                <a:latin typeface="Montserrat"/>
-              </a:rPr>
-              <a:t>•  </a:t>
+                  <a:srgbClr val="E8801A"/>
+                </a:solidFill>
+                <a:latin typeface="Montserrat"/>
+              </a:rPr>
+              <a:t>▸  </a:t>
             </a:r>
             <a:r>
               <a:rPr sz="1600" b="0" i="0">
@@ -7703,14 +8122,14 @@
                 </a:solidFill>
                 <a:latin typeface="Montserrat"/>
               </a:rPr>
-              <a:t>El detalle, en la UNE 60670-4</a:t>
-            </a:r>
-          </a:p>
-        </p:txBody>
-      </p:sp>
-      <p:sp>
-        <p:nvSpPr>
-          <p:cNvPr id="8" name="imgph" descr="IMGQ:pipe sleeve wall penetration conduit"/>
+              <a:t>Norma UNE-EN 15266</a:t>
+            </a:r>
+          </a:p>
+        </p:txBody>
+      </p:sp>
+      <p:sp>
+        <p:nvSpPr>
+          <p:cNvPr id="9" name="imgph" descr="IMGQ:corrugated stainless steel gas hose yellow"/>
           <p:cNvSpPr/>
           <p:nvPr/>
         </p:nvSpPr>
@@ -7756,7 +8175,7 @@
       </p:sp>
       <p:sp>
         <p:nvSpPr>
-          <p:cNvPr id="9" name="TextBox 8"/>
+          <p:cNvPr id="10" name="TextBox 9"/>
           <p:cNvSpPr txBox="1"/>
           <p:nvPr/>
         </p:nvSpPr>
@@ -7796,7 +8215,7 @@
                 </a:solidFill>
                 <a:latin typeface="Montserrat"/>
               </a:rPr>
-              <a:t>pipe sleeve wall penetration conduit</a:t>
+              <a:t>corrugated stainless steel gas hose yellow</a:t>
             </a:r>
           </a:p>
         </p:txBody>
@@ -7834,6 +8253,465 @@
             <a:avLst/>
           </a:prstGeom>
           <a:solidFill>
+            <a:srgbClr val="FFFFFF"/>
+          </a:solidFill>
+          <a:ln>
+            <a:noFill/>
+          </a:ln>
+          <a:effectLst/>
+        </p:spPr>
+        <p:style>
+          <a:lnRef idx="1">
+            <a:schemeClr val="accent1"/>
+          </a:lnRef>
+          <a:fillRef idx="3">
+            <a:schemeClr val="accent1"/>
+          </a:fillRef>
+          <a:effectRef idx="2">
+            <a:schemeClr val="accent1"/>
+          </a:effectRef>
+          <a:fontRef idx="minor">
+            <a:schemeClr val="lt1"/>
+          </a:fontRef>
+        </p:style>
+        <p:txBody>
+          <a:bodyPr rtlCol="0" anchor="ctr"/>
+          <a:lstStyle/>
+          <a:p>
+            <a:pPr algn="ctr"/>
+          </a:p>
+        </p:txBody>
+      </p:sp>
+      <p:sp>
+        <p:nvSpPr>
+          <p:cNvPr id="3" name="TextBox 2"/>
+          <p:cNvSpPr txBox="1"/>
+          <p:nvPr/>
+        </p:nvSpPr>
+        <p:spPr>
+          <a:xfrm>
+            <a:off x="10607040" y="320040"/>
+            <a:ext cx="1371600" cy="365760"/>
+          </a:xfrm>
+          <a:prstGeom prst="rect">
+            <a:avLst/>
+          </a:prstGeom>
+          <a:noFill/>
+        </p:spPr>
+        <p:txBody>
+          <a:bodyPr wrap="square">
+            <a:spAutoFit/>
+          </a:bodyPr>
+          <a:lstStyle/>
+          <a:p>
+            <a:pPr algn="r"/>
+            <a:r>
+              <a:rPr sz="1000" b="1" i="0">
+                <a:solidFill>
+                  <a:srgbClr val="64748B"/>
+                </a:solidFill>
+                <a:latin typeface="Montserrat"/>
+              </a:rPr>
+              <a:t>017 / 018</a:t>
+            </a:r>
+          </a:p>
+        </p:txBody>
+      </p:sp>
+      <p:sp>
+        <p:nvSpPr>
+          <p:cNvPr id="4" name="TextBox 3"/>
+          <p:cNvSpPr txBox="1"/>
+          <p:nvPr/>
+        </p:nvSpPr>
+        <p:spPr>
+          <a:xfrm>
+            <a:off x="457200" y="6419088"/>
+            <a:ext cx="8229600" cy="365760"/>
+          </a:xfrm>
+          <a:prstGeom prst="rect">
+            <a:avLst/>
+          </a:prstGeom>
+          <a:noFill/>
+        </p:spPr>
+        <p:txBody>
+          <a:bodyPr wrap="square">
+            <a:spAutoFit/>
+          </a:bodyPr>
+          <a:lstStyle/>
+          <a:p>
+            <a:r>
+              <a:rPr sz="900" b="0" i="0">
+                <a:solidFill>
+                  <a:srgbClr val="64748B"/>
+                </a:solidFill>
+                <a:latin typeface="Montserrat"/>
+              </a:rPr>
+              <a:t>Curso Gas B · Tema 10 · UNE 60670-3</a:t>
+            </a:r>
+          </a:p>
+        </p:txBody>
+      </p:sp>
+      <p:sp>
+        <p:nvSpPr>
+          <p:cNvPr id="5" name="TextBox 4"/>
+          <p:cNvSpPr txBox="1"/>
+          <p:nvPr/>
+        </p:nvSpPr>
+        <p:spPr>
+          <a:xfrm>
+            <a:off x="822960" y="457200"/>
+            <a:ext cx="10058400" cy="365760"/>
+          </a:xfrm>
+          <a:prstGeom prst="rect">
+            <a:avLst/>
+          </a:prstGeom>
+          <a:noFill/>
+        </p:spPr>
+        <p:txBody>
+          <a:bodyPr wrap="square">
+            <a:spAutoFit/>
+          </a:bodyPr>
+          <a:lstStyle/>
+          <a:p>
+            <a:r>
+              <a:rPr sz="1300" b="1" i="0">
+                <a:solidFill>
+                  <a:srgbClr val="E8801A"/>
+                </a:solidFill>
+                <a:latin typeface="Montserrat"/>
+              </a:rPr>
+              <a:t>VAINAS · OTROS MATERIALES</a:t>
+            </a:r>
+          </a:p>
+        </p:txBody>
+      </p:sp>
+      <p:sp>
+        <p:nvSpPr>
+          <p:cNvPr id="6" name="TextBox 5"/>
+          <p:cNvSpPr txBox="1"/>
+          <p:nvPr/>
+        </p:nvSpPr>
+        <p:spPr>
+          <a:xfrm>
+            <a:off x="822960" y="868680"/>
+            <a:ext cx="10515600" cy="914400"/>
+          </a:xfrm>
+          <a:prstGeom prst="rect">
+            <a:avLst/>
+          </a:prstGeom>
+          <a:noFill/>
+        </p:spPr>
+        <p:txBody>
+          <a:bodyPr wrap="square">
+            <a:spAutoFit/>
+          </a:bodyPr>
+          <a:lstStyle/>
+          <a:p>
+            <a:r>
+              <a:rPr sz="2800" b="1" i="0">
+                <a:solidFill>
+                  <a:srgbClr val="1E2761"/>
+                </a:solidFill>
+                <a:latin typeface="Montserrat"/>
+              </a:rPr>
+              <a:t>Vainas, conductos y pasamuros</a:t>
+            </a:r>
+          </a:p>
+        </p:txBody>
+      </p:sp>
+      <p:sp>
+        <p:nvSpPr>
+          <p:cNvPr id="7" name="Rounded Rectangle 6"/>
+          <p:cNvSpPr/>
+          <p:nvPr/>
+        </p:nvSpPr>
+        <p:spPr>
+          <a:xfrm>
+            <a:off x="868680" y="1627632"/>
+            <a:ext cx="2011680" cy="73152"/>
+          </a:xfrm>
+          <a:prstGeom prst="roundRect">
+            <a:avLst/>
+          </a:prstGeom>
+          <a:solidFill>
+            <a:srgbClr val="E8801A"/>
+          </a:solidFill>
+          <a:ln>
+            <a:noFill/>
+          </a:ln>
+          <a:effectLst/>
+        </p:spPr>
+        <p:style>
+          <a:lnRef idx="1">
+            <a:schemeClr val="accent1"/>
+          </a:lnRef>
+          <a:fillRef idx="3">
+            <a:schemeClr val="accent1"/>
+          </a:fillRef>
+          <a:effectRef idx="2">
+            <a:schemeClr val="accent1"/>
+          </a:effectRef>
+          <a:fontRef idx="minor">
+            <a:schemeClr val="lt1"/>
+          </a:fontRef>
+        </p:style>
+        <p:txBody>
+          <a:bodyPr rtlCol="0" anchor="ctr"/>
+          <a:lstStyle/>
+          <a:p>
+            <a:pPr algn="ctr"/>
+          </a:p>
+        </p:txBody>
+      </p:sp>
+      <p:sp>
+        <p:nvSpPr>
+          <p:cNvPr id="8" name="TextBox 7"/>
+          <p:cNvSpPr txBox="1"/>
+          <p:nvPr/>
+        </p:nvSpPr>
+        <p:spPr>
+          <a:xfrm>
+            <a:off x="822960" y="1965960"/>
+            <a:ext cx="4983480" cy="4206240"/>
+          </a:xfrm>
+          <a:prstGeom prst="rect">
+            <a:avLst/>
+          </a:prstGeom>
+          <a:noFill/>
+        </p:spPr>
+        <p:txBody>
+          <a:bodyPr wrap="square">
+            <a:spAutoFit/>
+          </a:bodyPr>
+          <a:lstStyle/>
+          <a:p>
+            <a:pPr>
+              <a:spcAft>
+                <a:spcPts val="1100"/>
+              </a:spcAft>
+            </a:pPr>
+            <a:r>
+              <a:rPr sz="1600" b="1" i="0">
+                <a:solidFill>
+                  <a:srgbClr val="E8801A"/>
+                </a:solidFill>
+                <a:latin typeface="Montserrat"/>
+              </a:rPr>
+              <a:t>▸  </a:t>
+            </a:r>
+            <a:r>
+              <a:rPr sz="1600" b="0" i="0">
+                <a:solidFill>
+                  <a:srgbClr val="1B2330"/>
+                </a:solidFill>
+                <a:latin typeface="Montserrat"/>
+              </a:rPr>
+              <a:t>La 'funda' del tubo de gas</a:t>
+            </a:r>
+          </a:p>
+          <a:p>
+            <a:pPr>
+              <a:spcAft>
+                <a:spcPts val="1100"/>
+              </a:spcAft>
+            </a:pPr>
+            <a:r>
+              <a:rPr sz="1600" b="1" i="0">
+                <a:solidFill>
+                  <a:srgbClr val="E8801A"/>
+                </a:solidFill>
+                <a:latin typeface="Montserrat"/>
+              </a:rPr>
+              <a:t>▸  </a:t>
+            </a:r>
+            <a:r>
+              <a:rPr sz="1600" b="0" i="0">
+                <a:solidFill>
+                  <a:srgbClr val="1B2330"/>
+                </a:solidFill>
+                <a:latin typeface="Montserrat"/>
+              </a:rPr>
+              <a:t>Material adecuado a su función</a:t>
+            </a:r>
+          </a:p>
+          <a:p>
+            <a:pPr>
+              <a:spcAft>
+                <a:spcPts val="1100"/>
+              </a:spcAft>
+            </a:pPr>
+            <a:r>
+              <a:rPr sz="1600" b="1" i="0">
+                <a:solidFill>
+                  <a:srgbClr val="E8801A"/>
+                </a:solidFill>
+                <a:latin typeface="Montserrat"/>
+              </a:rPr>
+              <a:t>▸  </a:t>
+            </a:r>
+            <a:r>
+              <a:rPr sz="1600" b="0" i="0">
+                <a:solidFill>
+                  <a:srgbClr val="1B2330"/>
+                </a:solidFill>
+                <a:latin typeface="Montserrat"/>
+              </a:rPr>
+              <a:t>Metálicas, plásticas, de obra…</a:t>
+            </a:r>
+          </a:p>
+          <a:p>
+            <a:pPr>
+              <a:spcAft>
+                <a:spcPts val="1100"/>
+              </a:spcAft>
+            </a:pPr>
+            <a:r>
+              <a:rPr sz="1600" b="1" i="0">
+                <a:solidFill>
+                  <a:srgbClr val="E8801A"/>
+                </a:solidFill>
+                <a:latin typeface="Montserrat"/>
+              </a:rPr>
+              <a:t>▸  </a:t>
+            </a:r>
+            <a:r>
+              <a:rPr sz="1600" b="0" i="0">
+                <a:solidFill>
+                  <a:srgbClr val="1B2330"/>
+                </a:solidFill>
+                <a:latin typeface="Montserrat"/>
+              </a:rPr>
+              <a:t>El detalle, en la UNE 60670-4</a:t>
+            </a:r>
+          </a:p>
+        </p:txBody>
+      </p:sp>
+      <p:sp>
+        <p:nvSpPr>
+          <p:cNvPr id="9" name="imgph" descr="IMGQ:pipe sleeve wall penetration conduit"/>
+          <p:cNvSpPr/>
+          <p:nvPr/>
+        </p:nvSpPr>
+        <p:spPr>
+          <a:xfrm>
+            <a:off x="5806440" y="1051560"/>
+            <a:ext cx="5298947" cy="4629150"/>
+          </a:xfrm>
+          <a:prstGeom prst="roundRect">
+            <a:avLst/>
+          </a:prstGeom>
+          <a:solidFill>
+            <a:srgbClr val="F3F6FB"/>
+          </a:solidFill>
+          <a:ln w="12700">
+            <a:solidFill>
+              <a:srgbClr val="C7D2E6"/>
+            </a:solidFill>
+          </a:ln>
+          <a:effectLst/>
+        </p:spPr>
+        <p:style>
+          <a:lnRef idx="1">
+            <a:schemeClr val="accent1"/>
+          </a:lnRef>
+          <a:fillRef idx="3">
+            <a:schemeClr val="accent1"/>
+          </a:fillRef>
+          <a:effectRef idx="2">
+            <a:schemeClr val="accent1"/>
+          </a:effectRef>
+          <a:fontRef idx="minor">
+            <a:schemeClr val="lt1"/>
+          </a:fontRef>
+        </p:style>
+        <p:txBody>
+          <a:bodyPr rtlCol="0" anchor="ctr"/>
+          <a:lstStyle/>
+          <a:p>
+            <a:pPr algn="ctr"/>
+          </a:p>
+        </p:txBody>
+      </p:sp>
+      <p:sp>
+        <p:nvSpPr>
+          <p:cNvPr id="10" name="TextBox 9"/>
+          <p:cNvSpPr txBox="1"/>
+          <p:nvPr/>
+        </p:nvSpPr>
+        <p:spPr>
+          <a:xfrm>
+            <a:off x="6080760" y="2726055"/>
+            <a:ext cx="4750307" cy="1280160"/>
+          </a:xfrm>
+          <a:prstGeom prst="rect">
+            <a:avLst/>
+          </a:prstGeom>
+          <a:noFill/>
+        </p:spPr>
+        <p:txBody>
+          <a:bodyPr wrap="square">
+            <a:spAutoFit/>
+          </a:bodyPr>
+          <a:lstStyle/>
+          <a:p>
+            <a:pPr algn="ctr"/>
+            <a:r>
+              <a:rPr sz="1400" b="1" i="0">
+                <a:solidFill>
+                  <a:srgbClr val="64748B"/>
+                </a:solidFill>
+                <a:latin typeface="Montserrat"/>
+              </a:rPr>
+              <a:t>IMAGEN REALISTA</a:t>
+            </a:r>
+          </a:p>
+          <a:p>
+            <a:pPr algn="ctr"/>
+            <a:r>
+              <a:rPr sz="1100" b="0" i="1">
+                <a:solidFill>
+                  <a:srgbClr val="64748B"/>
+                </a:solidFill>
+                <a:latin typeface="Montserrat"/>
+              </a:rPr>
+              <a:t>pipe sleeve wall penetration conduit</a:t>
+            </a:r>
+          </a:p>
+        </p:txBody>
+      </p:sp>
+    </p:spTree>
+  </p:cSld>
+  <p:clrMapOvr>
+    <a:masterClrMapping/>
+  </p:clrMapOvr>
+</p:sld>
+</file>
+
+<file path=ppt/slides/slide18.xml><?xml version="1.0" encoding="utf-8"?>
+<p:sld xmlns:a="http://schemas.openxmlformats.org/drawingml/2006/main" xmlns:p="http://schemas.openxmlformats.org/presentationml/2006/main" xmlns:r="http://schemas.openxmlformats.org/officeDocument/2006/relationships">
+  <p:cSld>
+    <p:spTree>
+      <p:nvGrpSpPr>
+        <p:cNvPr id="1" name=""/>
+        <p:cNvGrpSpPr/>
+        <p:nvPr/>
+      </p:nvGrpSpPr>
+      <p:grpSpPr/>
+      <p:sp>
+        <p:nvSpPr>
+          <p:cNvPr id="2" name="Rectangle 1"/>
+          <p:cNvSpPr/>
+          <p:nvPr/>
+        </p:nvSpPr>
+        <p:spPr>
+          <a:xfrm>
+            <a:off x="0" y="0"/>
+            <a:ext cx="12191695" cy="6858000"/>
+          </a:xfrm>
+          <a:prstGeom prst="rect">
+            <a:avLst/>
+          </a:prstGeom>
+          <a:solidFill>
             <a:srgbClr val="1E2761"/>
           </a:solidFill>
           <a:ln>
@@ -7888,7 +8766,7 @@
             <a:r>
               <a:rPr sz="1400" b="1" i="0">
                 <a:solidFill>
-                  <a:srgbClr val="CADCFC"/>
+                  <a:srgbClr val="F4A24C"/>
                 </a:solidFill>
                 <a:latin typeface="Montserrat"/>
               </a:rPr>
@@ -7899,13 +8777,57 @@
       </p:sp>
       <p:sp>
         <p:nvSpPr>
-          <p:cNvPr id="4" name="TextBox 3"/>
+          <p:cNvPr id="4" name="Rounded Rectangle 3"/>
+          <p:cNvSpPr/>
+          <p:nvPr/>
+        </p:nvSpPr>
+        <p:spPr>
+          <a:xfrm>
+            <a:off x="868680" y="1051560"/>
+            <a:ext cx="1463040" cy="82296"/>
+          </a:xfrm>
+          <a:prstGeom prst="roundRect">
+            <a:avLst/>
+          </a:prstGeom>
+          <a:solidFill>
+            <a:srgbClr val="E8801A"/>
+          </a:solidFill>
+          <a:ln>
+            <a:noFill/>
+          </a:ln>
+          <a:effectLst/>
+        </p:spPr>
+        <p:style>
+          <a:lnRef idx="1">
+            <a:schemeClr val="accent1"/>
+          </a:lnRef>
+          <a:fillRef idx="3">
+            <a:schemeClr val="accent1"/>
+          </a:fillRef>
+          <a:effectRef idx="2">
+            <a:schemeClr val="accent1"/>
+          </a:effectRef>
+          <a:fontRef idx="minor">
+            <a:schemeClr val="lt1"/>
+          </a:fontRef>
+        </p:style>
+        <p:txBody>
+          <a:bodyPr rtlCol="0" anchor="ctr"/>
+          <a:lstStyle/>
+          <a:p>
+            <a:pPr algn="ctr"/>
+          </a:p>
+        </p:txBody>
+      </p:sp>
+      <p:sp>
+        <p:nvSpPr>
+          <p:cNvPr id="5" name="TextBox 4"/>
           <p:cNvSpPr txBox="1"/>
           <p:nvPr/>
         </p:nvSpPr>
         <p:spPr>
           <a:xfrm>
-            <a:off x="822960" y="1143000"/>
+            <a:off x="822960" y="1234440"/>
             <a:ext cx="10515600" cy="1097280"/>
           </a:xfrm>
           <a:prstGeom prst="rect">
@@ -7933,14 +8855,14 @@
       </p:sp>
       <p:sp>
         <p:nvSpPr>
-          <p:cNvPr id="5" name="TextBox 4"/>
+          <p:cNvPr id="6" name="TextBox 5"/>
           <p:cNvSpPr txBox="1"/>
           <p:nvPr/>
         </p:nvSpPr>
         <p:spPr>
           <a:xfrm>
-            <a:off x="822960" y="2514600"/>
-            <a:ext cx="10515600" cy="2834640"/>
+            <a:off x="822960" y="2606040"/>
+            <a:ext cx="10515600" cy="2743200"/>
           </a:xfrm>
           <a:prstGeom prst="rect">
             <a:avLst/>
@@ -7961,7 +8883,7 @@
             <a:r>
               <a:rPr sz="2000" b="1" i="0">
                 <a:solidFill>
-                  <a:srgbClr val="CADCFC"/>
+                  <a:srgbClr val="F4A24C"/>
                 </a:solidFill>
                 <a:latin typeface="Montserrat"/>
               </a:rPr>
@@ -7986,7 +8908,7 @@
             <a:r>
               <a:rPr sz="2000" b="1" i="0">
                 <a:solidFill>
-                  <a:srgbClr val="CADCFC"/>
+                  <a:srgbClr val="F4A24C"/>
                 </a:solidFill>
                 <a:latin typeface="Montserrat"/>
               </a:rPr>
@@ -8011,7 +8933,7 @@
             <a:r>
               <a:rPr sz="2000" b="1" i="0">
                 <a:solidFill>
-                  <a:srgbClr val="CADCFC"/>
+                  <a:srgbClr val="F4A24C"/>
                 </a:solidFill>
                 <a:latin typeface="Montserrat"/>
               </a:rPr>
@@ -8036,7 +8958,7 @@
             <a:r>
               <a:rPr sz="2000" b="1" i="0">
                 <a:solidFill>
-                  <a:srgbClr val="CADCFC"/>
+                  <a:srgbClr val="F4A24C"/>
                 </a:solidFill>
                 <a:latin typeface="Montserrat"/>
               </a:rPr>
@@ -8056,20 +8978,20 @@
       </p:sp>
       <p:sp>
         <p:nvSpPr>
-          <p:cNvPr id="6" name="Rounded Rectangle 5"/>
+          <p:cNvPr id="7" name="Rounded Rectangle 6"/>
           <p:cNvSpPr/>
           <p:nvPr/>
         </p:nvSpPr>
         <p:spPr>
           <a:xfrm>
             <a:off x="822960" y="5532120"/>
-            <a:ext cx="10515600" cy="777240"/>
+            <a:ext cx="10515600" cy="822960"/>
           </a:xfrm>
           <a:prstGeom prst="roundRect">
             <a:avLst/>
           </a:prstGeom>
           <a:solidFill>
-            <a:srgbClr val="2E3A80"/>
+            <a:srgbClr val="E8801A"/>
           </a:solidFill>
           <a:ln>
             <a:noFill/>
@@ -8100,13 +9022,13 @@
       </p:sp>
       <p:sp>
         <p:nvSpPr>
-          <p:cNvPr id="7" name="TextBox 6"/>
+          <p:cNvPr id="8" name="TextBox 7"/>
           <p:cNvSpPr txBox="1"/>
           <p:nvPr/>
         </p:nvSpPr>
         <p:spPr>
           <a:xfrm>
-            <a:off x="1051560" y="5605272"/>
+            <a:off x="1051560" y="5623560"/>
             <a:ext cx="10058400" cy="640080"/>
           </a:xfrm>
           <a:prstGeom prst="rect">
@@ -8123,7 +9045,7 @@
             <a:r>
               <a:rPr sz="1500" b="1" i="1">
                 <a:solidFill>
-                  <a:srgbClr val="CADCFC"/>
+                  <a:srgbClr val="1E2761"/>
                 </a:solidFill>
                 <a:latin typeface="Montserrat"/>
               </a:rPr>
@@ -8224,7 +9146,7 @@
                 </a:solidFill>
                 <a:latin typeface="Montserrat"/>
               </a:rPr>
-              <a:t>002 / 017</a:t>
+              <a:t>002 / 018</a:t>
             </a:r>
           </a:p>
         </p:txBody>
@@ -8288,7 +9210,7 @@
             <a:r>
               <a:rPr sz="2700" b="1" i="0">
                 <a:solidFill>
-                  <a:srgbClr val="1E2761"/>
+                  <a:srgbClr val="E8801A"/>
                 </a:solidFill>
                 <a:latin typeface="Montserrat"/>
               </a:rPr>
@@ -8300,6 +9222,50 @@
       <p:sp>
         <p:nvSpPr>
           <p:cNvPr id="6" name="Rounded Rectangle 5"/>
+          <p:cNvSpPr/>
+          <p:nvPr/>
+        </p:nvSpPr>
+        <p:spPr>
+          <a:xfrm>
+            <a:off x="868680" y="1234440"/>
+            <a:ext cx="1463040" cy="73152"/>
+          </a:xfrm>
+          <a:prstGeom prst="roundRect">
+            <a:avLst/>
+          </a:prstGeom>
+          <a:solidFill>
+            <a:srgbClr val="1E2761"/>
+          </a:solidFill>
+          <a:ln>
+            <a:noFill/>
+          </a:ln>
+          <a:effectLst/>
+        </p:spPr>
+        <p:style>
+          <a:lnRef idx="1">
+            <a:schemeClr val="accent1"/>
+          </a:lnRef>
+          <a:fillRef idx="3">
+            <a:schemeClr val="accent1"/>
+          </a:fillRef>
+          <a:effectRef idx="2">
+            <a:schemeClr val="accent1"/>
+          </a:effectRef>
+          <a:fontRef idx="minor">
+            <a:schemeClr val="lt1"/>
+          </a:fontRef>
+        </p:style>
+        <p:txBody>
+          <a:bodyPr rtlCol="0" anchor="ctr"/>
+          <a:lstStyle/>
+          <a:p>
+            <a:pPr algn="ctr"/>
+          </a:p>
+        </p:txBody>
+      </p:sp>
+      <p:sp>
+        <p:nvSpPr>
+          <p:cNvPr id="7" name="Rounded Rectangle 6"/>
           <p:cNvSpPr/>
           <p:nvPr/>
         </p:nvSpPr>
@@ -8345,7 +9311,7 @@
       </p:sp>
       <p:sp>
         <p:nvSpPr>
-          <p:cNvPr id="7" name="TextBox 6"/>
+          <p:cNvPr id="8" name="TextBox 7"/>
           <p:cNvSpPr txBox="1"/>
           <p:nvPr/>
         </p:nvSpPr>
@@ -8380,7 +9346,7 @@
       </p:sp>
       <p:sp>
         <p:nvSpPr>
-          <p:cNvPr id="8" name="TextBox 7"/>
+          <p:cNvPr id="9" name="TextBox 8"/>
           <p:cNvSpPr txBox="1"/>
           <p:nvPr/>
         </p:nvSpPr>
@@ -8415,7 +9381,7 @@
       </p:sp>
       <p:sp>
         <p:nvSpPr>
-          <p:cNvPr id="9" name="Rounded Rectangle 8"/>
+          <p:cNvPr id="10" name="Rounded Rectangle 9"/>
           <p:cNvSpPr/>
           <p:nvPr/>
         </p:nvSpPr>
@@ -8461,7 +9427,7 @@
       </p:sp>
       <p:sp>
         <p:nvSpPr>
-          <p:cNvPr id="10" name="TextBox 9"/>
+          <p:cNvPr id="11" name="TextBox 10"/>
           <p:cNvSpPr txBox="1"/>
           <p:nvPr/>
         </p:nvSpPr>
@@ -8496,7 +9462,7 @@
       </p:sp>
       <p:sp>
         <p:nvSpPr>
-          <p:cNvPr id="11" name="TextBox 10"/>
+          <p:cNvPr id="12" name="TextBox 11"/>
           <p:cNvSpPr txBox="1"/>
           <p:nvPr/>
         </p:nvSpPr>
@@ -8531,7 +9497,7 @@
       </p:sp>
       <p:sp>
         <p:nvSpPr>
-          <p:cNvPr id="12" name="Rounded Rectangle 11"/>
+          <p:cNvPr id="13" name="Rounded Rectangle 12"/>
           <p:cNvSpPr/>
           <p:nvPr/>
         </p:nvSpPr>
@@ -8577,7 +9543,7 @@
       </p:sp>
       <p:sp>
         <p:nvSpPr>
-          <p:cNvPr id="13" name="TextBox 12"/>
+          <p:cNvPr id="14" name="TextBox 13"/>
           <p:cNvSpPr txBox="1"/>
           <p:nvPr/>
         </p:nvSpPr>
@@ -8612,7 +9578,7 @@
       </p:sp>
       <p:sp>
         <p:nvSpPr>
-          <p:cNvPr id="14" name="TextBox 13"/>
+          <p:cNvPr id="15" name="TextBox 14"/>
           <p:cNvSpPr txBox="1"/>
           <p:nvPr/>
         </p:nvSpPr>
@@ -8737,7 +9703,7 @@
                 </a:solidFill>
                 <a:latin typeface="Montserrat"/>
               </a:rPr>
-              <a:t>003 / 017</a:t>
+              <a:t>003 / 018</a:t>
             </a:r>
           </a:p>
         </p:txBody>
@@ -8784,7 +9750,7 @@
         </p:nvSpPr>
         <p:spPr>
           <a:xfrm>
-            <a:off x="822960" y="457200"/>
+            <a:off x="822960" y="502920"/>
             <a:ext cx="8229600" cy="365760"/>
           </a:xfrm>
           <a:prstGeom prst="rect">
@@ -8799,13 +9765,13 @@
           <a:lstStyle/>
           <a:p>
             <a:r>
-              <a:rPr sz="1200" b="1" i="0">
-                <a:solidFill>
-                  <a:srgbClr val="64748B"/>
-                </a:solidFill>
-                <a:latin typeface="Montserrat"/>
-              </a:rPr>
-              <a:t>UNE 60670 · ESTRUCTURA</a:t>
+              <a:rPr sz="1300" b="1" i="0">
+                <a:solidFill>
+                  <a:srgbClr val="E8801A"/>
+                </a:solidFill>
+                <a:latin typeface="Montserrat"/>
+              </a:rPr>
+              <a:t>PARTES DE ESTE VÍDEO</a:t>
             </a:r>
           </a:p>
         </p:txBody>
@@ -8818,7 +9784,7 @@
         </p:nvSpPr>
         <p:spPr>
           <a:xfrm>
-            <a:off x="822960" y="868680"/>
+            <a:off x="822960" y="914400"/>
             <a:ext cx="10515600" cy="914400"/>
           </a:xfrm>
           <a:prstGeom prst="rect">
@@ -8839,155 +9805,30 @@
                 </a:solidFill>
                 <a:latin typeface="Montserrat"/>
               </a:rPr>
-              <a:t>Dónde encaja esta parte</a:t>
-            </a:r>
-          </a:p>
-        </p:txBody>
-      </p:sp>
-      <p:sp>
-        <p:nvSpPr>
-          <p:cNvPr id="7" name="TextBox 6"/>
-          <p:cNvSpPr txBox="1"/>
-          <p:nvPr/>
-        </p:nvSpPr>
-        <p:spPr>
-          <a:xfrm>
-            <a:off x="822960" y="1920240"/>
-            <a:ext cx="4983480" cy="4206240"/>
-          </a:xfrm>
-          <a:prstGeom prst="rect">
-            <a:avLst/>
-          </a:prstGeom>
-          <a:noFill/>
-        </p:spPr>
-        <p:txBody>
-          <a:bodyPr wrap="square">
-            <a:spAutoFit/>
-          </a:bodyPr>
-          <a:lstStyle/>
-          <a:p>
-            <a:pPr>
-              <a:spcAft>
-                <a:spcPts val="1000"/>
-              </a:spcAft>
-            </a:pPr>
-            <a:r>
-              <a:rPr sz="1600" b="1" i="0">
-                <a:solidFill>
-                  <a:srgbClr val="2E3A80"/>
-                </a:solidFill>
-                <a:latin typeface="Montserrat"/>
-              </a:rPr>
-              <a:t>•  </a:t>
-            </a:r>
-            <a:r>
-              <a:rPr sz="1600" b="0" i="0">
-                <a:solidFill>
-                  <a:srgbClr val="1B2330"/>
-                </a:solidFill>
-                <a:latin typeface="Montserrat"/>
-              </a:rPr>
-              <a:t>Norma madre en 13 partes</a:t>
-            </a:r>
-          </a:p>
-          <a:p>
-            <a:pPr>
-              <a:spcAft>
-                <a:spcPts val="1000"/>
-              </a:spcAft>
-            </a:pPr>
-            <a:r>
-              <a:rPr sz="1600" b="1" i="0">
-                <a:solidFill>
-                  <a:srgbClr val="2E3A80"/>
-                </a:solidFill>
-                <a:latin typeface="Montserrat"/>
-              </a:rPr>
-              <a:t>•  </a:t>
-            </a:r>
-            <a:r>
-              <a:rPr sz="1600" b="0" i="0">
-                <a:solidFill>
-                  <a:srgbClr val="1B2330"/>
-                </a:solidFill>
-                <a:latin typeface="Montserrat"/>
-              </a:rPr>
-              <a:t>Esta es la Parte 3</a:t>
-            </a:r>
-          </a:p>
-          <a:p>
-            <a:pPr>
-              <a:spcAft>
-                <a:spcPts val="1000"/>
-              </a:spcAft>
-            </a:pPr>
-            <a:r>
-              <a:rPr sz="1600" b="1" i="0">
-                <a:solidFill>
-                  <a:srgbClr val="2E3A80"/>
-                </a:solidFill>
-                <a:latin typeface="Montserrat"/>
-              </a:rPr>
-              <a:t>•  </a:t>
-            </a:r>
-            <a:r>
-              <a:rPr sz="1600" b="0" i="0">
-                <a:solidFill>
-                  <a:srgbClr val="1B2330"/>
-                </a:solidFill>
-                <a:latin typeface="Montserrat"/>
-              </a:rPr>
-              <a:t>Instalaciones con MOP ≤ 5 bar</a:t>
-            </a:r>
-          </a:p>
-          <a:p>
-            <a:pPr>
-              <a:spcAft>
-                <a:spcPts val="1000"/>
-              </a:spcAft>
-            </a:pPr>
-            <a:r>
-              <a:rPr sz="1600" b="1" i="0">
-                <a:solidFill>
-                  <a:srgbClr val="2E3A80"/>
-                </a:solidFill>
-                <a:latin typeface="Montserrat"/>
-              </a:rPr>
-              <a:t>•  </a:t>
-            </a:r>
-            <a:r>
-              <a:rPr sz="1600" b="0" i="0">
-                <a:solidFill>
-                  <a:srgbClr val="1B2330"/>
-                </a:solidFill>
-                <a:latin typeface="Montserrat"/>
-              </a:rPr>
-              <a:t>Diseñar, construir, probar, controlar</a:t>
-            </a:r>
-          </a:p>
-        </p:txBody>
-      </p:sp>
-      <p:sp>
-        <p:nvSpPr>
-          <p:cNvPr id="8" name="imgph" descr="IMGQ:gas pipe installation technician wall"/>
+              <a:t>En este vídeo</a:t>
+            </a:r>
+          </a:p>
+        </p:txBody>
+      </p:sp>
+      <p:sp>
+        <p:nvSpPr>
+          <p:cNvPr id="7" name="Rounded Rectangle 6"/>
           <p:cNvSpPr/>
           <p:nvPr/>
         </p:nvSpPr>
         <p:spPr>
           <a:xfrm>
-            <a:off x="5806440" y="1051560"/>
-            <a:ext cx="5298947" cy="4629150"/>
+            <a:off x="868680" y="1673352"/>
+            <a:ext cx="2011680" cy="73152"/>
           </a:xfrm>
           <a:prstGeom prst="roundRect">
             <a:avLst/>
           </a:prstGeom>
           <a:solidFill>
-            <a:srgbClr val="F3F6FB"/>
+            <a:srgbClr val="E8801A"/>
           </a:solidFill>
-          <a:ln w="12700">
-            <a:solidFill>
-              <a:srgbClr val="C7D2E6"/>
-            </a:solidFill>
+          <a:ln>
+            <a:noFill/>
           </a:ln>
           <a:effectLst/>
         </p:spPr>
@@ -9015,14 +9856,14 @@
       </p:sp>
       <p:sp>
         <p:nvSpPr>
-          <p:cNvPr id="9" name="TextBox 8"/>
+          <p:cNvPr id="8" name="TextBox 7"/>
           <p:cNvSpPr txBox="1"/>
           <p:nvPr/>
         </p:nvSpPr>
         <p:spPr>
           <a:xfrm>
-            <a:off x="6080760" y="2726055"/>
-            <a:ext cx="4750307" cy="1280160"/>
+            <a:off x="822960" y="2103120"/>
+            <a:ext cx="10515600" cy="4023360"/>
           </a:xfrm>
           <a:prstGeom prst="rect">
             <a:avLst/>
@@ -9035,27 +9876,178 @@
           </a:bodyPr>
           <a:lstStyle/>
           <a:p>
-            <a:pPr algn="ctr"/>
-            <a:r>
-              <a:rPr sz="1400" b="1" i="0">
-                <a:solidFill>
-                  <a:srgbClr val="64748B"/>
-                </a:solidFill>
-                <a:latin typeface="Montserrat"/>
-              </a:rPr>
-              <a:t>IMAGEN REALISTA</a:t>
-            </a:r>
-          </a:p>
-          <a:p>
-            <a:pPr algn="ctr"/>
-            <a:r>
-              <a:rPr sz="1100" b="0" i="1">
-                <a:solidFill>
-                  <a:srgbClr val="64748B"/>
-                </a:solidFill>
-                <a:latin typeface="Montserrat"/>
-              </a:rPr>
-              <a:t>gas pipe installation technician wall</a:t>
+            <a:pPr>
+              <a:spcAft>
+                <a:spcPts val="900"/>
+              </a:spcAft>
+            </a:pPr>
+            <a:r>
+              <a:rPr sz="1800" b="1" i="0">
+                <a:solidFill>
+                  <a:srgbClr val="E8801A"/>
+                </a:solidFill>
+                <a:latin typeface="Montserrat"/>
+              </a:rPr>
+              <a:t>01   </a:t>
+            </a:r>
+            <a:r>
+              <a:rPr sz="1700" b="0" i="0">
+                <a:solidFill>
+                  <a:srgbClr val="1B2330"/>
+                </a:solidFill>
+                <a:latin typeface="Montserrat"/>
+              </a:rPr>
+              <a:t>UNE 60670</a:t>
+            </a:r>
+          </a:p>
+          <a:p>
+            <a:pPr>
+              <a:spcAft>
+                <a:spcPts val="900"/>
+              </a:spcAft>
+            </a:pPr>
+            <a:r>
+              <a:rPr sz="1800" b="1" i="0">
+                <a:solidFill>
+                  <a:srgbClr val="E8801A"/>
+                </a:solidFill>
+                <a:latin typeface="Montserrat"/>
+              </a:rPr>
+              <a:t>02   </a:t>
+            </a:r>
+            <a:r>
+              <a:rPr sz="1700" b="0" i="0">
+                <a:solidFill>
+                  <a:srgbClr val="1B2330"/>
+                </a:solidFill>
+                <a:latin typeface="Montserrat"/>
+              </a:rPr>
+              <a:t>No las confundas</a:t>
+            </a:r>
+          </a:p>
+          <a:p>
+            <a:pPr>
+              <a:spcAft>
+                <a:spcPts val="900"/>
+              </a:spcAft>
+            </a:pPr>
+            <a:r>
+              <a:rPr sz="1800" b="1" i="0">
+                <a:solidFill>
+                  <a:srgbClr val="E8801A"/>
+                </a:solidFill>
+                <a:latin typeface="Montserrat"/>
+              </a:rPr>
+              <a:t>03   </a:t>
+            </a:r>
+            <a:r>
+              <a:rPr sz="1700" b="0" i="0">
+                <a:solidFill>
+                  <a:srgbClr val="1B2330"/>
+                </a:solidFill>
+                <a:latin typeface="Montserrat"/>
+              </a:rPr>
+              <a:t>Novedades de la edición</a:t>
+            </a:r>
+          </a:p>
+          <a:p>
+            <a:pPr>
+              <a:spcAft>
+                <a:spcPts val="900"/>
+              </a:spcAft>
+            </a:pPr>
+            <a:r>
+              <a:rPr sz="1800" b="1" i="0">
+                <a:solidFill>
+                  <a:srgbClr val="E8801A"/>
+                </a:solidFill>
+                <a:latin typeface="Montserrat"/>
+              </a:rPr>
+              <a:t>04   </a:t>
+            </a:r>
+            <a:r>
+              <a:rPr sz="1700" b="0" i="0">
+                <a:solidFill>
+                  <a:srgbClr val="1B2330"/>
+                </a:solidFill>
+                <a:latin typeface="Montserrat"/>
+              </a:rPr>
+              <a:t>Objeto y campo</a:t>
+            </a:r>
+          </a:p>
+          <a:p>
+            <a:pPr>
+              <a:spcAft>
+                <a:spcPts val="900"/>
+              </a:spcAft>
+            </a:pPr>
+            <a:r>
+              <a:rPr sz="1800" b="1" i="0">
+                <a:solidFill>
+                  <a:srgbClr val="E8801A"/>
+                </a:solidFill>
+                <a:latin typeface="Montserrat"/>
+              </a:rPr>
+              <a:t>05   </a:t>
+            </a:r>
+            <a:r>
+              <a:rPr sz="1700" b="0" i="0">
+                <a:solidFill>
+                  <a:srgbClr val="1B2330"/>
+                </a:solidFill>
+                <a:latin typeface="Montserrat"/>
+              </a:rPr>
+              <a:t>Requisito básico</a:t>
+            </a:r>
+          </a:p>
+          <a:p>
+            <a:pPr>
+              <a:spcAft>
+                <a:spcPts val="900"/>
+              </a:spcAft>
+            </a:pPr>
+            <a:r>
+              <a:rPr sz="1800" b="1" i="0">
+                <a:solidFill>
+                  <a:srgbClr val="E8801A"/>
+                </a:solidFill>
+                <a:latin typeface="Montserrat"/>
+              </a:rPr>
+              <a:t>06   </a:t>
+            </a:r>
+            <a:r>
+              <a:rPr sz="1700" b="0" i="0">
+                <a:solidFill>
+                  <a:srgbClr val="1B2330"/>
+                </a:solidFill>
+                <a:latin typeface="Montserrat"/>
+              </a:rPr>
+              <a:t>Materiales</a:t>
+            </a:r>
+          </a:p>
+          <a:p>
+            <a:pPr>
+              <a:spcAft>
+                <a:spcPts val="900"/>
+              </a:spcAft>
+            </a:pPr>
+            <a:r>
+              <a:rPr sz="1800" b="1" i="0">
+                <a:solidFill>
+                  <a:srgbClr val="E8801A"/>
+                </a:solidFill>
+                <a:latin typeface="Montserrat"/>
+              </a:rPr>
+              <a:t>07   </a:t>
+            </a:r>
+            <a:r>
+              <a:rPr sz="1700" b="0" i="0">
+                <a:solidFill>
+                  <a:srgbClr val="1B2330"/>
+                </a:solidFill>
+                <a:latin typeface="Montserrat"/>
+              </a:rPr>
+              <a:t>Vainas</a:t>
             </a:r>
           </a:p>
         </p:txBody>
@@ -9152,7 +10144,7 @@
                 </a:solidFill>
                 <a:latin typeface="Montserrat"/>
               </a:rPr>
-              <a:t>004 / 017</a:t>
+              <a:t>004 / 018</a:t>
             </a:r>
           </a:p>
         </p:txBody>
@@ -9200,7 +10192,7 @@
         <p:spPr>
           <a:xfrm>
             <a:off x="822960" y="457200"/>
-            <a:ext cx="8229600" cy="365760"/>
+            <a:ext cx="10058400" cy="365760"/>
           </a:xfrm>
           <a:prstGeom prst="rect">
             <a:avLst/>
@@ -9214,13 +10206,13 @@
           <a:lstStyle/>
           <a:p>
             <a:r>
-              <a:rPr sz="1200" b="1" i="0">
-                <a:solidFill>
-                  <a:srgbClr val="64748B"/>
-                </a:solidFill>
-                <a:latin typeface="Montserrat"/>
-              </a:rPr>
-              <a:t>NO LAS CONFUNDAS</a:t>
+              <a:rPr sz="1300" b="1" i="0">
+                <a:solidFill>
+                  <a:srgbClr val="E8801A"/>
+                </a:solidFill>
+                <a:latin typeface="Montserrat"/>
+              </a:rPr>
+              <a:t>UNE 60670 · ESTRUCTURA</a:t>
             </a:r>
           </a:p>
         </p:txBody>
@@ -9248,26 +10240,70 @@
           <a:lstStyle/>
           <a:p>
             <a:r>
-              <a:rPr sz="2700" b="1" i="0">
+              <a:rPr sz="2800" b="1" i="0">
                 <a:solidFill>
                   <a:srgbClr val="1E2761"/>
                 </a:solidFill>
                 <a:latin typeface="Montserrat"/>
               </a:rPr>
-              <a:t>¿Parte 3 o Parte 4?</a:t>
-            </a:r>
-          </a:p>
-        </p:txBody>
-      </p:sp>
-      <p:sp>
-        <p:nvSpPr>
-          <p:cNvPr id="7" name="TextBox 6"/>
+              <a:t>Dónde encaja esta parte</a:t>
+            </a:r>
+          </a:p>
+        </p:txBody>
+      </p:sp>
+      <p:sp>
+        <p:nvSpPr>
+          <p:cNvPr id="7" name="Rounded Rectangle 6"/>
+          <p:cNvSpPr/>
+          <p:nvPr/>
+        </p:nvSpPr>
+        <p:spPr>
+          <a:xfrm>
+            <a:off x="868680" y="1627632"/>
+            <a:ext cx="2011680" cy="73152"/>
+          </a:xfrm>
+          <a:prstGeom prst="roundRect">
+            <a:avLst/>
+          </a:prstGeom>
+          <a:solidFill>
+            <a:srgbClr val="E8801A"/>
+          </a:solidFill>
+          <a:ln>
+            <a:noFill/>
+          </a:ln>
+          <a:effectLst/>
+        </p:spPr>
+        <p:style>
+          <a:lnRef idx="1">
+            <a:schemeClr val="accent1"/>
+          </a:lnRef>
+          <a:fillRef idx="3">
+            <a:schemeClr val="accent1"/>
+          </a:fillRef>
+          <a:effectRef idx="2">
+            <a:schemeClr val="accent1"/>
+          </a:effectRef>
+          <a:fontRef idx="minor">
+            <a:schemeClr val="lt1"/>
+          </a:fontRef>
+        </p:style>
+        <p:txBody>
+          <a:bodyPr rtlCol="0" anchor="ctr"/>
+          <a:lstStyle/>
+          <a:p>
+            <a:pPr algn="ctr"/>
+          </a:p>
+        </p:txBody>
+      </p:sp>
+      <p:sp>
+        <p:nvSpPr>
+          <p:cNvPr id="8" name="TextBox 7"/>
           <p:cNvSpPr txBox="1"/>
           <p:nvPr/>
         </p:nvSpPr>
         <p:spPr>
           <a:xfrm>
-            <a:off x="822960" y="1920240"/>
+            <a:off x="822960" y="1965960"/>
             <a:ext cx="4983480" cy="4206240"/>
           </a:xfrm>
           <a:prstGeom prst="rect">
@@ -9283,17 +10319,17 @@
           <a:p>
             <a:pPr>
               <a:spcAft>
-                <a:spcPts val="1000"/>
+                <a:spcPts val="1100"/>
               </a:spcAft>
             </a:pPr>
             <a:r>
               <a:rPr sz="1600" b="1" i="0">
                 <a:solidFill>
-                  <a:srgbClr val="2E3A80"/>
-                </a:solidFill>
-                <a:latin typeface="Montserrat"/>
-              </a:rPr>
-              <a:t>•  </a:t>
+                  <a:srgbClr val="E8801A"/>
+                </a:solidFill>
+                <a:latin typeface="Montserrat"/>
+              </a:rPr>
+              <a:t>▸  </a:t>
             </a:r>
             <a:r>
               <a:rPr sz="1600" b="0" i="0">
@@ -9302,23 +10338,23 @@
                 </a:solidFill>
                 <a:latin typeface="Montserrat"/>
               </a:rPr>
-              <a:t>Parte 3 = almacén de materiales</a:t>
+              <a:t>Norma madre en 13 partes</a:t>
             </a:r>
           </a:p>
           <a:p>
             <a:pPr>
               <a:spcAft>
-                <a:spcPts val="1000"/>
+                <a:spcPts val="1100"/>
               </a:spcAft>
             </a:pPr>
             <a:r>
               <a:rPr sz="1600" b="1" i="0">
                 <a:solidFill>
-                  <a:srgbClr val="2E3A80"/>
-                </a:solidFill>
-                <a:latin typeface="Montserrat"/>
-              </a:rPr>
-              <a:t>•  </a:t>
+                  <a:srgbClr val="E8801A"/>
+                </a:solidFill>
+                <a:latin typeface="Montserrat"/>
+              </a:rPr>
+              <a:t>▸  </a:t>
             </a:r>
             <a:r>
               <a:rPr sz="1600" b="0" i="0">
@@ -9327,23 +10363,23 @@
                 </a:solidFill>
                 <a:latin typeface="Montserrat"/>
               </a:rPr>
-              <a:t>Qué tubo, válvula o unión usar</a:t>
+              <a:t>Esta es la Parte 3</a:t>
             </a:r>
           </a:p>
           <a:p>
             <a:pPr>
               <a:spcAft>
-                <a:spcPts val="1000"/>
+                <a:spcPts val="1100"/>
               </a:spcAft>
             </a:pPr>
             <a:r>
               <a:rPr sz="1600" b="1" i="0">
                 <a:solidFill>
-                  <a:srgbClr val="2E3A80"/>
-                </a:solidFill>
-                <a:latin typeface="Montserrat"/>
-              </a:rPr>
-              <a:t>•  </a:t>
+                  <a:srgbClr val="E8801A"/>
+                </a:solidFill>
+                <a:latin typeface="Montserrat"/>
+              </a:rPr>
+              <a:t>▸  </a:t>
             </a:r>
             <a:r>
               <a:rPr sz="1600" b="0" i="0">
@@ -9352,23 +10388,23 @@
                 </a:solidFill>
                 <a:latin typeface="Montserrat"/>
               </a:rPr>
-              <a:t>Parte 4 = plano de la obra</a:t>
+              <a:t>Instalaciones con MOP ≤ 5 bar</a:t>
             </a:r>
           </a:p>
           <a:p>
             <a:pPr>
               <a:spcAft>
-                <a:spcPts val="1000"/>
+                <a:spcPts val="1100"/>
               </a:spcAft>
             </a:pPr>
             <a:r>
               <a:rPr sz="1600" b="1" i="0">
                 <a:solidFill>
-                  <a:srgbClr val="2E3A80"/>
-                </a:solidFill>
-                <a:latin typeface="Montserrat"/>
-              </a:rPr>
-              <a:t>•  </a:t>
+                  <a:srgbClr val="E8801A"/>
+                </a:solidFill>
+                <a:latin typeface="Montserrat"/>
+              </a:rPr>
+              <a:t>▸  </a:t>
             </a:r>
             <a:r>
               <a:rPr sz="1600" b="0" i="0">
@@ -9377,14 +10413,14 @@
                 </a:solidFill>
                 <a:latin typeface="Montserrat"/>
               </a:rPr>
-              <a:t>Dónde y cómo se coloca</a:t>
-            </a:r>
-          </a:p>
-        </p:txBody>
-      </p:sp>
-      <p:sp>
-        <p:nvSpPr>
-          <p:cNvPr id="8" name="imgph" descr="IMGQ:warehouse copper pipes shelves storage"/>
+              <a:t>Diseñar, construir, probar, controlar</a:t>
+            </a:r>
+          </a:p>
+        </p:txBody>
+      </p:sp>
+      <p:sp>
+        <p:nvSpPr>
+          <p:cNvPr id="9" name="imgph" descr="IMGQ:gas pipe installation technician wall"/>
           <p:cNvSpPr/>
           <p:nvPr/>
         </p:nvSpPr>
@@ -9430,7 +10466,7 @@
       </p:sp>
       <p:sp>
         <p:nvSpPr>
-          <p:cNvPr id="9" name="TextBox 8"/>
+          <p:cNvPr id="10" name="TextBox 9"/>
           <p:cNvSpPr txBox="1"/>
           <p:nvPr/>
         </p:nvSpPr>
@@ -9470,7 +10506,7 @@
                 </a:solidFill>
                 <a:latin typeface="Montserrat"/>
               </a:rPr>
-              <a:t>warehouse copper pipes shelves storage</a:t>
+              <a:t>gas pipe installation technician wall</a:t>
             </a:r>
           </a:p>
         </p:txBody>
@@ -9567,7 +10603,7 @@
                 </a:solidFill>
                 <a:latin typeface="Montserrat"/>
               </a:rPr>
-              <a:t>005 / 017</a:t>
+              <a:t>005 / 018</a:t>
             </a:r>
           </a:p>
         </p:txBody>
@@ -9615,7 +10651,7 @@
         <p:spPr>
           <a:xfrm>
             <a:off x="822960" y="457200"/>
-            <a:ext cx="8229600" cy="365760"/>
+            <a:ext cx="10058400" cy="365760"/>
           </a:xfrm>
           <a:prstGeom prst="rect">
             <a:avLst/>
@@ -9629,13 +10665,13 @@
           <a:lstStyle/>
           <a:p>
             <a:r>
-              <a:rPr sz="1200" b="1" i="0">
-                <a:solidFill>
-                  <a:srgbClr val="64748B"/>
-                </a:solidFill>
-                <a:latin typeface="Montserrat"/>
-              </a:rPr>
-              <a:t>NOVEDADES DE LA EDICIÓN</a:t>
+              <a:rPr sz="1300" b="1" i="0">
+                <a:solidFill>
+                  <a:srgbClr val="E8801A"/>
+                </a:solidFill>
+                <a:latin typeface="Montserrat"/>
+              </a:rPr>
+              <a:t>NO LAS CONFUNDAS</a:t>
             </a:r>
           </a:p>
         </p:txBody>
@@ -9663,26 +10699,70 @@
           <a:lstStyle/>
           <a:p>
             <a:r>
-              <a:rPr sz="2700" b="1" i="0">
+              <a:rPr sz="2800" b="1" i="0">
                 <a:solidFill>
                   <a:srgbClr val="1E2761"/>
                 </a:solidFill>
                 <a:latin typeface="Montserrat"/>
               </a:rPr>
-              <a:t>Qué ha cambiado</a:t>
-            </a:r>
-          </a:p>
-        </p:txBody>
-      </p:sp>
-      <p:sp>
-        <p:nvSpPr>
-          <p:cNvPr id="7" name="TextBox 6"/>
+              <a:t>¿Parte 3 o Parte 4?</a:t>
+            </a:r>
+          </a:p>
+        </p:txBody>
+      </p:sp>
+      <p:sp>
+        <p:nvSpPr>
+          <p:cNvPr id="7" name="Rounded Rectangle 6"/>
+          <p:cNvSpPr/>
+          <p:nvPr/>
+        </p:nvSpPr>
+        <p:spPr>
+          <a:xfrm>
+            <a:off x="868680" y="1627632"/>
+            <a:ext cx="2011680" cy="73152"/>
+          </a:xfrm>
+          <a:prstGeom prst="roundRect">
+            <a:avLst/>
+          </a:prstGeom>
+          <a:solidFill>
+            <a:srgbClr val="E8801A"/>
+          </a:solidFill>
+          <a:ln>
+            <a:noFill/>
+          </a:ln>
+          <a:effectLst/>
+        </p:spPr>
+        <p:style>
+          <a:lnRef idx="1">
+            <a:schemeClr val="accent1"/>
+          </a:lnRef>
+          <a:fillRef idx="3">
+            <a:schemeClr val="accent1"/>
+          </a:fillRef>
+          <a:effectRef idx="2">
+            <a:schemeClr val="accent1"/>
+          </a:effectRef>
+          <a:fontRef idx="minor">
+            <a:schemeClr val="lt1"/>
+          </a:fontRef>
+        </p:style>
+        <p:txBody>
+          <a:bodyPr rtlCol="0" anchor="ctr"/>
+          <a:lstStyle/>
+          <a:p>
+            <a:pPr algn="ctr"/>
+          </a:p>
+        </p:txBody>
+      </p:sp>
+      <p:sp>
+        <p:nvSpPr>
+          <p:cNvPr id="8" name="TextBox 7"/>
           <p:cNvSpPr txBox="1"/>
           <p:nvPr/>
         </p:nvSpPr>
         <p:spPr>
           <a:xfrm>
-            <a:off x="822960" y="1920240"/>
+            <a:off x="822960" y="1965960"/>
             <a:ext cx="4983480" cy="4206240"/>
           </a:xfrm>
           <a:prstGeom prst="rect">
@@ -9698,17 +10778,17 @@
           <a:p>
             <a:pPr>
               <a:spcAft>
-                <a:spcPts val="1000"/>
+                <a:spcPts val="1100"/>
               </a:spcAft>
             </a:pPr>
             <a:r>
               <a:rPr sz="1600" b="1" i="0">
                 <a:solidFill>
-                  <a:srgbClr val="2E3A80"/>
-                </a:solidFill>
-                <a:latin typeface="Montserrat"/>
-              </a:rPr>
-              <a:t>•  </a:t>
+                  <a:srgbClr val="E8801A"/>
+                </a:solidFill>
+                <a:latin typeface="Montserrat"/>
+              </a:rPr>
+              <a:t>▸  </a:t>
             </a:r>
             <a:r>
               <a:rPr sz="1600" b="0" i="0">
@@ -9717,23 +10797,23 @@
                 </a:solidFill>
                 <a:latin typeface="Montserrat"/>
               </a:rPr>
-              <a:t>Multicapa: limitador de caudal y de temperatura</a:t>
+              <a:t>Parte 3 = almacén de materiales</a:t>
             </a:r>
           </a:p>
           <a:p>
             <a:pPr>
               <a:spcAft>
-                <a:spcPts val="1000"/>
+                <a:spcPts val="1100"/>
               </a:spcAft>
             </a:pPr>
             <a:r>
               <a:rPr sz="1600" b="1" i="0">
                 <a:solidFill>
-                  <a:srgbClr val="2E3A80"/>
-                </a:solidFill>
-                <a:latin typeface="Montserrat"/>
-              </a:rPr>
-              <a:t>•  </a:t>
+                  <a:srgbClr val="E8801A"/>
+                </a:solidFill>
+                <a:latin typeface="Montserrat"/>
+              </a:rPr>
+              <a:t>▸  </a:t>
             </a:r>
             <a:r>
               <a:rPr sz="1600" b="0" i="0">
@@ -9742,23 +10822,23 @@
                 </a:solidFill>
                 <a:latin typeface="Montserrat"/>
               </a:rPr>
-              <a:t>Se admite el tallo PE-multicapa</a:t>
+              <a:t>Qué tubo, válvula o unión usar</a:t>
             </a:r>
           </a:p>
           <a:p>
             <a:pPr>
               <a:spcAft>
-                <a:spcPts val="1000"/>
+                <a:spcPts val="1100"/>
               </a:spcAft>
             </a:pPr>
             <a:r>
               <a:rPr sz="1600" b="1" i="0">
                 <a:solidFill>
-                  <a:srgbClr val="2E3A80"/>
-                </a:solidFill>
-                <a:latin typeface="Montserrat"/>
-              </a:rPr>
-              <a:t>•  </a:t>
+                  <a:srgbClr val="E8801A"/>
+                </a:solidFill>
+                <a:latin typeface="Montserrat"/>
+              </a:rPr>
+              <a:t>▸  </a:t>
             </a:r>
             <a:r>
               <a:rPr sz="1600" b="0" i="0">
@@ -9767,23 +10847,23 @@
                 </a:solidFill>
                 <a:latin typeface="Montserrat"/>
               </a:rPr>
-              <a:t>UNE-EN 16129 unifica reguladores de GLP</a:t>
+              <a:t>Parte 4 = plano de la obra</a:t>
             </a:r>
           </a:p>
           <a:p>
             <a:pPr>
               <a:spcAft>
-                <a:spcPts val="1000"/>
+                <a:spcPts val="1100"/>
               </a:spcAft>
             </a:pPr>
             <a:r>
               <a:rPr sz="1600" b="1" i="0">
                 <a:solidFill>
-                  <a:srgbClr val="2E3A80"/>
-                </a:solidFill>
-                <a:latin typeface="Montserrat"/>
-              </a:rPr>
-              <a:t>•  </a:t>
+                  <a:srgbClr val="E8801A"/>
+                </a:solidFill>
+                <a:latin typeface="Montserrat"/>
+              </a:rPr>
+              <a:t>▸  </a:t>
             </a:r>
             <a:r>
               <a:rPr sz="1600" b="0" i="0">
@@ -9792,14 +10872,14 @@
                 </a:solidFill>
                 <a:latin typeface="Montserrat"/>
               </a:rPr>
-              <a:t>Fuera el autobloqueo en llaves de aparato</a:t>
-            </a:r>
-          </a:p>
-        </p:txBody>
-      </p:sp>
-      <p:sp>
-        <p:nvSpPr>
-          <p:cNvPr id="8" name="imgph" descr="IMGQ:multilayer pex pipe cutaway aluminium"/>
+              <a:t>Dónde y cómo se coloca</a:t>
+            </a:r>
+          </a:p>
+        </p:txBody>
+      </p:sp>
+      <p:sp>
+        <p:nvSpPr>
+          <p:cNvPr id="9" name="imgph" descr="IMGQ:warehouse copper pipes shelves storage"/>
           <p:cNvSpPr/>
           <p:nvPr/>
         </p:nvSpPr>
@@ -9845,7 +10925,7 @@
       </p:sp>
       <p:sp>
         <p:nvSpPr>
-          <p:cNvPr id="9" name="TextBox 8"/>
+          <p:cNvPr id="10" name="TextBox 9"/>
           <p:cNvSpPr txBox="1"/>
           <p:nvPr/>
         </p:nvSpPr>
@@ -9885,7 +10965,7 @@
                 </a:solidFill>
                 <a:latin typeface="Montserrat"/>
               </a:rPr>
-              <a:t>multilayer pex pipe cutaway aluminium</a:t>
+              <a:t>warehouse copper pipes shelves storage</a:t>
             </a:r>
           </a:p>
         </p:txBody>
@@ -9982,7 +11062,7 @@
                 </a:solidFill>
                 <a:latin typeface="Montserrat"/>
               </a:rPr>
-              <a:t>006 / 017</a:t>
+              <a:t>006 / 018</a:t>
             </a:r>
           </a:p>
         </p:txBody>
@@ -10030,7 +11110,7 @@
         <p:spPr>
           <a:xfrm>
             <a:off x="822960" y="457200"/>
-            <a:ext cx="8229600" cy="365760"/>
+            <a:ext cx="10058400" cy="365760"/>
           </a:xfrm>
           <a:prstGeom prst="rect">
             <a:avLst/>
@@ -10044,13 +11124,13 @@
           <a:lstStyle/>
           <a:p>
             <a:r>
-              <a:rPr sz="1200" b="1" i="0">
-                <a:solidFill>
-                  <a:srgbClr val="64748B"/>
-                </a:solidFill>
-                <a:latin typeface="Montserrat"/>
-              </a:rPr>
-              <a:t>OBJETO Y CAMPO</a:t>
+              <a:rPr sz="1300" b="1" i="0">
+                <a:solidFill>
+                  <a:srgbClr val="E8801A"/>
+                </a:solidFill>
+                <a:latin typeface="Montserrat"/>
+              </a:rPr>
+              <a:t>NOVEDADES DE LA EDICIÓN</a:t>
             </a:r>
           </a:p>
         </p:txBody>
@@ -10078,26 +11158,70 @@
           <a:lstStyle/>
           <a:p>
             <a:r>
-              <a:rPr sz="2700" b="1" i="0">
+              <a:rPr sz="2800" b="1" i="0">
                 <a:solidFill>
                   <a:srgbClr val="1E2761"/>
                 </a:solidFill>
                 <a:latin typeface="Montserrat"/>
               </a:rPr>
-              <a:t>Para qué sirve esta parte</a:t>
-            </a:r>
-          </a:p>
-        </p:txBody>
-      </p:sp>
-      <p:sp>
-        <p:nvSpPr>
-          <p:cNvPr id="7" name="TextBox 6"/>
+              <a:t>Qué ha cambiado</a:t>
+            </a:r>
+          </a:p>
+        </p:txBody>
+      </p:sp>
+      <p:sp>
+        <p:nvSpPr>
+          <p:cNvPr id="7" name="Rounded Rectangle 6"/>
+          <p:cNvSpPr/>
+          <p:nvPr/>
+        </p:nvSpPr>
+        <p:spPr>
+          <a:xfrm>
+            <a:off x="868680" y="1627632"/>
+            <a:ext cx="2011680" cy="73152"/>
+          </a:xfrm>
+          <a:prstGeom prst="roundRect">
+            <a:avLst/>
+          </a:prstGeom>
+          <a:solidFill>
+            <a:srgbClr val="E8801A"/>
+          </a:solidFill>
+          <a:ln>
+            <a:noFill/>
+          </a:ln>
+          <a:effectLst/>
+        </p:spPr>
+        <p:style>
+          <a:lnRef idx="1">
+            <a:schemeClr val="accent1"/>
+          </a:lnRef>
+          <a:fillRef idx="3">
+            <a:schemeClr val="accent1"/>
+          </a:fillRef>
+          <a:effectRef idx="2">
+            <a:schemeClr val="accent1"/>
+          </a:effectRef>
+          <a:fontRef idx="minor">
+            <a:schemeClr val="lt1"/>
+          </a:fontRef>
+        </p:style>
+        <p:txBody>
+          <a:bodyPr rtlCol="0" anchor="ctr"/>
+          <a:lstStyle/>
+          <a:p>
+            <a:pPr algn="ctr"/>
+          </a:p>
+        </p:txBody>
+      </p:sp>
+      <p:sp>
+        <p:nvSpPr>
+          <p:cNvPr id="8" name="TextBox 7"/>
           <p:cNvSpPr txBox="1"/>
           <p:nvPr/>
         </p:nvSpPr>
         <p:spPr>
           <a:xfrm>
-            <a:off x="822960" y="1920240"/>
+            <a:off x="822960" y="1965960"/>
             <a:ext cx="4983480" cy="4206240"/>
           </a:xfrm>
           <a:prstGeom prst="rect">
@@ -10113,17 +11237,17 @@
           <a:p>
             <a:pPr>
               <a:spcAft>
-                <a:spcPts val="1000"/>
+                <a:spcPts val="1100"/>
               </a:spcAft>
             </a:pPr>
             <a:r>
               <a:rPr sz="1600" b="1" i="0">
                 <a:solidFill>
-                  <a:srgbClr val="2E3A80"/>
-                </a:solidFill>
-                <a:latin typeface="Montserrat"/>
-              </a:rPr>
-              <a:t>•  </a:t>
+                  <a:srgbClr val="E8801A"/>
+                </a:solidFill>
+                <a:latin typeface="Montserrat"/>
+              </a:rPr>
+              <a:t>▸  </a:t>
             </a:r>
             <a:r>
               <a:rPr sz="1600" b="0" i="0">
@@ -10132,23 +11256,23 @@
                 </a:solidFill>
                 <a:latin typeface="Montserrat"/>
               </a:rPr>
-              <a:t>Condiciones de tuberías, elementos y accesorios</a:t>
+              <a:t>Multicapa: limitador de caudal y de temperatura</a:t>
             </a:r>
           </a:p>
           <a:p>
             <a:pPr>
               <a:spcAft>
-                <a:spcPts val="1000"/>
+                <a:spcPts val="1100"/>
               </a:spcAft>
             </a:pPr>
             <a:r>
               <a:rPr sz="1600" b="1" i="0">
                 <a:solidFill>
-                  <a:srgbClr val="2E3A80"/>
-                </a:solidFill>
-                <a:latin typeface="Montserrat"/>
-              </a:rPr>
-              <a:t>•  </a:t>
+                  <a:srgbClr val="E8801A"/>
+                </a:solidFill>
+                <a:latin typeface="Montserrat"/>
+              </a:rPr>
+              <a:t>▸  </a:t>
             </a:r>
             <a:r>
               <a:rPr sz="1600" b="0" i="0">
@@ -10157,23 +11281,23 @@
                 </a:solidFill>
                 <a:latin typeface="Montserrat"/>
               </a:rPr>
-              <a:t>Y también de sus uniones</a:t>
+              <a:t>Se admite el tallo PE-multicapa</a:t>
             </a:r>
           </a:p>
           <a:p>
             <a:pPr>
               <a:spcAft>
-                <a:spcPts val="1000"/>
+                <a:spcPts val="1100"/>
               </a:spcAft>
             </a:pPr>
             <a:r>
               <a:rPr sz="1600" b="1" i="0">
                 <a:solidFill>
-                  <a:srgbClr val="2E3A80"/>
-                </a:solidFill>
-                <a:latin typeface="Montserrat"/>
-              </a:rPr>
-              <a:t>•  </a:t>
+                  <a:srgbClr val="E8801A"/>
+                </a:solidFill>
+                <a:latin typeface="Montserrat"/>
+              </a:rPr>
+              <a:t>▸  </a:t>
             </a:r>
             <a:r>
               <a:rPr sz="1600" b="0" i="0">
@@ -10182,23 +11306,23 @@
                 </a:solidFill>
                 <a:latin typeface="Montserrat"/>
               </a:rPr>
-              <a:t>Para construir la instalación receptora</a:t>
+              <a:t>UNE-EN 16129 unifica reguladores de GLP</a:t>
             </a:r>
           </a:p>
           <a:p>
             <a:pPr>
               <a:spcAft>
-                <a:spcPts val="1000"/>
+                <a:spcPts val="1100"/>
               </a:spcAft>
             </a:pPr>
             <a:r>
               <a:rPr sz="1600" b="1" i="0">
                 <a:solidFill>
-                  <a:srgbClr val="2E3A80"/>
-                </a:solidFill>
-                <a:latin typeface="Montserrat"/>
-              </a:rPr>
-              <a:t>•  </a:t>
+                  <a:srgbClr val="E8801A"/>
+                </a:solidFill>
+                <a:latin typeface="Montserrat"/>
+              </a:rPr>
+              <a:t>▸  </a:t>
             </a:r>
             <a:r>
               <a:rPr sz="1600" b="0" i="0">
@@ -10207,14 +11331,14 @@
                 </a:solidFill>
                 <a:latin typeface="Montserrat"/>
               </a:rPr>
-              <a:t>Y para conectar los aparatos</a:t>
-            </a:r>
-          </a:p>
-        </p:txBody>
-      </p:sp>
-      <p:sp>
-        <p:nvSpPr>
-          <p:cNvPr id="8" name="imgph" descr="IMGQ:gas pipe fittings copper elbow parts"/>
+              <a:t>Fuera el autobloqueo en llaves de aparato</a:t>
+            </a:r>
+          </a:p>
+        </p:txBody>
+      </p:sp>
+      <p:sp>
+        <p:nvSpPr>
+          <p:cNvPr id="9" name="imgph" descr="IMGQ:multilayer pex pipe cutaway aluminium"/>
           <p:cNvSpPr/>
           <p:nvPr/>
         </p:nvSpPr>
@@ -10260,7 +11384,7 @@
       </p:sp>
       <p:sp>
         <p:nvSpPr>
-          <p:cNvPr id="9" name="TextBox 8"/>
+          <p:cNvPr id="10" name="TextBox 9"/>
           <p:cNvSpPr txBox="1"/>
           <p:nvPr/>
         </p:nvSpPr>
@@ -10300,7 +11424,7 @@
                 </a:solidFill>
                 <a:latin typeface="Montserrat"/>
               </a:rPr>
-              <a:t>gas pipe fittings copper elbow parts</a:t>
+              <a:t>multilayer pex pipe cutaway aluminium</a:t>
             </a:r>
           </a:p>
         </p:txBody>
@@ -10397,7 +11521,7 @@
                 </a:solidFill>
                 <a:latin typeface="Montserrat"/>
               </a:rPr>
-              <a:t>007 / 017</a:t>
+              <a:t>007 / 018</a:t>
             </a:r>
           </a:p>
         </p:txBody>
@@ -10445,7 +11569,7 @@
         <p:spPr>
           <a:xfrm>
             <a:off x="822960" y="457200"/>
-            <a:ext cx="8229600" cy="365760"/>
+            <a:ext cx="10058400" cy="365760"/>
           </a:xfrm>
           <a:prstGeom prst="rect">
             <a:avLst/>
@@ -10459,13 +11583,13 @@
           <a:lstStyle/>
           <a:p>
             <a:r>
-              <a:rPr sz="1200" b="1" i="0">
-                <a:solidFill>
-                  <a:srgbClr val="64748B"/>
-                </a:solidFill>
-                <a:latin typeface="Montserrat"/>
-              </a:rPr>
-              <a:t>REQUISITO BÁSICO</a:t>
+              <a:rPr sz="1300" b="1" i="0">
+                <a:solidFill>
+                  <a:srgbClr val="E8801A"/>
+                </a:solidFill>
+                <a:latin typeface="Montserrat"/>
+              </a:rPr>
+              <a:t>OBJETO Y CAMPO</a:t>
             </a:r>
           </a:p>
         </p:txBody>
@@ -10493,26 +11617,70 @@
           <a:lstStyle/>
           <a:p>
             <a:r>
-              <a:rPr sz="2700" b="1" i="0">
+              <a:rPr sz="2800" b="1" i="0">
                 <a:solidFill>
                   <a:srgbClr val="1E2761"/>
                 </a:solidFill>
                 <a:latin typeface="Montserrat"/>
               </a:rPr>
-              <a:t>La regla madre del material</a:t>
-            </a:r>
-          </a:p>
-        </p:txBody>
-      </p:sp>
-      <p:sp>
-        <p:nvSpPr>
-          <p:cNvPr id="7" name="TextBox 6"/>
+              <a:t>Para qué sirve esta parte</a:t>
+            </a:r>
+          </a:p>
+        </p:txBody>
+      </p:sp>
+      <p:sp>
+        <p:nvSpPr>
+          <p:cNvPr id="7" name="Rounded Rectangle 6"/>
+          <p:cNvSpPr/>
+          <p:nvPr/>
+        </p:nvSpPr>
+        <p:spPr>
+          <a:xfrm>
+            <a:off x="868680" y="1627632"/>
+            <a:ext cx="2011680" cy="73152"/>
+          </a:xfrm>
+          <a:prstGeom prst="roundRect">
+            <a:avLst/>
+          </a:prstGeom>
+          <a:solidFill>
+            <a:srgbClr val="E8801A"/>
+          </a:solidFill>
+          <a:ln>
+            <a:noFill/>
+          </a:ln>
+          <a:effectLst/>
+        </p:spPr>
+        <p:style>
+          <a:lnRef idx="1">
+            <a:schemeClr val="accent1"/>
+          </a:lnRef>
+          <a:fillRef idx="3">
+            <a:schemeClr val="accent1"/>
+          </a:fillRef>
+          <a:effectRef idx="2">
+            <a:schemeClr val="accent1"/>
+          </a:effectRef>
+          <a:fontRef idx="minor">
+            <a:schemeClr val="lt1"/>
+          </a:fontRef>
+        </p:style>
+        <p:txBody>
+          <a:bodyPr rtlCol="0" anchor="ctr"/>
+          <a:lstStyle/>
+          <a:p>
+            <a:pPr algn="ctr"/>
+          </a:p>
+        </p:txBody>
+      </p:sp>
+      <p:sp>
+        <p:nvSpPr>
+          <p:cNvPr id="8" name="TextBox 7"/>
           <p:cNvSpPr txBox="1"/>
           <p:nvPr/>
         </p:nvSpPr>
         <p:spPr>
           <a:xfrm>
-            <a:off x="822960" y="1920240"/>
+            <a:off x="822960" y="1965960"/>
             <a:ext cx="4983480" cy="4206240"/>
           </a:xfrm>
           <a:prstGeom prst="rect">
@@ -10528,17 +11696,17 @@
           <a:p>
             <a:pPr>
               <a:spcAft>
-                <a:spcPts val="1000"/>
+                <a:spcPts val="1100"/>
               </a:spcAft>
             </a:pPr>
             <a:r>
               <a:rPr sz="1600" b="1" i="0">
                 <a:solidFill>
-                  <a:srgbClr val="2E3A80"/>
-                </a:solidFill>
-                <a:latin typeface="Montserrat"/>
-              </a:rPr>
-              <a:t>•  </a:t>
+                  <a:srgbClr val="E8801A"/>
+                </a:solidFill>
+                <a:latin typeface="Montserrat"/>
+              </a:rPr>
+              <a:t>▸  </a:t>
             </a:r>
             <a:r>
               <a:rPr sz="1600" b="0" i="0">
@@ -10547,23 +11715,23 @@
                 </a:solidFill>
                 <a:latin typeface="Montserrat"/>
               </a:rPr>
-              <a:t>Ni lo daña el gas por dentro</a:t>
+              <a:t>Condiciones de tuberías, elementos y accesorios</a:t>
             </a:r>
           </a:p>
           <a:p>
             <a:pPr>
               <a:spcAft>
-                <a:spcPts val="1000"/>
+                <a:spcPts val="1100"/>
               </a:spcAft>
             </a:pPr>
             <a:r>
               <a:rPr sz="1600" b="1" i="0">
                 <a:solidFill>
-                  <a:srgbClr val="2E3A80"/>
-                </a:solidFill>
-                <a:latin typeface="Montserrat"/>
-              </a:rPr>
-              <a:t>•  </a:t>
+                  <a:srgbClr val="E8801A"/>
+                </a:solidFill>
+                <a:latin typeface="Montserrat"/>
+              </a:rPr>
+              <a:t>▸  </a:t>
             </a:r>
             <a:r>
               <a:rPr sz="1600" b="0" i="0">
@@ -10572,23 +11740,23 @@
                 </a:solidFill>
                 <a:latin typeface="Montserrat"/>
               </a:rPr>
-              <a:t>Ni el medio exterior por fuera</a:t>
+              <a:t>Y también de sus uniones</a:t>
             </a:r>
           </a:p>
           <a:p>
             <a:pPr>
               <a:spcAft>
-                <a:spcPts val="1000"/>
+                <a:spcPts val="1100"/>
               </a:spcAft>
             </a:pPr>
             <a:r>
               <a:rPr sz="1600" b="1" i="0">
                 <a:solidFill>
-                  <a:srgbClr val="2E3A80"/>
-                </a:solidFill>
-                <a:latin typeface="Montserrat"/>
-              </a:rPr>
-              <a:t>•  </a:t>
+                  <a:srgbClr val="E8801A"/>
+                </a:solidFill>
+                <a:latin typeface="Montserrat"/>
+              </a:rPr>
+              <a:t>▸  </a:t>
             </a:r>
             <a:r>
               <a:rPr sz="1600" b="0" i="0">
@@ -10597,23 +11765,23 @@
                 </a:solidFill>
                 <a:latin typeface="Montserrat"/>
               </a:rPr>
-              <a:t>Si el ambiente ataca: recubrimiento</a:t>
+              <a:t>Para construir la instalación receptora</a:t>
             </a:r>
           </a:p>
           <a:p>
             <a:pPr>
               <a:spcAft>
-                <a:spcPts val="1000"/>
+                <a:spcPts val="1100"/>
               </a:spcAft>
             </a:pPr>
             <a:r>
               <a:rPr sz="1600" b="1" i="0">
                 <a:solidFill>
-                  <a:srgbClr val="2E3A80"/>
-                </a:solidFill>
-                <a:latin typeface="Montserrat"/>
-              </a:rPr>
-              <a:t>•  </a:t>
+                  <a:srgbClr val="E8801A"/>
+                </a:solidFill>
+                <a:latin typeface="Montserrat"/>
+              </a:rPr>
+              <a:t>▸  </a:t>
             </a:r>
             <a:r>
               <a:rPr sz="1600" b="0" i="0">
@@ -10622,14 +11790,14 @@
                 </a:solidFill>
                 <a:latin typeface="Montserrat"/>
               </a:rPr>
-              <a:t>Siempre con Marcado CE</a:t>
-            </a:r>
-          </a:p>
-        </p:txBody>
-      </p:sp>
-      <p:sp>
-        <p:nvSpPr>
-          <p:cNvPr id="8" name="imgph" descr="IMGQ:corroded rusty metal pipe underground"/>
+              <a:t>Y para conectar los aparatos</a:t>
+            </a:r>
+          </a:p>
+        </p:txBody>
+      </p:sp>
+      <p:sp>
+        <p:nvSpPr>
+          <p:cNvPr id="9" name="imgph" descr="IMGQ:gas pipe fittings copper elbow parts"/>
           <p:cNvSpPr/>
           <p:nvPr/>
         </p:nvSpPr>
@@ -10675,7 +11843,7 @@
       </p:sp>
       <p:sp>
         <p:nvSpPr>
-          <p:cNvPr id="9" name="TextBox 8"/>
+          <p:cNvPr id="10" name="TextBox 9"/>
           <p:cNvSpPr txBox="1"/>
           <p:nvPr/>
         </p:nvSpPr>
@@ -10715,7 +11883,7 @@
                 </a:solidFill>
                 <a:latin typeface="Montserrat"/>
               </a:rPr>
-              <a:t>corroded rusty metal pipe underground</a:t>
+              <a:t>gas pipe fittings copper elbow parts</a:t>
             </a:r>
           </a:p>
         </p:txBody>
@@ -10812,7 +11980,7 @@
                 </a:solidFill>
                 <a:latin typeface="Montserrat"/>
               </a:rPr>
-              <a:t>008 / 017</a:t>
+              <a:t>008 / 018</a:t>
             </a:r>
           </a:p>
         </p:txBody>
@@ -10860,7 +12028,7 @@
         <p:spPr>
           <a:xfrm>
             <a:off x="822960" y="457200"/>
-            <a:ext cx="8229600" cy="365760"/>
+            <a:ext cx="10058400" cy="365760"/>
           </a:xfrm>
           <a:prstGeom prst="rect">
             <a:avLst/>
@@ -10874,13 +12042,13 @@
           <a:lstStyle/>
           <a:p>
             <a:r>
-              <a:rPr sz="1200" b="1" i="0">
-                <a:solidFill>
-                  <a:srgbClr val="64748B"/>
-                </a:solidFill>
-                <a:latin typeface="Montserrat"/>
-              </a:rPr>
-              <a:t>MATERIALES · POLIETILENO</a:t>
+              <a:rPr sz="1300" b="1" i="0">
+                <a:solidFill>
+                  <a:srgbClr val="E8801A"/>
+                </a:solidFill>
+                <a:latin typeface="Montserrat"/>
+              </a:rPr>
+              <a:t>REQUISITO BÁSICO</a:t>
             </a:r>
           </a:p>
         </p:txBody>
@@ -10908,26 +12076,70 @@
           <a:lstStyle/>
           <a:p>
             <a:r>
-              <a:rPr sz="2700" b="1" i="0">
+              <a:rPr sz="2800" b="1" i="0">
                 <a:solidFill>
                   <a:srgbClr val="1E2761"/>
                 </a:solidFill>
                 <a:latin typeface="Montserrat"/>
               </a:rPr>
-              <a:t>Polietileno: para enterrar</a:t>
-            </a:r>
-          </a:p>
-        </p:txBody>
-      </p:sp>
-      <p:sp>
-        <p:nvSpPr>
-          <p:cNvPr id="7" name="TextBox 6"/>
+              <a:t>La regla madre del material</a:t>
+            </a:r>
+          </a:p>
+        </p:txBody>
+      </p:sp>
+      <p:sp>
+        <p:nvSpPr>
+          <p:cNvPr id="7" name="Rounded Rectangle 6"/>
+          <p:cNvSpPr/>
+          <p:nvPr/>
+        </p:nvSpPr>
+        <p:spPr>
+          <a:xfrm>
+            <a:off x="868680" y="1627632"/>
+            <a:ext cx="2011680" cy="73152"/>
+          </a:xfrm>
+          <a:prstGeom prst="roundRect">
+            <a:avLst/>
+          </a:prstGeom>
+          <a:solidFill>
+            <a:srgbClr val="E8801A"/>
+          </a:solidFill>
+          <a:ln>
+            <a:noFill/>
+          </a:ln>
+          <a:effectLst/>
+        </p:spPr>
+        <p:style>
+          <a:lnRef idx="1">
+            <a:schemeClr val="accent1"/>
+          </a:lnRef>
+          <a:fillRef idx="3">
+            <a:schemeClr val="accent1"/>
+          </a:fillRef>
+          <a:effectRef idx="2">
+            <a:schemeClr val="accent1"/>
+          </a:effectRef>
+          <a:fontRef idx="minor">
+            <a:schemeClr val="lt1"/>
+          </a:fontRef>
+        </p:style>
+        <p:txBody>
+          <a:bodyPr rtlCol="0" anchor="ctr"/>
+          <a:lstStyle/>
+          <a:p>
+            <a:pPr algn="ctr"/>
+          </a:p>
+        </p:txBody>
+      </p:sp>
+      <p:sp>
+        <p:nvSpPr>
+          <p:cNvPr id="8" name="TextBox 7"/>
           <p:cNvSpPr txBox="1"/>
           <p:nvPr/>
         </p:nvSpPr>
         <p:spPr>
           <a:xfrm>
-            <a:off x="822960" y="1920240"/>
+            <a:off x="822960" y="1965960"/>
             <a:ext cx="4983480" cy="4206240"/>
           </a:xfrm>
           <a:prstGeom prst="rect">
@@ -10943,17 +12155,17 @@
           <a:p>
             <a:pPr>
               <a:spcAft>
-                <a:spcPts val="1000"/>
+                <a:spcPts val="1100"/>
               </a:spcAft>
             </a:pPr>
             <a:r>
               <a:rPr sz="1600" b="1" i="0">
                 <a:solidFill>
-                  <a:srgbClr val="2E3A80"/>
-                </a:solidFill>
-                <a:latin typeface="Montserrat"/>
-              </a:rPr>
-              <a:t>•  </a:t>
+                  <a:srgbClr val="E8801A"/>
+                </a:solidFill>
+                <a:latin typeface="Montserrat"/>
+              </a:rPr>
+              <a:t>▸  </a:t>
             </a:r>
             <a:r>
               <a:rPr sz="1600" b="0" i="0">
@@ -10962,23 +12174,23 @@
                 </a:solidFill>
                 <a:latin typeface="Montserrat"/>
               </a:rPr>
-              <a:t>Calidad PE 80 o PE 100 (UNE-EN 1555)</a:t>
+              <a:t>Ni lo daña el gas por dentro</a:t>
             </a:r>
           </a:p>
           <a:p>
             <a:pPr>
               <a:spcAft>
-                <a:spcPts val="1000"/>
+                <a:spcPts val="1100"/>
               </a:spcAft>
             </a:pPr>
             <a:r>
               <a:rPr sz="1600" b="1" i="0">
                 <a:solidFill>
-                  <a:srgbClr val="2E3A80"/>
-                </a:solidFill>
-                <a:latin typeface="Montserrat"/>
-              </a:rPr>
-              <a:t>•  </a:t>
+                  <a:srgbClr val="E8801A"/>
+                </a:solidFill>
+                <a:latin typeface="Montserrat"/>
+              </a:rPr>
+              <a:t>▸  </a:t>
             </a:r>
             <a:r>
               <a:rPr sz="1600" b="0" i="0">
@@ -10987,23 +12199,23 @@
                 </a:solidFill>
                 <a:latin typeface="Montserrat"/>
               </a:rPr>
-              <a:t>Solo enterrado o en vaina</a:t>
+              <a:t>Ni el medio exterior por fuera</a:t>
             </a:r>
           </a:p>
           <a:p>
             <a:pPr>
               <a:spcAft>
-                <a:spcPts val="1000"/>
+                <a:spcPts val="1100"/>
               </a:spcAft>
             </a:pPr>
             <a:r>
               <a:rPr sz="1600" b="1" i="0">
                 <a:solidFill>
-                  <a:srgbClr val="2E3A80"/>
-                </a:solidFill>
-                <a:latin typeface="Montserrat"/>
-              </a:rPr>
-              <a:t>•  </a:t>
+                  <a:srgbClr val="E8801A"/>
+                </a:solidFill>
+                <a:latin typeface="Montserrat"/>
+              </a:rPr>
+              <a:t>▸  </a:t>
             </a:r>
             <a:r>
               <a:rPr sz="1600" b="0" i="0">
@@ -11012,23 +12224,23 @@
                 </a:solidFill>
                 <a:latin typeface="Montserrat"/>
               </a:rPr>
-              <a:t>El sol lo agrieta</a:t>
+              <a:t>Si el ambiente ataca: recubrimiento</a:t>
             </a:r>
           </a:p>
           <a:p>
             <a:pPr>
               <a:spcAft>
-                <a:spcPts val="1000"/>
+                <a:spcPts val="1100"/>
               </a:spcAft>
             </a:pPr>
             <a:r>
               <a:rPr sz="1600" b="1" i="0">
                 <a:solidFill>
-                  <a:srgbClr val="2E3A80"/>
-                </a:solidFill>
-                <a:latin typeface="Montserrat"/>
-              </a:rPr>
-              <a:t>•  </a:t>
+                  <a:srgbClr val="E8801A"/>
+                </a:solidFill>
+                <a:latin typeface="Montserrat"/>
+              </a:rPr>
+              <a:t>▸  </a:t>
             </a:r>
             <a:r>
               <a:rPr sz="1600" b="0" i="0">
@@ -11037,14 +12249,14 @@
                 </a:solidFill>
                 <a:latin typeface="Montserrat"/>
               </a:rPr>
-              <a:t>PE = Para Enterrar</a:t>
-            </a:r>
-          </a:p>
-        </p:txBody>
-      </p:sp>
-      <p:sp>
-        <p:nvSpPr>
-          <p:cNvPr id="8" name="imgph" descr="IMGQ:black polyethylene gas pipe trench ground"/>
+              <a:t>Siempre con Marcado CE</a:t>
+            </a:r>
+          </a:p>
+        </p:txBody>
+      </p:sp>
+      <p:sp>
+        <p:nvSpPr>
+          <p:cNvPr id="9" name="imgph" descr="IMGQ:corroded rusty metal pipe underground"/>
           <p:cNvSpPr/>
           <p:nvPr/>
         </p:nvSpPr>
@@ -11090,7 +12302,7 @@
       </p:sp>
       <p:sp>
         <p:nvSpPr>
-          <p:cNvPr id="9" name="TextBox 8"/>
+          <p:cNvPr id="10" name="TextBox 9"/>
           <p:cNvSpPr txBox="1"/>
           <p:nvPr/>
         </p:nvSpPr>
@@ -11130,7 +12342,7 @@
                 </a:solidFill>
                 <a:latin typeface="Montserrat"/>
               </a:rPr>
-              <a:t>black polyethylene gas pipe trench ground</a:t>
+              <a:t>corroded rusty metal pipe underground</a:t>
             </a:r>
           </a:p>
         </p:txBody>
@@ -11227,7 +12439,7 @@
                 </a:solidFill>
                 <a:latin typeface="Montserrat"/>
               </a:rPr>
-              <a:t>009 / 017</a:t>
+              <a:t>009 / 018</a:t>
             </a:r>
           </a:p>
         </p:txBody>
@@ -11275,7 +12487,7 @@
         <p:spPr>
           <a:xfrm>
             <a:off x="822960" y="457200"/>
-            <a:ext cx="8229600" cy="365760"/>
+            <a:ext cx="10058400" cy="365760"/>
           </a:xfrm>
           <a:prstGeom prst="rect">
             <a:avLst/>
@@ -11289,13 +12501,13 @@
           <a:lstStyle/>
           <a:p>
             <a:r>
-              <a:rPr sz="1200" b="1" i="0">
-                <a:solidFill>
-                  <a:srgbClr val="64748B"/>
-                </a:solidFill>
-                <a:latin typeface="Montserrat"/>
-              </a:rPr>
-              <a:t>MATERIALES · COBRE</a:t>
+              <a:rPr sz="1300" b="1" i="0">
+                <a:solidFill>
+                  <a:srgbClr val="E8801A"/>
+                </a:solidFill>
+                <a:latin typeface="Montserrat"/>
+              </a:rPr>
+              <a:t>MATERIALES · POLIETILENO</a:t>
             </a:r>
           </a:p>
         </p:txBody>
@@ -11323,26 +12535,70 @@
           <a:lstStyle/>
           <a:p>
             <a:r>
-              <a:rPr sz="2700" b="1" i="0">
+              <a:rPr sz="2800" b="1" i="0">
                 <a:solidFill>
                   <a:srgbClr val="1E2761"/>
                 </a:solidFill>
                 <a:latin typeface="Montserrat"/>
               </a:rPr>
-              <a:t>Cobre: el tubo noble</a:t>
-            </a:r>
-          </a:p>
-        </p:txBody>
-      </p:sp>
-      <p:sp>
-        <p:nvSpPr>
-          <p:cNvPr id="7" name="TextBox 6"/>
+              <a:t>Polietileno: para enterrar</a:t>
+            </a:r>
+          </a:p>
+        </p:txBody>
+      </p:sp>
+      <p:sp>
+        <p:nvSpPr>
+          <p:cNvPr id="7" name="Rounded Rectangle 6"/>
+          <p:cNvSpPr/>
+          <p:nvPr/>
+        </p:nvSpPr>
+        <p:spPr>
+          <a:xfrm>
+            <a:off x="868680" y="1627632"/>
+            <a:ext cx="2011680" cy="73152"/>
+          </a:xfrm>
+          <a:prstGeom prst="roundRect">
+            <a:avLst/>
+          </a:prstGeom>
+          <a:solidFill>
+            <a:srgbClr val="E8801A"/>
+          </a:solidFill>
+          <a:ln>
+            <a:noFill/>
+          </a:ln>
+          <a:effectLst/>
+        </p:spPr>
+        <p:style>
+          <a:lnRef idx="1">
+            <a:schemeClr val="accent1"/>
+          </a:lnRef>
+          <a:fillRef idx="3">
+            <a:schemeClr val="accent1"/>
+          </a:fillRef>
+          <a:effectRef idx="2">
+            <a:schemeClr val="accent1"/>
+          </a:effectRef>
+          <a:fontRef idx="minor">
+            <a:schemeClr val="lt1"/>
+          </a:fontRef>
+        </p:style>
+        <p:txBody>
+          <a:bodyPr rtlCol="0" anchor="ctr"/>
+          <a:lstStyle/>
+          <a:p>
+            <a:pPr algn="ctr"/>
+          </a:p>
+        </p:txBody>
+      </p:sp>
+      <p:sp>
+        <p:nvSpPr>
+          <p:cNvPr id="8" name="TextBox 7"/>
           <p:cNvSpPr txBox="1"/>
           <p:nvPr/>
         </p:nvSpPr>
         <p:spPr>
           <a:xfrm>
-            <a:off x="822960" y="1920240"/>
+            <a:off x="822960" y="1965960"/>
             <a:ext cx="4983480" cy="4206240"/>
           </a:xfrm>
           <a:prstGeom prst="rect">
@@ -11358,17 +12614,17 @@
           <a:p>
             <a:pPr>
               <a:spcAft>
-                <a:spcPts val="1000"/>
+                <a:spcPts val="1100"/>
               </a:spcAft>
             </a:pPr>
             <a:r>
               <a:rPr sz="1600" b="1" i="0">
                 <a:solidFill>
-                  <a:srgbClr val="2E3A80"/>
-                </a:solidFill>
-                <a:latin typeface="Montserrat"/>
-              </a:rPr>
-              <a:t>•  </a:t>
+                  <a:srgbClr val="E8801A"/>
+                </a:solidFill>
+                <a:latin typeface="Montserrat"/>
+              </a:rPr>
+              <a:t>▸  </a:t>
             </a:r>
             <a:r>
               <a:rPr sz="1600" b="0" i="0">
@@ -11377,23 +12633,23 @@
                 </a:solidFill>
                 <a:latin typeface="Montserrat"/>
               </a:rPr>
-              <a:t>Redondo de precisión, sin soldadura</a:t>
+              <a:t>Calidad PE 80 o PE 100 (UNE-EN 1555)</a:t>
             </a:r>
           </a:p>
           <a:p>
             <a:pPr>
               <a:spcAft>
-                <a:spcPts val="1000"/>
+                <a:spcPts val="1100"/>
               </a:spcAft>
             </a:pPr>
             <a:r>
               <a:rPr sz="1600" b="1" i="0">
                 <a:solidFill>
-                  <a:srgbClr val="2E3A80"/>
-                </a:solidFill>
-                <a:latin typeface="Montserrat"/>
-              </a:rPr>
-              <a:t>•  </a:t>
+                  <a:srgbClr val="E8801A"/>
+                </a:solidFill>
+                <a:latin typeface="Montserrat"/>
+              </a:rPr>
+              <a:t>▸  </a:t>
             </a:r>
             <a:r>
               <a:rPr sz="1600" b="0" i="0">
@@ -11402,23 +12658,23 @@
                 </a:solidFill>
                 <a:latin typeface="Montserrat"/>
               </a:rPr>
-              <a:t>Tipo Cu-DHP (UNE-EN 1057)</a:t>
+              <a:t>Solo enterrado o en vaina</a:t>
             </a:r>
           </a:p>
           <a:p>
             <a:pPr>
               <a:spcAft>
-                <a:spcPts val="1000"/>
+                <a:spcPts val="1100"/>
               </a:spcAft>
             </a:pPr>
             <a:r>
               <a:rPr sz="1600" b="1" i="0">
                 <a:solidFill>
-                  <a:srgbClr val="2E3A80"/>
-                </a:solidFill>
-                <a:latin typeface="Montserrat"/>
-              </a:rPr>
-              <a:t>•  </a:t>
+                  <a:srgbClr val="E8801A"/>
+                </a:solidFill>
+                <a:latin typeface="Montserrat"/>
+              </a:rPr>
+              <a:t>▸  </a:t>
             </a:r>
             <a:r>
               <a:rPr sz="1600" b="0" i="0">
@@ -11427,23 +12683,23 @@
                 </a:solidFill>
                 <a:latin typeface="Montserrat"/>
               </a:rPr>
-              <a:t>Estado duro o recocido en rollo</a:t>
+              <a:t>El sol lo agrieta</a:t>
             </a:r>
           </a:p>
           <a:p>
             <a:pPr>
               <a:spcAft>
-                <a:spcPts val="1000"/>
+                <a:spcPts val="1100"/>
               </a:spcAft>
             </a:pPr>
             <a:r>
               <a:rPr sz="1600" b="1" i="0">
                 <a:solidFill>
-                  <a:srgbClr val="2E3A80"/>
-                </a:solidFill>
-                <a:latin typeface="Montserrat"/>
-              </a:rPr>
-              <a:t>•  </a:t>
+                  <a:srgbClr val="E8801A"/>
+                </a:solidFill>
+                <a:latin typeface="Montserrat"/>
+              </a:rPr>
+              <a:t>▸  </a:t>
             </a:r>
             <a:r>
               <a:rPr sz="1600" b="0" i="0">
@@ -11452,14 +12708,14 @@
                 </a:solidFill>
                 <a:latin typeface="Montserrat"/>
               </a:rPr>
-              <a:t>Sus piezas, por soldadura capilar</a:t>
-            </a:r>
-          </a:p>
-        </p:txBody>
-      </p:sp>
-      <p:sp>
-        <p:nvSpPr>
-          <p:cNvPr id="8" name="imgph" descr="IMGQ:copper pipe coil hard drawn tube"/>
+              <a:t>PE = Para Enterrar</a:t>
+            </a:r>
+          </a:p>
+        </p:txBody>
+      </p:sp>
+      <p:sp>
+        <p:nvSpPr>
+          <p:cNvPr id="9" name="imgph" descr="IMGQ:black polyethylene gas pipe trench ground"/>
           <p:cNvSpPr/>
           <p:nvPr/>
         </p:nvSpPr>
@@ -11505,7 +12761,7 @@
       </p:sp>
       <p:sp>
         <p:nvSpPr>
-          <p:cNvPr id="9" name="TextBox 8"/>
+          <p:cNvPr id="10" name="TextBox 9"/>
           <p:cNvSpPr txBox="1"/>
           <p:nvPr/>
         </p:nvSpPr>
@@ -11545,7 +12801,7 @@
                 </a:solidFill>
                 <a:latin typeface="Montserrat"/>
               </a:rPr>
-              <a:t>copper pipe coil hard drawn tube</a:t>
+              <a:t>black polyethylene gas pipe trench ground</a:t>
             </a:r>
           </a:p>
         </p:txBody>

--- a/Curso Gas B/10 - UNE 60670 - Tuberias, accesorios y uniones/10 - UNE 60670 - Tuberias, accesorios y uniones - Vídeo 1.pptx
+++ b/Curso Gas B/10 - UNE 60670 - Tuberias, accesorios y uniones/10 - UNE 60670 - Tuberias, accesorios y uniones - Vídeo 1.pptx
@@ -23,6 +23,10 @@
     <p:sldId id="271" r:id="rId23"/>
     <p:sldId id="272" r:id="rId24"/>
     <p:sldId id="273" r:id="rId25"/>
+    <p:sldId id="274" r:id="rId26"/>
+    <p:sldId id="275" r:id="rId27"/>
+    <p:sldId id="276" r:id="rId28"/>
+    <p:sldId id="277" r:id="rId29"/>
   </p:sldIdLst>
   <p:sldSz cx="12191695" cy="6858000" type="screen4x3"/>
   <p:notesSz cx="6858000" cy="9144000"/>
@@ -744,12 +748,12 @@
           <a:lstStyle/>
           <a:p>
             <a:r>
-              <a:t>N1: Duro y recocido... ¿y cómo curvo cada uno sin cargármelo?</a:t>
-            </a:r>
-          </a:p>
-          <a:p>
-            <a:r>
-              <a:t>N2: Vamos por partes. El cobre duro viene tieso, en barra, así que para doblarlo necesitas una máquina curvadora, manual o eléctrica. El recocido viene blando, en rollo, y ese lo doblas casi a mano con un muelle curvatubos, que es una espiral que metes para que el tubo no se aplaste. La clave, y vale para los dos, es que la curva quede lisa, sin arrugas ni pliegues. Y aquí el detalle que encanta preguntar: nunca se usa mandril interno. El mandril es una pieza que se mete dentro del tubo para curvar chapa gruesa, pero en el cobre de gas está prohibido. ¿Por qué? Porque arruga y estrangula el tubo por dentro, y un estrangulamiento deja al aparato sin caudal: llama pobre, mala combustión y avería. Curva limpia y sin mandril: esa es la consigna.</a:t>
+              <a:t>N1: Va la primera, y esta cae en el examen casi seguro. ¿Qué espesor mínimo pide el cobre cuando va enterrado?</a:t>
+            </a:r>
+          </a:p>
+          <a:p>
+            <a:r>
+              <a:t>N2: Piensa en que bajo tierra el tubo lo pasa peor; ¿le pedirás la misma pared que a uno visto, o un poco más?</a:t>
             </a:r>
           </a:p>
         </p:txBody>
@@ -819,12 +823,12 @@
           <a:lstStyle/>
           <a:p>
             <a:r>
-              <a:t>N1: ¿Y el acero? ¿hasta dónde se puede curvar?</a:t>
-            </a:r>
-          </a:p>
-          <a:p>
-            <a:r>
-              <a:t>N2: El acero es el tubo de toda la vida para el gas visto en interior, el negro roscado que has visto mil veces. Se fabrica de dos maneras válidas: sin costura, o con una soldadura a lo largo del tubo, siempre según la norma diez mil doscientos cincuenta y cinco. Lo que más se pregunta es el límite del curvado: se curva en frío con máquina, pero preferentemente solo hasta dos pulgadas de diámetro. ¿Por qué ese tope? Porque a partir de ahí el tubo es tan gordo que curvarlo en frío lo deforma; para esos diámetros grandes se usan codos ya fabricados. Sus piezas van soldadas o roscadas, cada una con su norma. Y un aviso: el acero enterrado sin proteger se lo come el terreno en nada, así que fuera siempre con su recubrimiento. Ah, y aquí también, mandril interno prohibido.</a:t>
+              <a:t>N1: ¿Por qué el grueso mayor y no el fino?</a:t>
+            </a:r>
+          </a:p>
+          <a:p>
+            <a:r>
+              <a:t>N2: Porque enterrado hay presión del terreno y corrosión, así que se le pide medio milímetro más de pared. El truco para no fallar: enterrado, medio milímetro más gordo. El otro espesor es para todo lo demás.</a:t>
             </a:r>
           </a:p>
         </p:txBody>
@@ -894,12 +898,12 @@
           <a:lstStyle/>
           <a:p>
             <a:r>
-              <a:t>N1: ¿Cuándo compensa el inoxidable en vez del acero normal?</a:t>
-            </a:r>
-          </a:p>
-          <a:p>
-            <a:r>
-              <a:t>N2: Cuando el ambiente es agresivo y quieres que el tubo aguante sin oxidarse. Por eso la norma dice algo muy lógico: el tipo de inoxidable se elige según las condiciones del sitio. No es lo mismo un local seco de interior que una instalación a pie de costa, donde el salitre ataca, o una zona industrial con humos. A más agresividad, un inoxidable de más categoría. El dato numérico que te pueden pedir es el apellido: Serie dos. Tanto el tubo como sus accesorios de presión trabajan con la Serie dos, según la norma diez mil trescientos doce. Así que si te preguntan qué serie de inoxidable se usa, la respuesta es la dos; grábate ese número y ese apellido.</a:t>
+              <a:t>N1: Duro y recocido... ¿y cómo curvo cada uno sin cargármelo?</a:t>
+            </a:r>
+          </a:p>
+          <a:p>
+            <a:r>
+              <a:t>N2: Vamos por partes. El cobre duro viene tieso, en barra, así que para doblarlo necesitas una máquina curvadora, manual o eléctrica. El recocido viene blando, en rollo, y ese lo doblas casi a mano con un muelle curvatubos, que es una espiral que metes para que el tubo no se aplaste. La clave, y vale para los dos, es que la curva quede lisa, sin arrugas ni pliegues. Y aquí el detalle que encanta preguntar: nunca se usa mandril interno. El mandril es una pieza que se mete dentro del tubo para curvar chapa gruesa, pero en el cobre de gas está prohibido. ¿Por qué? Porque arruga y estrangula el tubo por dentro, y un estrangulamiento deja al aparato sin caudal: llama pobre, mala combustión y avería. Curva limpia y sin mandril: esa es la consigna.</a:t>
             </a:r>
           </a:p>
         </p:txBody>
@@ -969,12 +973,12 @@
           <a:lstStyle/>
           <a:p>
             <a:r>
-              <a:t>N1: ¿Qué es eso del multicapa y por qué lleva limitadores obligatorios?</a:t>
-            </a:r>
-          </a:p>
-          <a:p>
-            <a:r>
-              <a:t>N2: Imagínate el corte del tubo y lo entiendes de golpe: es un sándwich de tres capas, plástico por dentro, una lámina de aluminio en medio y plástico por fuera. De ahí el nombre, polímero-aluminio-polímero. Es ligero y rápido de montar, pero tiene una debilidad: aguanta mal el calor. Si se le acerca una fuente caliente, se reblandece. Por eso la norma le exige siempre dos piezas de seguridad: un limitador de caudal, que corta si sale más gas del previsto, y un limitador de temperatura, que corta si el tubo se calienta de más. Y aquí viene la trampa de examen: son obligatorios con independencia de la longitud del tramo. Aunque el trozo de multicapa sea de un palmo, van sus dos limitadores. Todo esto según la norma cincuenta y tres mil ocho.</a:t>
+              <a:t>N1: ¿Y el acero? ¿hasta dónde se puede curvar?</a:t>
+            </a:r>
+          </a:p>
+          <a:p>
+            <a:r>
+              <a:t>N2: El acero es el tubo de toda la vida para el gas visto en interior, el negro roscado que has visto mil veces. Se fabrica de dos maneras válidas: sin costura, o con una soldadura a lo largo del tubo, siempre según la norma diez mil doscientos cincuenta y cinco. Lo que más se pregunta es el límite del curvado: se curva en frío con máquina, pero preferentemente solo hasta dos pulgadas de diámetro. ¿Por qué ese tope? Porque a partir de ahí el tubo es tan gordo que curvarlo en frío lo deforma; para esos diámetros grandes se usan codos ya fabricados. Sus piezas van soldadas o roscadas, cada una con su norma. Y un aviso: el acero enterrado sin proteger se lo come el terreno en nada, así que fuera siempre con su recubrimiento. Ah, y aquí también, mandril interno prohibido.</a:t>
             </a:r>
           </a:p>
         </p:txBody>
@@ -1044,12 +1048,12 @@
           <a:lstStyle/>
           <a:p>
             <a:r>
-              <a:t>N1: El tubo amarillo con forma de acordeón, ¿ese cuál es?</a:t>
-            </a:r>
-          </a:p>
-          <a:p>
-            <a:r>
-              <a:t>N2: Ese es el acero inoxidable corrugado, y cada vez se ve más en viviendas porque se monta rapidísimo: es flexible y lo llevas por rincones donde el tubo rígido no entra. Fíjate en que tiene dos capas, y esto es lo que se pregunta. La de dentro es el acero inoxidable ondulado, el acordeón, y es la que aguanta, la que hace de estructura y resiste la presión. La de fuera es una funda de protección, normalmente ese plástico amarillo, que lo defiende de golpes y del ambiente. Estructura por dentro, protección por fuera. Su norma es la quince mil doscientos sesenta y seis. Si te describen 'un tubo de dos capas, una estructural corrugada y otra externa de protección', están hablando de este.</a:t>
+              <a:t>N1: ¿Cuándo compensa el inoxidable en vez del acero normal?</a:t>
+            </a:r>
+          </a:p>
+          <a:p>
+            <a:r>
+              <a:t>N2: Cuando el ambiente es agresivo y quieres que el tubo aguante sin oxidarse. Por eso la norma dice algo muy lógico: el tipo de inoxidable se elige según las condiciones del sitio. No es lo mismo un local seco de interior que una instalación a pie de costa, donde el salitre ataca, o una zona industrial con humos. A más agresividad, un inoxidable de más categoría. El dato numérico que te pueden pedir es el apellido: Serie dos. Tanto el tubo como sus accesorios de presión trabajan con la Serie dos, según la norma diez mil trescientos doce. Así que si te preguntan qué serie de inoxidable se usa, la respuesta es la dos; grábate ese número y ese apellido.</a:t>
             </a:r>
           </a:p>
         </p:txBody>
@@ -1119,12 +1123,12 @@
           <a:lstStyle/>
           <a:p>
             <a:r>
-              <a:t>N1: ¿Qué es exactamente una vaina y de qué tiene que ser?</a:t>
-            </a:r>
-          </a:p>
-          <a:p>
-            <a:r>
-              <a:t>N2: La vaina es la funda del tubo de gas: un tubo más ancho por dentro del cual pasa el de gas cuando cruza un muro o una zona comprometida, para protegerlo. Junto a ella van los conductos y los pasamuros, que hacen esa misma labor al atravesar una pared. Aquí la norma no te da un material único, y eso a veces despista. Lo que dice es que sea el adecuado a su función: pueden ser metálicas, de plástico, de obra... según para qué sirvan. El detalle concreto de cuándo va cada una lo remite a la parte cuatro, la del plano de obra. Y un cierre útil: además de los seis materiales de tubo que hemos visto, se admite cualquier otro que acepte la norma mil setecientos setenta y cinco. La idea con la que quedarte: la vaina protege al tubo, y su material depende del trabajo que haga.</a:t>
+              <a:t>N1: ¿Qué es eso del multicapa y por qué lleva limitadores obligatorios?</a:t>
+            </a:r>
+          </a:p>
+          <a:p>
+            <a:r>
+              <a:t>N2: Imagínate el corte del tubo y lo entiendes de golpe: es un sándwich de tres capas, plástico por dentro, una lámina de aluminio en medio y plástico por fuera. De ahí el nombre, polímero-aluminio-polímero. Es ligero y rápido de montar, pero tiene una debilidad: aguanta mal el calor. Si se le acerca una fuente caliente, se reblandece. Por eso la norma le exige siempre dos piezas de seguridad: un limitador de caudal, que corta si sale más gas del previsto, y un limitador de temperatura, que corta si el tubo se calienta de más. Y aquí viene la trampa de examen: son obligatorios con independencia de la longitud del tramo. Aunque el trozo de multicapa sea de un palmo, van sus dos limitadores. Todo esto según la norma cincuenta y tres mil ocho.</a:t>
             </a:r>
           </a:p>
         </p:txBody>
@@ -1194,22 +1198,87 @@
           <a:lstStyle/>
           <a:p>
             <a:r>
-              <a:t>N1: Cerramos el primer vídeo. Si me quedo con lo esencial, ¿qué me llevo?</a:t>
-            </a:r>
-          </a:p>
-          <a:p>
-            <a:r>
-              <a:t>N2: Reconstruyamos el hilo, que así se te queda solo. Empezamos entendiendo que esta parte, la tres, es el almacén de materiales de la norma del gas, para instalaciones de hasta cinco bar. Luego fuimos material por material, y cada uno tiene su porqué. El polietileno, Para Enterrar, porque el sol lo mata. El cobre, con sus dos espesores, un milímetro para lo normal y uno coma cinco para lo enterrado, porque bajo tierra sufre más, y siempre sin mandril interno para no estrangularlo. El acero, curvado hasta dos pulgadas y protegido si va enterrado. El inoxidable de Serie dos, elegido según lo agresivo del ambiente. El multicapa, ese sándwich que siempre lleva sus dos limitadores porque aguanta mal el calor. Y el corrugado, de dos capas, una que aguanta y otra que protege.</a:t>
-            </a:r>
-          </a:p>
-          <a:p>
-            <a:r>
-              <a:t>N1: ¿Y cómo cae esto en el examen y en la obra?</a:t>
-            </a:r>
-          </a:p>
-          <a:p>
-            <a:r>
-              <a:t>N2: En el examen te lo cruzan: te dan un espesor, una norma o una serie y tienes que decir si es correcto; con lo de hoy, esas las tienes ganadas. Y en la obra decide que la instalación pase la prueba de estanquidad a la primera y que el boletín, el certificado que firma la empresa instaladora, no te salga con defectos. Hoy ya eres más gasista que ayer: sabes elegir el tubo. En el siguiente vídeo damos el salto a los elementos que se intercalan en ese tubo, los reguladores, los contadores, las válvulas y las llaves. Te espero allí.</a:t>
+              <a:t>N1: Segunda pregunta, y lleva trampa. Los dos limitadores del multicapa, ¿cuándo hay que ponerlos?</a:t>
+            </a:r>
+          </a:p>
+          <a:p>
+            <a:r>
+              <a:t>N2: Ojo, que la norma usa una expresión muy concreta sobre la longitud; ¿te suena aquello de 'con independencia de'?</a:t>
+            </a:r>
+          </a:p>
+        </p:txBody>
+      </p:sp>
+      <p:sp>
+        <p:nvSpPr>
+          <p:cNvPr id="4" name="Slide Number Placeholder 3"/>
+          <p:cNvSpPr>
+            <a:spLocks noGrp="1"/>
+          </p:cNvSpPr>
+          <p:nvPr>
+            <p:ph type="sldNum" idx="5" sz="quarter"/>
+          </p:nvPr>
+        </p:nvSpPr>
+        <p:spPr/>
+      </p:sp>
+    </p:spTree>
+  </p:cSld>
+  <p:clrMapOvr>
+    <a:masterClrMapping/>
+  </p:clrMapOvr>
+</p:notes>
+</file>
+
+<file path=ppt/notesSlides/notesSlide19.xml><?xml version="1.0" encoding="utf-8"?>
+<p:notes xmlns:a="http://schemas.openxmlformats.org/drawingml/2006/main" xmlns:p="http://schemas.openxmlformats.org/presentationml/2006/main" xmlns:r="http://schemas.openxmlformats.org/officeDocument/2006/relationships">
+  <p:cSld>
+    <p:spTree>
+      <p:nvGrpSpPr>
+        <p:cNvPr id="1" name=""/>
+        <p:cNvGrpSpPr/>
+        <p:nvPr/>
+      </p:nvGrpSpPr>
+      <p:grpSpPr>
+        <a:xfrm>
+          <a:off x="0" y="0"/>
+          <a:ext cx="0" cy="0"/>
+          <a:chOff x="0" y="0"/>
+          <a:chExt cx="0" cy="0"/>
+        </a:xfrm>
+      </p:grpSpPr>
+      <p:sp>
+        <p:nvSpPr>
+          <p:cNvPr id="2" name="Slide Image Placeholder 1"/>
+          <p:cNvSpPr>
+            <a:spLocks noGrp="1"/>
+          </p:cNvSpPr>
+          <p:nvPr>
+            <p:ph type="sldImg" idx="2"/>
+          </p:nvPr>
+        </p:nvSpPr>
+        <p:spPr/>
+      </p:sp>
+      <p:sp>
+        <p:nvSpPr>
+          <p:cNvPr id="3" name="Notes Placeholder 2"/>
+          <p:cNvSpPr>
+            <a:spLocks noGrp="1"/>
+          </p:cNvSpPr>
+          <p:nvPr>
+            <p:ph type="body" idx="3" sz="quarter"/>
+          </p:nvPr>
+        </p:nvSpPr>
+        <p:spPr/>
+        <p:txBody>
+          <a:bodyPr/>
+          <a:lstStyle/>
+          <a:p>
+            <a:r>
+              <a:t>N1: ¿Por qué siempre y no solo en tramos largos?</a:t>
+            </a:r>
+          </a:p>
+          <a:p>
+            <a:r>
+              <a:t>N2: Porque el multicapa se reblandece con el calor, y esos limitadores son su red de seguridad. La norma lo deja claro: van sea cual sea la longitud, aunque el tramo mida un palmo. Si una respuesta dice 'solo en tramos largos', es falsa.</a:t>
             </a:r>
           </a:p>
         </p:txBody>
@@ -1285,6 +1354,241 @@
           <a:p>
             <a:r>
               <a:t>N2: Menos del que parece, y te doy tres balizas para orientarte. La primera: la norma madre, la seis-cero-seis-siete-cero, se parte en trece cuadernillos, y el que estudiamos es el tercero, el de materiales. La segunda: todo esto vale para instalaciones de hasta cinco bar de presión máxima; por encima ya es otro mundo. Y la tercera: de tubería solo se admiten seis materiales, ni uno más. Si te agarras a esos tres números, ya tienes el mapa; el resto es rellenar detalles. Fíjate en que ninguno es una fecha: son datos de oficio, de los que caen en el examen.</a:t>
+            </a:r>
+          </a:p>
+        </p:txBody>
+      </p:sp>
+      <p:sp>
+        <p:nvSpPr>
+          <p:cNvPr id="4" name="Slide Number Placeholder 3"/>
+          <p:cNvSpPr>
+            <a:spLocks noGrp="1"/>
+          </p:cNvSpPr>
+          <p:nvPr>
+            <p:ph type="sldNum" idx="5" sz="quarter"/>
+          </p:nvPr>
+        </p:nvSpPr>
+        <p:spPr/>
+      </p:sp>
+    </p:spTree>
+  </p:cSld>
+  <p:clrMapOvr>
+    <a:masterClrMapping/>
+  </p:clrMapOvr>
+</p:notes>
+</file>
+
+<file path=ppt/notesSlides/notesSlide20.xml><?xml version="1.0" encoding="utf-8"?>
+<p:notes xmlns:a="http://schemas.openxmlformats.org/drawingml/2006/main" xmlns:p="http://schemas.openxmlformats.org/presentationml/2006/main" xmlns:r="http://schemas.openxmlformats.org/officeDocument/2006/relationships">
+  <p:cSld>
+    <p:spTree>
+      <p:nvGrpSpPr>
+        <p:cNvPr id="1" name=""/>
+        <p:cNvGrpSpPr/>
+        <p:nvPr/>
+      </p:nvGrpSpPr>
+      <p:grpSpPr>
+        <a:xfrm>
+          <a:off x="0" y="0"/>
+          <a:ext cx="0" cy="0"/>
+          <a:chOff x="0" y="0"/>
+          <a:chExt cx="0" cy="0"/>
+        </a:xfrm>
+      </p:grpSpPr>
+      <p:sp>
+        <p:nvSpPr>
+          <p:cNvPr id="2" name="Slide Image Placeholder 1"/>
+          <p:cNvSpPr>
+            <a:spLocks noGrp="1"/>
+          </p:cNvSpPr>
+          <p:nvPr>
+            <p:ph type="sldImg" idx="2"/>
+          </p:nvPr>
+        </p:nvSpPr>
+        <p:spPr/>
+      </p:sp>
+      <p:sp>
+        <p:nvSpPr>
+          <p:cNvPr id="3" name="Notes Placeholder 2"/>
+          <p:cNvSpPr>
+            <a:spLocks noGrp="1"/>
+          </p:cNvSpPr>
+          <p:nvPr>
+            <p:ph type="body" idx="3" sz="quarter"/>
+          </p:nvPr>
+        </p:nvSpPr>
+        <p:spPr/>
+        <p:txBody>
+          <a:bodyPr/>
+          <a:lstStyle/>
+          <a:p>
+            <a:r>
+              <a:t>N1: El tubo amarillo con forma de acordeón, ¿ese cuál es?</a:t>
+            </a:r>
+          </a:p>
+          <a:p>
+            <a:r>
+              <a:t>N2: Ese es el acero inoxidable corrugado, y cada vez se ve más en viviendas porque se monta rapidísimo: es flexible y lo llevas por rincones donde el tubo rígido no entra. Fíjate en que tiene dos capas, y esto es lo que se pregunta. La de dentro es el acero inoxidable ondulado, el acordeón, y es la que aguanta, la que hace de estructura y resiste la presión. La de fuera es una funda de protección, normalmente ese plástico amarillo, que lo defiende de golpes y del ambiente. Estructura por dentro, protección por fuera. Su norma es la quince mil doscientos sesenta y seis. Si te describen 'un tubo de dos capas, una estructural corrugada y otra externa de protección', están hablando de este.</a:t>
+            </a:r>
+          </a:p>
+        </p:txBody>
+      </p:sp>
+      <p:sp>
+        <p:nvSpPr>
+          <p:cNvPr id="4" name="Slide Number Placeholder 3"/>
+          <p:cNvSpPr>
+            <a:spLocks noGrp="1"/>
+          </p:cNvSpPr>
+          <p:nvPr>
+            <p:ph type="sldNum" idx="5" sz="quarter"/>
+          </p:nvPr>
+        </p:nvSpPr>
+        <p:spPr/>
+      </p:sp>
+    </p:spTree>
+  </p:cSld>
+  <p:clrMapOvr>
+    <a:masterClrMapping/>
+  </p:clrMapOvr>
+</p:notes>
+</file>
+
+<file path=ppt/notesSlides/notesSlide21.xml><?xml version="1.0" encoding="utf-8"?>
+<p:notes xmlns:a="http://schemas.openxmlformats.org/drawingml/2006/main" xmlns:p="http://schemas.openxmlformats.org/presentationml/2006/main" xmlns:r="http://schemas.openxmlformats.org/officeDocument/2006/relationships">
+  <p:cSld>
+    <p:spTree>
+      <p:nvGrpSpPr>
+        <p:cNvPr id="1" name=""/>
+        <p:cNvGrpSpPr/>
+        <p:nvPr/>
+      </p:nvGrpSpPr>
+      <p:grpSpPr>
+        <a:xfrm>
+          <a:off x="0" y="0"/>
+          <a:ext cx="0" cy="0"/>
+          <a:chOff x="0" y="0"/>
+          <a:chExt cx="0" cy="0"/>
+        </a:xfrm>
+      </p:grpSpPr>
+      <p:sp>
+        <p:nvSpPr>
+          <p:cNvPr id="2" name="Slide Image Placeholder 1"/>
+          <p:cNvSpPr>
+            <a:spLocks noGrp="1"/>
+          </p:cNvSpPr>
+          <p:nvPr>
+            <p:ph type="sldImg" idx="2"/>
+          </p:nvPr>
+        </p:nvSpPr>
+        <p:spPr/>
+      </p:sp>
+      <p:sp>
+        <p:nvSpPr>
+          <p:cNvPr id="3" name="Notes Placeholder 2"/>
+          <p:cNvSpPr>
+            <a:spLocks noGrp="1"/>
+          </p:cNvSpPr>
+          <p:nvPr>
+            <p:ph type="body" idx="3" sz="quarter"/>
+          </p:nvPr>
+        </p:nvSpPr>
+        <p:spPr/>
+        <p:txBody>
+          <a:bodyPr/>
+          <a:lstStyle/>
+          <a:p>
+            <a:r>
+              <a:t>N1: ¿Qué es exactamente una vaina y de qué tiene que ser?</a:t>
+            </a:r>
+          </a:p>
+          <a:p>
+            <a:r>
+              <a:t>N2: La vaina es la funda del tubo de gas: un tubo más ancho por dentro del cual pasa el de gas cuando cruza un muro o una zona comprometida, para protegerlo. Junto a ella van los conductos y los pasamuros, que hacen esa misma labor al atravesar una pared. Aquí la norma no te da un material único, y eso a veces despista. Lo que dice es que sea el adecuado a su función: pueden ser metálicas, de plástico, de obra... según para qué sirvan. El detalle concreto de cuándo va cada una lo remite a la parte cuatro, la del plano de obra. Y un cierre útil: además de los seis materiales de tubo que hemos visto, se admite cualquier otro que acepte la norma mil setecientos setenta y cinco. La idea con la que quedarte: la vaina protege al tubo, y su material depende del trabajo que haga.</a:t>
+            </a:r>
+          </a:p>
+        </p:txBody>
+      </p:sp>
+      <p:sp>
+        <p:nvSpPr>
+          <p:cNvPr id="4" name="Slide Number Placeholder 3"/>
+          <p:cNvSpPr>
+            <a:spLocks noGrp="1"/>
+          </p:cNvSpPr>
+          <p:nvPr>
+            <p:ph type="sldNum" idx="5" sz="quarter"/>
+          </p:nvPr>
+        </p:nvSpPr>
+        <p:spPr/>
+      </p:sp>
+    </p:spTree>
+  </p:cSld>
+  <p:clrMapOvr>
+    <a:masterClrMapping/>
+  </p:clrMapOvr>
+</p:notes>
+</file>
+
+<file path=ppt/notesSlides/notesSlide22.xml><?xml version="1.0" encoding="utf-8"?>
+<p:notes xmlns:a="http://schemas.openxmlformats.org/drawingml/2006/main" xmlns:p="http://schemas.openxmlformats.org/presentationml/2006/main" xmlns:r="http://schemas.openxmlformats.org/officeDocument/2006/relationships">
+  <p:cSld>
+    <p:spTree>
+      <p:nvGrpSpPr>
+        <p:cNvPr id="1" name=""/>
+        <p:cNvGrpSpPr/>
+        <p:nvPr/>
+      </p:nvGrpSpPr>
+      <p:grpSpPr>
+        <a:xfrm>
+          <a:off x="0" y="0"/>
+          <a:ext cx="0" cy="0"/>
+          <a:chOff x="0" y="0"/>
+          <a:chExt cx="0" cy="0"/>
+        </a:xfrm>
+      </p:grpSpPr>
+      <p:sp>
+        <p:nvSpPr>
+          <p:cNvPr id="2" name="Slide Image Placeholder 1"/>
+          <p:cNvSpPr>
+            <a:spLocks noGrp="1"/>
+          </p:cNvSpPr>
+          <p:nvPr>
+            <p:ph type="sldImg" idx="2"/>
+          </p:nvPr>
+        </p:nvSpPr>
+        <p:spPr/>
+      </p:sp>
+      <p:sp>
+        <p:nvSpPr>
+          <p:cNvPr id="3" name="Notes Placeholder 2"/>
+          <p:cNvSpPr>
+            <a:spLocks noGrp="1"/>
+          </p:cNvSpPr>
+          <p:nvPr>
+            <p:ph type="body" idx="3" sz="quarter"/>
+          </p:nvPr>
+        </p:nvSpPr>
+        <p:spPr/>
+        <p:txBody>
+          <a:bodyPr/>
+          <a:lstStyle/>
+          <a:p>
+            <a:r>
+              <a:t>N1: Cerramos el primer vídeo. Si me quedo con lo esencial, ¿qué me llevo?</a:t>
+            </a:r>
+          </a:p>
+          <a:p>
+            <a:r>
+              <a:t>N2: Reconstruyamos el hilo, que así se te queda solo. Empezamos entendiendo que esta parte, la tres, es el almacén de materiales de la norma del gas, para instalaciones de hasta cinco bar. Luego fuimos material por material, y cada uno tiene su porqué. El polietileno, Para Enterrar, porque el sol lo mata. El cobre, con sus dos espesores, un milímetro para lo normal y uno coma cinco para lo enterrado, porque bajo tierra sufre más, y siempre sin mandril interno para no estrangularlo. El acero, curvado hasta dos pulgadas y protegido si va enterrado. El inoxidable de Serie dos, elegido según lo agresivo del ambiente. El multicapa, ese sándwich que siempre lleva sus dos limitadores porque aguanta mal el calor. Y el corrugado, de dos capas, una que aguanta y otra que protege.</a:t>
+            </a:r>
+          </a:p>
+          <a:p>
+            <a:r>
+              <a:t>N1: ¿Y cómo cae esto en el examen y en la obra?</a:t>
+            </a:r>
+          </a:p>
+          <a:p>
+            <a:r>
+              <a:t>N2: En el examen te lo cruzan: te dan un espesor, una norma o una serie y tienes que decir si es correcto; con lo de hoy, esas las tienes ganadas. Y en la obra decide que la instalación pase la prueba de estanquidad a la primera y que el boletín, el certificado que firma la empresa instaladora, no te salga con defectos. Hoy ya eres más gasista que ayer: sabes elegir el tubo. En el siguiente vídeo damos el salto a los elementos que se intercalan en ese tubo, los reguladores, los contadores, las válvulas y las llaves. Te espero allí.</a:t>
             </a:r>
           </a:p>
         </p:txBody>
@@ -4886,7 +5190,7 @@
       </p:sp>
       <p:sp>
         <p:nvSpPr>
-          <p:cNvPr id="4" name="Rounded Rectangle 3"/>
+          <p:cNvPr id="4" name="Rectangle 3"/>
           <p:cNvSpPr/>
           <p:nvPr/>
         </p:nvSpPr>
@@ -4895,7 +5199,7 @@
             <a:off x="868680" y="2057400"/>
             <a:ext cx="1463040" cy="82296"/>
           </a:xfrm>
-          <a:prstGeom prst="roundRect">
+          <a:prstGeom prst="rect">
             <a:avLst/>
           </a:prstGeom>
           <a:solidFill>
@@ -5012,6 +5316,18 @@
   <p:clrMapOvr>
     <a:masterClrMapping/>
   </p:clrMapOvr>
+  <mc:AlternateContent xmlns:mc="http://schemas.openxmlformats.org/markup-compatibility/2006">
+    <mc:Choice xmlns:p14="http://schemas.microsoft.com/office/powerpoint/2010/main" Requires="p14">
+      <p:transition spd="med" p14:dur="700">
+        <p14:cube dir="l"/>
+      </p:transition>
+    </mc:Choice>
+    <mc:Fallback>
+      <p:transition spd="med">
+        <p:push dir="l"/>
+      </p:transition>
+    </mc:Fallback>
+  </mc:AlternateContent>
 </p:sld>
 </file>
 
@@ -5099,7 +5415,7 @@
                 </a:solidFill>
                 <a:latin typeface="Montserrat"/>
               </a:rPr>
-              <a:t>010 / 018</a:t>
+              <a:t>010 / 022</a:t>
             </a:r>
           </a:p>
         </p:txBody>
@@ -5208,7 +5524,7 @@
       </p:sp>
       <p:sp>
         <p:nvSpPr>
-          <p:cNvPr id="7" name="Rounded Rectangle 6"/>
+          <p:cNvPr id="7" name="Rectangle 6"/>
           <p:cNvSpPr/>
           <p:nvPr/>
         </p:nvSpPr>
@@ -5217,7 +5533,7 @@
             <a:off x="868680" y="1627632"/>
             <a:ext cx="2011680" cy="73152"/>
           </a:xfrm>
-          <a:prstGeom prst="roundRect">
+          <a:prstGeom prst="rect">
             <a:avLst/>
           </a:prstGeom>
           <a:solidFill>
@@ -5259,7 +5575,7 @@
         <p:spPr>
           <a:xfrm>
             <a:off x="822960" y="1965960"/>
-            <a:ext cx="4983480" cy="4206240"/>
+            <a:ext cx="5029200" cy="4206240"/>
           </a:xfrm>
           <a:prstGeom prst="rect">
             <a:avLst/>
@@ -5381,8 +5697,8 @@
         </p:nvSpPr>
         <p:spPr>
           <a:xfrm>
-            <a:off x="5806440" y="1051560"/>
-            <a:ext cx="5298947" cy="4629150"/>
+            <a:off x="6080760" y="1965960"/>
+            <a:ext cx="5303520" cy="4572000"/>
           </a:xfrm>
           <a:prstGeom prst="roundRect">
             <a:avLst/>
@@ -5427,8 +5743,8 @@
         </p:nvSpPr>
         <p:spPr>
           <a:xfrm>
-            <a:off x="6080760" y="2726055"/>
-            <a:ext cx="4750307" cy="1280160"/>
+            <a:off x="6355080" y="3611880"/>
+            <a:ext cx="4754880" cy="1280160"/>
           </a:xfrm>
           <a:prstGeom prst="rect">
             <a:avLst/>
@@ -5449,7 +5765,7 @@
                 </a:solidFill>
                 <a:latin typeface="Montserrat"/>
               </a:rPr>
-              <a:t>IMAGEN REALISTA</a:t>
+              <a:t>IMAGEN</a:t>
             </a:r>
           </a:p>
           <a:p>
@@ -5471,6 +5787,18 @@
   <p:clrMapOvr>
     <a:masterClrMapping/>
   </p:clrMapOvr>
+  <mc:AlternateContent xmlns:mc="http://schemas.openxmlformats.org/markup-compatibility/2006">
+    <mc:Choice xmlns:p14="http://schemas.microsoft.com/office/powerpoint/2010/main" Requires="p14">
+      <p:transition spd="med" p14:dur="700">
+        <p14:cube dir="r"/>
+      </p:transition>
+    </mc:Choice>
+    <mc:Fallback>
+      <p:transition spd="med">
+        <p:push dir="r"/>
+      </p:transition>
+    </mc:Fallback>
+  </mc:AlternateContent>
 </p:sld>
 </file>
 
@@ -5558,7 +5886,7 @@
                 </a:solidFill>
                 <a:latin typeface="Montserrat"/>
               </a:rPr>
-              <a:t>011 / 018</a:t>
+              <a:t>011 / 022</a:t>
             </a:r>
           </a:p>
         </p:txBody>
@@ -5667,7 +5995,7 @@
       </p:sp>
       <p:sp>
         <p:nvSpPr>
-          <p:cNvPr id="7" name="Rounded Rectangle 6"/>
+          <p:cNvPr id="7" name="Rectangle 6"/>
           <p:cNvSpPr/>
           <p:nvPr/>
         </p:nvSpPr>
@@ -5676,7 +6004,7 @@
             <a:off x="868680" y="1627632"/>
             <a:ext cx="2011680" cy="73152"/>
           </a:xfrm>
-          <a:prstGeom prst="roundRect">
+          <a:prstGeom prst="rect">
             <a:avLst/>
           </a:prstGeom>
           <a:solidFill>
@@ -5717,8 +6045,8 @@
         </p:nvSpPr>
         <p:spPr>
           <a:xfrm>
-            <a:off x="822960" y="1965960"/>
-            <a:ext cx="4983480" cy="4206240"/>
+            <a:off x="6355080" y="1965960"/>
+            <a:ext cx="5029200" cy="4206240"/>
           </a:xfrm>
           <a:prstGeom prst="rect">
             <a:avLst/>
@@ -5840,8 +6168,8 @@
         </p:nvSpPr>
         <p:spPr>
           <a:xfrm>
-            <a:off x="5806440" y="1051560"/>
-            <a:ext cx="5298947" cy="4629150"/>
+            <a:off x="822960" y="1965960"/>
+            <a:ext cx="5303520" cy="4572000"/>
           </a:xfrm>
           <a:prstGeom prst="roundRect">
             <a:avLst/>
@@ -5886,8 +6214,8 @@
         </p:nvSpPr>
         <p:spPr>
           <a:xfrm>
-            <a:off x="6080760" y="2726055"/>
-            <a:ext cx="4750307" cy="1280160"/>
+            <a:off x="1097280" y="3611880"/>
+            <a:ext cx="4754880" cy="1280160"/>
           </a:xfrm>
           <a:prstGeom prst="rect">
             <a:avLst/>
@@ -5908,7 +6236,7 @@
                 </a:solidFill>
                 <a:latin typeface="Montserrat"/>
               </a:rPr>
-              <a:t>IMAGEN REALISTA</a:t>
+              <a:t>IMAGEN</a:t>
             </a:r>
           </a:p>
           <a:p>
@@ -5930,6 +6258,18 @@
   <p:clrMapOvr>
     <a:masterClrMapping/>
   </p:clrMapOvr>
+  <mc:AlternateContent xmlns:mc="http://schemas.openxmlformats.org/markup-compatibility/2006">
+    <mc:Choice xmlns:p14="http://schemas.microsoft.com/office/powerpoint/2010/main" Requires="p14">
+      <p:transition spd="med" p14:dur="700">
+        <p14:cube dir="l"/>
+      </p:transition>
+    </mc:Choice>
+    <mc:Fallback>
+      <p:transition spd="med">
+        <p:push dir="l"/>
+      </p:transition>
+    </mc:Fallback>
+  </mc:AlternateContent>
 </p:sld>
 </file>
 
@@ -6017,7 +6357,7 @@
                 </a:solidFill>
                 <a:latin typeface="Montserrat"/>
               </a:rPr>
-              <a:t>012 / 018</a:t>
+              <a:t>012 / 022</a:t>
             </a:r>
           </a:p>
         </p:txBody>
@@ -6058,84 +6398,16 @@
       </p:sp>
       <p:sp>
         <p:nvSpPr>
-          <p:cNvPr id="5" name="TextBox 4"/>
-          <p:cNvSpPr txBox="1"/>
-          <p:nvPr/>
-        </p:nvSpPr>
-        <p:spPr>
-          <a:xfrm>
-            <a:off x="822960" y="457200"/>
-            <a:ext cx="10058400" cy="365760"/>
-          </a:xfrm>
-          <a:prstGeom prst="rect">
-            <a:avLst/>
-          </a:prstGeom>
-          <a:noFill/>
-        </p:spPr>
-        <p:txBody>
-          <a:bodyPr wrap="square">
-            <a:spAutoFit/>
-          </a:bodyPr>
-          <a:lstStyle/>
-          <a:p>
-            <a:r>
-              <a:rPr sz="1300" b="1" i="0">
-                <a:solidFill>
-                  <a:srgbClr val="E8801A"/>
-                </a:solidFill>
-                <a:latin typeface="Montserrat"/>
-              </a:rPr>
-              <a:t>MATERIALES · COBRE</a:t>
-            </a:r>
-          </a:p>
-        </p:txBody>
-      </p:sp>
-      <p:sp>
-        <p:nvSpPr>
-          <p:cNvPr id="6" name="TextBox 5"/>
-          <p:cNvSpPr txBox="1"/>
-          <p:nvPr/>
-        </p:nvSpPr>
-        <p:spPr>
-          <a:xfrm>
-            <a:off x="822960" y="868680"/>
-            <a:ext cx="10515600" cy="914400"/>
-          </a:xfrm>
-          <a:prstGeom prst="rect">
-            <a:avLst/>
-          </a:prstGeom>
-          <a:noFill/>
-        </p:spPr>
-        <p:txBody>
-          <a:bodyPr wrap="square">
-            <a:spAutoFit/>
-          </a:bodyPr>
-          <a:lstStyle/>
-          <a:p>
-            <a:r>
-              <a:rPr sz="2800" b="1" i="0">
-                <a:solidFill>
-                  <a:srgbClr val="1E2761"/>
-                </a:solidFill>
-                <a:latin typeface="Montserrat"/>
-              </a:rPr>
-              <a:t>Duro, recocido y curvado</a:t>
-            </a:r>
-          </a:p>
-        </p:txBody>
-      </p:sp>
-      <p:sp>
-        <p:nvSpPr>
-          <p:cNvPr id="7" name="Rounded Rectangle 6"/>
+          <p:cNvPr id="5" name="Rectangle 4"/>
           <p:cNvSpPr/>
           <p:nvPr/>
         </p:nvSpPr>
         <p:spPr>
           <a:xfrm>
-            <a:off x="868680" y="1627632"/>
-            <a:ext cx="2011680" cy="73152"/>
-          </a:xfrm>
-          <a:prstGeom prst="roundRect">
+            <a:off x="0" y="0"/>
+            <a:ext cx="12191695" cy="1143000"/>
+          </a:xfrm>
+          <a:prstGeom prst="rect">
             <a:avLst/>
           </a:prstGeom>
           <a:solidFill>
@@ -6170,14 +6442,14 @@
       </p:sp>
       <p:sp>
         <p:nvSpPr>
-          <p:cNvPr id="8" name="TextBox 7"/>
+          <p:cNvPr id="6" name="TextBox 5"/>
           <p:cNvSpPr txBox="1"/>
           <p:nvPr/>
         </p:nvSpPr>
         <p:spPr>
           <a:xfrm>
-            <a:off x="822960" y="1965960"/>
-            <a:ext cx="4983480" cy="4206240"/>
+            <a:off x="822960" y="274320"/>
+            <a:ext cx="10515600" cy="640080"/>
           </a:xfrm>
           <a:prstGeom prst="rect">
             <a:avLst/>
@@ -6190,117 +6462,62 @@
           </a:bodyPr>
           <a:lstStyle/>
           <a:p>
-            <a:pPr>
-              <a:spcAft>
-                <a:spcPts val="1100"/>
-              </a:spcAft>
-            </a:pPr>
-            <a:r>
-              <a:rPr sz="1600" b="1" i="0">
-                <a:solidFill>
-                  <a:srgbClr val="E8801A"/>
-                </a:solidFill>
-                <a:latin typeface="Montserrat"/>
-              </a:rPr>
-              <a:t>▸  </a:t>
-            </a:r>
-            <a:r>
-              <a:rPr sz="1600" b="0" i="0">
-                <a:solidFill>
-                  <a:srgbClr val="1B2330"/>
-                </a:solidFill>
-                <a:latin typeface="Montserrat"/>
-              </a:rPr>
-              <a:t>Duro: barra rígida, curvadora de máquina</a:t>
-            </a:r>
-          </a:p>
-          <a:p>
-            <a:pPr>
-              <a:spcAft>
-                <a:spcPts val="1100"/>
-              </a:spcAft>
-            </a:pPr>
-            <a:r>
-              <a:rPr sz="1600" b="1" i="0">
-                <a:solidFill>
-                  <a:srgbClr val="E8801A"/>
-                </a:solidFill>
-                <a:latin typeface="Montserrat"/>
-              </a:rPr>
-              <a:t>▸  </a:t>
-            </a:r>
-            <a:r>
-              <a:rPr sz="1600" b="0" i="0">
-                <a:solidFill>
-                  <a:srgbClr val="1B2330"/>
-                </a:solidFill>
-                <a:latin typeface="Montserrat"/>
-              </a:rPr>
-              <a:t>Recocido: rollo blando, muelle curvatubos</a:t>
-            </a:r>
-          </a:p>
-          <a:p>
-            <a:pPr>
-              <a:spcAft>
-                <a:spcPts val="1100"/>
-              </a:spcAft>
-            </a:pPr>
-            <a:r>
-              <a:rPr sz="1600" b="1" i="0">
-                <a:solidFill>
-                  <a:srgbClr val="E8801A"/>
-                </a:solidFill>
-                <a:latin typeface="Montserrat"/>
-              </a:rPr>
-              <a:t>▸  </a:t>
-            </a:r>
-            <a:r>
-              <a:rPr sz="1600" b="0" i="0">
-                <a:solidFill>
-                  <a:srgbClr val="1B2330"/>
-                </a:solidFill>
-                <a:latin typeface="Montserrat"/>
-              </a:rPr>
-              <a:t>Nunca mandril interno</a:t>
-            </a:r>
-          </a:p>
-          <a:p>
-            <a:pPr>
-              <a:spcAft>
-                <a:spcPts val="1100"/>
-              </a:spcAft>
-            </a:pPr>
-            <a:r>
-              <a:rPr sz="1600" b="1" i="0">
-                <a:solidFill>
-                  <a:srgbClr val="E8801A"/>
-                </a:solidFill>
-                <a:latin typeface="Montserrat"/>
-              </a:rPr>
-              <a:t>▸  </a:t>
-            </a:r>
-            <a:r>
-              <a:rPr sz="1600" b="0" i="0">
-                <a:solidFill>
-                  <a:srgbClr val="1B2330"/>
-                </a:solidFill>
-                <a:latin typeface="Montserrat"/>
-              </a:rPr>
-              <a:t>Curva sin arrugas ni defectos</a:t>
-            </a:r>
-          </a:p>
-        </p:txBody>
-      </p:sp>
-      <p:sp>
-        <p:nvSpPr>
-          <p:cNvPr id="9" name="imgph" descr="IMGQ:bending copper pipe with spring tool"/>
+            <a:r>
+              <a:rPr sz="2400" b="1" i="0">
+                <a:solidFill>
+                  <a:srgbClr val="FFFFFF"/>
+                </a:solidFill>
+                <a:latin typeface="Montserrat"/>
+              </a:rPr>
+              <a:t>⚡  PREGUNTA RÁPIDA</a:t>
+            </a:r>
+          </a:p>
+        </p:txBody>
+      </p:sp>
+      <p:sp>
+        <p:nvSpPr>
+          <p:cNvPr id="7" name="TextBox 6"/>
+          <p:cNvSpPr txBox="1"/>
+          <p:nvPr/>
+        </p:nvSpPr>
+        <p:spPr>
+          <a:xfrm>
+            <a:off x="822960" y="1508760"/>
+            <a:ext cx="10515600" cy="1371600"/>
+          </a:xfrm>
+          <a:prstGeom prst="rect">
+            <a:avLst/>
+          </a:prstGeom>
+          <a:noFill/>
+        </p:spPr>
+        <p:txBody>
+          <a:bodyPr wrap="square">
+            <a:spAutoFit/>
+          </a:bodyPr>
+          <a:lstStyle/>
+          <a:p>
+            <a:r>
+              <a:rPr sz="2400" b="1" i="0">
+                <a:solidFill>
+                  <a:srgbClr val="1E2761"/>
+                </a:solidFill>
+                <a:latin typeface="Montserrat"/>
+              </a:rPr>
+              <a:t>¿Qué espesor mínimo exige la norma para el tubo de cobre enterrado?</a:t>
+            </a:r>
+          </a:p>
+        </p:txBody>
+      </p:sp>
+      <p:sp>
+        <p:nvSpPr>
+          <p:cNvPr id="8" name="Rounded Rectangle 7"/>
           <p:cNvSpPr/>
           <p:nvPr/>
         </p:nvSpPr>
         <p:spPr>
           <a:xfrm>
-            <a:off x="5806440" y="1051560"/>
-            <a:ext cx="5298947" cy="4629150"/>
+            <a:off x="822960" y="3291840"/>
+            <a:ext cx="4983480" cy="1143000"/>
           </a:xfrm>
           <a:prstGeom prst="roundRect">
             <a:avLst/>
@@ -6339,14 +6556,58 @@
       </p:sp>
       <p:sp>
         <p:nvSpPr>
+          <p:cNvPr id="9" name="Rectangle 8"/>
+          <p:cNvSpPr/>
+          <p:nvPr/>
+        </p:nvSpPr>
+        <p:spPr>
+          <a:xfrm>
+            <a:off x="822960" y="3291840"/>
+            <a:ext cx="640080" cy="1143000"/>
+          </a:xfrm>
+          <a:prstGeom prst="rect">
+            <a:avLst/>
+          </a:prstGeom>
+          <a:solidFill>
+            <a:srgbClr val="1E2761"/>
+          </a:solidFill>
+          <a:ln>
+            <a:noFill/>
+          </a:ln>
+          <a:effectLst/>
+        </p:spPr>
+        <p:style>
+          <a:lnRef idx="1">
+            <a:schemeClr val="accent1"/>
+          </a:lnRef>
+          <a:fillRef idx="3">
+            <a:schemeClr val="accent1"/>
+          </a:fillRef>
+          <a:effectRef idx="2">
+            <a:schemeClr val="accent1"/>
+          </a:effectRef>
+          <a:fontRef idx="minor">
+            <a:schemeClr val="lt1"/>
+          </a:fontRef>
+        </p:style>
+        <p:txBody>
+          <a:bodyPr rtlCol="0" anchor="ctr"/>
+          <a:lstStyle/>
+          <a:p>
+            <a:pPr algn="ctr"/>
+          </a:p>
+        </p:txBody>
+      </p:sp>
+      <p:sp>
+        <p:nvSpPr>
           <p:cNvPr id="10" name="TextBox 9"/>
           <p:cNvSpPr txBox="1"/>
           <p:nvPr/>
         </p:nvSpPr>
         <p:spPr>
           <a:xfrm>
-            <a:off x="6080760" y="2726055"/>
-            <a:ext cx="4750307" cy="1280160"/>
+            <a:off x="822960" y="3611880"/>
+            <a:ext cx="640080" cy="548640"/>
           </a:xfrm>
           <a:prstGeom prst="rect">
             <a:avLst/>
@@ -6361,25 +6622,524 @@
           <a:p>
             <a:pPr algn="ctr"/>
             <a:r>
-              <a:rPr sz="1400" b="1" i="0">
-                <a:solidFill>
-                  <a:srgbClr val="64748B"/>
-                </a:solidFill>
-                <a:latin typeface="Montserrat"/>
-              </a:rPr>
-              <a:t>IMAGEN REALISTA</a:t>
-            </a:r>
-          </a:p>
+              <a:rPr sz="2200" b="1" i="0">
+                <a:solidFill>
+                  <a:srgbClr val="FFFFFF"/>
+                </a:solidFill>
+                <a:latin typeface="Montserrat"/>
+              </a:rPr>
+              <a:t>A</a:t>
+            </a:r>
+          </a:p>
+        </p:txBody>
+      </p:sp>
+      <p:sp>
+        <p:nvSpPr>
+          <p:cNvPr id="11" name="TextBox 10"/>
+          <p:cNvSpPr txBox="1"/>
+          <p:nvPr/>
+        </p:nvSpPr>
+        <p:spPr>
+          <a:xfrm>
+            <a:off x="1600200" y="3474720"/>
+            <a:ext cx="4114800" cy="868680"/>
+          </a:xfrm>
+          <a:prstGeom prst="rect">
+            <a:avLst/>
+          </a:prstGeom>
+          <a:noFill/>
+        </p:spPr>
+        <p:txBody>
+          <a:bodyPr wrap="square">
+            <a:spAutoFit/>
+          </a:bodyPr>
+          <a:lstStyle/>
+          <a:p>
+            <a:r>
+              <a:rPr sz="1400" b="0" i="0">
+                <a:solidFill>
+                  <a:srgbClr val="1B2330"/>
+                </a:solidFill>
+                <a:latin typeface="Montserrat"/>
+              </a:rPr>
+              <a:t>0,8 mm</a:t>
+            </a:r>
+          </a:p>
+        </p:txBody>
+      </p:sp>
+      <p:sp>
+        <p:nvSpPr>
+          <p:cNvPr id="12" name="Rounded Rectangle 11"/>
+          <p:cNvSpPr/>
+          <p:nvPr/>
+        </p:nvSpPr>
+        <p:spPr>
+          <a:xfrm>
+            <a:off x="6355080" y="3291840"/>
+            <a:ext cx="4983480" cy="1143000"/>
+          </a:xfrm>
+          <a:prstGeom prst="roundRect">
+            <a:avLst/>
+          </a:prstGeom>
+          <a:solidFill>
+            <a:srgbClr val="F3F6FB"/>
+          </a:solidFill>
+          <a:ln w="12700">
+            <a:solidFill>
+              <a:srgbClr val="C7D2E6"/>
+            </a:solidFill>
+          </a:ln>
+          <a:effectLst/>
+        </p:spPr>
+        <p:style>
+          <a:lnRef idx="1">
+            <a:schemeClr val="accent1"/>
+          </a:lnRef>
+          <a:fillRef idx="3">
+            <a:schemeClr val="accent1"/>
+          </a:fillRef>
+          <a:effectRef idx="2">
+            <a:schemeClr val="accent1"/>
+          </a:effectRef>
+          <a:fontRef idx="minor">
+            <a:schemeClr val="lt1"/>
+          </a:fontRef>
+        </p:style>
+        <p:txBody>
+          <a:bodyPr rtlCol="0" anchor="ctr"/>
+          <a:lstStyle/>
           <a:p>
             <a:pPr algn="ctr"/>
-            <a:r>
-              <a:rPr sz="1100" b="0" i="1">
-                <a:solidFill>
-                  <a:srgbClr val="64748B"/>
-                </a:solidFill>
-                <a:latin typeface="Montserrat"/>
-              </a:rPr>
-              <a:t>bending copper pipe with spring tool</a:t>
+          </a:p>
+        </p:txBody>
+      </p:sp>
+      <p:sp>
+        <p:nvSpPr>
+          <p:cNvPr id="13" name="Rectangle 12"/>
+          <p:cNvSpPr/>
+          <p:nvPr/>
+        </p:nvSpPr>
+        <p:spPr>
+          <a:xfrm>
+            <a:off x="6355080" y="3291840"/>
+            <a:ext cx="640080" cy="1143000"/>
+          </a:xfrm>
+          <a:prstGeom prst="rect">
+            <a:avLst/>
+          </a:prstGeom>
+          <a:solidFill>
+            <a:srgbClr val="1E2761"/>
+          </a:solidFill>
+          <a:ln>
+            <a:noFill/>
+          </a:ln>
+          <a:effectLst/>
+        </p:spPr>
+        <p:style>
+          <a:lnRef idx="1">
+            <a:schemeClr val="accent1"/>
+          </a:lnRef>
+          <a:fillRef idx="3">
+            <a:schemeClr val="accent1"/>
+          </a:fillRef>
+          <a:effectRef idx="2">
+            <a:schemeClr val="accent1"/>
+          </a:effectRef>
+          <a:fontRef idx="minor">
+            <a:schemeClr val="lt1"/>
+          </a:fontRef>
+        </p:style>
+        <p:txBody>
+          <a:bodyPr rtlCol="0" anchor="ctr"/>
+          <a:lstStyle/>
+          <a:p>
+            <a:pPr algn="ctr"/>
+          </a:p>
+        </p:txBody>
+      </p:sp>
+      <p:sp>
+        <p:nvSpPr>
+          <p:cNvPr id="14" name="TextBox 13"/>
+          <p:cNvSpPr txBox="1"/>
+          <p:nvPr/>
+        </p:nvSpPr>
+        <p:spPr>
+          <a:xfrm>
+            <a:off x="6355080" y="3611880"/>
+            <a:ext cx="640080" cy="548640"/>
+          </a:xfrm>
+          <a:prstGeom prst="rect">
+            <a:avLst/>
+          </a:prstGeom>
+          <a:noFill/>
+        </p:spPr>
+        <p:txBody>
+          <a:bodyPr wrap="square">
+            <a:spAutoFit/>
+          </a:bodyPr>
+          <a:lstStyle/>
+          <a:p>
+            <a:pPr algn="ctr"/>
+            <a:r>
+              <a:rPr sz="2200" b="1" i="0">
+                <a:solidFill>
+                  <a:srgbClr val="FFFFFF"/>
+                </a:solidFill>
+                <a:latin typeface="Montserrat"/>
+              </a:rPr>
+              <a:t>B</a:t>
+            </a:r>
+          </a:p>
+        </p:txBody>
+      </p:sp>
+      <p:sp>
+        <p:nvSpPr>
+          <p:cNvPr id="15" name="TextBox 14"/>
+          <p:cNvSpPr txBox="1"/>
+          <p:nvPr/>
+        </p:nvSpPr>
+        <p:spPr>
+          <a:xfrm>
+            <a:off x="7132320" y="3474720"/>
+            <a:ext cx="4114800" cy="868680"/>
+          </a:xfrm>
+          <a:prstGeom prst="rect">
+            <a:avLst/>
+          </a:prstGeom>
+          <a:noFill/>
+        </p:spPr>
+        <p:txBody>
+          <a:bodyPr wrap="square">
+            <a:spAutoFit/>
+          </a:bodyPr>
+          <a:lstStyle/>
+          <a:p>
+            <a:r>
+              <a:rPr sz="1400" b="0" i="0">
+                <a:solidFill>
+                  <a:srgbClr val="1B2330"/>
+                </a:solidFill>
+                <a:latin typeface="Montserrat"/>
+              </a:rPr>
+              <a:t>1 mm</a:t>
+            </a:r>
+          </a:p>
+        </p:txBody>
+      </p:sp>
+      <p:sp>
+        <p:nvSpPr>
+          <p:cNvPr id="16" name="Rounded Rectangle 15"/>
+          <p:cNvSpPr/>
+          <p:nvPr/>
+        </p:nvSpPr>
+        <p:spPr>
+          <a:xfrm>
+            <a:off x="822960" y="4617720"/>
+            <a:ext cx="4983480" cy="1143000"/>
+          </a:xfrm>
+          <a:prstGeom prst="roundRect">
+            <a:avLst/>
+          </a:prstGeom>
+          <a:solidFill>
+            <a:srgbClr val="F3F6FB"/>
+          </a:solidFill>
+          <a:ln w="12700">
+            <a:solidFill>
+              <a:srgbClr val="C7D2E6"/>
+            </a:solidFill>
+          </a:ln>
+          <a:effectLst/>
+        </p:spPr>
+        <p:style>
+          <a:lnRef idx="1">
+            <a:schemeClr val="accent1"/>
+          </a:lnRef>
+          <a:fillRef idx="3">
+            <a:schemeClr val="accent1"/>
+          </a:fillRef>
+          <a:effectRef idx="2">
+            <a:schemeClr val="accent1"/>
+          </a:effectRef>
+          <a:fontRef idx="minor">
+            <a:schemeClr val="lt1"/>
+          </a:fontRef>
+        </p:style>
+        <p:txBody>
+          <a:bodyPr rtlCol="0" anchor="ctr"/>
+          <a:lstStyle/>
+          <a:p>
+            <a:pPr algn="ctr"/>
+          </a:p>
+        </p:txBody>
+      </p:sp>
+      <p:sp>
+        <p:nvSpPr>
+          <p:cNvPr id="17" name="Rectangle 16"/>
+          <p:cNvSpPr/>
+          <p:nvPr/>
+        </p:nvSpPr>
+        <p:spPr>
+          <a:xfrm>
+            <a:off x="822960" y="4617720"/>
+            <a:ext cx="640080" cy="1143000"/>
+          </a:xfrm>
+          <a:prstGeom prst="rect">
+            <a:avLst/>
+          </a:prstGeom>
+          <a:solidFill>
+            <a:srgbClr val="1E2761"/>
+          </a:solidFill>
+          <a:ln>
+            <a:noFill/>
+          </a:ln>
+          <a:effectLst/>
+        </p:spPr>
+        <p:style>
+          <a:lnRef idx="1">
+            <a:schemeClr val="accent1"/>
+          </a:lnRef>
+          <a:fillRef idx="3">
+            <a:schemeClr val="accent1"/>
+          </a:fillRef>
+          <a:effectRef idx="2">
+            <a:schemeClr val="accent1"/>
+          </a:effectRef>
+          <a:fontRef idx="minor">
+            <a:schemeClr val="lt1"/>
+          </a:fontRef>
+        </p:style>
+        <p:txBody>
+          <a:bodyPr rtlCol="0" anchor="ctr"/>
+          <a:lstStyle/>
+          <a:p>
+            <a:pPr algn="ctr"/>
+          </a:p>
+        </p:txBody>
+      </p:sp>
+      <p:sp>
+        <p:nvSpPr>
+          <p:cNvPr id="18" name="TextBox 17"/>
+          <p:cNvSpPr txBox="1"/>
+          <p:nvPr/>
+        </p:nvSpPr>
+        <p:spPr>
+          <a:xfrm>
+            <a:off x="822960" y="4937760"/>
+            <a:ext cx="640080" cy="548640"/>
+          </a:xfrm>
+          <a:prstGeom prst="rect">
+            <a:avLst/>
+          </a:prstGeom>
+          <a:noFill/>
+        </p:spPr>
+        <p:txBody>
+          <a:bodyPr wrap="square">
+            <a:spAutoFit/>
+          </a:bodyPr>
+          <a:lstStyle/>
+          <a:p>
+            <a:pPr algn="ctr"/>
+            <a:r>
+              <a:rPr sz="2200" b="1" i="0">
+                <a:solidFill>
+                  <a:srgbClr val="FFFFFF"/>
+                </a:solidFill>
+                <a:latin typeface="Montserrat"/>
+              </a:rPr>
+              <a:t>C</a:t>
+            </a:r>
+          </a:p>
+        </p:txBody>
+      </p:sp>
+      <p:sp>
+        <p:nvSpPr>
+          <p:cNvPr id="19" name="TextBox 18"/>
+          <p:cNvSpPr txBox="1"/>
+          <p:nvPr/>
+        </p:nvSpPr>
+        <p:spPr>
+          <a:xfrm>
+            <a:off x="1600200" y="4800600"/>
+            <a:ext cx="4114800" cy="868680"/>
+          </a:xfrm>
+          <a:prstGeom prst="rect">
+            <a:avLst/>
+          </a:prstGeom>
+          <a:noFill/>
+        </p:spPr>
+        <p:txBody>
+          <a:bodyPr wrap="square">
+            <a:spAutoFit/>
+          </a:bodyPr>
+          <a:lstStyle/>
+          <a:p>
+            <a:r>
+              <a:rPr sz="1400" b="0" i="0">
+                <a:solidFill>
+                  <a:srgbClr val="1B2330"/>
+                </a:solidFill>
+                <a:latin typeface="Montserrat"/>
+              </a:rPr>
+              <a:t>1,5 mm</a:t>
+            </a:r>
+          </a:p>
+        </p:txBody>
+      </p:sp>
+      <p:sp>
+        <p:nvSpPr>
+          <p:cNvPr id="20" name="Rounded Rectangle 19"/>
+          <p:cNvSpPr/>
+          <p:nvPr/>
+        </p:nvSpPr>
+        <p:spPr>
+          <a:xfrm>
+            <a:off x="6355080" y="4617720"/>
+            <a:ext cx="4983480" cy="1143000"/>
+          </a:xfrm>
+          <a:prstGeom prst="roundRect">
+            <a:avLst/>
+          </a:prstGeom>
+          <a:solidFill>
+            <a:srgbClr val="F3F6FB"/>
+          </a:solidFill>
+          <a:ln w="12700">
+            <a:solidFill>
+              <a:srgbClr val="C7D2E6"/>
+            </a:solidFill>
+          </a:ln>
+          <a:effectLst/>
+        </p:spPr>
+        <p:style>
+          <a:lnRef idx="1">
+            <a:schemeClr val="accent1"/>
+          </a:lnRef>
+          <a:fillRef idx="3">
+            <a:schemeClr val="accent1"/>
+          </a:fillRef>
+          <a:effectRef idx="2">
+            <a:schemeClr val="accent1"/>
+          </a:effectRef>
+          <a:fontRef idx="minor">
+            <a:schemeClr val="lt1"/>
+          </a:fontRef>
+        </p:style>
+        <p:txBody>
+          <a:bodyPr rtlCol="0" anchor="ctr"/>
+          <a:lstStyle/>
+          <a:p>
+            <a:pPr algn="ctr"/>
+          </a:p>
+        </p:txBody>
+      </p:sp>
+      <p:sp>
+        <p:nvSpPr>
+          <p:cNvPr id="21" name="Rectangle 20"/>
+          <p:cNvSpPr/>
+          <p:nvPr/>
+        </p:nvSpPr>
+        <p:spPr>
+          <a:xfrm>
+            <a:off x="6355080" y="4617720"/>
+            <a:ext cx="640080" cy="1143000"/>
+          </a:xfrm>
+          <a:prstGeom prst="rect">
+            <a:avLst/>
+          </a:prstGeom>
+          <a:solidFill>
+            <a:srgbClr val="1E2761"/>
+          </a:solidFill>
+          <a:ln>
+            <a:noFill/>
+          </a:ln>
+          <a:effectLst/>
+        </p:spPr>
+        <p:style>
+          <a:lnRef idx="1">
+            <a:schemeClr val="accent1"/>
+          </a:lnRef>
+          <a:fillRef idx="3">
+            <a:schemeClr val="accent1"/>
+          </a:fillRef>
+          <a:effectRef idx="2">
+            <a:schemeClr val="accent1"/>
+          </a:effectRef>
+          <a:fontRef idx="minor">
+            <a:schemeClr val="lt1"/>
+          </a:fontRef>
+        </p:style>
+        <p:txBody>
+          <a:bodyPr rtlCol="0" anchor="ctr"/>
+          <a:lstStyle/>
+          <a:p>
+            <a:pPr algn="ctr"/>
+          </a:p>
+        </p:txBody>
+      </p:sp>
+      <p:sp>
+        <p:nvSpPr>
+          <p:cNvPr id="22" name="TextBox 21"/>
+          <p:cNvSpPr txBox="1"/>
+          <p:nvPr/>
+        </p:nvSpPr>
+        <p:spPr>
+          <a:xfrm>
+            <a:off x="6355080" y="4937760"/>
+            <a:ext cx="640080" cy="548640"/>
+          </a:xfrm>
+          <a:prstGeom prst="rect">
+            <a:avLst/>
+          </a:prstGeom>
+          <a:noFill/>
+        </p:spPr>
+        <p:txBody>
+          <a:bodyPr wrap="square">
+            <a:spAutoFit/>
+          </a:bodyPr>
+          <a:lstStyle/>
+          <a:p>
+            <a:pPr algn="ctr"/>
+            <a:r>
+              <a:rPr sz="2200" b="1" i="0">
+                <a:solidFill>
+                  <a:srgbClr val="FFFFFF"/>
+                </a:solidFill>
+                <a:latin typeface="Montserrat"/>
+              </a:rPr>
+              <a:t>D</a:t>
+            </a:r>
+          </a:p>
+        </p:txBody>
+      </p:sp>
+      <p:sp>
+        <p:nvSpPr>
+          <p:cNvPr id="23" name="TextBox 22"/>
+          <p:cNvSpPr txBox="1"/>
+          <p:nvPr/>
+        </p:nvSpPr>
+        <p:spPr>
+          <a:xfrm>
+            <a:off x="7132320" y="4800600"/>
+            <a:ext cx="4114800" cy="868680"/>
+          </a:xfrm>
+          <a:prstGeom prst="rect">
+            <a:avLst/>
+          </a:prstGeom>
+          <a:noFill/>
+        </p:spPr>
+        <p:txBody>
+          <a:bodyPr wrap="square">
+            <a:spAutoFit/>
+          </a:bodyPr>
+          <a:lstStyle/>
+          <a:p>
+            <a:r>
+              <a:rPr sz="1400" b="0" i="0">
+                <a:solidFill>
+                  <a:srgbClr val="1B2330"/>
+                </a:solidFill>
+                <a:latin typeface="Montserrat"/>
+              </a:rPr>
+              <a:t>2 mm</a:t>
             </a:r>
           </a:p>
         </p:txBody>
@@ -6389,6 +7149,18 @@
   <p:clrMapOvr>
     <a:masterClrMapping/>
   </p:clrMapOvr>
+  <mc:AlternateContent xmlns:mc="http://schemas.openxmlformats.org/markup-compatibility/2006">
+    <mc:Choice xmlns:p14="http://schemas.microsoft.com/office/powerpoint/2010/main" Requires="p14">
+      <p:transition spd="med" p14:dur="700">
+        <p14:cube dir="r"/>
+      </p:transition>
+    </mc:Choice>
+    <mc:Fallback>
+      <p:transition spd="med">
+        <p:push dir="r"/>
+      </p:transition>
+    </mc:Fallback>
+  </mc:AlternateContent>
 </p:sld>
 </file>
 
@@ -6476,7 +7248,7 @@
                 </a:solidFill>
                 <a:latin typeface="Montserrat"/>
               </a:rPr>
-              <a:t>013 / 018</a:t>
+              <a:t>013 / 022</a:t>
             </a:r>
           </a:p>
         </p:txBody>
@@ -6517,88 +7289,20 @@
       </p:sp>
       <p:sp>
         <p:nvSpPr>
-          <p:cNvPr id="5" name="TextBox 4"/>
-          <p:cNvSpPr txBox="1"/>
-          <p:nvPr/>
-        </p:nvSpPr>
-        <p:spPr>
-          <a:xfrm>
-            <a:off x="822960" y="457200"/>
-            <a:ext cx="10058400" cy="365760"/>
-          </a:xfrm>
-          <a:prstGeom prst="rect">
-            <a:avLst/>
-          </a:prstGeom>
-          <a:noFill/>
-        </p:spPr>
-        <p:txBody>
-          <a:bodyPr wrap="square">
-            <a:spAutoFit/>
-          </a:bodyPr>
-          <a:lstStyle/>
-          <a:p>
-            <a:r>
-              <a:rPr sz="1300" b="1" i="0">
-                <a:solidFill>
-                  <a:srgbClr val="E8801A"/>
-                </a:solidFill>
-                <a:latin typeface="Montserrat"/>
-              </a:rPr>
-              <a:t>MATERIALES · ACERO</a:t>
-            </a:r>
-          </a:p>
-        </p:txBody>
-      </p:sp>
-      <p:sp>
-        <p:nvSpPr>
-          <p:cNvPr id="6" name="TextBox 5"/>
-          <p:cNvSpPr txBox="1"/>
-          <p:nvPr/>
-        </p:nvSpPr>
-        <p:spPr>
-          <a:xfrm>
-            <a:off x="822960" y="868680"/>
-            <a:ext cx="10515600" cy="914400"/>
-          </a:xfrm>
-          <a:prstGeom prst="rect">
-            <a:avLst/>
-          </a:prstGeom>
-          <a:noFill/>
-        </p:spPr>
-        <p:txBody>
-          <a:bodyPr wrap="square">
-            <a:spAutoFit/>
-          </a:bodyPr>
-          <a:lstStyle/>
-          <a:p>
-            <a:r>
-              <a:rPr sz="2800" b="1" i="0">
-                <a:solidFill>
-                  <a:srgbClr val="1E2761"/>
-                </a:solidFill>
-                <a:latin typeface="Montserrat"/>
-              </a:rPr>
-              <a:t>Acero: el clásico del gas visto</a:t>
-            </a:r>
-          </a:p>
-        </p:txBody>
-      </p:sp>
-      <p:sp>
-        <p:nvSpPr>
-          <p:cNvPr id="7" name="Rounded Rectangle 6"/>
+          <p:cNvPr id="5" name="Rectangle 4"/>
           <p:cNvSpPr/>
           <p:nvPr/>
         </p:nvSpPr>
         <p:spPr>
           <a:xfrm>
-            <a:off x="868680" y="1627632"/>
-            <a:ext cx="2011680" cy="73152"/>
-          </a:xfrm>
-          <a:prstGeom prst="roundRect">
+            <a:off x="0" y="0"/>
+            <a:ext cx="12191695" cy="1143000"/>
+          </a:xfrm>
+          <a:prstGeom prst="rect">
             <a:avLst/>
           </a:prstGeom>
           <a:solidFill>
-            <a:srgbClr val="E8801A"/>
+            <a:srgbClr val="1E8E4B"/>
           </a:solidFill>
           <a:ln>
             <a:noFill/>
@@ -6629,14 +7333,14 @@
       </p:sp>
       <p:sp>
         <p:nvSpPr>
-          <p:cNvPr id="8" name="TextBox 7"/>
+          <p:cNvPr id="6" name="TextBox 5"/>
           <p:cNvSpPr txBox="1"/>
           <p:nvPr/>
         </p:nvSpPr>
         <p:spPr>
           <a:xfrm>
-            <a:off x="822960" y="1965960"/>
-            <a:ext cx="4983480" cy="4206240"/>
+            <a:off x="822960" y="274320"/>
+            <a:ext cx="10515600" cy="640080"/>
           </a:xfrm>
           <a:prstGeom prst="rect">
             <a:avLst/>
@@ -6649,127 +7353,72 @@
           </a:bodyPr>
           <a:lstStyle/>
           <a:p>
-            <a:pPr>
-              <a:spcAft>
-                <a:spcPts val="1100"/>
-              </a:spcAft>
-            </a:pPr>
-            <a:r>
-              <a:rPr sz="1600" b="1" i="0">
-                <a:solidFill>
-                  <a:srgbClr val="E8801A"/>
-                </a:solidFill>
-                <a:latin typeface="Montserrat"/>
-              </a:rPr>
-              <a:t>▸  </a:t>
-            </a:r>
-            <a:r>
-              <a:rPr sz="1600" b="0" i="0">
-                <a:solidFill>
-                  <a:srgbClr val="1B2330"/>
-                </a:solidFill>
-                <a:latin typeface="Montserrat"/>
-              </a:rPr>
-              <a:t>Sin soldadura o con soldadura longitudinal</a:t>
-            </a:r>
-          </a:p>
-          <a:p>
-            <a:pPr>
-              <a:spcAft>
-                <a:spcPts val="1100"/>
-              </a:spcAft>
-            </a:pPr>
-            <a:r>
-              <a:rPr sz="1600" b="1" i="0">
-                <a:solidFill>
-                  <a:srgbClr val="E8801A"/>
-                </a:solidFill>
-                <a:latin typeface="Montserrat"/>
-              </a:rPr>
-              <a:t>▸  </a:t>
-            </a:r>
-            <a:r>
-              <a:rPr sz="1600" b="0" i="0">
-                <a:solidFill>
-                  <a:srgbClr val="1B2330"/>
-                </a:solidFill>
-                <a:latin typeface="Montserrat"/>
-              </a:rPr>
-              <a:t>Dimensiones según UNE-EN 10255</a:t>
-            </a:r>
-          </a:p>
-          <a:p>
-            <a:pPr>
-              <a:spcAft>
-                <a:spcPts val="1100"/>
-              </a:spcAft>
-            </a:pPr>
-            <a:r>
-              <a:rPr sz="1600" b="1" i="0">
-                <a:solidFill>
-                  <a:srgbClr val="E8801A"/>
-                </a:solidFill>
-                <a:latin typeface="Montserrat"/>
-              </a:rPr>
-              <a:t>▸  </a:t>
-            </a:r>
-            <a:r>
-              <a:rPr sz="1600" b="0" i="0">
-                <a:solidFill>
-                  <a:srgbClr val="1B2330"/>
-                </a:solidFill>
-                <a:latin typeface="Montserrat"/>
-              </a:rPr>
-              <a:t>Curvado en frío preferente hasta 2"</a:t>
-            </a:r>
-          </a:p>
-          <a:p>
-            <a:pPr>
-              <a:spcAft>
-                <a:spcPts val="1100"/>
-              </a:spcAft>
-            </a:pPr>
-            <a:r>
-              <a:rPr sz="1600" b="1" i="0">
-                <a:solidFill>
-                  <a:srgbClr val="E8801A"/>
-                </a:solidFill>
-                <a:latin typeface="Montserrat"/>
-              </a:rPr>
-              <a:t>▸  </a:t>
-            </a:r>
-            <a:r>
-              <a:rPr sz="1600" b="0" i="0">
-                <a:solidFill>
-                  <a:srgbClr val="1B2330"/>
-                </a:solidFill>
-                <a:latin typeface="Montserrat"/>
-              </a:rPr>
-              <a:t>Enterrado, siempre protegido</a:t>
-            </a:r>
-          </a:p>
-        </p:txBody>
-      </p:sp>
-      <p:sp>
-        <p:nvSpPr>
-          <p:cNvPr id="9" name="imgph" descr="IMGQ:black steel gas pipe threaded fitting"/>
+            <a:r>
+              <a:rPr sz="2400" b="1" i="0">
+                <a:solidFill>
+                  <a:srgbClr val="FFFFFF"/>
+                </a:solidFill>
+                <a:latin typeface="Montserrat"/>
+              </a:rPr>
+              <a:t>✔  RESPUESTA:  C</a:t>
+            </a:r>
+          </a:p>
+        </p:txBody>
+      </p:sp>
+      <p:sp>
+        <p:nvSpPr>
+          <p:cNvPr id="7" name="TextBox 6"/>
+          <p:cNvSpPr txBox="1"/>
+          <p:nvPr/>
+        </p:nvSpPr>
+        <p:spPr>
+          <a:xfrm>
+            <a:off x="822960" y="1417320"/>
+            <a:ext cx="10515600" cy="914400"/>
+          </a:xfrm>
+          <a:prstGeom prst="rect">
+            <a:avLst/>
+          </a:prstGeom>
+          <a:noFill/>
+        </p:spPr>
+        <p:txBody>
+          <a:bodyPr wrap="square">
+            <a:spAutoFit/>
+          </a:bodyPr>
+          <a:lstStyle/>
+          <a:p>
+            <a:r>
+              <a:rPr sz="1800" b="1" i="0">
+                <a:solidFill>
+                  <a:srgbClr val="64748B"/>
+                </a:solidFill>
+                <a:latin typeface="Montserrat"/>
+              </a:rPr>
+              <a:t>¿Qué espesor mínimo exige la norma para el tubo de cobre enterrado?</a:t>
+            </a:r>
+          </a:p>
+        </p:txBody>
+      </p:sp>
+      <p:sp>
+        <p:nvSpPr>
+          <p:cNvPr id="8" name="Rounded Rectangle 7"/>
           <p:cNvSpPr/>
           <p:nvPr/>
         </p:nvSpPr>
         <p:spPr>
           <a:xfrm>
-            <a:off x="5806440" y="1051560"/>
-            <a:ext cx="5298947" cy="4629150"/>
+            <a:off x="822960" y="2514600"/>
+            <a:ext cx="10515600" cy="914400"/>
           </a:xfrm>
           <a:prstGeom prst="roundRect">
             <a:avLst/>
           </a:prstGeom>
           <a:solidFill>
-            <a:srgbClr val="F3F6FB"/>
+            <a:srgbClr val="E9F6EE"/>
           </a:solidFill>
           <a:ln w="12700">
             <a:solidFill>
-              <a:srgbClr val="C7D2E6"/>
+              <a:srgbClr val="1E8E4B"/>
             </a:solidFill>
           </a:ln>
           <a:effectLst/>
@@ -6798,14 +7447,14 @@
       </p:sp>
       <p:sp>
         <p:nvSpPr>
-          <p:cNvPr id="10" name="TextBox 9"/>
+          <p:cNvPr id="9" name="TextBox 8"/>
           <p:cNvSpPr txBox="1"/>
           <p:nvPr/>
         </p:nvSpPr>
         <p:spPr>
           <a:xfrm>
-            <a:off x="6080760" y="2726055"/>
-            <a:ext cx="4750307" cy="1280160"/>
+            <a:off x="1097280" y="2697480"/>
+            <a:ext cx="10058400" cy="640080"/>
           </a:xfrm>
           <a:prstGeom prst="rect">
             <a:avLst/>
@@ -6818,27 +7467,66 @@
           </a:bodyPr>
           <a:lstStyle/>
           <a:p>
-            <a:pPr algn="ctr"/>
-            <a:r>
-              <a:rPr sz="1400" b="1" i="0">
-                <a:solidFill>
-                  <a:srgbClr val="64748B"/>
-                </a:solidFill>
-                <a:latin typeface="Montserrat"/>
-              </a:rPr>
-              <a:t>IMAGEN REALISTA</a:t>
-            </a:r>
-          </a:p>
-          <a:p>
-            <a:pPr algn="ctr"/>
-            <a:r>
-              <a:rPr sz="1100" b="0" i="1">
-                <a:solidFill>
-                  <a:srgbClr val="64748B"/>
-                </a:solidFill>
-                <a:latin typeface="Montserrat"/>
-              </a:rPr>
-              <a:t>black steel gas pipe threaded fitting</a:t>
+            <a:r>
+              <a:rPr sz="1800" b="1" i="0">
+                <a:solidFill>
+                  <a:srgbClr val="1E8E4B"/>
+                </a:solidFill>
+                <a:latin typeface="Montserrat"/>
+              </a:rPr>
+              <a:t>C.  </a:t>
+            </a:r>
+            <a:r>
+              <a:rPr sz="1800" b="1" i="0">
+                <a:solidFill>
+                  <a:srgbClr val="1E2761"/>
+                </a:solidFill>
+                <a:latin typeface="Montserrat"/>
+              </a:rPr>
+              <a:t>1,5 mm</a:t>
+            </a:r>
+          </a:p>
+        </p:txBody>
+      </p:sp>
+      <p:sp>
+        <p:nvSpPr>
+          <p:cNvPr id="10" name="TextBox 9"/>
+          <p:cNvSpPr txBox="1"/>
+          <p:nvPr/>
+        </p:nvSpPr>
+        <p:spPr>
+          <a:xfrm>
+            <a:off x="822960" y="3749039"/>
+            <a:ext cx="10515600" cy="2194560"/>
+          </a:xfrm>
+          <a:prstGeom prst="rect">
+            <a:avLst/>
+          </a:prstGeom>
+          <a:noFill/>
+        </p:spPr>
+        <p:txBody>
+          <a:bodyPr wrap="square">
+            <a:spAutoFit/>
+          </a:bodyPr>
+          <a:lstStyle/>
+          <a:p>
+            <a:r>
+              <a:rPr sz="1500" b="1" i="0">
+                <a:solidFill>
+                  <a:srgbClr val="E8801A"/>
+                </a:solidFill>
+                <a:latin typeface="Montserrat"/>
+              </a:rPr>
+              <a:t>Por qué:  </a:t>
+            </a:r>
+            <a:r>
+              <a:rPr sz="1500" b="0" i="0">
+                <a:solidFill>
+                  <a:srgbClr val="1B2330"/>
+                </a:solidFill>
+                <a:latin typeface="Montserrat"/>
+              </a:rPr>
+              <a:t>El cobre enterrado sufre más (peso del terreno y corrosión), por eso pide 1,5 mm; el 1 mm queda para visto, empotrado, en vaina o conexión de aparatos.</a:t>
             </a:r>
           </a:p>
         </p:txBody>
@@ -6848,6 +7536,18 @@
   <p:clrMapOvr>
     <a:masterClrMapping/>
   </p:clrMapOvr>
+  <mc:AlternateContent xmlns:mc="http://schemas.openxmlformats.org/markup-compatibility/2006">
+    <mc:Choice xmlns:p14="http://schemas.microsoft.com/office/powerpoint/2010/main" Requires="p14">
+      <p:transition spd="med" p14:dur="700">
+        <p14:cube dir="l"/>
+      </p:transition>
+    </mc:Choice>
+    <mc:Fallback>
+      <p:transition spd="med">
+        <p:push dir="l"/>
+      </p:transition>
+    </mc:Fallback>
+  </mc:AlternateContent>
 </p:sld>
 </file>
 
@@ -6935,7 +7635,7 @@
                 </a:solidFill>
                 <a:latin typeface="Montserrat"/>
               </a:rPr>
-              <a:t>014 / 018</a:t>
+              <a:t>014 / 022</a:t>
             </a:r>
           </a:p>
         </p:txBody>
@@ -7003,7 +7703,7 @@
                 </a:solidFill>
                 <a:latin typeface="Montserrat"/>
               </a:rPr>
-              <a:t>MATERIALES · ACERO INOXIDABLE</a:t>
+              <a:t>MATERIALES · COBRE</a:t>
             </a:r>
           </a:p>
         </p:txBody>
@@ -7037,14 +7737,14 @@
                 </a:solidFill>
                 <a:latin typeface="Montserrat"/>
               </a:rPr>
-              <a:t>Inoxidable: para ambientes duros</a:t>
-            </a:r>
-          </a:p>
-        </p:txBody>
-      </p:sp>
-      <p:sp>
-        <p:nvSpPr>
-          <p:cNvPr id="7" name="Rounded Rectangle 6"/>
+              <a:t>Duro, recocido y curvado</a:t>
+            </a:r>
+          </a:p>
+        </p:txBody>
+      </p:sp>
+      <p:sp>
+        <p:nvSpPr>
+          <p:cNvPr id="7" name="Rectangle 6"/>
           <p:cNvSpPr/>
           <p:nvPr/>
         </p:nvSpPr>
@@ -7053,7 +7753,7 @@
             <a:off x="868680" y="1627632"/>
             <a:ext cx="2011680" cy="73152"/>
           </a:xfrm>
-          <a:prstGeom prst="roundRect">
+          <a:prstGeom prst="rect">
             <a:avLst/>
           </a:prstGeom>
           <a:solidFill>
@@ -7095,7 +7795,7 @@
         <p:spPr>
           <a:xfrm>
             <a:off x="822960" y="1965960"/>
-            <a:ext cx="4983480" cy="4206240"/>
+            <a:ext cx="5029200" cy="4206240"/>
           </a:xfrm>
           <a:prstGeom prst="rect">
             <a:avLst/>
@@ -7129,7 +7829,7 @@
                 </a:solidFill>
                 <a:latin typeface="Montserrat"/>
               </a:rPr>
-              <a:t>Banda soldada longitudinalmente</a:t>
+              <a:t>Duro: barra rígida, curvadora de máquina</a:t>
             </a:r>
           </a:p>
           <a:p>
@@ -7154,7 +7854,7 @@
                 </a:solidFill>
                 <a:latin typeface="Montserrat"/>
               </a:rPr>
-              <a:t>Serie 2 (UNE-EN 10312)</a:t>
+              <a:t>Recocido: rollo blando, muelle curvatubos</a:t>
             </a:r>
           </a:p>
           <a:p>
@@ -7179,7 +7879,7 @@
                 </a:solidFill>
                 <a:latin typeface="Montserrat"/>
               </a:rPr>
-              <a:t>El tipo se elige según el ambiente</a:t>
+              <a:t>Nunca mandril interno</a:t>
             </a:r>
           </a:p>
           <a:p>
@@ -7204,21 +7904,21 @@
                 </a:solidFill>
                 <a:latin typeface="Montserrat"/>
               </a:rPr>
-              <a:t>Accesorios de presión, también Serie 2</a:t>
-            </a:r>
-          </a:p>
-        </p:txBody>
-      </p:sp>
-      <p:sp>
-        <p:nvSpPr>
-          <p:cNvPr id="9" name="imgph" descr="IMGQ:stainless steel pipe coastal installation"/>
+              <a:t>Curva sin arrugas ni defectos</a:t>
+            </a:r>
+          </a:p>
+        </p:txBody>
+      </p:sp>
+      <p:sp>
+        <p:nvSpPr>
+          <p:cNvPr id="9" name="imgph" descr="IMGQ:bending copper pipe with spring tool"/>
           <p:cNvSpPr/>
           <p:nvPr/>
         </p:nvSpPr>
         <p:spPr>
           <a:xfrm>
-            <a:off x="5806440" y="1051560"/>
-            <a:ext cx="5298947" cy="4629150"/>
+            <a:off x="6080760" y="1965960"/>
+            <a:ext cx="5303520" cy="4572000"/>
           </a:xfrm>
           <a:prstGeom prst="roundRect">
             <a:avLst/>
@@ -7263,8 +7963,8 @@
         </p:nvSpPr>
         <p:spPr>
           <a:xfrm>
-            <a:off x="6080760" y="2726055"/>
-            <a:ext cx="4750307" cy="1280160"/>
+            <a:off x="6355080" y="3611880"/>
+            <a:ext cx="4754880" cy="1280160"/>
           </a:xfrm>
           <a:prstGeom prst="rect">
             <a:avLst/>
@@ -7285,7 +7985,7 @@
                 </a:solidFill>
                 <a:latin typeface="Montserrat"/>
               </a:rPr>
-              <a:t>IMAGEN REALISTA</a:t>
+              <a:t>IMAGEN</a:t>
             </a:r>
           </a:p>
           <a:p>
@@ -7297,7 +7997,7 @@
                 </a:solidFill>
                 <a:latin typeface="Montserrat"/>
               </a:rPr>
-              <a:t>stainless steel pipe coastal installation</a:t>
+              <a:t>bending copper pipe with spring tool</a:t>
             </a:r>
           </a:p>
         </p:txBody>
@@ -7307,6 +8007,18 @@
   <p:clrMapOvr>
     <a:masterClrMapping/>
   </p:clrMapOvr>
+  <mc:AlternateContent xmlns:mc="http://schemas.openxmlformats.org/markup-compatibility/2006">
+    <mc:Choice xmlns:p14="http://schemas.microsoft.com/office/powerpoint/2010/main" Requires="p14">
+      <p:transition spd="med" p14:dur="700">
+        <p14:cube dir="r"/>
+      </p:transition>
+    </mc:Choice>
+    <mc:Fallback>
+      <p:transition spd="med">
+        <p:push dir="r"/>
+      </p:transition>
+    </mc:Fallback>
+  </mc:AlternateContent>
 </p:sld>
 </file>
 
@@ -7394,7 +8106,7 @@
                 </a:solidFill>
                 <a:latin typeface="Montserrat"/>
               </a:rPr>
-              <a:t>015 / 018</a:t>
+              <a:t>015 / 022</a:t>
             </a:r>
           </a:p>
         </p:txBody>
@@ -7462,7 +8174,7 @@
                 </a:solidFill>
                 <a:latin typeface="Montserrat"/>
               </a:rPr>
-              <a:t>MATERIALES · MULTICAPA</a:t>
+              <a:t>MATERIALES · ACERO</a:t>
             </a:r>
           </a:p>
         </p:txBody>
@@ -7496,14 +8208,14 @@
                 </a:solidFill>
                 <a:latin typeface="Montserrat"/>
               </a:rPr>
-              <a:t>Multicapa: el sándwich</a:t>
-            </a:r>
-          </a:p>
-        </p:txBody>
-      </p:sp>
-      <p:sp>
-        <p:nvSpPr>
-          <p:cNvPr id="7" name="Rounded Rectangle 6"/>
+              <a:t>Acero: el clásico del gas visto</a:t>
+            </a:r>
+          </a:p>
+        </p:txBody>
+      </p:sp>
+      <p:sp>
+        <p:nvSpPr>
+          <p:cNvPr id="7" name="Rectangle 6"/>
           <p:cNvSpPr/>
           <p:nvPr/>
         </p:nvSpPr>
@@ -7512,7 +8224,7 @@
             <a:off x="868680" y="1627632"/>
             <a:ext cx="2011680" cy="73152"/>
           </a:xfrm>
-          <a:prstGeom prst="roundRect">
+          <a:prstGeom prst="rect">
             <a:avLst/>
           </a:prstGeom>
           <a:solidFill>
@@ -7553,8 +8265,8 @@
         </p:nvSpPr>
         <p:spPr>
           <a:xfrm>
-            <a:off x="822960" y="1965960"/>
-            <a:ext cx="4983480" cy="4206240"/>
+            <a:off x="6355080" y="1965960"/>
+            <a:ext cx="5029200" cy="4206240"/>
           </a:xfrm>
           <a:prstGeom prst="rect">
             <a:avLst/>
@@ -7588,7 +8300,7 @@
                 </a:solidFill>
                 <a:latin typeface="Montserrat"/>
               </a:rPr>
-              <a:t>Polímero – aluminio – polímero</a:t>
+              <a:t>Sin soldadura o con soldadura longitudinal</a:t>
             </a:r>
           </a:p>
           <a:p>
@@ -7613,7 +8325,7 @@
                 </a:solidFill>
                 <a:latin typeface="Montserrat"/>
               </a:rPr>
-              <a:t>Normas UNE 53008-1 y -2</a:t>
+              <a:t>Dimensiones según UNE-EN 10255</a:t>
             </a:r>
           </a:p>
           <a:p>
@@ -7638,7 +8350,7 @@
                 </a:solidFill>
                 <a:latin typeface="Montserrat"/>
               </a:rPr>
-              <a:t>Siempre limitador de caudal y de temperatura</a:t>
+              <a:t>Curvado en frío preferente hasta 2"</a:t>
             </a:r>
           </a:p>
           <a:p>
@@ -7663,21 +8375,21 @@
                 </a:solidFill>
                 <a:latin typeface="Montserrat"/>
               </a:rPr>
-              <a:t>Sea cual sea la longitud del tramo</a:t>
-            </a:r>
-          </a:p>
-        </p:txBody>
-      </p:sp>
-      <p:sp>
-        <p:nvSpPr>
-          <p:cNvPr id="9" name="imgph" descr="IMGQ:multilayer pipe cross section aluminium layers"/>
+              <a:t>Enterrado, siempre protegido</a:t>
+            </a:r>
+          </a:p>
+        </p:txBody>
+      </p:sp>
+      <p:sp>
+        <p:nvSpPr>
+          <p:cNvPr id="9" name="imgph" descr="IMGQ:black steel gas pipe threaded fitting"/>
           <p:cNvSpPr/>
           <p:nvPr/>
         </p:nvSpPr>
         <p:spPr>
           <a:xfrm>
-            <a:off x="5806440" y="1051560"/>
-            <a:ext cx="5298947" cy="4629150"/>
+            <a:off x="822960" y="1965960"/>
+            <a:ext cx="5303520" cy="4572000"/>
           </a:xfrm>
           <a:prstGeom prst="roundRect">
             <a:avLst/>
@@ -7722,8 +8434,8 @@
         </p:nvSpPr>
         <p:spPr>
           <a:xfrm>
-            <a:off x="6080760" y="2726055"/>
-            <a:ext cx="4750307" cy="1280160"/>
+            <a:off x="1097280" y="3611880"/>
+            <a:ext cx="4754880" cy="1280160"/>
           </a:xfrm>
           <a:prstGeom prst="rect">
             <a:avLst/>
@@ -7744,7 +8456,7 @@
                 </a:solidFill>
                 <a:latin typeface="Montserrat"/>
               </a:rPr>
-              <a:t>IMAGEN REALISTA</a:t>
+              <a:t>IMAGEN</a:t>
             </a:r>
           </a:p>
           <a:p>
@@ -7756,7 +8468,7 @@
                 </a:solidFill>
                 <a:latin typeface="Montserrat"/>
               </a:rPr>
-              <a:t>multilayer pipe cross section aluminium layers</a:t>
+              <a:t>black steel gas pipe threaded fitting</a:t>
             </a:r>
           </a:p>
         </p:txBody>
@@ -7766,6 +8478,18 @@
   <p:clrMapOvr>
     <a:masterClrMapping/>
   </p:clrMapOvr>
+  <mc:AlternateContent xmlns:mc="http://schemas.openxmlformats.org/markup-compatibility/2006">
+    <mc:Choice xmlns:p14="http://schemas.microsoft.com/office/powerpoint/2010/main" Requires="p14">
+      <p:transition spd="med" p14:dur="700">
+        <p14:cube dir="l"/>
+      </p:transition>
+    </mc:Choice>
+    <mc:Fallback>
+      <p:transition spd="med">
+        <p:push dir="l"/>
+      </p:transition>
+    </mc:Fallback>
+  </mc:AlternateContent>
 </p:sld>
 </file>
 
@@ -7853,7 +8577,7 @@
                 </a:solidFill>
                 <a:latin typeface="Montserrat"/>
               </a:rPr>
-              <a:t>016 / 018</a:t>
+              <a:t>016 / 022</a:t>
             </a:r>
           </a:p>
         </p:txBody>
@@ -7921,7 +8645,7 @@
                 </a:solidFill>
                 <a:latin typeface="Montserrat"/>
               </a:rPr>
-              <a:t>MATERIALES · INOX CORRUGADO</a:t>
+              <a:t>MATERIALES · ACERO INOXIDABLE</a:t>
             </a:r>
           </a:p>
         </p:txBody>
@@ -7955,14 +8679,14 @@
                 </a:solidFill>
                 <a:latin typeface="Montserrat"/>
               </a:rPr>
-              <a:t>Corrugado: el flexible acordeón</a:t>
-            </a:r>
-          </a:p>
-        </p:txBody>
-      </p:sp>
-      <p:sp>
-        <p:nvSpPr>
-          <p:cNvPr id="7" name="Rounded Rectangle 6"/>
+              <a:t>Inoxidable: para ambientes duros</a:t>
+            </a:r>
+          </a:p>
+        </p:txBody>
+      </p:sp>
+      <p:sp>
+        <p:nvSpPr>
+          <p:cNvPr id="7" name="Rectangle 6"/>
           <p:cNvSpPr/>
           <p:nvPr/>
         </p:nvSpPr>
@@ -7971,7 +8695,7 @@
             <a:off x="868680" y="1627632"/>
             <a:ext cx="2011680" cy="73152"/>
           </a:xfrm>
-          <a:prstGeom prst="roundRect">
+          <a:prstGeom prst="rect">
             <a:avLst/>
           </a:prstGeom>
           <a:solidFill>
@@ -8013,7 +8737,7 @@
         <p:spPr>
           <a:xfrm>
             <a:off x="822960" y="1965960"/>
-            <a:ext cx="4983480" cy="4206240"/>
+            <a:ext cx="5029200" cy="4206240"/>
           </a:xfrm>
           <a:prstGeom prst="rect">
             <a:avLst/>
@@ -8047,7 +8771,7 @@
                 </a:solidFill>
                 <a:latin typeface="Montserrat"/>
               </a:rPr>
-              <a:t>Dos capas: inox corrugado + protección</a:t>
+              <a:t>Banda soldada longitudinalmente</a:t>
             </a:r>
           </a:p>
           <a:p>
@@ -8072,7 +8796,7 @@
                 </a:solidFill>
                 <a:latin typeface="Montserrat"/>
               </a:rPr>
-              <a:t>La corrugada aguanta (estructura)</a:t>
+              <a:t>Serie 2 (UNE-EN 10312)</a:t>
             </a:r>
           </a:p>
           <a:p>
@@ -8097,7 +8821,7 @@
                 </a:solidFill>
                 <a:latin typeface="Montserrat"/>
               </a:rPr>
-              <a:t>La externa protege</a:t>
+              <a:t>El tipo se elige según el ambiente</a:t>
             </a:r>
           </a:p>
           <a:p>
@@ -8122,21 +8846,21 @@
                 </a:solidFill>
                 <a:latin typeface="Montserrat"/>
               </a:rPr>
-              <a:t>Norma UNE-EN 15266</a:t>
-            </a:r>
-          </a:p>
-        </p:txBody>
-      </p:sp>
-      <p:sp>
-        <p:nvSpPr>
-          <p:cNvPr id="9" name="imgph" descr="IMGQ:corrugated stainless steel gas hose yellow"/>
+              <a:t>Accesorios de presión, también Serie 2</a:t>
+            </a:r>
+          </a:p>
+        </p:txBody>
+      </p:sp>
+      <p:sp>
+        <p:nvSpPr>
+          <p:cNvPr id="9" name="imgph" descr="IMGQ:stainless steel pipe coastal installation"/>
           <p:cNvSpPr/>
           <p:nvPr/>
         </p:nvSpPr>
         <p:spPr>
           <a:xfrm>
-            <a:off x="5806440" y="1051560"/>
-            <a:ext cx="5298947" cy="4629150"/>
+            <a:off x="6080760" y="1965960"/>
+            <a:ext cx="5303520" cy="4572000"/>
           </a:xfrm>
           <a:prstGeom prst="roundRect">
             <a:avLst/>
@@ -8181,8 +8905,8 @@
         </p:nvSpPr>
         <p:spPr>
           <a:xfrm>
-            <a:off x="6080760" y="2726055"/>
-            <a:ext cx="4750307" cy="1280160"/>
+            <a:off x="6355080" y="3611880"/>
+            <a:ext cx="4754880" cy="1280160"/>
           </a:xfrm>
           <a:prstGeom prst="rect">
             <a:avLst/>
@@ -8203,7 +8927,7 @@
                 </a:solidFill>
                 <a:latin typeface="Montserrat"/>
               </a:rPr>
-              <a:t>IMAGEN REALISTA</a:t>
+              <a:t>IMAGEN</a:t>
             </a:r>
           </a:p>
           <a:p>
@@ -8215,7 +8939,7 @@
                 </a:solidFill>
                 <a:latin typeface="Montserrat"/>
               </a:rPr>
-              <a:t>corrugated stainless steel gas hose yellow</a:t>
+              <a:t>stainless steel pipe coastal installation</a:t>
             </a:r>
           </a:p>
         </p:txBody>
@@ -8225,6 +8949,18 @@
   <p:clrMapOvr>
     <a:masterClrMapping/>
   </p:clrMapOvr>
+  <mc:AlternateContent xmlns:mc="http://schemas.openxmlformats.org/markup-compatibility/2006">
+    <mc:Choice xmlns:p14="http://schemas.microsoft.com/office/powerpoint/2010/main" Requires="p14">
+      <p:transition spd="med" p14:dur="700">
+        <p14:cube dir="r"/>
+      </p:transition>
+    </mc:Choice>
+    <mc:Fallback>
+      <p:transition spd="med">
+        <p:push dir="r"/>
+      </p:transition>
+    </mc:Fallback>
+  </mc:AlternateContent>
 </p:sld>
 </file>
 
@@ -8312,7 +9048,7 @@
                 </a:solidFill>
                 <a:latin typeface="Montserrat"/>
               </a:rPr>
-              <a:t>017 / 018</a:t>
+              <a:t>017 / 022</a:t>
             </a:r>
           </a:p>
         </p:txBody>
@@ -8380,7 +9116,7 @@
                 </a:solidFill>
                 <a:latin typeface="Montserrat"/>
               </a:rPr>
-              <a:t>VAINAS · OTROS MATERIALES</a:t>
+              <a:t>MATERIALES · MULTICAPA</a:t>
             </a:r>
           </a:p>
         </p:txBody>
@@ -8414,14 +9150,14 @@
                 </a:solidFill>
                 <a:latin typeface="Montserrat"/>
               </a:rPr>
-              <a:t>Vainas, conductos y pasamuros</a:t>
-            </a:r>
-          </a:p>
-        </p:txBody>
-      </p:sp>
-      <p:sp>
-        <p:nvSpPr>
-          <p:cNvPr id="7" name="Rounded Rectangle 6"/>
+              <a:t>Multicapa: el sándwich</a:t>
+            </a:r>
+          </a:p>
+        </p:txBody>
+      </p:sp>
+      <p:sp>
+        <p:nvSpPr>
+          <p:cNvPr id="7" name="Rectangle 6"/>
           <p:cNvSpPr/>
           <p:nvPr/>
         </p:nvSpPr>
@@ -8430,7 +9166,7 @@
             <a:off x="868680" y="1627632"/>
             <a:ext cx="2011680" cy="73152"/>
           </a:xfrm>
-          <a:prstGeom prst="roundRect">
+          <a:prstGeom prst="rect">
             <a:avLst/>
           </a:prstGeom>
           <a:solidFill>
@@ -8471,8 +9207,8 @@
         </p:nvSpPr>
         <p:spPr>
           <a:xfrm>
-            <a:off x="822960" y="1965960"/>
-            <a:ext cx="4983480" cy="4206240"/>
+            <a:off x="6355080" y="1965960"/>
+            <a:ext cx="5029200" cy="4206240"/>
           </a:xfrm>
           <a:prstGeom prst="rect">
             <a:avLst/>
@@ -8506,7 +9242,7 @@
                 </a:solidFill>
                 <a:latin typeface="Montserrat"/>
               </a:rPr>
-              <a:t>La 'funda' del tubo de gas</a:t>
+              <a:t>Polímero – aluminio – polímero</a:t>
             </a:r>
           </a:p>
           <a:p>
@@ -8531,7 +9267,7 @@
                 </a:solidFill>
                 <a:latin typeface="Montserrat"/>
               </a:rPr>
-              <a:t>Material adecuado a su función</a:t>
+              <a:t>Normas UNE 53008-1 y -2</a:t>
             </a:r>
           </a:p>
           <a:p>
@@ -8556,7 +9292,7 @@
                 </a:solidFill>
                 <a:latin typeface="Montserrat"/>
               </a:rPr>
-              <a:t>Metálicas, plásticas, de obra…</a:t>
+              <a:t>Siempre limitador de caudal y de temperatura</a:t>
             </a:r>
           </a:p>
           <a:p>
@@ -8581,21 +9317,21 @@
                 </a:solidFill>
                 <a:latin typeface="Montserrat"/>
               </a:rPr>
-              <a:t>El detalle, en la UNE 60670-4</a:t>
-            </a:r>
-          </a:p>
-        </p:txBody>
-      </p:sp>
-      <p:sp>
-        <p:nvSpPr>
-          <p:cNvPr id="9" name="imgph" descr="IMGQ:pipe sleeve wall penetration conduit"/>
+              <a:t>Sea cual sea la longitud del tramo</a:t>
+            </a:r>
+          </a:p>
+        </p:txBody>
+      </p:sp>
+      <p:sp>
+        <p:nvSpPr>
+          <p:cNvPr id="9" name="imgph" descr="IMGQ:multilayer pipe cross section aluminium layers"/>
           <p:cNvSpPr/>
           <p:nvPr/>
         </p:nvSpPr>
         <p:spPr>
           <a:xfrm>
-            <a:off x="5806440" y="1051560"/>
-            <a:ext cx="5298947" cy="4629150"/>
+            <a:off x="822960" y="1965960"/>
+            <a:ext cx="5303520" cy="4572000"/>
           </a:xfrm>
           <a:prstGeom prst="roundRect">
             <a:avLst/>
@@ -8640,8 +9376,8 @@
         </p:nvSpPr>
         <p:spPr>
           <a:xfrm>
-            <a:off x="6080760" y="2726055"/>
-            <a:ext cx="4750307" cy="1280160"/>
+            <a:off x="1097280" y="3611880"/>
+            <a:ext cx="4754880" cy="1280160"/>
           </a:xfrm>
           <a:prstGeom prst="rect">
             <a:avLst/>
@@ -8662,7 +9398,7 @@
                 </a:solidFill>
                 <a:latin typeface="Montserrat"/>
               </a:rPr>
-              <a:t>IMAGEN REALISTA</a:t>
+              <a:t>IMAGEN</a:t>
             </a:r>
           </a:p>
           <a:p>
@@ -8674,7 +9410,7 @@
                 </a:solidFill>
                 <a:latin typeface="Montserrat"/>
               </a:rPr>
-              <a:t>pipe sleeve wall penetration conduit</a:t>
+              <a:t>multilayer pipe cross section aluminium layers</a:t>
             </a:r>
           </a:p>
         </p:txBody>
@@ -8684,6 +9420,18 @@
   <p:clrMapOvr>
     <a:masterClrMapping/>
   </p:clrMapOvr>
+  <mc:AlternateContent xmlns:mc="http://schemas.openxmlformats.org/markup-compatibility/2006">
+    <mc:Choice xmlns:p14="http://schemas.microsoft.com/office/powerpoint/2010/main" Requires="p14">
+      <p:transition spd="med" p14:dur="700">
+        <p14:cube dir="l"/>
+      </p:transition>
+    </mc:Choice>
+    <mc:Fallback>
+      <p:transition spd="med">
+        <p:push dir="l"/>
+      </p:transition>
+    </mc:Fallback>
+  </mc:AlternateContent>
 </p:sld>
 </file>
 
@@ -8712,7 +9460,7 @@
             <a:avLst/>
           </a:prstGeom>
           <a:solidFill>
-            <a:srgbClr val="1E2761"/>
+            <a:srgbClr val="FFFFFF"/>
           </a:solidFill>
           <a:ln>
             <a:noFill/>
@@ -8749,8 +9497,8 @@
         </p:nvSpPr>
         <p:spPr>
           <a:xfrm>
-            <a:off x="822960" y="640080"/>
-            <a:ext cx="10515600" cy="457200"/>
+            <a:off x="10607040" y="320040"/>
+            <a:ext cx="1371600" cy="365760"/>
           </a:xfrm>
           <a:prstGeom prst="rect">
             <a:avLst/>
@@ -8763,30 +9511,65 @@
           </a:bodyPr>
           <a:lstStyle/>
           <a:p>
-            <a:r>
-              <a:rPr sz="1400" b="1" i="0">
-                <a:solidFill>
-                  <a:srgbClr val="F4A24C"/>
-                </a:solidFill>
-                <a:latin typeface="Montserrat"/>
-              </a:rPr>
-              <a:t>LO QUE YA DOMINAS</a:t>
-            </a:r>
-          </a:p>
-        </p:txBody>
-      </p:sp>
-      <p:sp>
-        <p:nvSpPr>
-          <p:cNvPr id="4" name="Rounded Rectangle 3"/>
+            <a:pPr algn="r"/>
+            <a:r>
+              <a:rPr sz="1000" b="1" i="0">
+                <a:solidFill>
+                  <a:srgbClr val="64748B"/>
+                </a:solidFill>
+                <a:latin typeface="Montserrat"/>
+              </a:rPr>
+              <a:t>018 / 022</a:t>
+            </a:r>
+          </a:p>
+        </p:txBody>
+      </p:sp>
+      <p:sp>
+        <p:nvSpPr>
+          <p:cNvPr id="4" name="TextBox 3"/>
+          <p:cNvSpPr txBox="1"/>
+          <p:nvPr/>
+        </p:nvSpPr>
+        <p:spPr>
+          <a:xfrm>
+            <a:off x="457200" y="6419088"/>
+            <a:ext cx="8229600" cy="365760"/>
+          </a:xfrm>
+          <a:prstGeom prst="rect">
+            <a:avLst/>
+          </a:prstGeom>
+          <a:noFill/>
+        </p:spPr>
+        <p:txBody>
+          <a:bodyPr wrap="square">
+            <a:spAutoFit/>
+          </a:bodyPr>
+          <a:lstStyle/>
+          <a:p>
+            <a:r>
+              <a:rPr sz="900" b="0" i="0">
+                <a:solidFill>
+                  <a:srgbClr val="64748B"/>
+                </a:solidFill>
+                <a:latin typeface="Montserrat"/>
+              </a:rPr>
+              <a:t>Curso Gas B · Tema 10 · UNE 60670-3</a:t>
+            </a:r>
+          </a:p>
+        </p:txBody>
+      </p:sp>
+      <p:sp>
+        <p:nvSpPr>
+          <p:cNvPr id="5" name="Rectangle 4"/>
           <p:cNvSpPr/>
           <p:nvPr/>
         </p:nvSpPr>
         <p:spPr>
           <a:xfrm>
-            <a:off x="868680" y="1051560"/>
-            <a:ext cx="1463040" cy="82296"/>
-          </a:xfrm>
-          <a:prstGeom prst="roundRect">
+            <a:off x="0" y="0"/>
+            <a:ext cx="12191695" cy="1143000"/>
+          </a:xfrm>
+          <a:prstGeom prst="rect">
             <a:avLst/>
           </a:prstGeom>
           <a:solidFill>
@@ -8821,14 +9604,14 @@
       </p:sp>
       <p:sp>
         <p:nvSpPr>
-          <p:cNvPr id="5" name="TextBox 4"/>
+          <p:cNvPr id="6" name="TextBox 5"/>
           <p:cNvSpPr txBox="1"/>
           <p:nvPr/>
         </p:nvSpPr>
         <p:spPr>
           <a:xfrm>
-            <a:off x="822960" y="1234440"/>
-            <a:ext cx="10515600" cy="1097280"/>
+            <a:off x="822960" y="274320"/>
+            <a:ext cx="10515600" cy="640080"/>
           </a:xfrm>
           <a:prstGeom prst="rect">
             <a:avLst/>
@@ -8842,27 +9625,27 @@
           <a:lstStyle/>
           <a:p>
             <a:r>
-              <a:rPr sz="3400" b="1" i="0">
+              <a:rPr sz="2400" b="1" i="0">
                 <a:solidFill>
                   <a:srgbClr val="FFFFFF"/>
                 </a:solidFill>
                 <a:latin typeface="Montserrat"/>
               </a:rPr>
-              <a:t>Ya sabes con qué se construye el gas</a:t>
-            </a:r>
-          </a:p>
-        </p:txBody>
-      </p:sp>
-      <p:sp>
-        <p:nvSpPr>
-          <p:cNvPr id="6" name="TextBox 5"/>
+              <a:t>⚡  PREGUNTA RÁPIDA</a:t>
+            </a:r>
+          </a:p>
+        </p:txBody>
+      </p:sp>
+      <p:sp>
+        <p:nvSpPr>
+          <p:cNvPr id="7" name="TextBox 6"/>
           <p:cNvSpPr txBox="1"/>
           <p:nvPr/>
         </p:nvSpPr>
         <p:spPr>
           <a:xfrm>
-            <a:off x="822960" y="2606040"/>
-            <a:ext cx="10515600" cy="2743200"/>
+            <a:off x="822960" y="1508760"/>
+            <a:ext cx="10515600" cy="1371600"/>
           </a:xfrm>
           <a:prstGeom prst="rect">
             <a:avLst/>
@@ -8875,123 +9658,80 @@
           </a:bodyPr>
           <a:lstStyle/>
           <a:p>
-            <a:pPr>
-              <a:spcAft>
-                <a:spcPts val="1200"/>
-              </a:spcAft>
-            </a:pPr>
-            <a:r>
-              <a:rPr sz="2000" b="1" i="0">
-                <a:solidFill>
-                  <a:srgbClr val="F4A24C"/>
-                </a:solidFill>
-                <a:latin typeface="Montserrat"/>
-              </a:rPr>
-              <a:t>✓  </a:t>
-            </a:r>
-            <a:r>
-              <a:rPr sz="1900" b="0" i="0">
-                <a:solidFill>
-                  <a:srgbClr val="FFFFFF"/>
-                </a:solidFill>
-                <a:latin typeface="Montserrat"/>
-              </a:rPr>
-              <a:t>PE Para Enterrar; el sol, prohibido</a:t>
-            </a:r>
-          </a:p>
-          <a:p>
-            <a:pPr>
-              <a:spcAft>
-                <a:spcPts val="1200"/>
-              </a:spcAft>
-            </a:pPr>
-            <a:r>
-              <a:rPr sz="2000" b="1" i="0">
-                <a:solidFill>
-                  <a:srgbClr val="F4A24C"/>
-                </a:solidFill>
-                <a:latin typeface="Montserrat"/>
-              </a:rPr>
-              <a:t>✓  </a:t>
-            </a:r>
-            <a:r>
-              <a:rPr sz="1900" b="0" i="0">
-                <a:solidFill>
-                  <a:srgbClr val="FFFFFF"/>
-                </a:solidFill>
-                <a:latin typeface="Montserrat"/>
-              </a:rPr>
-              <a:t>Cobre 1 mm / 1,5 mm enterrado, sin mandril</a:t>
-            </a:r>
-          </a:p>
-          <a:p>
-            <a:pPr>
-              <a:spcAft>
-                <a:spcPts val="1200"/>
-              </a:spcAft>
-            </a:pPr>
-            <a:r>
-              <a:rPr sz="2000" b="1" i="0">
-                <a:solidFill>
-                  <a:srgbClr val="F4A24C"/>
-                </a:solidFill>
-                <a:latin typeface="Montserrat"/>
-              </a:rPr>
-              <a:t>✓  </a:t>
-            </a:r>
-            <a:r>
-              <a:rPr sz="1900" b="0" i="0">
-                <a:solidFill>
-                  <a:srgbClr val="FFFFFF"/>
-                </a:solidFill>
-                <a:latin typeface="Montserrat"/>
-              </a:rPr>
-              <a:t>Acero hasta 2"; inoxidable Serie 2</a:t>
-            </a:r>
-          </a:p>
-          <a:p>
-            <a:pPr>
-              <a:spcAft>
-                <a:spcPts val="1200"/>
-              </a:spcAft>
-            </a:pPr>
-            <a:r>
-              <a:rPr sz="2000" b="1" i="0">
-                <a:solidFill>
-                  <a:srgbClr val="F4A24C"/>
-                </a:solidFill>
-                <a:latin typeface="Montserrat"/>
-              </a:rPr>
-              <a:t>✓  </a:t>
-            </a:r>
-            <a:r>
-              <a:rPr sz="1900" b="0" i="0">
-                <a:solidFill>
-                  <a:srgbClr val="FFFFFF"/>
-                </a:solidFill>
-                <a:latin typeface="Montserrat"/>
-              </a:rPr>
-              <a:t>Multicapa: siempre sus dos limitadores</a:t>
-            </a:r>
-          </a:p>
-        </p:txBody>
-      </p:sp>
-      <p:sp>
-        <p:nvSpPr>
-          <p:cNvPr id="7" name="Rounded Rectangle 6"/>
+            <a:r>
+              <a:rPr sz="2400" b="1" i="0">
+                <a:solidFill>
+                  <a:srgbClr val="1E2761"/>
+                </a:solidFill>
+                <a:latin typeface="Montserrat"/>
+              </a:rPr>
+              <a:t>En un tramo de tubo multicapa, ¿cuándo son obligatorios el limitador de caudal y el de temperatura?</a:t>
+            </a:r>
+          </a:p>
+        </p:txBody>
+      </p:sp>
+      <p:sp>
+        <p:nvSpPr>
+          <p:cNvPr id="8" name="Rounded Rectangle 7"/>
           <p:cNvSpPr/>
           <p:nvPr/>
         </p:nvSpPr>
         <p:spPr>
           <a:xfrm>
-            <a:off x="822960" y="5532120"/>
-            <a:ext cx="10515600" cy="822960"/>
+            <a:off x="822960" y="3291840"/>
+            <a:ext cx="4983480" cy="1143000"/>
           </a:xfrm>
           <a:prstGeom prst="roundRect">
             <a:avLst/>
           </a:prstGeom>
           <a:solidFill>
-            <a:srgbClr val="E8801A"/>
+            <a:srgbClr val="F3F6FB"/>
+          </a:solidFill>
+          <a:ln w="12700">
+            <a:solidFill>
+              <a:srgbClr val="C7D2E6"/>
+            </a:solidFill>
+          </a:ln>
+          <a:effectLst/>
+        </p:spPr>
+        <p:style>
+          <a:lnRef idx="1">
+            <a:schemeClr val="accent1"/>
+          </a:lnRef>
+          <a:fillRef idx="3">
+            <a:schemeClr val="accent1"/>
+          </a:fillRef>
+          <a:effectRef idx="2">
+            <a:schemeClr val="accent1"/>
+          </a:effectRef>
+          <a:fontRef idx="minor">
+            <a:schemeClr val="lt1"/>
+          </a:fontRef>
+        </p:style>
+        <p:txBody>
+          <a:bodyPr rtlCol="0" anchor="ctr"/>
+          <a:lstStyle/>
+          <a:p>
+            <a:pPr algn="ctr"/>
+          </a:p>
+        </p:txBody>
+      </p:sp>
+      <p:sp>
+        <p:nvSpPr>
+          <p:cNvPr id="9" name="Rectangle 8"/>
+          <p:cNvSpPr/>
+          <p:nvPr/>
+        </p:nvSpPr>
+        <p:spPr>
+          <a:xfrm>
+            <a:off x="822960" y="3291840"/>
+            <a:ext cx="640080" cy="1143000"/>
+          </a:xfrm>
+          <a:prstGeom prst="rect">
+            <a:avLst/>
+          </a:prstGeom>
+          <a:solidFill>
+            <a:srgbClr val="1E2761"/>
           </a:solidFill>
           <a:ln>
             <a:noFill/>
@@ -9022,14 +9762,14 @@
       </p:sp>
       <p:sp>
         <p:nvSpPr>
-          <p:cNvPr id="8" name="TextBox 7"/>
+          <p:cNvPr id="10" name="TextBox 9"/>
           <p:cNvSpPr txBox="1"/>
           <p:nvPr/>
         </p:nvSpPr>
         <p:spPr>
           <a:xfrm>
-            <a:off x="1051560" y="5623560"/>
-            <a:ext cx="10058400" cy="640080"/>
+            <a:off x="822960" y="3611880"/>
+            <a:ext cx="640080" cy="548640"/>
           </a:xfrm>
           <a:prstGeom prst="rect">
             <a:avLst/>
@@ -9042,14 +9782,526 @@
           </a:bodyPr>
           <a:lstStyle/>
           <a:p>
-            <a:r>
-              <a:rPr sz="1500" b="1" i="1">
-                <a:solidFill>
-                  <a:srgbClr val="1E2761"/>
-                </a:solidFill>
-                <a:latin typeface="Montserrat"/>
-              </a:rPr>
-              <a:t>Con estos materiales ya no te la cuela ninguna pregunta de la Parte 3. Vamos a por los elementos.</a:t>
+            <a:pPr algn="ctr"/>
+            <a:r>
+              <a:rPr sz="2200" b="1" i="0">
+                <a:solidFill>
+                  <a:srgbClr val="FFFFFF"/>
+                </a:solidFill>
+                <a:latin typeface="Montserrat"/>
+              </a:rPr>
+              <a:t>A</a:t>
+            </a:r>
+          </a:p>
+        </p:txBody>
+      </p:sp>
+      <p:sp>
+        <p:nvSpPr>
+          <p:cNvPr id="11" name="TextBox 10"/>
+          <p:cNvSpPr txBox="1"/>
+          <p:nvPr/>
+        </p:nvSpPr>
+        <p:spPr>
+          <a:xfrm>
+            <a:off x="1600200" y="3474720"/>
+            <a:ext cx="4114800" cy="868680"/>
+          </a:xfrm>
+          <a:prstGeom prst="rect">
+            <a:avLst/>
+          </a:prstGeom>
+          <a:noFill/>
+        </p:spPr>
+        <p:txBody>
+          <a:bodyPr wrap="square">
+            <a:spAutoFit/>
+          </a:bodyPr>
+          <a:lstStyle/>
+          <a:p>
+            <a:r>
+              <a:rPr sz="1400" b="0" i="0">
+                <a:solidFill>
+                  <a:srgbClr val="1B2330"/>
+                </a:solidFill>
+                <a:latin typeface="Montserrat"/>
+              </a:rPr>
+              <a:t>Solo en tramos largos</a:t>
+            </a:r>
+          </a:p>
+        </p:txBody>
+      </p:sp>
+      <p:sp>
+        <p:nvSpPr>
+          <p:cNvPr id="12" name="Rounded Rectangle 11"/>
+          <p:cNvSpPr/>
+          <p:nvPr/>
+        </p:nvSpPr>
+        <p:spPr>
+          <a:xfrm>
+            <a:off x="6355080" y="3291840"/>
+            <a:ext cx="4983480" cy="1143000"/>
+          </a:xfrm>
+          <a:prstGeom prst="roundRect">
+            <a:avLst/>
+          </a:prstGeom>
+          <a:solidFill>
+            <a:srgbClr val="F3F6FB"/>
+          </a:solidFill>
+          <a:ln w="12700">
+            <a:solidFill>
+              <a:srgbClr val="C7D2E6"/>
+            </a:solidFill>
+          </a:ln>
+          <a:effectLst/>
+        </p:spPr>
+        <p:style>
+          <a:lnRef idx="1">
+            <a:schemeClr val="accent1"/>
+          </a:lnRef>
+          <a:fillRef idx="3">
+            <a:schemeClr val="accent1"/>
+          </a:fillRef>
+          <a:effectRef idx="2">
+            <a:schemeClr val="accent1"/>
+          </a:effectRef>
+          <a:fontRef idx="minor">
+            <a:schemeClr val="lt1"/>
+          </a:fontRef>
+        </p:style>
+        <p:txBody>
+          <a:bodyPr rtlCol="0" anchor="ctr"/>
+          <a:lstStyle/>
+          <a:p>
+            <a:pPr algn="ctr"/>
+          </a:p>
+        </p:txBody>
+      </p:sp>
+      <p:sp>
+        <p:nvSpPr>
+          <p:cNvPr id="13" name="Rectangle 12"/>
+          <p:cNvSpPr/>
+          <p:nvPr/>
+        </p:nvSpPr>
+        <p:spPr>
+          <a:xfrm>
+            <a:off x="6355080" y="3291840"/>
+            <a:ext cx="640080" cy="1143000"/>
+          </a:xfrm>
+          <a:prstGeom prst="rect">
+            <a:avLst/>
+          </a:prstGeom>
+          <a:solidFill>
+            <a:srgbClr val="1E2761"/>
+          </a:solidFill>
+          <a:ln>
+            <a:noFill/>
+          </a:ln>
+          <a:effectLst/>
+        </p:spPr>
+        <p:style>
+          <a:lnRef idx="1">
+            <a:schemeClr val="accent1"/>
+          </a:lnRef>
+          <a:fillRef idx="3">
+            <a:schemeClr val="accent1"/>
+          </a:fillRef>
+          <a:effectRef idx="2">
+            <a:schemeClr val="accent1"/>
+          </a:effectRef>
+          <a:fontRef idx="minor">
+            <a:schemeClr val="lt1"/>
+          </a:fontRef>
+        </p:style>
+        <p:txBody>
+          <a:bodyPr rtlCol="0" anchor="ctr"/>
+          <a:lstStyle/>
+          <a:p>
+            <a:pPr algn="ctr"/>
+          </a:p>
+        </p:txBody>
+      </p:sp>
+      <p:sp>
+        <p:nvSpPr>
+          <p:cNvPr id="14" name="TextBox 13"/>
+          <p:cNvSpPr txBox="1"/>
+          <p:nvPr/>
+        </p:nvSpPr>
+        <p:spPr>
+          <a:xfrm>
+            <a:off x="6355080" y="3611880"/>
+            <a:ext cx="640080" cy="548640"/>
+          </a:xfrm>
+          <a:prstGeom prst="rect">
+            <a:avLst/>
+          </a:prstGeom>
+          <a:noFill/>
+        </p:spPr>
+        <p:txBody>
+          <a:bodyPr wrap="square">
+            <a:spAutoFit/>
+          </a:bodyPr>
+          <a:lstStyle/>
+          <a:p>
+            <a:pPr algn="ctr"/>
+            <a:r>
+              <a:rPr sz="2200" b="1" i="0">
+                <a:solidFill>
+                  <a:srgbClr val="FFFFFF"/>
+                </a:solidFill>
+                <a:latin typeface="Montserrat"/>
+              </a:rPr>
+              <a:t>B</a:t>
+            </a:r>
+          </a:p>
+        </p:txBody>
+      </p:sp>
+      <p:sp>
+        <p:nvSpPr>
+          <p:cNvPr id="15" name="TextBox 14"/>
+          <p:cNvSpPr txBox="1"/>
+          <p:nvPr/>
+        </p:nvSpPr>
+        <p:spPr>
+          <a:xfrm>
+            <a:off x="7132320" y="3474720"/>
+            <a:ext cx="4114800" cy="868680"/>
+          </a:xfrm>
+          <a:prstGeom prst="rect">
+            <a:avLst/>
+          </a:prstGeom>
+          <a:noFill/>
+        </p:spPr>
+        <p:txBody>
+          <a:bodyPr wrap="square">
+            <a:spAutoFit/>
+          </a:bodyPr>
+          <a:lstStyle/>
+          <a:p>
+            <a:r>
+              <a:rPr sz="1400" b="0" i="0">
+                <a:solidFill>
+                  <a:srgbClr val="1B2330"/>
+                </a:solidFill>
+                <a:latin typeface="Montserrat"/>
+              </a:rPr>
+              <a:t>Solo si el tubo va enterrado</a:t>
+            </a:r>
+          </a:p>
+        </p:txBody>
+      </p:sp>
+      <p:sp>
+        <p:nvSpPr>
+          <p:cNvPr id="16" name="Rounded Rectangle 15"/>
+          <p:cNvSpPr/>
+          <p:nvPr/>
+        </p:nvSpPr>
+        <p:spPr>
+          <a:xfrm>
+            <a:off x="822960" y="4617720"/>
+            <a:ext cx="4983480" cy="1143000"/>
+          </a:xfrm>
+          <a:prstGeom prst="roundRect">
+            <a:avLst/>
+          </a:prstGeom>
+          <a:solidFill>
+            <a:srgbClr val="F3F6FB"/>
+          </a:solidFill>
+          <a:ln w="12700">
+            <a:solidFill>
+              <a:srgbClr val="C7D2E6"/>
+            </a:solidFill>
+          </a:ln>
+          <a:effectLst/>
+        </p:spPr>
+        <p:style>
+          <a:lnRef idx="1">
+            <a:schemeClr val="accent1"/>
+          </a:lnRef>
+          <a:fillRef idx="3">
+            <a:schemeClr val="accent1"/>
+          </a:fillRef>
+          <a:effectRef idx="2">
+            <a:schemeClr val="accent1"/>
+          </a:effectRef>
+          <a:fontRef idx="minor">
+            <a:schemeClr val="lt1"/>
+          </a:fontRef>
+        </p:style>
+        <p:txBody>
+          <a:bodyPr rtlCol="0" anchor="ctr"/>
+          <a:lstStyle/>
+          <a:p>
+            <a:pPr algn="ctr"/>
+          </a:p>
+        </p:txBody>
+      </p:sp>
+      <p:sp>
+        <p:nvSpPr>
+          <p:cNvPr id="17" name="Rectangle 16"/>
+          <p:cNvSpPr/>
+          <p:nvPr/>
+        </p:nvSpPr>
+        <p:spPr>
+          <a:xfrm>
+            <a:off x="822960" y="4617720"/>
+            <a:ext cx="640080" cy="1143000"/>
+          </a:xfrm>
+          <a:prstGeom prst="rect">
+            <a:avLst/>
+          </a:prstGeom>
+          <a:solidFill>
+            <a:srgbClr val="1E2761"/>
+          </a:solidFill>
+          <a:ln>
+            <a:noFill/>
+          </a:ln>
+          <a:effectLst/>
+        </p:spPr>
+        <p:style>
+          <a:lnRef idx="1">
+            <a:schemeClr val="accent1"/>
+          </a:lnRef>
+          <a:fillRef idx="3">
+            <a:schemeClr val="accent1"/>
+          </a:fillRef>
+          <a:effectRef idx="2">
+            <a:schemeClr val="accent1"/>
+          </a:effectRef>
+          <a:fontRef idx="minor">
+            <a:schemeClr val="lt1"/>
+          </a:fontRef>
+        </p:style>
+        <p:txBody>
+          <a:bodyPr rtlCol="0" anchor="ctr"/>
+          <a:lstStyle/>
+          <a:p>
+            <a:pPr algn="ctr"/>
+          </a:p>
+        </p:txBody>
+      </p:sp>
+      <p:sp>
+        <p:nvSpPr>
+          <p:cNvPr id="18" name="TextBox 17"/>
+          <p:cNvSpPr txBox="1"/>
+          <p:nvPr/>
+        </p:nvSpPr>
+        <p:spPr>
+          <a:xfrm>
+            <a:off x="822960" y="4937760"/>
+            <a:ext cx="640080" cy="548640"/>
+          </a:xfrm>
+          <a:prstGeom prst="rect">
+            <a:avLst/>
+          </a:prstGeom>
+          <a:noFill/>
+        </p:spPr>
+        <p:txBody>
+          <a:bodyPr wrap="square">
+            <a:spAutoFit/>
+          </a:bodyPr>
+          <a:lstStyle/>
+          <a:p>
+            <a:pPr algn="ctr"/>
+            <a:r>
+              <a:rPr sz="2200" b="1" i="0">
+                <a:solidFill>
+                  <a:srgbClr val="FFFFFF"/>
+                </a:solidFill>
+                <a:latin typeface="Montserrat"/>
+              </a:rPr>
+              <a:t>C</a:t>
+            </a:r>
+          </a:p>
+        </p:txBody>
+      </p:sp>
+      <p:sp>
+        <p:nvSpPr>
+          <p:cNvPr id="19" name="TextBox 18"/>
+          <p:cNvSpPr txBox="1"/>
+          <p:nvPr/>
+        </p:nvSpPr>
+        <p:spPr>
+          <a:xfrm>
+            <a:off x="1600200" y="4800600"/>
+            <a:ext cx="4114800" cy="868680"/>
+          </a:xfrm>
+          <a:prstGeom prst="rect">
+            <a:avLst/>
+          </a:prstGeom>
+          <a:noFill/>
+        </p:spPr>
+        <p:txBody>
+          <a:bodyPr wrap="square">
+            <a:spAutoFit/>
+          </a:bodyPr>
+          <a:lstStyle/>
+          <a:p>
+            <a:r>
+              <a:rPr sz="1400" b="0" i="0">
+                <a:solidFill>
+                  <a:srgbClr val="1B2330"/>
+                </a:solidFill>
+                <a:latin typeface="Montserrat"/>
+              </a:rPr>
+              <a:t>Siempre, sea cual sea la longitud</a:t>
+            </a:r>
+          </a:p>
+        </p:txBody>
+      </p:sp>
+      <p:sp>
+        <p:nvSpPr>
+          <p:cNvPr id="20" name="Rounded Rectangle 19"/>
+          <p:cNvSpPr/>
+          <p:nvPr/>
+        </p:nvSpPr>
+        <p:spPr>
+          <a:xfrm>
+            <a:off x="6355080" y="4617720"/>
+            <a:ext cx="4983480" cy="1143000"/>
+          </a:xfrm>
+          <a:prstGeom prst="roundRect">
+            <a:avLst/>
+          </a:prstGeom>
+          <a:solidFill>
+            <a:srgbClr val="F3F6FB"/>
+          </a:solidFill>
+          <a:ln w="12700">
+            <a:solidFill>
+              <a:srgbClr val="C7D2E6"/>
+            </a:solidFill>
+          </a:ln>
+          <a:effectLst/>
+        </p:spPr>
+        <p:style>
+          <a:lnRef idx="1">
+            <a:schemeClr val="accent1"/>
+          </a:lnRef>
+          <a:fillRef idx="3">
+            <a:schemeClr val="accent1"/>
+          </a:fillRef>
+          <a:effectRef idx="2">
+            <a:schemeClr val="accent1"/>
+          </a:effectRef>
+          <a:fontRef idx="minor">
+            <a:schemeClr val="lt1"/>
+          </a:fontRef>
+        </p:style>
+        <p:txBody>
+          <a:bodyPr rtlCol="0" anchor="ctr"/>
+          <a:lstStyle/>
+          <a:p>
+            <a:pPr algn="ctr"/>
+          </a:p>
+        </p:txBody>
+      </p:sp>
+      <p:sp>
+        <p:nvSpPr>
+          <p:cNvPr id="21" name="Rectangle 20"/>
+          <p:cNvSpPr/>
+          <p:nvPr/>
+        </p:nvSpPr>
+        <p:spPr>
+          <a:xfrm>
+            <a:off x="6355080" y="4617720"/>
+            <a:ext cx="640080" cy="1143000"/>
+          </a:xfrm>
+          <a:prstGeom prst="rect">
+            <a:avLst/>
+          </a:prstGeom>
+          <a:solidFill>
+            <a:srgbClr val="1E2761"/>
+          </a:solidFill>
+          <a:ln>
+            <a:noFill/>
+          </a:ln>
+          <a:effectLst/>
+        </p:spPr>
+        <p:style>
+          <a:lnRef idx="1">
+            <a:schemeClr val="accent1"/>
+          </a:lnRef>
+          <a:fillRef idx="3">
+            <a:schemeClr val="accent1"/>
+          </a:fillRef>
+          <a:effectRef idx="2">
+            <a:schemeClr val="accent1"/>
+          </a:effectRef>
+          <a:fontRef idx="minor">
+            <a:schemeClr val="lt1"/>
+          </a:fontRef>
+        </p:style>
+        <p:txBody>
+          <a:bodyPr rtlCol="0" anchor="ctr"/>
+          <a:lstStyle/>
+          <a:p>
+            <a:pPr algn="ctr"/>
+          </a:p>
+        </p:txBody>
+      </p:sp>
+      <p:sp>
+        <p:nvSpPr>
+          <p:cNvPr id="22" name="TextBox 21"/>
+          <p:cNvSpPr txBox="1"/>
+          <p:nvPr/>
+        </p:nvSpPr>
+        <p:spPr>
+          <a:xfrm>
+            <a:off x="6355080" y="4937760"/>
+            <a:ext cx="640080" cy="548640"/>
+          </a:xfrm>
+          <a:prstGeom prst="rect">
+            <a:avLst/>
+          </a:prstGeom>
+          <a:noFill/>
+        </p:spPr>
+        <p:txBody>
+          <a:bodyPr wrap="square">
+            <a:spAutoFit/>
+          </a:bodyPr>
+          <a:lstStyle/>
+          <a:p>
+            <a:pPr algn="ctr"/>
+            <a:r>
+              <a:rPr sz="2200" b="1" i="0">
+                <a:solidFill>
+                  <a:srgbClr val="FFFFFF"/>
+                </a:solidFill>
+                <a:latin typeface="Montserrat"/>
+              </a:rPr>
+              <a:t>D</a:t>
+            </a:r>
+          </a:p>
+        </p:txBody>
+      </p:sp>
+      <p:sp>
+        <p:nvSpPr>
+          <p:cNvPr id="23" name="TextBox 22"/>
+          <p:cNvSpPr txBox="1"/>
+          <p:nvPr/>
+        </p:nvSpPr>
+        <p:spPr>
+          <a:xfrm>
+            <a:off x="7132320" y="4800600"/>
+            <a:ext cx="4114800" cy="868680"/>
+          </a:xfrm>
+          <a:prstGeom prst="rect">
+            <a:avLst/>
+          </a:prstGeom>
+          <a:noFill/>
+        </p:spPr>
+        <p:txBody>
+          <a:bodyPr wrap="square">
+            <a:spAutoFit/>
+          </a:bodyPr>
+          <a:lstStyle/>
+          <a:p>
+            <a:r>
+              <a:rPr sz="1400" b="0" i="0">
+                <a:solidFill>
+                  <a:srgbClr val="1B2330"/>
+                </a:solidFill>
+                <a:latin typeface="Montserrat"/>
+              </a:rPr>
+              <a:t>Solo en instalaciones de propano</a:t>
             </a:r>
           </a:p>
         </p:txBody>
@@ -9059,6 +10311,405 @@
   <p:clrMapOvr>
     <a:masterClrMapping/>
   </p:clrMapOvr>
+  <mc:AlternateContent xmlns:mc="http://schemas.openxmlformats.org/markup-compatibility/2006">
+    <mc:Choice xmlns:p14="http://schemas.microsoft.com/office/powerpoint/2010/main" Requires="p14">
+      <p:transition spd="med" p14:dur="700">
+        <p14:cube dir="r"/>
+      </p:transition>
+    </mc:Choice>
+    <mc:Fallback>
+      <p:transition spd="med">
+        <p:push dir="r"/>
+      </p:transition>
+    </mc:Fallback>
+  </mc:AlternateContent>
+</p:sld>
+</file>
+
+<file path=ppt/slides/slide19.xml><?xml version="1.0" encoding="utf-8"?>
+<p:sld xmlns:a="http://schemas.openxmlformats.org/drawingml/2006/main" xmlns:p="http://schemas.openxmlformats.org/presentationml/2006/main" xmlns:r="http://schemas.openxmlformats.org/officeDocument/2006/relationships">
+  <p:cSld>
+    <p:spTree>
+      <p:nvGrpSpPr>
+        <p:cNvPr id="1" name=""/>
+        <p:cNvGrpSpPr/>
+        <p:nvPr/>
+      </p:nvGrpSpPr>
+      <p:grpSpPr/>
+      <p:sp>
+        <p:nvSpPr>
+          <p:cNvPr id="2" name="Rectangle 1"/>
+          <p:cNvSpPr/>
+          <p:nvPr/>
+        </p:nvSpPr>
+        <p:spPr>
+          <a:xfrm>
+            <a:off x="0" y="0"/>
+            <a:ext cx="12191695" cy="6858000"/>
+          </a:xfrm>
+          <a:prstGeom prst="rect">
+            <a:avLst/>
+          </a:prstGeom>
+          <a:solidFill>
+            <a:srgbClr val="FFFFFF"/>
+          </a:solidFill>
+          <a:ln>
+            <a:noFill/>
+          </a:ln>
+          <a:effectLst/>
+        </p:spPr>
+        <p:style>
+          <a:lnRef idx="1">
+            <a:schemeClr val="accent1"/>
+          </a:lnRef>
+          <a:fillRef idx="3">
+            <a:schemeClr val="accent1"/>
+          </a:fillRef>
+          <a:effectRef idx="2">
+            <a:schemeClr val="accent1"/>
+          </a:effectRef>
+          <a:fontRef idx="minor">
+            <a:schemeClr val="lt1"/>
+          </a:fontRef>
+        </p:style>
+        <p:txBody>
+          <a:bodyPr rtlCol="0" anchor="ctr"/>
+          <a:lstStyle/>
+          <a:p>
+            <a:pPr algn="ctr"/>
+          </a:p>
+        </p:txBody>
+      </p:sp>
+      <p:sp>
+        <p:nvSpPr>
+          <p:cNvPr id="3" name="TextBox 2"/>
+          <p:cNvSpPr txBox="1"/>
+          <p:nvPr/>
+        </p:nvSpPr>
+        <p:spPr>
+          <a:xfrm>
+            <a:off x="10607040" y="320040"/>
+            <a:ext cx="1371600" cy="365760"/>
+          </a:xfrm>
+          <a:prstGeom prst="rect">
+            <a:avLst/>
+          </a:prstGeom>
+          <a:noFill/>
+        </p:spPr>
+        <p:txBody>
+          <a:bodyPr wrap="square">
+            <a:spAutoFit/>
+          </a:bodyPr>
+          <a:lstStyle/>
+          <a:p>
+            <a:pPr algn="r"/>
+            <a:r>
+              <a:rPr sz="1000" b="1" i="0">
+                <a:solidFill>
+                  <a:srgbClr val="64748B"/>
+                </a:solidFill>
+                <a:latin typeface="Montserrat"/>
+              </a:rPr>
+              <a:t>019 / 022</a:t>
+            </a:r>
+          </a:p>
+        </p:txBody>
+      </p:sp>
+      <p:sp>
+        <p:nvSpPr>
+          <p:cNvPr id="4" name="TextBox 3"/>
+          <p:cNvSpPr txBox="1"/>
+          <p:nvPr/>
+        </p:nvSpPr>
+        <p:spPr>
+          <a:xfrm>
+            <a:off x="457200" y="6419088"/>
+            <a:ext cx="8229600" cy="365760"/>
+          </a:xfrm>
+          <a:prstGeom prst="rect">
+            <a:avLst/>
+          </a:prstGeom>
+          <a:noFill/>
+        </p:spPr>
+        <p:txBody>
+          <a:bodyPr wrap="square">
+            <a:spAutoFit/>
+          </a:bodyPr>
+          <a:lstStyle/>
+          <a:p>
+            <a:r>
+              <a:rPr sz="900" b="0" i="0">
+                <a:solidFill>
+                  <a:srgbClr val="64748B"/>
+                </a:solidFill>
+                <a:latin typeface="Montserrat"/>
+              </a:rPr>
+              <a:t>Curso Gas B · Tema 10 · UNE 60670-3</a:t>
+            </a:r>
+          </a:p>
+        </p:txBody>
+      </p:sp>
+      <p:sp>
+        <p:nvSpPr>
+          <p:cNvPr id="5" name="Rectangle 4"/>
+          <p:cNvSpPr/>
+          <p:nvPr/>
+        </p:nvSpPr>
+        <p:spPr>
+          <a:xfrm>
+            <a:off x="0" y="0"/>
+            <a:ext cx="12191695" cy="1143000"/>
+          </a:xfrm>
+          <a:prstGeom prst="rect">
+            <a:avLst/>
+          </a:prstGeom>
+          <a:solidFill>
+            <a:srgbClr val="1E8E4B"/>
+          </a:solidFill>
+          <a:ln>
+            <a:noFill/>
+          </a:ln>
+          <a:effectLst/>
+        </p:spPr>
+        <p:style>
+          <a:lnRef idx="1">
+            <a:schemeClr val="accent1"/>
+          </a:lnRef>
+          <a:fillRef idx="3">
+            <a:schemeClr val="accent1"/>
+          </a:fillRef>
+          <a:effectRef idx="2">
+            <a:schemeClr val="accent1"/>
+          </a:effectRef>
+          <a:fontRef idx="minor">
+            <a:schemeClr val="lt1"/>
+          </a:fontRef>
+        </p:style>
+        <p:txBody>
+          <a:bodyPr rtlCol="0" anchor="ctr"/>
+          <a:lstStyle/>
+          <a:p>
+            <a:pPr algn="ctr"/>
+          </a:p>
+        </p:txBody>
+      </p:sp>
+      <p:sp>
+        <p:nvSpPr>
+          <p:cNvPr id="6" name="TextBox 5"/>
+          <p:cNvSpPr txBox="1"/>
+          <p:nvPr/>
+        </p:nvSpPr>
+        <p:spPr>
+          <a:xfrm>
+            <a:off x="822960" y="274320"/>
+            <a:ext cx="10515600" cy="640080"/>
+          </a:xfrm>
+          <a:prstGeom prst="rect">
+            <a:avLst/>
+          </a:prstGeom>
+          <a:noFill/>
+        </p:spPr>
+        <p:txBody>
+          <a:bodyPr wrap="square">
+            <a:spAutoFit/>
+          </a:bodyPr>
+          <a:lstStyle/>
+          <a:p>
+            <a:r>
+              <a:rPr sz="2400" b="1" i="0">
+                <a:solidFill>
+                  <a:srgbClr val="FFFFFF"/>
+                </a:solidFill>
+                <a:latin typeface="Montserrat"/>
+              </a:rPr>
+              <a:t>✔  RESPUESTA:  C</a:t>
+            </a:r>
+          </a:p>
+        </p:txBody>
+      </p:sp>
+      <p:sp>
+        <p:nvSpPr>
+          <p:cNvPr id="7" name="TextBox 6"/>
+          <p:cNvSpPr txBox="1"/>
+          <p:nvPr/>
+        </p:nvSpPr>
+        <p:spPr>
+          <a:xfrm>
+            <a:off x="822960" y="1417320"/>
+            <a:ext cx="10515600" cy="914400"/>
+          </a:xfrm>
+          <a:prstGeom prst="rect">
+            <a:avLst/>
+          </a:prstGeom>
+          <a:noFill/>
+        </p:spPr>
+        <p:txBody>
+          <a:bodyPr wrap="square">
+            <a:spAutoFit/>
+          </a:bodyPr>
+          <a:lstStyle/>
+          <a:p>
+            <a:r>
+              <a:rPr sz="1800" b="1" i="0">
+                <a:solidFill>
+                  <a:srgbClr val="64748B"/>
+                </a:solidFill>
+                <a:latin typeface="Montserrat"/>
+              </a:rPr>
+              <a:t>En un tramo de tubo multicapa, ¿cuándo son obligatorios el limitador de caudal y el de temperatura?</a:t>
+            </a:r>
+          </a:p>
+        </p:txBody>
+      </p:sp>
+      <p:sp>
+        <p:nvSpPr>
+          <p:cNvPr id="8" name="Rounded Rectangle 7"/>
+          <p:cNvSpPr/>
+          <p:nvPr/>
+        </p:nvSpPr>
+        <p:spPr>
+          <a:xfrm>
+            <a:off x="822960" y="2514600"/>
+            <a:ext cx="10515600" cy="914400"/>
+          </a:xfrm>
+          <a:prstGeom prst="roundRect">
+            <a:avLst/>
+          </a:prstGeom>
+          <a:solidFill>
+            <a:srgbClr val="E9F6EE"/>
+          </a:solidFill>
+          <a:ln w="12700">
+            <a:solidFill>
+              <a:srgbClr val="1E8E4B"/>
+            </a:solidFill>
+          </a:ln>
+          <a:effectLst/>
+        </p:spPr>
+        <p:style>
+          <a:lnRef idx="1">
+            <a:schemeClr val="accent1"/>
+          </a:lnRef>
+          <a:fillRef idx="3">
+            <a:schemeClr val="accent1"/>
+          </a:fillRef>
+          <a:effectRef idx="2">
+            <a:schemeClr val="accent1"/>
+          </a:effectRef>
+          <a:fontRef idx="minor">
+            <a:schemeClr val="lt1"/>
+          </a:fontRef>
+        </p:style>
+        <p:txBody>
+          <a:bodyPr rtlCol="0" anchor="ctr"/>
+          <a:lstStyle/>
+          <a:p>
+            <a:pPr algn="ctr"/>
+          </a:p>
+        </p:txBody>
+      </p:sp>
+      <p:sp>
+        <p:nvSpPr>
+          <p:cNvPr id="9" name="TextBox 8"/>
+          <p:cNvSpPr txBox="1"/>
+          <p:nvPr/>
+        </p:nvSpPr>
+        <p:spPr>
+          <a:xfrm>
+            <a:off x="1097280" y="2697480"/>
+            <a:ext cx="10058400" cy="640080"/>
+          </a:xfrm>
+          <a:prstGeom prst="rect">
+            <a:avLst/>
+          </a:prstGeom>
+          <a:noFill/>
+        </p:spPr>
+        <p:txBody>
+          <a:bodyPr wrap="square">
+            <a:spAutoFit/>
+          </a:bodyPr>
+          <a:lstStyle/>
+          <a:p>
+            <a:r>
+              <a:rPr sz="1800" b="1" i="0">
+                <a:solidFill>
+                  <a:srgbClr val="1E8E4B"/>
+                </a:solidFill>
+                <a:latin typeface="Montserrat"/>
+              </a:rPr>
+              <a:t>C.  </a:t>
+            </a:r>
+            <a:r>
+              <a:rPr sz="1800" b="1" i="0">
+                <a:solidFill>
+                  <a:srgbClr val="1E2761"/>
+                </a:solidFill>
+                <a:latin typeface="Montserrat"/>
+              </a:rPr>
+              <a:t>Siempre, sea cual sea la longitud</a:t>
+            </a:r>
+          </a:p>
+        </p:txBody>
+      </p:sp>
+      <p:sp>
+        <p:nvSpPr>
+          <p:cNvPr id="10" name="TextBox 9"/>
+          <p:cNvSpPr txBox="1"/>
+          <p:nvPr/>
+        </p:nvSpPr>
+        <p:spPr>
+          <a:xfrm>
+            <a:off x="822960" y="3749039"/>
+            <a:ext cx="10515600" cy="2194560"/>
+          </a:xfrm>
+          <a:prstGeom prst="rect">
+            <a:avLst/>
+          </a:prstGeom>
+          <a:noFill/>
+        </p:spPr>
+        <p:txBody>
+          <a:bodyPr wrap="square">
+            <a:spAutoFit/>
+          </a:bodyPr>
+          <a:lstStyle/>
+          <a:p>
+            <a:r>
+              <a:rPr sz="1500" b="1" i="0">
+                <a:solidFill>
+                  <a:srgbClr val="E8801A"/>
+                </a:solidFill>
+                <a:latin typeface="Montserrat"/>
+              </a:rPr>
+              <a:t>Por qué:  </a:t>
+            </a:r>
+            <a:r>
+              <a:rPr sz="1500" b="0" i="0">
+                <a:solidFill>
+                  <a:srgbClr val="1B2330"/>
+                </a:solidFill>
+                <a:latin typeface="Montserrat"/>
+              </a:rPr>
+              <a:t>El multicapa aguanta mal el calor; por eso la norma exige sus dos limitadores con independencia de la longitud del tramo, aunque sea de un palmo.</a:t>
+            </a:r>
+          </a:p>
+        </p:txBody>
+      </p:sp>
+    </p:spTree>
+  </p:cSld>
+  <p:clrMapOvr>
+    <a:masterClrMapping/>
+  </p:clrMapOvr>
+  <mc:AlternateContent xmlns:mc="http://schemas.openxmlformats.org/markup-compatibility/2006">
+    <mc:Choice xmlns:p14="http://schemas.microsoft.com/office/powerpoint/2010/main" Requires="p14">
+      <p:transition spd="med" p14:dur="700">
+        <p14:cube dir="l"/>
+      </p:transition>
+    </mc:Choice>
+    <mc:Fallback>
+      <p:transition spd="med">
+        <p:push dir="l"/>
+      </p:transition>
+    </mc:Fallback>
+  </mc:AlternateContent>
 </p:sld>
 </file>
 
@@ -9146,7 +10797,7 @@
                 </a:solidFill>
                 <a:latin typeface="Montserrat"/>
               </a:rPr>
-              <a:t>002 / 018</a:t>
+              <a:t>002 / 022</a:t>
             </a:r>
           </a:p>
         </p:txBody>
@@ -9221,7 +10872,7 @@
       </p:sp>
       <p:sp>
         <p:nvSpPr>
-          <p:cNvPr id="6" name="Rounded Rectangle 5"/>
+          <p:cNvPr id="6" name="Rectangle 5"/>
           <p:cNvSpPr/>
           <p:nvPr/>
         </p:nvSpPr>
@@ -9230,7 +10881,7 @@
             <a:off x="868680" y="1234440"/>
             <a:ext cx="1463040" cy="73152"/>
           </a:xfrm>
-          <a:prstGeom prst="roundRect">
+          <a:prstGeom prst="rect">
             <a:avLst/>
           </a:prstGeom>
           <a:solidFill>
@@ -9311,14 +10962,58 @@
       </p:sp>
       <p:sp>
         <p:nvSpPr>
-          <p:cNvPr id="8" name="TextBox 7"/>
+          <p:cNvPr id="8" name="Rectangle 7"/>
+          <p:cNvSpPr/>
+          <p:nvPr/>
+        </p:nvSpPr>
+        <p:spPr>
+          <a:xfrm>
+            <a:off x="822960" y="2011680"/>
+            <a:ext cx="3017520" cy="128016"/>
+          </a:xfrm>
+          <a:prstGeom prst="rect">
+            <a:avLst/>
+          </a:prstGeom>
+          <a:solidFill>
+            <a:srgbClr val="E8801A"/>
+          </a:solidFill>
+          <a:ln>
+            <a:noFill/>
+          </a:ln>
+          <a:effectLst/>
+        </p:spPr>
+        <p:style>
+          <a:lnRef idx="1">
+            <a:schemeClr val="accent1"/>
+          </a:lnRef>
+          <a:fillRef idx="3">
+            <a:schemeClr val="accent1"/>
+          </a:fillRef>
+          <a:effectRef idx="2">
+            <a:schemeClr val="accent1"/>
+          </a:effectRef>
+          <a:fontRef idx="minor">
+            <a:schemeClr val="lt1"/>
+          </a:fontRef>
+        </p:style>
+        <p:txBody>
+          <a:bodyPr rtlCol="0" anchor="ctr"/>
+          <a:lstStyle/>
+          <a:p>
+            <a:pPr algn="ctr"/>
+          </a:p>
+        </p:txBody>
+      </p:sp>
+      <p:sp>
+        <p:nvSpPr>
+          <p:cNvPr id="9" name="TextBox 8"/>
           <p:cNvSpPr txBox="1"/>
           <p:nvPr/>
         </p:nvSpPr>
         <p:spPr>
           <a:xfrm>
-            <a:off x="822960" y="2331720"/>
-            <a:ext cx="3017520" cy="1463040"/>
+            <a:off x="822960" y="2377440"/>
+            <a:ext cx="3017520" cy="1371600"/>
           </a:xfrm>
           <a:prstGeom prst="rect">
             <a:avLst/>
@@ -9333,7 +11028,7 @@
           <a:p>
             <a:pPr algn="ctr"/>
             <a:r>
-              <a:rPr sz="6000" b="1" i="0">
+              <a:rPr sz="5800" b="1" i="0">
                 <a:solidFill>
                   <a:srgbClr val="1E2761"/>
                 </a:solidFill>
@@ -9346,13 +11041,13 @@
       </p:sp>
       <p:sp>
         <p:nvSpPr>
-          <p:cNvPr id="9" name="TextBox 8"/>
+          <p:cNvPr id="10" name="TextBox 9"/>
           <p:cNvSpPr txBox="1"/>
           <p:nvPr/>
         </p:nvSpPr>
         <p:spPr>
           <a:xfrm>
-            <a:off x="1051560" y="3611880"/>
+            <a:off x="1051560" y="3657600"/>
             <a:ext cx="2560320" cy="1005840"/>
           </a:xfrm>
           <a:prstGeom prst="rect">
@@ -9381,7 +11076,7 @@
       </p:sp>
       <p:sp>
         <p:nvSpPr>
-          <p:cNvPr id="10" name="Rounded Rectangle 9"/>
+          <p:cNvPr id="11" name="Rounded Rectangle 10"/>
           <p:cNvSpPr/>
           <p:nvPr/>
         </p:nvSpPr>
@@ -9427,14 +11122,58 @@
       </p:sp>
       <p:sp>
         <p:nvSpPr>
-          <p:cNvPr id="11" name="TextBox 10"/>
+          <p:cNvPr id="12" name="Rectangle 11"/>
+          <p:cNvSpPr/>
+          <p:nvPr/>
+        </p:nvSpPr>
+        <p:spPr>
+          <a:xfrm>
+            <a:off x="4617720" y="2011680"/>
+            <a:ext cx="3017520" cy="128016"/>
+          </a:xfrm>
+          <a:prstGeom prst="rect">
+            <a:avLst/>
+          </a:prstGeom>
+          <a:solidFill>
+            <a:srgbClr val="E8801A"/>
+          </a:solidFill>
+          <a:ln>
+            <a:noFill/>
+          </a:ln>
+          <a:effectLst/>
+        </p:spPr>
+        <p:style>
+          <a:lnRef idx="1">
+            <a:schemeClr val="accent1"/>
+          </a:lnRef>
+          <a:fillRef idx="3">
+            <a:schemeClr val="accent1"/>
+          </a:fillRef>
+          <a:effectRef idx="2">
+            <a:schemeClr val="accent1"/>
+          </a:effectRef>
+          <a:fontRef idx="minor">
+            <a:schemeClr val="lt1"/>
+          </a:fontRef>
+        </p:style>
+        <p:txBody>
+          <a:bodyPr rtlCol="0" anchor="ctr"/>
+          <a:lstStyle/>
+          <a:p>
+            <a:pPr algn="ctr"/>
+          </a:p>
+        </p:txBody>
+      </p:sp>
+      <p:sp>
+        <p:nvSpPr>
+          <p:cNvPr id="13" name="TextBox 12"/>
           <p:cNvSpPr txBox="1"/>
           <p:nvPr/>
         </p:nvSpPr>
         <p:spPr>
           <a:xfrm>
-            <a:off x="4617720" y="2331720"/>
-            <a:ext cx="3017520" cy="1463040"/>
+            <a:off x="4617720" y="2377440"/>
+            <a:ext cx="3017520" cy="1371600"/>
           </a:xfrm>
           <a:prstGeom prst="rect">
             <a:avLst/>
@@ -9449,7 +11188,7 @@
           <a:p>
             <a:pPr algn="ctr"/>
             <a:r>
-              <a:rPr sz="6000" b="1" i="0">
+              <a:rPr sz="5800" b="1" i="0">
                 <a:solidFill>
                   <a:srgbClr val="1E2761"/>
                 </a:solidFill>
@@ -9462,13 +11201,13 @@
       </p:sp>
       <p:sp>
         <p:nvSpPr>
-          <p:cNvPr id="12" name="TextBox 11"/>
+          <p:cNvPr id="14" name="TextBox 13"/>
           <p:cNvSpPr txBox="1"/>
           <p:nvPr/>
         </p:nvSpPr>
         <p:spPr>
           <a:xfrm>
-            <a:off x="4846320" y="3611880"/>
+            <a:off x="4846320" y="3657600"/>
             <a:ext cx="2560320" cy="1005840"/>
           </a:xfrm>
           <a:prstGeom prst="rect">
@@ -9497,7 +11236,7 @@
       </p:sp>
       <p:sp>
         <p:nvSpPr>
-          <p:cNvPr id="13" name="Rounded Rectangle 12"/>
+          <p:cNvPr id="15" name="Rounded Rectangle 14"/>
           <p:cNvSpPr/>
           <p:nvPr/>
         </p:nvSpPr>
@@ -9543,14 +11282,58 @@
       </p:sp>
       <p:sp>
         <p:nvSpPr>
-          <p:cNvPr id="14" name="TextBox 13"/>
+          <p:cNvPr id="16" name="Rectangle 15"/>
+          <p:cNvSpPr/>
+          <p:nvPr/>
+        </p:nvSpPr>
+        <p:spPr>
+          <a:xfrm>
+            <a:off x="8412480" y="2011680"/>
+            <a:ext cx="3017520" cy="128016"/>
+          </a:xfrm>
+          <a:prstGeom prst="rect">
+            <a:avLst/>
+          </a:prstGeom>
+          <a:solidFill>
+            <a:srgbClr val="E8801A"/>
+          </a:solidFill>
+          <a:ln>
+            <a:noFill/>
+          </a:ln>
+          <a:effectLst/>
+        </p:spPr>
+        <p:style>
+          <a:lnRef idx="1">
+            <a:schemeClr val="accent1"/>
+          </a:lnRef>
+          <a:fillRef idx="3">
+            <a:schemeClr val="accent1"/>
+          </a:fillRef>
+          <a:effectRef idx="2">
+            <a:schemeClr val="accent1"/>
+          </a:effectRef>
+          <a:fontRef idx="minor">
+            <a:schemeClr val="lt1"/>
+          </a:fontRef>
+        </p:style>
+        <p:txBody>
+          <a:bodyPr rtlCol="0" anchor="ctr"/>
+          <a:lstStyle/>
+          <a:p>
+            <a:pPr algn="ctr"/>
+          </a:p>
+        </p:txBody>
+      </p:sp>
+      <p:sp>
+        <p:nvSpPr>
+          <p:cNvPr id="17" name="TextBox 16"/>
           <p:cNvSpPr txBox="1"/>
           <p:nvPr/>
         </p:nvSpPr>
         <p:spPr>
           <a:xfrm>
-            <a:off x="8412480" y="2331720"/>
-            <a:ext cx="3017520" cy="1463040"/>
+            <a:off x="8412480" y="2377440"/>
+            <a:ext cx="3017520" cy="1371600"/>
           </a:xfrm>
           <a:prstGeom prst="rect">
             <a:avLst/>
@@ -9565,7 +11348,7 @@
           <a:p>
             <a:pPr algn="ctr"/>
             <a:r>
-              <a:rPr sz="6000" b="1" i="0">
+              <a:rPr sz="5800" b="1" i="0">
                 <a:solidFill>
                   <a:srgbClr val="1E2761"/>
                 </a:solidFill>
@@ -9578,13 +11361,13 @@
       </p:sp>
       <p:sp>
         <p:nvSpPr>
-          <p:cNvPr id="15" name="TextBox 14"/>
+          <p:cNvPr id="18" name="TextBox 17"/>
           <p:cNvSpPr txBox="1"/>
           <p:nvPr/>
         </p:nvSpPr>
         <p:spPr>
           <a:xfrm>
-            <a:off x="8641080" y="3611880"/>
+            <a:off x="8641080" y="3657600"/>
             <a:ext cx="2560320" cy="1005840"/>
           </a:xfrm>
           <a:prstGeom prst="rect">
@@ -9616,6 +11399,1347 @@
   <p:clrMapOvr>
     <a:masterClrMapping/>
   </p:clrMapOvr>
+  <mc:AlternateContent xmlns:mc="http://schemas.openxmlformats.org/markup-compatibility/2006">
+    <mc:Choice xmlns:p14="http://schemas.microsoft.com/office/powerpoint/2010/main" Requires="p14">
+      <p:transition spd="med" p14:dur="700">
+        <p14:cube dir="r"/>
+      </p:transition>
+    </mc:Choice>
+    <mc:Fallback>
+      <p:transition spd="med">
+        <p:push dir="r"/>
+      </p:transition>
+    </mc:Fallback>
+  </mc:AlternateContent>
+</p:sld>
+</file>
+
+<file path=ppt/slides/slide20.xml><?xml version="1.0" encoding="utf-8"?>
+<p:sld xmlns:a="http://schemas.openxmlformats.org/drawingml/2006/main" xmlns:p="http://schemas.openxmlformats.org/presentationml/2006/main" xmlns:r="http://schemas.openxmlformats.org/officeDocument/2006/relationships">
+  <p:cSld>
+    <p:spTree>
+      <p:nvGrpSpPr>
+        <p:cNvPr id="1" name=""/>
+        <p:cNvGrpSpPr/>
+        <p:nvPr/>
+      </p:nvGrpSpPr>
+      <p:grpSpPr/>
+      <p:sp>
+        <p:nvSpPr>
+          <p:cNvPr id="2" name="Rectangle 1"/>
+          <p:cNvSpPr/>
+          <p:nvPr/>
+        </p:nvSpPr>
+        <p:spPr>
+          <a:xfrm>
+            <a:off x="0" y="0"/>
+            <a:ext cx="12191695" cy="6858000"/>
+          </a:xfrm>
+          <a:prstGeom prst="rect">
+            <a:avLst/>
+          </a:prstGeom>
+          <a:solidFill>
+            <a:srgbClr val="FFFFFF"/>
+          </a:solidFill>
+          <a:ln>
+            <a:noFill/>
+          </a:ln>
+          <a:effectLst/>
+        </p:spPr>
+        <p:style>
+          <a:lnRef idx="1">
+            <a:schemeClr val="accent1"/>
+          </a:lnRef>
+          <a:fillRef idx="3">
+            <a:schemeClr val="accent1"/>
+          </a:fillRef>
+          <a:effectRef idx="2">
+            <a:schemeClr val="accent1"/>
+          </a:effectRef>
+          <a:fontRef idx="minor">
+            <a:schemeClr val="lt1"/>
+          </a:fontRef>
+        </p:style>
+        <p:txBody>
+          <a:bodyPr rtlCol="0" anchor="ctr"/>
+          <a:lstStyle/>
+          <a:p>
+            <a:pPr algn="ctr"/>
+          </a:p>
+        </p:txBody>
+      </p:sp>
+      <p:sp>
+        <p:nvSpPr>
+          <p:cNvPr id="3" name="TextBox 2"/>
+          <p:cNvSpPr txBox="1"/>
+          <p:nvPr/>
+        </p:nvSpPr>
+        <p:spPr>
+          <a:xfrm>
+            <a:off x="10607040" y="320040"/>
+            <a:ext cx="1371600" cy="365760"/>
+          </a:xfrm>
+          <a:prstGeom prst="rect">
+            <a:avLst/>
+          </a:prstGeom>
+          <a:noFill/>
+        </p:spPr>
+        <p:txBody>
+          <a:bodyPr wrap="square">
+            <a:spAutoFit/>
+          </a:bodyPr>
+          <a:lstStyle/>
+          <a:p>
+            <a:pPr algn="r"/>
+            <a:r>
+              <a:rPr sz="1000" b="1" i="0">
+                <a:solidFill>
+                  <a:srgbClr val="64748B"/>
+                </a:solidFill>
+                <a:latin typeface="Montserrat"/>
+              </a:rPr>
+              <a:t>020 / 022</a:t>
+            </a:r>
+          </a:p>
+        </p:txBody>
+      </p:sp>
+      <p:sp>
+        <p:nvSpPr>
+          <p:cNvPr id="4" name="TextBox 3"/>
+          <p:cNvSpPr txBox="1"/>
+          <p:nvPr/>
+        </p:nvSpPr>
+        <p:spPr>
+          <a:xfrm>
+            <a:off x="457200" y="6419088"/>
+            <a:ext cx="8229600" cy="365760"/>
+          </a:xfrm>
+          <a:prstGeom prst="rect">
+            <a:avLst/>
+          </a:prstGeom>
+          <a:noFill/>
+        </p:spPr>
+        <p:txBody>
+          <a:bodyPr wrap="square">
+            <a:spAutoFit/>
+          </a:bodyPr>
+          <a:lstStyle/>
+          <a:p>
+            <a:r>
+              <a:rPr sz="900" b="0" i="0">
+                <a:solidFill>
+                  <a:srgbClr val="64748B"/>
+                </a:solidFill>
+                <a:latin typeface="Montserrat"/>
+              </a:rPr>
+              <a:t>Curso Gas B · Tema 10 · UNE 60670-3</a:t>
+            </a:r>
+          </a:p>
+        </p:txBody>
+      </p:sp>
+      <p:sp>
+        <p:nvSpPr>
+          <p:cNvPr id="5" name="TextBox 4"/>
+          <p:cNvSpPr txBox="1"/>
+          <p:nvPr/>
+        </p:nvSpPr>
+        <p:spPr>
+          <a:xfrm>
+            <a:off x="822960" y="457200"/>
+            <a:ext cx="10058400" cy="365760"/>
+          </a:xfrm>
+          <a:prstGeom prst="rect">
+            <a:avLst/>
+          </a:prstGeom>
+          <a:noFill/>
+        </p:spPr>
+        <p:txBody>
+          <a:bodyPr wrap="square">
+            <a:spAutoFit/>
+          </a:bodyPr>
+          <a:lstStyle/>
+          <a:p>
+            <a:r>
+              <a:rPr sz="1300" b="1" i="0">
+                <a:solidFill>
+                  <a:srgbClr val="E8801A"/>
+                </a:solidFill>
+                <a:latin typeface="Montserrat"/>
+              </a:rPr>
+              <a:t>MATERIALES · INOX CORRUGADO</a:t>
+            </a:r>
+          </a:p>
+        </p:txBody>
+      </p:sp>
+      <p:sp>
+        <p:nvSpPr>
+          <p:cNvPr id="6" name="TextBox 5"/>
+          <p:cNvSpPr txBox="1"/>
+          <p:nvPr/>
+        </p:nvSpPr>
+        <p:spPr>
+          <a:xfrm>
+            <a:off x="822960" y="868680"/>
+            <a:ext cx="10515600" cy="914400"/>
+          </a:xfrm>
+          <a:prstGeom prst="rect">
+            <a:avLst/>
+          </a:prstGeom>
+          <a:noFill/>
+        </p:spPr>
+        <p:txBody>
+          <a:bodyPr wrap="square">
+            <a:spAutoFit/>
+          </a:bodyPr>
+          <a:lstStyle/>
+          <a:p>
+            <a:r>
+              <a:rPr sz="2800" b="1" i="0">
+                <a:solidFill>
+                  <a:srgbClr val="1E2761"/>
+                </a:solidFill>
+                <a:latin typeface="Montserrat"/>
+              </a:rPr>
+              <a:t>Corrugado: el flexible acordeón</a:t>
+            </a:r>
+          </a:p>
+        </p:txBody>
+      </p:sp>
+      <p:sp>
+        <p:nvSpPr>
+          <p:cNvPr id="7" name="Rectangle 6"/>
+          <p:cNvSpPr/>
+          <p:nvPr/>
+        </p:nvSpPr>
+        <p:spPr>
+          <a:xfrm>
+            <a:off x="868680" y="1627632"/>
+            <a:ext cx="2011680" cy="73152"/>
+          </a:xfrm>
+          <a:prstGeom prst="rect">
+            <a:avLst/>
+          </a:prstGeom>
+          <a:solidFill>
+            <a:srgbClr val="E8801A"/>
+          </a:solidFill>
+          <a:ln>
+            <a:noFill/>
+          </a:ln>
+          <a:effectLst/>
+        </p:spPr>
+        <p:style>
+          <a:lnRef idx="1">
+            <a:schemeClr val="accent1"/>
+          </a:lnRef>
+          <a:fillRef idx="3">
+            <a:schemeClr val="accent1"/>
+          </a:fillRef>
+          <a:effectRef idx="2">
+            <a:schemeClr val="accent1"/>
+          </a:effectRef>
+          <a:fontRef idx="minor">
+            <a:schemeClr val="lt1"/>
+          </a:fontRef>
+        </p:style>
+        <p:txBody>
+          <a:bodyPr rtlCol="0" anchor="ctr"/>
+          <a:lstStyle/>
+          <a:p>
+            <a:pPr algn="ctr"/>
+          </a:p>
+        </p:txBody>
+      </p:sp>
+      <p:sp>
+        <p:nvSpPr>
+          <p:cNvPr id="8" name="TextBox 7"/>
+          <p:cNvSpPr txBox="1"/>
+          <p:nvPr/>
+        </p:nvSpPr>
+        <p:spPr>
+          <a:xfrm>
+            <a:off x="822960" y="1965960"/>
+            <a:ext cx="5029200" cy="4206240"/>
+          </a:xfrm>
+          <a:prstGeom prst="rect">
+            <a:avLst/>
+          </a:prstGeom>
+          <a:noFill/>
+        </p:spPr>
+        <p:txBody>
+          <a:bodyPr wrap="square">
+            <a:spAutoFit/>
+          </a:bodyPr>
+          <a:lstStyle/>
+          <a:p>
+            <a:pPr>
+              <a:spcAft>
+                <a:spcPts val="1100"/>
+              </a:spcAft>
+            </a:pPr>
+            <a:r>
+              <a:rPr sz="1600" b="1" i="0">
+                <a:solidFill>
+                  <a:srgbClr val="E8801A"/>
+                </a:solidFill>
+                <a:latin typeface="Montserrat"/>
+              </a:rPr>
+              <a:t>▸  </a:t>
+            </a:r>
+            <a:r>
+              <a:rPr sz="1600" b="0" i="0">
+                <a:solidFill>
+                  <a:srgbClr val="1B2330"/>
+                </a:solidFill>
+                <a:latin typeface="Montserrat"/>
+              </a:rPr>
+              <a:t>Dos capas: inox corrugado + protección</a:t>
+            </a:r>
+          </a:p>
+          <a:p>
+            <a:pPr>
+              <a:spcAft>
+                <a:spcPts val="1100"/>
+              </a:spcAft>
+            </a:pPr>
+            <a:r>
+              <a:rPr sz="1600" b="1" i="0">
+                <a:solidFill>
+                  <a:srgbClr val="E8801A"/>
+                </a:solidFill>
+                <a:latin typeface="Montserrat"/>
+              </a:rPr>
+              <a:t>▸  </a:t>
+            </a:r>
+            <a:r>
+              <a:rPr sz="1600" b="0" i="0">
+                <a:solidFill>
+                  <a:srgbClr val="1B2330"/>
+                </a:solidFill>
+                <a:latin typeface="Montserrat"/>
+              </a:rPr>
+              <a:t>La corrugada aguanta (estructura)</a:t>
+            </a:r>
+          </a:p>
+          <a:p>
+            <a:pPr>
+              <a:spcAft>
+                <a:spcPts val="1100"/>
+              </a:spcAft>
+            </a:pPr>
+            <a:r>
+              <a:rPr sz="1600" b="1" i="0">
+                <a:solidFill>
+                  <a:srgbClr val="E8801A"/>
+                </a:solidFill>
+                <a:latin typeface="Montserrat"/>
+              </a:rPr>
+              <a:t>▸  </a:t>
+            </a:r>
+            <a:r>
+              <a:rPr sz="1600" b="0" i="0">
+                <a:solidFill>
+                  <a:srgbClr val="1B2330"/>
+                </a:solidFill>
+                <a:latin typeface="Montserrat"/>
+              </a:rPr>
+              <a:t>La externa protege</a:t>
+            </a:r>
+          </a:p>
+          <a:p>
+            <a:pPr>
+              <a:spcAft>
+                <a:spcPts val="1100"/>
+              </a:spcAft>
+            </a:pPr>
+            <a:r>
+              <a:rPr sz="1600" b="1" i="0">
+                <a:solidFill>
+                  <a:srgbClr val="E8801A"/>
+                </a:solidFill>
+                <a:latin typeface="Montserrat"/>
+              </a:rPr>
+              <a:t>▸  </a:t>
+            </a:r>
+            <a:r>
+              <a:rPr sz="1600" b="0" i="0">
+                <a:solidFill>
+                  <a:srgbClr val="1B2330"/>
+                </a:solidFill>
+                <a:latin typeface="Montserrat"/>
+              </a:rPr>
+              <a:t>Norma UNE-EN 15266</a:t>
+            </a:r>
+          </a:p>
+        </p:txBody>
+      </p:sp>
+      <p:sp>
+        <p:nvSpPr>
+          <p:cNvPr id="9" name="imgph" descr="IMGQ:corrugated stainless steel gas hose yellow"/>
+          <p:cNvSpPr/>
+          <p:nvPr/>
+        </p:nvSpPr>
+        <p:spPr>
+          <a:xfrm>
+            <a:off x="6080760" y="1965960"/>
+            <a:ext cx="5303520" cy="4572000"/>
+          </a:xfrm>
+          <a:prstGeom prst="roundRect">
+            <a:avLst/>
+          </a:prstGeom>
+          <a:solidFill>
+            <a:srgbClr val="F3F6FB"/>
+          </a:solidFill>
+          <a:ln w="12700">
+            <a:solidFill>
+              <a:srgbClr val="C7D2E6"/>
+            </a:solidFill>
+          </a:ln>
+          <a:effectLst/>
+        </p:spPr>
+        <p:style>
+          <a:lnRef idx="1">
+            <a:schemeClr val="accent1"/>
+          </a:lnRef>
+          <a:fillRef idx="3">
+            <a:schemeClr val="accent1"/>
+          </a:fillRef>
+          <a:effectRef idx="2">
+            <a:schemeClr val="accent1"/>
+          </a:effectRef>
+          <a:fontRef idx="minor">
+            <a:schemeClr val="lt1"/>
+          </a:fontRef>
+        </p:style>
+        <p:txBody>
+          <a:bodyPr rtlCol="0" anchor="ctr"/>
+          <a:lstStyle/>
+          <a:p>
+            <a:pPr algn="ctr"/>
+          </a:p>
+        </p:txBody>
+      </p:sp>
+      <p:sp>
+        <p:nvSpPr>
+          <p:cNvPr id="10" name="TextBox 9"/>
+          <p:cNvSpPr txBox="1"/>
+          <p:nvPr/>
+        </p:nvSpPr>
+        <p:spPr>
+          <a:xfrm>
+            <a:off x="6355080" y="3611880"/>
+            <a:ext cx="4754880" cy="1280160"/>
+          </a:xfrm>
+          <a:prstGeom prst="rect">
+            <a:avLst/>
+          </a:prstGeom>
+          <a:noFill/>
+        </p:spPr>
+        <p:txBody>
+          <a:bodyPr wrap="square">
+            <a:spAutoFit/>
+          </a:bodyPr>
+          <a:lstStyle/>
+          <a:p>
+            <a:pPr algn="ctr"/>
+            <a:r>
+              <a:rPr sz="1400" b="1" i="0">
+                <a:solidFill>
+                  <a:srgbClr val="64748B"/>
+                </a:solidFill>
+                <a:latin typeface="Montserrat"/>
+              </a:rPr>
+              <a:t>IMAGEN</a:t>
+            </a:r>
+          </a:p>
+          <a:p>
+            <a:pPr algn="ctr"/>
+            <a:r>
+              <a:rPr sz="1100" b="0" i="1">
+                <a:solidFill>
+                  <a:srgbClr val="64748B"/>
+                </a:solidFill>
+                <a:latin typeface="Montserrat"/>
+              </a:rPr>
+              <a:t>corrugated stainless steel gas hose yellow</a:t>
+            </a:r>
+          </a:p>
+        </p:txBody>
+      </p:sp>
+    </p:spTree>
+  </p:cSld>
+  <p:clrMapOvr>
+    <a:masterClrMapping/>
+  </p:clrMapOvr>
+  <mc:AlternateContent xmlns:mc="http://schemas.openxmlformats.org/markup-compatibility/2006">
+    <mc:Choice xmlns:p14="http://schemas.microsoft.com/office/powerpoint/2010/main" Requires="p14">
+      <p:transition spd="med" p14:dur="700">
+        <p14:cube dir="r"/>
+      </p:transition>
+    </mc:Choice>
+    <mc:Fallback>
+      <p:transition spd="med">
+        <p:push dir="r"/>
+      </p:transition>
+    </mc:Fallback>
+  </mc:AlternateContent>
+</p:sld>
+</file>
+
+<file path=ppt/slides/slide21.xml><?xml version="1.0" encoding="utf-8"?>
+<p:sld xmlns:a="http://schemas.openxmlformats.org/drawingml/2006/main" xmlns:p="http://schemas.openxmlformats.org/presentationml/2006/main" xmlns:r="http://schemas.openxmlformats.org/officeDocument/2006/relationships">
+  <p:cSld>
+    <p:spTree>
+      <p:nvGrpSpPr>
+        <p:cNvPr id="1" name=""/>
+        <p:cNvGrpSpPr/>
+        <p:nvPr/>
+      </p:nvGrpSpPr>
+      <p:grpSpPr/>
+      <p:sp>
+        <p:nvSpPr>
+          <p:cNvPr id="2" name="Rectangle 1"/>
+          <p:cNvSpPr/>
+          <p:nvPr/>
+        </p:nvSpPr>
+        <p:spPr>
+          <a:xfrm>
+            <a:off x="0" y="0"/>
+            <a:ext cx="12191695" cy="6858000"/>
+          </a:xfrm>
+          <a:prstGeom prst="rect">
+            <a:avLst/>
+          </a:prstGeom>
+          <a:solidFill>
+            <a:srgbClr val="FFFFFF"/>
+          </a:solidFill>
+          <a:ln>
+            <a:noFill/>
+          </a:ln>
+          <a:effectLst/>
+        </p:spPr>
+        <p:style>
+          <a:lnRef idx="1">
+            <a:schemeClr val="accent1"/>
+          </a:lnRef>
+          <a:fillRef idx="3">
+            <a:schemeClr val="accent1"/>
+          </a:fillRef>
+          <a:effectRef idx="2">
+            <a:schemeClr val="accent1"/>
+          </a:effectRef>
+          <a:fontRef idx="minor">
+            <a:schemeClr val="lt1"/>
+          </a:fontRef>
+        </p:style>
+        <p:txBody>
+          <a:bodyPr rtlCol="0" anchor="ctr"/>
+          <a:lstStyle/>
+          <a:p>
+            <a:pPr algn="ctr"/>
+          </a:p>
+        </p:txBody>
+      </p:sp>
+      <p:sp>
+        <p:nvSpPr>
+          <p:cNvPr id="3" name="TextBox 2"/>
+          <p:cNvSpPr txBox="1"/>
+          <p:nvPr/>
+        </p:nvSpPr>
+        <p:spPr>
+          <a:xfrm>
+            <a:off x="10607040" y="320040"/>
+            <a:ext cx="1371600" cy="365760"/>
+          </a:xfrm>
+          <a:prstGeom prst="rect">
+            <a:avLst/>
+          </a:prstGeom>
+          <a:noFill/>
+        </p:spPr>
+        <p:txBody>
+          <a:bodyPr wrap="square">
+            <a:spAutoFit/>
+          </a:bodyPr>
+          <a:lstStyle/>
+          <a:p>
+            <a:pPr algn="r"/>
+            <a:r>
+              <a:rPr sz="1000" b="1" i="0">
+                <a:solidFill>
+                  <a:srgbClr val="64748B"/>
+                </a:solidFill>
+                <a:latin typeface="Montserrat"/>
+              </a:rPr>
+              <a:t>021 / 022</a:t>
+            </a:r>
+          </a:p>
+        </p:txBody>
+      </p:sp>
+      <p:sp>
+        <p:nvSpPr>
+          <p:cNvPr id="4" name="TextBox 3"/>
+          <p:cNvSpPr txBox="1"/>
+          <p:nvPr/>
+        </p:nvSpPr>
+        <p:spPr>
+          <a:xfrm>
+            <a:off x="457200" y="6419088"/>
+            <a:ext cx="8229600" cy="365760"/>
+          </a:xfrm>
+          <a:prstGeom prst="rect">
+            <a:avLst/>
+          </a:prstGeom>
+          <a:noFill/>
+        </p:spPr>
+        <p:txBody>
+          <a:bodyPr wrap="square">
+            <a:spAutoFit/>
+          </a:bodyPr>
+          <a:lstStyle/>
+          <a:p>
+            <a:r>
+              <a:rPr sz="900" b="0" i="0">
+                <a:solidFill>
+                  <a:srgbClr val="64748B"/>
+                </a:solidFill>
+                <a:latin typeface="Montserrat"/>
+              </a:rPr>
+              <a:t>Curso Gas B · Tema 10 · UNE 60670-3</a:t>
+            </a:r>
+          </a:p>
+        </p:txBody>
+      </p:sp>
+      <p:sp>
+        <p:nvSpPr>
+          <p:cNvPr id="5" name="TextBox 4"/>
+          <p:cNvSpPr txBox="1"/>
+          <p:nvPr/>
+        </p:nvSpPr>
+        <p:spPr>
+          <a:xfrm>
+            <a:off x="822960" y="457200"/>
+            <a:ext cx="10058400" cy="365760"/>
+          </a:xfrm>
+          <a:prstGeom prst="rect">
+            <a:avLst/>
+          </a:prstGeom>
+          <a:noFill/>
+        </p:spPr>
+        <p:txBody>
+          <a:bodyPr wrap="square">
+            <a:spAutoFit/>
+          </a:bodyPr>
+          <a:lstStyle/>
+          <a:p>
+            <a:r>
+              <a:rPr sz="1300" b="1" i="0">
+                <a:solidFill>
+                  <a:srgbClr val="E8801A"/>
+                </a:solidFill>
+                <a:latin typeface="Montserrat"/>
+              </a:rPr>
+              <a:t>VAINAS · OTROS MATERIALES</a:t>
+            </a:r>
+          </a:p>
+        </p:txBody>
+      </p:sp>
+      <p:sp>
+        <p:nvSpPr>
+          <p:cNvPr id="6" name="TextBox 5"/>
+          <p:cNvSpPr txBox="1"/>
+          <p:nvPr/>
+        </p:nvSpPr>
+        <p:spPr>
+          <a:xfrm>
+            <a:off x="822960" y="868680"/>
+            <a:ext cx="10515600" cy="914400"/>
+          </a:xfrm>
+          <a:prstGeom prst="rect">
+            <a:avLst/>
+          </a:prstGeom>
+          <a:noFill/>
+        </p:spPr>
+        <p:txBody>
+          <a:bodyPr wrap="square">
+            <a:spAutoFit/>
+          </a:bodyPr>
+          <a:lstStyle/>
+          <a:p>
+            <a:r>
+              <a:rPr sz="2800" b="1" i="0">
+                <a:solidFill>
+                  <a:srgbClr val="1E2761"/>
+                </a:solidFill>
+                <a:latin typeface="Montserrat"/>
+              </a:rPr>
+              <a:t>Vainas, conductos y pasamuros</a:t>
+            </a:r>
+          </a:p>
+        </p:txBody>
+      </p:sp>
+      <p:sp>
+        <p:nvSpPr>
+          <p:cNvPr id="7" name="Rectangle 6"/>
+          <p:cNvSpPr/>
+          <p:nvPr/>
+        </p:nvSpPr>
+        <p:spPr>
+          <a:xfrm>
+            <a:off x="868680" y="1627632"/>
+            <a:ext cx="2011680" cy="73152"/>
+          </a:xfrm>
+          <a:prstGeom prst="rect">
+            <a:avLst/>
+          </a:prstGeom>
+          <a:solidFill>
+            <a:srgbClr val="E8801A"/>
+          </a:solidFill>
+          <a:ln>
+            <a:noFill/>
+          </a:ln>
+          <a:effectLst/>
+        </p:spPr>
+        <p:style>
+          <a:lnRef idx="1">
+            <a:schemeClr val="accent1"/>
+          </a:lnRef>
+          <a:fillRef idx="3">
+            <a:schemeClr val="accent1"/>
+          </a:fillRef>
+          <a:effectRef idx="2">
+            <a:schemeClr val="accent1"/>
+          </a:effectRef>
+          <a:fontRef idx="minor">
+            <a:schemeClr val="lt1"/>
+          </a:fontRef>
+        </p:style>
+        <p:txBody>
+          <a:bodyPr rtlCol="0" anchor="ctr"/>
+          <a:lstStyle/>
+          <a:p>
+            <a:pPr algn="ctr"/>
+          </a:p>
+        </p:txBody>
+      </p:sp>
+      <p:sp>
+        <p:nvSpPr>
+          <p:cNvPr id="8" name="TextBox 7"/>
+          <p:cNvSpPr txBox="1"/>
+          <p:nvPr/>
+        </p:nvSpPr>
+        <p:spPr>
+          <a:xfrm>
+            <a:off x="6355080" y="1965960"/>
+            <a:ext cx="5029200" cy="4206240"/>
+          </a:xfrm>
+          <a:prstGeom prst="rect">
+            <a:avLst/>
+          </a:prstGeom>
+          <a:noFill/>
+        </p:spPr>
+        <p:txBody>
+          <a:bodyPr wrap="square">
+            <a:spAutoFit/>
+          </a:bodyPr>
+          <a:lstStyle/>
+          <a:p>
+            <a:pPr>
+              <a:spcAft>
+                <a:spcPts val="1100"/>
+              </a:spcAft>
+            </a:pPr>
+            <a:r>
+              <a:rPr sz="1600" b="1" i="0">
+                <a:solidFill>
+                  <a:srgbClr val="E8801A"/>
+                </a:solidFill>
+                <a:latin typeface="Montserrat"/>
+              </a:rPr>
+              <a:t>▸  </a:t>
+            </a:r>
+            <a:r>
+              <a:rPr sz="1600" b="0" i="0">
+                <a:solidFill>
+                  <a:srgbClr val="1B2330"/>
+                </a:solidFill>
+                <a:latin typeface="Montserrat"/>
+              </a:rPr>
+              <a:t>La 'funda' del tubo de gas</a:t>
+            </a:r>
+          </a:p>
+          <a:p>
+            <a:pPr>
+              <a:spcAft>
+                <a:spcPts val="1100"/>
+              </a:spcAft>
+            </a:pPr>
+            <a:r>
+              <a:rPr sz="1600" b="1" i="0">
+                <a:solidFill>
+                  <a:srgbClr val="E8801A"/>
+                </a:solidFill>
+                <a:latin typeface="Montserrat"/>
+              </a:rPr>
+              <a:t>▸  </a:t>
+            </a:r>
+            <a:r>
+              <a:rPr sz="1600" b="0" i="0">
+                <a:solidFill>
+                  <a:srgbClr val="1B2330"/>
+                </a:solidFill>
+                <a:latin typeface="Montserrat"/>
+              </a:rPr>
+              <a:t>Material adecuado a su función</a:t>
+            </a:r>
+          </a:p>
+          <a:p>
+            <a:pPr>
+              <a:spcAft>
+                <a:spcPts val="1100"/>
+              </a:spcAft>
+            </a:pPr>
+            <a:r>
+              <a:rPr sz="1600" b="1" i="0">
+                <a:solidFill>
+                  <a:srgbClr val="E8801A"/>
+                </a:solidFill>
+                <a:latin typeface="Montserrat"/>
+              </a:rPr>
+              <a:t>▸  </a:t>
+            </a:r>
+            <a:r>
+              <a:rPr sz="1600" b="0" i="0">
+                <a:solidFill>
+                  <a:srgbClr val="1B2330"/>
+                </a:solidFill>
+                <a:latin typeface="Montserrat"/>
+              </a:rPr>
+              <a:t>Metálicas, plásticas, de obra…</a:t>
+            </a:r>
+          </a:p>
+          <a:p>
+            <a:pPr>
+              <a:spcAft>
+                <a:spcPts val="1100"/>
+              </a:spcAft>
+            </a:pPr>
+            <a:r>
+              <a:rPr sz="1600" b="1" i="0">
+                <a:solidFill>
+                  <a:srgbClr val="E8801A"/>
+                </a:solidFill>
+                <a:latin typeface="Montserrat"/>
+              </a:rPr>
+              <a:t>▸  </a:t>
+            </a:r>
+            <a:r>
+              <a:rPr sz="1600" b="0" i="0">
+                <a:solidFill>
+                  <a:srgbClr val="1B2330"/>
+                </a:solidFill>
+                <a:latin typeface="Montserrat"/>
+              </a:rPr>
+              <a:t>El detalle, en la UNE 60670-4</a:t>
+            </a:r>
+          </a:p>
+        </p:txBody>
+      </p:sp>
+      <p:sp>
+        <p:nvSpPr>
+          <p:cNvPr id="9" name="imgph" descr="IMGQ:pipe sleeve wall penetration conduit"/>
+          <p:cNvSpPr/>
+          <p:nvPr/>
+        </p:nvSpPr>
+        <p:spPr>
+          <a:xfrm>
+            <a:off x="822960" y="1965960"/>
+            <a:ext cx="5303520" cy="4572000"/>
+          </a:xfrm>
+          <a:prstGeom prst="roundRect">
+            <a:avLst/>
+          </a:prstGeom>
+          <a:solidFill>
+            <a:srgbClr val="F3F6FB"/>
+          </a:solidFill>
+          <a:ln w="12700">
+            <a:solidFill>
+              <a:srgbClr val="C7D2E6"/>
+            </a:solidFill>
+          </a:ln>
+          <a:effectLst/>
+        </p:spPr>
+        <p:style>
+          <a:lnRef idx="1">
+            <a:schemeClr val="accent1"/>
+          </a:lnRef>
+          <a:fillRef idx="3">
+            <a:schemeClr val="accent1"/>
+          </a:fillRef>
+          <a:effectRef idx="2">
+            <a:schemeClr val="accent1"/>
+          </a:effectRef>
+          <a:fontRef idx="minor">
+            <a:schemeClr val="lt1"/>
+          </a:fontRef>
+        </p:style>
+        <p:txBody>
+          <a:bodyPr rtlCol="0" anchor="ctr"/>
+          <a:lstStyle/>
+          <a:p>
+            <a:pPr algn="ctr"/>
+          </a:p>
+        </p:txBody>
+      </p:sp>
+      <p:sp>
+        <p:nvSpPr>
+          <p:cNvPr id="10" name="TextBox 9"/>
+          <p:cNvSpPr txBox="1"/>
+          <p:nvPr/>
+        </p:nvSpPr>
+        <p:spPr>
+          <a:xfrm>
+            <a:off x="1097280" y="3611880"/>
+            <a:ext cx="4754880" cy="1280160"/>
+          </a:xfrm>
+          <a:prstGeom prst="rect">
+            <a:avLst/>
+          </a:prstGeom>
+          <a:noFill/>
+        </p:spPr>
+        <p:txBody>
+          <a:bodyPr wrap="square">
+            <a:spAutoFit/>
+          </a:bodyPr>
+          <a:lstStyle/>
+          <a:p>
+            <a:pPr algn="ctr"/>
+            <a:r>
+              <a:rPr sz="1400" b="1" i="0">
+                <a:solidFill>
+                  <a:srgbClr val="64748B"/>
+                </a:solidFill>
+                <a:latin typeface="Montserrat"/>
+              </a:rPr>
+              <a:t>IMAGEN</a:t>
+            </a:r>
+          </a:p>
+          <a:p>
+            <a:pPr algn="ctr"/>
+            <a:r>
+              <a:rPr sz="1100" b="0" i="1">
+                <a:solidFill>
+                  <a:srgbClr val="64748B"/>
+                </a:solidFill>
+                <a:latin typeface="Montserrat"/>
+              </a:rPr>
+              <a:t>pipe sleeve wall penetration conduit</a:t>
+            </a:r>
+          </a:p>
+        </p:txBody>
+      </p:sp>
+    </p:spTree>
+  </p:cSld>
+  <p:clrMapOvr>
+    <a:masterClrMapping/>
+  </p:clrMapOvr>
+  <mc:AlternateContent xmlns:mc="http://schemas.openxmlformats.org/markup-compatibility/2006">
+    <mc:Choice xmlns:p14="http://schemas.microsoft.com/office/powerpoint/2010/main" Requires="p14">
+      <p:transition spd="med" p14:dur="700">
+        <p14:cube dir="l"/>
+      </p:transition>
+    </mc:Choice>
+    <mc:Fallback>
+      <p:transition spd="med">
+        <p:push dir="l"/>
+      </p:transition>
+    </mc:Fallback>
+  </mc:AlternateContent>
+</p:sld>
+</file>
+
+<file path=ppt/slides/slide22.xml><?xml version="1.0" encoding="utf-8"?>
+<p:sld xmlns:a="http://schemas.openxmlformats.org/drawingml/2006/main" xmlns:p="http://schemas.openxmlformats.org/presentationml/2006/main" xmlns:r="http://schemas.openxmlformats.org/officeDocument/2006/relationships">
+  <p:cSld>
+    <p:spTree>
+      <p:nvGrpSpPr>
+        <p:cNvPr id="1" name=""/>
+        <p:cNvGrpSpPr/>
+        <p:nvPr/>
+      </p:nvGrpSpPr>
+      <p:grpSpPr/>
+      <p:sp>
+        <p:nvSpPr>
+          <p:cNvPr id="2" name="Rectangle 1"/>
+          <p:cNvSpPr/>
+          <p:nvPr/>
+        </p:nvSpPr>
+        <p:spPr>
+          <a:xfrm>
+            <a:off x="0" y="0"/>
+            <a:ext cx="12191695" cy="6858000"/>
+          </a:xfrm>
+          <a:prstGeom prst="rect">
+            <a:avLst/>
+          </a:prstGeom>
+          <a:solidFill>
+            <a:srgbClr val="1E2761"/>
+          </a:solidFill>
+          <a:ln>
+            <a:noFill/>
+          </a:ln>
+          <a:effectLst/>
+        </p:spPr>
+        <p:style>
+          <a:lnRef idx="1">
+            <a:schemeClr val="accent1"/>
+          </a:lnRef>
+          <a:fillRef idx="3">
+            <a:schemeClr val="accent1"/>
+          </a:fillRef>
+          <a:effectRef idx="2">
+            <a:schemeClr val="accent1"/>
+          </a:effectRef>
+          <a:fontRef idx="minor">
+            <a:schemeClr val="lt1"/>
+          </a:fontRef>
+        </p:style>
+        <p:txBody>
+          <a:bodyPr rtlCol="0" anchor="ctr"/>
+          <a:lstStyle/>
+          <a:p>
+            <a:pPr algn="ctr"/>
+          </a:p>
+        </p:txBody>
+      </p:sp>
+      <p:sp>
+        <p:nvSpPr>
+          <p:cNvPr id="3" name="TextBox 2"/>
+          <p:cNvSpPr txBox="1"/>
+          <p:nvPr/>
+        </p:nvSpPr>
+        <p:spPr>
+          <a:xfrm>
+            <a:off x="822960" y="640080"/>
+            <a:ext cx="10515600" cy="457200"/>
+          </a:xfrm>
+          <a:prstGeom prst="rect">
+            <a:avLst/>
+          </a:prstGeom>
+          <a:noFill/>
+        </p:spPr>
+        <p:txBody>
+          <a:bodyPr wrap="square">
+            <a:spAutoFit/>
+          </a:bodyPr>
+          <a:lstStyle/>
+          <a:p>
+            <a:r>
+              <a:rPr sz="1400" b="1" i="0">
+                <a:solidFill>
+                  <a:srgbClr val="F4A24C"/>
+                </a:solidFill>
+                <a:latin typeface="Montserrat"/>
+              </a:rPr>
+              <a:t>LO QUE YA DOMINAS</a:t>
+            </a:r>
+          </a:p>
+        </p:txBody>
+      </p:sp>
+      <p:sp>
+        <p:nvSpPr>
+          <p:cNvPr id="4" name="Rectangle 3"/>
+          <p:cNvSpPr/>
+          <p:nvPr/>
+        </p:nvSpPr>
+        <p:spPr>
+          <a:xfrm>
+            <a:off x="868680" y="1051560"/>
+            <a:ext cx="1463040" cy="82296"/>
+          </a:xfrm>
+          <a:prstGeom prst="rect">
+            <a:avLst/>
+          </a:prstGeom>
+          <a:solidFill>
+            <a:srgbClr val="E8801A"/>
+          </a:solidFill>
+          <a:ln>
+            <a:noFill/>
+          </a:ln>
+          <a:effectLst/>
+        </p:spPr>
+        <p:style>
+          <a:lnRef idx="1">
+            <a:schemeClr val="accent1"/>
+          </a:lnRef>
+          <a:fillRef idx="3">
+            <a:schemeClr val="accent1"/>
+          </a:fillRef>
+          <a:effectRef idx="2">
+            <a:schemeClr val="accent1"/>
+          </a:effectRef>
+          <a:fontRef idx="minor">
+            <a:schemeClr val="lt1"/>
+          </a:fontRef>
+        </p:style>
+        <p:txBody>
+          <a:bodyPr rtlCol="0" anchor="ctr"/>
+          <a:lstStyle/>
+          <a:p>
+            <a:pPr algn="ctr"/>
+          </a:p>
+        </p:txBody>
+      </p:sp>
+      <p:sp>
+        <p:nvSpPr>
+          <p:cNvPr id="5" name="TextBox 4"/>
+          <p:cNvSpPr txBox="1"/>
+          <p:nvPr/>
+        </p:nvSpPr>
+        <p:spPr>
+          <a:xfrm>
+            <a:off x="822960" y="1234440"/>
+            <a:ext cx="10515600" cy="1097280"/>
+          </a:xfrm>
+          <a:prstGeom prst="rect">
+            <a:avLst/>
+          </a:prstGeom>
+          <a:noFill/>
+        </p:spPr>
+        <p:txBody>
+          <a:bodyPr wrap="square">
+            <a:spAutoFit/>
+          </a:bodyPr>
+          <a:lstStyle/>
+          <a:p>
+            <a:r>
+              <a:rPr sz="3400" b="1" i="0">
+                <a:solidFill>
+                  <a:srgbClr val="FFFFFF"/>
+                </a:solidFill>
+                <a:latin typeface="Montserrat"/>
+              </a:rPr>
+              <a:t>Ya sabes con qué se construye el gas</a:t>
+            </a:r>
+          </a:p>
+        </p:txBody>
+      </p:sp>
+      <p:sp>
+        <p:nvSpPr>
+          <p:cNvPr id="6" name="TextBox 5"/>
+          <p:cNvSpPr txBox="1"/>
+          <p:nvPr/>
+        </p:nvSpPr>
+        <p:spPr>
+          <a:xfrm>
+            <a:off x="822960" y="2606040"/>
+            <a:ext cx="10515600" cy="2743200"/>
+          </a:xfrm>
+          <a:prstGeom prst="rect">
+            <a:avLst/>
+          </a:prstGeom>
+          <a:noFill/>
+        </p:spPr>
+        <p:txBody>
+          <a:bodyPr wrap="square">
+            <a:spAutoFit/>
+          </a:bodyPr>
+          <a:lstStyle/>
+          <a:p>
+            <a:pPr>
+              <a:spcAft>
+                <a:spcPts val="1200"/>
+              </a:spcAft>
+            </a:pPr>
+            <a:r>
+              <a:rPr sz="2000" b="1" i="0">
+                <a:solidFill>
+                  <a:srgbClr val="F4A24C"/>
+                </a:solidFill>
+                <a:latin typeface="Montserrat"/>
+              </a:rPr>
+              <a:t>✓  </a:t>
+            </a:r>
+            <a:r>
+              <a:rPr sz="1900" b="0" i="0">
+                <a:solidFill>
+                  <a:srgbClr val="FFFFFF"/>
+                </a:solidFill>
+                <a:latin typeface="Montserrat"/>
+              </a:rPr>
+              <a:t>PE Para Enterrar; el sol, prohibido</a:t>
+            </a:r>
+          </a:p>
+          <a:p>
+            <a:pPr>
+              <a:spcAft>
+                <a:spcPts val="1200"/>
+              </a:spcAft>
+            </a:pPr>
+            <a:r>
+              <a:rPr sz="2000" b="1" i="0">
+                <a:solidFill>
+                  <a:srgbClr val="F4A24C"/>
+                </a:solidFill>
+                <a:latin typeface="Montserrat"/>
+              </a:rPr>
+              <a:t>✓  </a:t>
+            </a:r>
+            <a:r>
+              <a:rPr sz="1900" b="0" i="0">
+                <a:solidFill>
+                  <a:srgbClr val="FFFFFF"/>
+                </a:solidFill>
+                <a:latin typeface="Montserrat"/>
+              </a:rPr>
+              <a:t>Cobre 1 mm / 1,5 mm enterrado, sin mandril</a:t>
+            </a:r>
+          </a:p>
+          <a:p>
+            <a:pPr>
+              <a:spcAft>
+                <a:spcPts val="1200"/>
+              </a:spcAft>
+            </a:pPr>
+            <a:r>
+              <a:rPr sz="2000" b="1" i="0">
+                <a:solidFill>
+                  <a:srgbClr val="F4A24C"/>
+                </a:solidFill>
+                <a:latin typeface="Montserrat"/>
+              </a:rPr>
+              <a:t>✓  </a:t>
+            </a:r>
+            <a:r>
+              <a:rPr sz="1900" b="0" i="0">
+                <a:solidFill>
+                  <a:srgbClr val="FFFFFF"/>
+                </a:solidFill>
+                <a:latin typeface="Montserrat"/>
+              </a:rPr>
+              <a:t>Acero hasta 2"; inoxidable Serie 2</a:t>
+            </a:r>
+          </a:p>
+          <a:p>
+            <a:pPr>
+              <a:spcAft>
+                <a:spcPts val="1200"/>
+              </a:spcAft>
+            </a:pPr>
+            <a:r>
+              <a:rPr sz="2000" b="1" i="0">
+                <a:solidFill>
+                  <a:srgbClr val="F4A24C"/>
+                </a:solidFill>
+                <a:latin typeface="Montserrat"/>
+              </a:rPr>
+              <a:t>✓  </a:t>
+            </a:r>
+            <a:r>
+              <a:rPr sz="1900" b="0" i="0">
+                <a:solidFill>
+                  <a:srgbClr val="FFFFFF"/>
+                </a:solidFill>
+                <a:latin typeface="Montserrat"/>
+              </a:rPr>
+              <a:t>Multicapa: siempre sus dos limitadores</a:t>
+            </a:r>
+          </a:p>
+        </p:txBody>
+      </p:sp>
+      <p:sp>
+        <p:nvSpPr>
+          <p:cNvPr id="7" name="Rounded Rectangle 6"/>
+          <p:cNvSpPr/>
+          <p:nvPr/>
+        </p:nvSpPr>
+        <p:spPr>
+          <a:xfrm>
+            <a:off x="822960" y="5532120"/>
+            <a:ext cx="10515600" cy="822960"/>
+          </a:xfrm>
+          <a:prstGeom prst="roundRect">
+            <a:avLst/>
+          </a:prstGeom>
+          <a:solidFill>
+            <a:srgbClr val="E8801A"/>
+          </a:solidFill>
+          <a:ln>
+            <a:noFill/>
+          </a:ln>
+          <a:effectLst/>
+        </p:spPr>
+        <p:style>
+          <a:lnRef idx="1">
+            <a:schemeClr val="accent1"/>
+          </a:lnRef>
+          <a:fillRef idx="3">
+            <a:schemeClr val="accent1"/>
+          </a:fillRef>
+          <a:effectRef idx="2">
+            <a:schemeClr val="accent1"/>
+          </a:effectRef>
+          <a:fontRef idx="minor">
+            <a:schemeClr val="lt1"/>
+          </a:fontRef>
+        </p:style>
+        <p:txBody>
+          <a:bodyPr rtlCol="0" anchor="ctr"/>
+          <a:lstStyle/>
+          <a:p>
+            <a:pPr algn="ctr"/>
+          </a:p>
+        </p:txBody>
+      </p:sp>
+      <p:sp>
+        <p:nvSpPr>
+          <p:cNvPr id="8" name="TextBox 7"/>
+          <p:cNvSpPr txBox="1"/>
+          <p:nvPr/>
+        </p:nvSpPr>
+        <p:spPr>
+          <a:xfrm>
+            <a:off x="1051560" y="5623560"/>
+            <a:ext cx="10058400" cy="640080"/>
+          </a:xfrm>
+          <a:prstGeom prst="rect">
+            <a:avLst/>
+          </a:prstGeom>
+          <a:noFill/>
+        </p:spPr>
+        <p:txBody>
+          <a:bodyPr wrap="square">
+            <a:spAutoFit/>
+          </a:bodyPr>
+          <a:lstStyle/>
+          <a:p>
+            <a:r>
+              <a:rPr sz="1500" b="1" i="1">
+                <a:solidFill>
+                  <a:srgbClr val="1E2761"/>
+                </a:solidFill>
+                <a:latin typeface="Montserrat"/>
+              </a:rPr>
+              <a:t>Con estos materiales ya no te la cuela ninguna pregunta de la Parte 3. Vamos a por los elementos.</a:t>
+            </a:r>
+          </a:p>
+        </p:txBody>
+      </p:sp>
+    </p:spTree>
+  </p:cSld>
+  <p:clrMapOvr>
+    <a:masterClrMapping/>
+  </p:clrMapOvr>
+  <mc:AlternateContent xmlns:mc="http://schemas.openxmlformats.org/markup-compatibility/2006">
+    <mc:Choice xmlns:p14="http://schemas.microsoft.com/office/powerpoint/2010/main" Requires="p14">
+      <p:transition spd="med" p14:dur="700">
+        <p14:cube dir="r"/>
+      </p:transition>
+    </mc:Choice>
+    <mc:Fallback>
+      <p:transition spd="med">
+        <p:push dir="r"/>
+      </p:transition>
+    </mc:Fallback>
+  </mc:AlternateContent>
 </p:sld>
 </file>
 
@@ -9703,7 +12827,7 @@
                 </a:solidFill>
                 <a:latin typeface="Montserrat"/>
               </a:rPr>
-              <a:t>003 / 018</a:t>
+              <a:t>003 / 022</a:t>
             </a:r>
           </a:p>
         </p:txBody>
@@ -9812,7 +12936,7 @@
       </p:sp>
       <p:sp>
         <p:nvSpPr>
-          <p:cNvPr id="7" name="Rounded Rectangle 6"/>
+          <p:cNvPr id="7" name="Rectangle 6"/>
           <p:cNvSpPr/>
           <p:nvPr/>
         </p:nvSpPr>
@@ -9821,7 +12945,7 @@
             <a:off x="868680" y="1673352"/>
             <a:ext cx="2011680" cy="73152"/>
           </a:xfrm>
-          <a:prstGeom prst="roundRect">
+          <a:prstGeom prst="rect">
             <a:avLst/>
           </a:prstGeom>
           <a:solidFill>
@@ -10057,6 +13181,18 @@
   <p:clrMapOvr>
     <a:masterClrMapping/>
   </p:clrMapOvr>
+  <mc:AlternateContent xmlns:mc="http://schemas.openxmlformats.org/markup-compatibility/2006">
+    <mc:Choice xmlns:p14="http://schemas.microsoft.com/office/powerpoint/2010/main" Requires="p14">
+      <p:transition spd="med" p14:dur="700">
+        <p14:cube dir="l"/>
+      </p:transition>
+    </mc:Choice>
+    <mc:Fallback>
+      <p:transition spd="med">
+        <p:push dir="l"/>
+      </p:transition>
+    </mc:Fallback>
+  </mc:AlternateContent>
 </p:sld>
 </file>
 
@@ -10144,7 +13280,7 @@
                 </a:solidFill>
                 <a:latin typeface="Montserrat"/>
               </a:rPr>
-              <a:t>004 / 018</a:t>
+              <a:t>004 / 022</a:t>
             </a:r>
           </a:p>
         </p:txBody>
@@ -10253,7 +13389,7 @@
       </p:sp>
       <p:sp>
         <p:nvSpPr>
-          <p:cNvPr id="7" name="Rounded Rectangle 6"/>
+          <p:cNvPr id="7" name="Rectangle 6"/>
           <p:cNvSpPr/>
           <p:nvPr/>
         </p:nvSpPr>
@@ -10262,7 +13398,7 @@
             <a:off x="868680" y="1627632"/>
             <a:ext cx="2011680" cy="73152"/>
           </a:xfrm>
-          <a:prstGeom prst="roundRect">
+          <a:prstGeom prst="rect">
             <a:avLst/>
           </a:prstGeom>
           <a:solidFill>
@@ -10304,7 +13440,7 @@
         <p:spPr>
           <a:xfrm>
             <a:off x="822960" y="1965960"/>
-            <a:ext cx="4983480" cy="4206240"/>
+            <a:ext cx="5029200" cy="4206240"/>
           </a:xfrm>
           <a:prstGeom prst="rect">
             <a:avLst/>
@@ -10426,8 +13562,8 @@
         </p:nvSpPr>
         <p:spPr>
           <a:xfrm>
-            <a:off x="5806440" y="1051560"/>
-            <a:ext cx="5298947" cy="4629150"/>
+            <a:off x="6080760" y="1965960"/>
+            <a:ext cx="5303520" cy="4572000"/>
           </a:xfrm>
           <a:prstGeom prst="roundRect">
             <a:avLst/>
@@ -10472,8 +13608,8 @@
         </p:nvSpPr>
         <p:spPr>
           <a:xfrm>
-            <a:off x="6080760" y="2726055"/>
-            <a:ext cx="4750307" cy="1280160"/>
+            <a:off x="6355080" y="3611880"/>
+            <a:ext cx="4754880" cy="1280160"/>
           </a:xfrm>
           <a:prstGeom prst="rect">
             <a:avLst/>
@@ -10494,7 +13630,7 @@
                 </a:solidFill>
                 <a:latin typeface="Montserrat"/>
               </a:rPr>
-              <a:t>IMAGEN REALISTA</a:t>
+              <a:t>IMAGEN</a:t>
             </a:r>
           </a:p>
           <a:p>
@@ -10516,6 +13652,18 @@
   <p:clrMapOvr>
     <a:masterClrMapping/>
   </p:clrMapOvr>
+  <mc:AlternateContent xmlns:mc="http://schemas.openxmlformats.org/markup-compatibility/2006">
+    <mc:Choice xmlns:p14="http://schemas.microsoft.com/office/powerpoint/2010/main" Requires="p14">
+      <p:transition spd="med" p14:dur="700">
+        <p14:cube dir="r"/>
+      </p:transition>
+    </mc:Choice>
+    <mc:Fallback>
+      <p:transition spd="med">
+        <p:push dir="r"/>
+      </p:transition>
+    </mc:Fallback>
+  </mc:AlternateContent>
 </p:sld>
 </file>
 
@@ -10603,7 +13751,7 @@
                 </a:solidFill>
                 <a:latin typeface="Montserrat"/>
               </a:rPr>
-              <a:t>005 / 018</a:t>
+              <a:t>005 / 022</a:t>
             </a:r>
           </a:p>
         </p:txBody>
@@ -10712,7 +13860,7 @@
       </p:sp>
       <p:sp>
         <p:nvSpPr>
-          <p:cNvPr id="7" name="Rounded Rectangle 6"/>
+          <p:cNvPr id="7" name="Rectangle 6"/>
           <p:cNvSpPr/>
           <p:nvPr/>
         </p:nvSpPr>
@@ -10721,7 +13869,7 @@
             <a:off x="868680" y="1627632"/>
             <a:ext cx="2011680" cy="73152"/>
           </a:xfrm>
-          <a:prstGeom prst="roundRect">
+          <a:prstGeom prst="rect">
             <a:avLst/>
           </a:prstGeom>
           <a:solidFill>
@@ -10762,8 +13910,8 @@
         </p:nvSpPr>
         <p:spPr>
           <a:xfrm>
-            <a:off x="822960" y="1965960"/>
-            <a:ext cx="4983480" cy="4206240"/>
+            <a:off x="6355080" y="1965960"/>
+            <a:ext cx="5029200" cy="4206240"/>
           </a:xfrm>
           <a:prstGeom prst="rect">
             <a:avLst/>
@@ -10885,8 +14033,8 @@
         </p:nvSpPr>
         <p:spPr>
           <a:xfrm>
-            <a:off x="5806440" y="1051560"/>
-            <a:ext cx="5298947" cy="4629150"/>
+            <a:off x="822960" y="1965960"/>
+            <a:ext cx="5303520" cy="4572000"/>
           </a:xfrm>
           <a:prstGeom prst="roundRect">
             <a:avLst/>
@@ -10931,8 +14079,8 @@
         </p:nvSpPr>
         <p:spPr>
           <a:xfrm>
-            <a:off x="6080760" y="2726055"/>
-            <a:ext cx="4750307" cy="1280160"/>
+            <a:off x="1097280" y="3611880"/>
+            <a:ext cx="4754880" cy="1280160"/>
           </a:xfrm>
           <a:prstGeom prst="rect">
             <a:avLst/>
@@ -10953,7 +14101,7 @@
                 </a:solidFill>
                 <a:latin typeface="Montserrat"/>
               </a:rPr>
-              <a:t>IMAGEN REALISTA</a:t>
+              <a:t>IMAGEN</a:t>
             </a:r>
           </a:p>
           <a:p>
@@ -10975,6 +14123,18 @@
   <p:clrMapOvr>
     <a:masterClrMapping/>
   </p:clrMapOvr>
+  <mc:AlternateContent xmlns:mc="http://schemas.openxmlformats.org/markup-compatibility/2006">
+    <mc:Choice xmlns:p14="http://schemas.microsoft.com/office/powerpoint/2010/main" Requires="p14">
+      <p:transition spd="med" p14:dur="700">
+        <p14:cube dir="l"/>
+      </p:transition>
+    </mc:Choice>
+    <mc:Fallback>
+      <p:transition spd="med">
+        <p:push dir="l"/>
+      </p:transition>
+    </mc:Fallback>
+  </mc:AlternateContent>
 </p:sld>
 </file>
 
@@ -11062,7 +14222,7 @@
                 </a:solidFill>
                 <a:latin typeface="Montserrat"/>
               </a:rPr>
-              <a:t>006 / 018</a:t>
+              <a:t>006 / 022</a:t>
             </a:r>
           </a:p>
         </p:txBody>
@@ -11171,7 +14331,7 @@
       </p:sp>
       <p:sp>
         <p:nvSpPr>
-          <p:cNvPr id="7" name="Rounded Rectangle 6"/>
+          <p:cNvPr id="7" name="Rectangle 6"/>
           <p:cNvSpPr/>
           <p:nvPr/>
         </p:nvSpPr>
@@ -11180,7 +14340,7 @@
             <a:off x="868680" y="1627632"/>
             <a:ext cx="2011680" cy="73152"/>
           </a:xfrm>
-          <a:prstGeom prst="roundRect">
+          <a:prstGeom prst="rect">
             <a:avLst/>
           </a:prstGeom>
           <a:solidFill>
@@ -11222,7 +14382,7 @@
         <p:spPr>
           <a:xfrm>
             <a:off x="822960" y="1965960"/>
-            <a:ext cx="4983480" cy="4206240"/>
+            <a:ext cx="5029200" cy="4206240"/>
           </a:xfrm>
           <a:prstGeom prst="rect">
             <a:avLst/>
@@ -11344,8 +14504,8 @@
         </p:nvSpPr>
         <p:spPr>
           <a:xfrm>
-            <a:off x="5806440" y="1051560"/>
-            <a:ext cx="5298947" cy="4629150"/>
+            <a:off x="6080760" y="1965960"/>
+            <a:ext cx="5303520" cy="4572000"/>
           </a:xfrm>
           <a:prstGeom prst="roundRect">
             <a:avLst/>
@@ -11390,8 +14550,8 @@
         </p:nvSpPr>
         <p:spPr>
           <a:xfrm>
-            <a:off x="6080760" y="2726055"/>
-            <a:ext cx="4750307" cy="1280160"/>
+            <a:off x="6355080" y="3611880"/>
+            <a:ext cx="4754880" cy="1280160"/>
           </a:xfrm>
           <a:prstGeom prst="rect">
             <a:avLst/>
@@ -11412,7 +14572,7 @@
                 </a:solidFill>
                 <a:latin typeface="Montserrat"/>
               </a:rPr>
-              <a:t>IMAGEN REALISTA</a:t>
+              <a:t>IMAGEN</a:t>
             </a:r>
           </a:p>
           <a:p>
@@ -11434,6 +14594,18 @@
   <p:clrMapOvr>
     <a:masterClrMapping/>
   </p:clrMapOvr>
+  <mc:AlternateContent xmlns:mc="http://schemas.openxmlformats.org/markup-compatibility/2006">
+    <mc:Choice xmlns:p14="http://schemas.microsoft.com/office/powerpoint/2010/main" Requires="p14">
+      <p:transition spd="med" p14:dur="700">
+        <p14:cube dir="r"/>
+      </p:transition>
+    </mc:Choice>
+    <mc:Fallback>
+      <p:transition spd="med">
+        <p:push dir="r"/>
+      </p:transition>
+    </mc:Fallback>
+  </mc:AlternateContent>
 </p:sld>
 </file>
 
@@ -11521,7 +14693,7 @@
                 </a:solidFill>
                 <a:latin typeface="Montserrat"/>
               </a:rPr>
-              <a:t>007 / 018</a:t>
+              <a:t>007 / 022</a:t>
             </a:r>
           </a:p>
         </p:txBody>
@@ -11630,7 +14802,7 @@
       </p:sp>
       <p:sp>
         <p:nvSpPr>
-          <p:cNvPr id="7" name="Rounded Rectangle 6"/>
+          <p:cNvPr id="7" name="Rectangle 6"/>
           <p:cNvSpPr/>
           <p:nvPr/>
         </p:nvSpPr>
@@ -11639,7 +14811,7 @@
             <a:off x="868680" y="1627632"/>
             <a:ext cx="2011680" cy="73152"/>
           </a:xfrm>
-          <a:prstGeom prst="roundRect">
+          <a:prstGeom prst="rect">
             <a:avLst/>
           </a:prstGeom>
           <a:solidFill>
@@ -11680,8 +14852,8 @@
         </p:nvSpPr>
         <p:spPr>
           <a:xfrm>
-            <a:off x="822960" y="1965960"/>
-            <a:ext cx="4983480" cy="4206240"/>
+            <a:off x="6355080" y="1965960"/>
+            <a:ext cx="5029200" cy="4206240"/>
           </a:xfrm>
           <a:prstGeom prst="rect">
             <a:avLst/>
@@ -11803,8 +14975,8 @@
         </p:nvSpPr>
         <p:spPr>
           <a:xfrm>
-            <a:off x="5806440" y="1051560"/>
-            <a:ext cx="5298947" cy="4629150"/>
+            <a:off x="822960" y="1965960"/>
+            <a:ext cx="5303520" cy="4572000"/>
           </a:xfrm>
           <a:prstGeom prst="roundRect">
             <a:avLst/>
@@ -11849,8 +15021,8 @@
         </p:nvSpPr>
         <p:spPr>
           <a:xfrm>
-            <a:off x="6080760" y="2726055"/>
-            <a:ext cx="4750307" cy="1280160"/>
+            <a:off x="1097280" y="3611880"/>
+            <a:ext cx="4754880" cy="1280160"/>
           </a:xfrm>
           <a:prstGeom prst="rect">
             <a:avLst/>
@@ -11871,7 +15043,7 @@
                 </a:solidFill>
                 <a:latin typeface="Montserrat"/>
               </a:rPr>
-              <a:t>IMAGEN REALISTA</a:t>
+              <a:t>IMAGEN</a:t>
             </a:r>
           </a:p>
           <a:p>
@@ -11893,6 +15065,18 @@
   <p:clrMapOvr>
     <a:masterClrMapping/>
   </p:clrMapOvr>
+  <mc:AlternateContent xmlns:mc="http://schemas.openxmlformats.org/markup-compatibility/2006">
+    <mc:Choice xmlns:p14="http://schemas.microsoft.com/office/powerpoint/2010/main" Requires="p14">
+      <p:transition spd="med" p14:dur="700">
+        <p14:cube dir="l"/>
+      </p:transition>
+    </mc:Choice>
+    <mc:Fallback>
+      <p:transition spd="med">
+        <p:push dir="l"/>
+      </p:transition>
+    </mc:Fallback>
+  </mc:AlternateContent>
 </p:sld>
 </file>
 
@@ -11980,7 +15164,7 @@
                 </a:solidFill>
                 <a:latin typeface="Montserrat"/>
               </a:rPr>
-              <a:t>008 / 018</a:t>
+              <a:t>008 / 022</a:t>
             </a:r>
           </a:p>
         </p:txBody>
@@ -12089,7 +15273,7 @@
       </p:sp>
       <p:sp>
         <p:nvSpPr>
-          <p:cNvPr id="7" name="Rounded Rectangle 6"/>
+          <p:cNvPr id="7" name="Rectangle 6"/>
           <p:cNvSpPr/>
           <p:nvPr/>
         </p:nvSpPr>
@@ -12098,7 +15282,7 @@
             <a:off x="868680" y="1627632"/>
             <a:ext cx="2011680" cy="73152"/>
           </a:xfrm>
-          <a:prstGeom prst="roundRect">
+          <a:prstGeom prst="rect">
             <a:avLst/>
           </a:prstGeom>
           <a:solidFill>
@@ -12140,7 +15324,7 @@
         <p:spPr>
           <a:xfrm>
             <a:off x="822960" y="1965960"/>
-            <a:ext cx="4983480" cy="4206240"/>
+            <a:ext cx="5029200" cy="4206240"/>
           </a:xfrm>
           <a:prstGeom prst="rect">
             <a:avLst/>
@@ -12262,8 +15446,8 @@
         </p:nvSpPr>
         <p:spPr>
           <a:xfrm>
-            <a:off x="5806440" y="1051560"/>
-            <a:ext cx="5298947" cy="4629150"/>
+            <a:off x="6080760" y="1965960"/>
+            <a:ext cx="5303520" cy="4572000"/>
           </a:xfrm>
           <a:prstGeom prst="roundRect">
             <a:avLst/>
@@ -12308,8 +15492,8 @@
         </p:nvSpPr>
         <p:spPr>
           <a:xfrm>
-            <a:off x="6080760" y="2726055"/>
-            <a:ext cx="4750307" cy="1280160"/>
+            <a:off x="6355080" y="3611880"/>
+            <a:ext cx="4754880" cy="1280160"/>
           </a:xfrm>
           <a:prstGeom prst="rect">
             <a:avLst/>
@@ -12330,7 +15514,7 @@
                 </a:solidFill>
                 <a:latin typeface="Montserrat"/>
               </a:rPr>
-              <a:t>IMAGEN REALISTA</a:t>
+              <a:t>IMAGEN</a:t>
             </a:r>
           </a:p>
           <a:p>
@@ -12352,6 +15536,18 @@
   <p:clrMapOvr>
     <a:masterClrMapping/>
   </p:clrMapOvr>
+  <mc:AlternateContent xmlns:mc="http://schemas.openxmlformats.org/markup-compatibility/2006">
+    <mc:Choice xmlns:p14="http://schemas.microsoft.com/office/powerpoint/2010/main" Requires="p14">
+      <p:transition spd="med" p14:dur="700">
+        <p14:cube dir="r"/>
+      </p:transition>
+    </mc:Choice>
+    <mc:Fallback>
+      <p:transition spd="med">
+        <p:push dir="r"/>
+      </p:transition>
+    </mc:Fallback>
+  </mc:AlternateContent>
 </p:sld>
 </file>
 
@@ -12439,7 +15635,7 @@
                 </a:solidFill>
                 <a:latin typeface="Montserrat"/>
               </a:rPr>
-              <a:t>009 / 018</a:t>
+              <a:t>009 / 022</a:t>
             </a:r>
           </a:p>
         </p:txBody>
@@ -12548,7 +15744,7 @@
       </p:sp>
       <p:sp>
         <p:nvSpPr>
-          <p:cNvPr id="7" name="Rounded Rectangle 6"/>
+          <p:cNvPr id="7" name="Rectangle 6"/>
           <p:cNvSpPr/>
           <p:nvPr/>
         </p:nvSpPr>
@@ -12557,7 +15753,7 @@
             <a:off x="868680" y="1627632"/>
             <a:ext cx="2011680" cy="73152"/>
           </a:xfrm>
-          <a:prstGeom prst="roundRect">
+          <a:prstGeom prst="rect">
             <a:avLst/>
           </a:prstGeom>
           <a:solidFill>
@@ -12598,8 +15794,8 @@
         </p:nvSpPr>
         <p:spPr>
           <a:xfrm>
-            <a:off x="822960" y="1965960"/>
-            <a:ext cx="4983480" cy="4206240"/>
+            <a:off x="6355080" y="1965960"/>
+            <a:ext cx="5029200" cy="4206240"/>
           </a:xfrm>
           <a:prstGeom prst="rect">
             <a:avLst/>
@@ -12721,8 +15917,8 @@
         </p:nvSpPr>
         <p:spPr>
           <a:xfrm>
-            <a:off x="5806440" y="1051560"/>
-            <a:ext cx="5298947" cy="4629150"/>
+            <a:off x="822960" y="1965960"/>
+            <a:ext cx="5303520" cy="4572000"/>
           </a:xfrm>
           <a:prstGeom prst="roundRect">
             <a:avLst/>
@@ -12767,8 +15963,8 @@
         </p:nvSpPr>
         <p:spPr>
           <a:xfrm>
-            <a:off x="6080760" y="2726055"/>
-            <a:ext cx="4750307" cy="1280160"/>
+            <a:off x="1097280" y="3611880"/>
+            <a:ext cx="4754880" cy="1280160"/>
           </a:xfrm>
           <a:prstGeom prst="rect">
             <a:avLst/>
@@ -12789,7 +15985,7 @@
                 </a:solidFill>
                 <a:latin typeface="Montserrat"/>
               </a:rPr>
-              <a:t>IMAGEN REALISTA</a:t>
+              <a:t>IMAGEN</a:t>
             </a:r>
           </a:p>
           <a:p>
@@ -12811,6 +16007,18 @@
   <p:clrMapOvr>
     <a:masterClrMapping/>
   </p:clrMapOvr>
+  <mc:AlternateContent xmlns:mc="http://schemas.openxmlformats.org/markup-compatibility/2006">
+    <mc:Choice xmlns:p14="http://schemas.microsoft.com/office/powerpoint/2010/main" Requires="p14">
+      <p:transition spd="med" p14:dur="700">
+        <p14:cube dir="l"/>
+      </p:transition>
+    </mc:Choice>
+    <mc:Fallback>
+      <p:transition spd="med">
+        <p:push dir="l"/>
+      </p:transition>
+    </mc:Fallback>
+  </mc:AlternateContent>
 </p:sld>
 </file>
 

--- a/Curso Gas B/10 - UNE 60670 - Tuberias, accesorios y uniones/10 - UNE 60670 - Tuberias, accesorios y uniones - Vídeo 1.pptx
+++ b/Curso Gas B/10 - UNE 60670 - Tuberias, accesorios y uniones/10 - UNE 60670 - Tuberias, accesorios y uniones - Vídeo 1.pptx
@@ -748,12 +748,12 @@
           <a:lstStyle/>
           <a:p>
             <a:r>
-              <a:t>N1: Va la primera, y esta cae en el examen casi seguro. ¿Qué espesor mínimo pide el cobre cuando va enterrado?</a:t>
-            </a:r>
-          </a:p>
-          <a:p>
-            <a:r>
-              <a:t>N2: Piensa en que bajo tierra el tubo lo pasa peor; ¿le pedirás la misma pared que a uno visto, o un poco más?</a:t>
+              <a:t>N1: Va la primera pregunta, y esta cae en el examen casi seguro. Escucha con atención: ¿qué espesor mínimo exige la norma para el tubo de cobre cuando va enterrado? Te leo las cuatro opciones. Opción A, cero coma ocho milímetros. Opción B, un milímetro. Opción C, uno coma cinco milímetros. Opción D, dos milímetros. Párala un momento si quieres y piensa tu respuesta.</a:t>
+            </a:r>
+          </a:p>
+          <a:p>
+            <a:r>
+              <a:t>N2: Una pista mientras lo decides: bajo tierra el tubo lo pasa peor, así que la norma no le pide la misma pared que a uno visto, sino un poco más.</a:t>
             </a:r>
           </a:p>
         </p:txBody>
@@ -823,12 +823,12 @@
           <a:lstStyle/>
           <a:p>
             <a:r>
-              <a:t>N1: ¿Por qué el grueso mayor y no el fino?</a:t>
-            </a:r>
-          </a:p>
-          <a:p>
-            <a:r>
-              <a:t>N2: Porque enterrado hay presión del terreno y corrosión, así que se le pide medio milímetro más de pared. El truco para no fallar: enterrado, medio milímetro más gordo. El otro espesor es para todo lo demás.</a:t>
+              <a:t>N2: La respuesta correcta es la opción C: uno coma cinco milímetros. ¿Por qué el grueso mayor y no el fino? Porque el cobre enterrado sufre más, aguanta el peso del terreno y la corrosión, y por eso la norma le pide medio milímetro más de pared. El un milímetro se queda para todo lo demás: tubo visto, empotrado, en vaina o conexión de aparatos. El truco para no fallar: enterrado, medio milímetro más gordo.</a:t>
+            </a:r>
+          </a:p>
+          <a:p>
+            <a:r>
+              <a:t>N1: Y si en una opción ves 'un milímetro para tubo enterrado', descártala, que ahí está la trampa.</a:t>
             </a:r>
           </a:p>
         </p:txBody>
@@ -1198,12 +1198,12 @@
           <a:lstStyle/>
           <a:p>
             <a:r>
-              <a:t>N1: Segunda pregunta, y lleva trampa. Los dos limitadores del multicapa, ¿cuándo hay que ponerlos?</a:t>
-            </a:r>
-          </a:p>
-          <a:p>
-            <a:r>
-              <a:t>N2: Ojo, que la norma usa una expresión muy concreta sobre la longitud; ¿te suena aquello de 'con independencia de'?</a:t>
+              <a:t>N1: Segunda pregunta, y lleva trampa. Escucha bien: en un tramo de tubo multicapa, ¿cuándo son obligatorios el limitador de caudal y el de temperatura? Estas son las opciones. Opción A, solo en tramos largos. Opción B, solo si el tubo va enterrado. Opción C, siempre, sea cual sea la longitud. Opción D, solo en instalaciones de propano. Tómate un momento y elige.</a:t>
+            </a:r>
+          </a:p>
+          <a:p>
+            <a:r>
+              <a:t>N2: Una pista: la norma usa una expresión muy concreta sobre la longitud; ¿te suena aquello de 'con independencia de'?</a:t>
             </a:r>
           </a:p>
         </p:txBody>
@@ -1273,12 +1273,12 @@
           <a:lstStyle/>
           <a:p>
             <a:r>
-              <a:t>N1: ¿Por qué siempre y no solo en tramos largos?</a:t>
-            </a:r>
-          </a:p>
-          <a:p>
-            <a:r>
-              <a:t>N2: Porque el multicapa se reblandece con el calor, y esos limitadores son su red de seguridad. La norma lo deja claro: van sea cual sea la longitud, aunque el tramo mida un palmo. Si una respuesta dice 'solo en tramos largos', es falsa.</a:t>
+              <a:t>N2: La respuesta correcta es la opción C: siempre, sea cual sea la longitud. ¿Por qué siempre y no solo en tramos largos? Porque el multicapa se reblandece con el calor, y esos dos limitadores son su red de seguridad. La norma lo deja claro: van con independencia de la longitud del tramo, aunque el trozo mida un palmo. El truco para no fallar: si una opción dice 'solo en tramos largos' o 'solo enterrado', es falsa.</a:t>
+            </a:r>
+          </a:p>
+          <a:p>
+            <a:r>
+              <a:t>N1: El multicapa, siempre con sus dos limitadores, y punto.</a:t>
             </a:r>
           </a:p>
         </p:txBody>
